--- a/pr11.pptx
+++ b/pr11.pptx
@@ -5,52 +5,54 @@
     <p:sldMasterId id="2147483657" r:id="rId1"/>
   </p:sldMasterIdLst>
   <p:notesMasterIdLst>
-    <p:notesMasterId r:id="rId10"/>
+    <p:notesMasterId r:id="rId12"/>
   </p:notesMasterIdLst>
   <p:sldIdLst>
     <p:sldId id="256" r:id="rId2"/>
-    <p:sldId id="257" r:id="rId3"/>
-    <p:sldId id="258" r:id="rId4"/>
-    <p:sldId id="259" r:id="rId5"/>
-    <p:sldId id="275" r:id="rId6"/>
-    <p:sldId id="276" r:id="rId7"/>
-    <p:sldId id="260" r:id="rId8"/>
-    <p:sldId id="261" r:id="rId9"/>
+    <p:sldId id="258" r:id="rId3"/>
+    <p:sldId id="277" r:id="rId4"/>
+    <p:sldId id="278" r:id="rId5"/>
+    <p:sldId id="257" r:id="rId6"/>
+    <p:sldId id="259" r:id="rId7"/>
+    <p:sldId id="275" r:id="rId8"/>
+    <p:sldId id="276" r:id="rId9"/>
+    <p:sldId id="260" r:id="rId10"/>
+    <p:sldId id="261" r:id="rId11"/>
   </p:sldIdLst>
   <p:sldSz cx="18288000" cy="10287000"/>
   <p:notesSz cx="6858000" cy="9144000"/>
   <p:embeddedFontLst>
     <p:embeddedFont>
-      <p:font typeface="Raleway" panose="020B0604020202020204" charset="-52"/>
-      <p:regular r:id="rId11"/>
-      <p:bold r:id="rId12"/>
-      <p:italic r:id="rId13"/>
-      <p:boldItalic r:id="rId14"/>
+      <p:font typeface="Calibri" panose="020F0502020204030204" pitchFamily="34" charset="0"/>
+      <p:regular r:id="rId13"/>
+      <p:bold r:id="rId14"/>
+      <p:italic r:id="rId15"/>
+      <p:boldItalic r:id="rId16"/>
     </p:embeddedFont>
     <p:embeddedFont>
-      <p:font typeface="Calibri" panose="020F0502020204030204" pitchFamily="34" charset="0"/>
-      <p:regular r:id="rId15"/>
-      <p:bold r:id="rId16"/>
-      <p:italic r:id="rId17"/>
-      <p:boldItalic r:id="rId18"/>
+      <p:font typeface="Montserrat" panose="020B0604020202020204" charset="-52"/>
+      <p:regular r:id="rId17"/>
+      <p:bold r:id="rId18"/>
+      <p:italic r:id="rId19"/>
+      <p:boldItalic r:id="rId20"/>
     </p:embeddedFont>
     <p:embeddedFont>
       <p:font typeface="Arial Black" panose="020B0A04020102020204" pitchFamily="34" charset="0"/>
-      <p:bold r:id="rId19"/>
+      <p:bold r:id="rId21"/>
     </p:embeddedFont>
     <p:embeddedFont>
       <p:font typeface="Roboto Condensed" panose="020B0604020202020204" charset="0"/>
-      <p:regular r:id="rId20"/>
-      <p:bold r:id="rId21"/>
-      <p:italic r:id="rId22"/>
-      <p:boldItalic r:id="rId23"/>
+      <p:regular r:id="rId22"/>
+      <p:bold r:id="rId23"/>
+      <p:italic r:id="rId24"/>
+      <p:boldItalic r:id="rId25"/>
     </p:embeddedFont>
     <p:embeddedFont>
-      <p:font typeface="Montserrat" panose="020B0604020202020204" charset="-52"/>
-      <p:regular r:id="rId24"/>
-      <p:bold r:id="rId25"/>
-      <p:italic r:id="rId26"/>
-      <p:boldItalic r:id="rId27"/>
+      <p:font typeface="Raleway" panose="020B0604020202020204" charset="-52"/>
+      <p:regular r:id="rId26"/>
+      <p:bold r:id="rId27"/>
+      <p:italic r:id="rId28"/>
+      <p:boldItalic r:id="rId29"/>
     </p:embeddedFont>
   </p:embeddedFontLst>
   <p:defaultTextStyle>
@@ -846,12 +848,12 @@
 </p:notes>
 </file>
 
-<file path=ppt/notesSlides/notesSlide2.xml><?xml version="1.0" encoding="utf-8"?>
+<file path=ppt/notesSlides/notesSlide10.xml><?xml version="1.0" encoding="utf-8"?>
 <p:notes xmlns:a="http://schemas.openxmlformats.org/drawingml/2006/main" xmlns:r="http://schemas.openxmlformats.org/officeDocument/2006/relationships" xmlns:p="http://schemas.openxmlformats.org/presentationml/2006/main" showMasterSp="0" showMasterPhAnim="0">
   <p:cSld>
     <p:spTree>
       <p:nvGrpSpPr>
-        <p:cNvPr id="1" name="Shape 245"/>
+        <p:cNvPr id="1" name="Shape 408"/>
         <p:cNvGrpSpPr/>
         <p:nvPr/>
       </p:nvGrpSpPr>
@@ -865,7 +867,7 @@
       </p:grpSpPr>
       <p:sp>
         <p:nvSpPr>
-          <p:cNvPr id="246" name="Google Shape;246;p2:notes"/>
+          <p:cNvPr id="409" name="Google Shape;409;p6:notes"/>
           <p:cNvSpPr txBox="1">
             <a:spLocks noGrp="1"/>
           </p:cNvSpPr>
@@ -903,7 +905,111 @@
       </p:sp>
       <p:sp>
         <p:nvSpPr>
-          <p:cNvPr id="247" name="Google Shape;247;p2:notes"/>
+          <p:cNvPr id="410" name="Google Shape;410;p6:notes"/>
+          <p:cNvSpPr>
+            <a:spLocks noGrp="1" noRot="1" noChangeAspect="1"/>
+          </p:cNvSpPr>
+          <p:nvPr>
+            <p:ph type="sldImg" idx="2"/>
+          </p:nvPr>
+        </p:nvSpPr>
+        <p:spPr>
+          <a:xfrm>
+            <a:off x="381000" y="685800"/>
+            <a:ext cx="6096000" cy="3429000"/>
+          </a:xfrm>
+          <a:custGeom>
+            <a:avLst/>
+            <a:gdLst/>
+            <a:ahLst/>
+            <a:cxnLst/>
+            <a:rect l="l" t="t" r="r" b="b"/>
+            <a:pathLst>
+              <a:path w="120000" h="120000" extrusionOk="0">
+                <a:moveTo>
+                  <a:pt x="0" y="0"/>
+                </a:moveTo>
+                <a:lnTo>
+                  <a:pt x="120000" y="0"/>
+                </a:lnTo>
+                <a:lnTo>
+                  <a:pt x="120000" y="120000"/>
+                </a:lnTo>
+                <a:lnTo>
+                  <a:pt x="0" y="120000"/>
+                </a:lnTo>
+                <a:close/>
+              </a:path>
+            </a:pathLst>
+          </a:custGeom>
+        </p:spPr>
+      </p:sp>
+    </p:spTree>
+  </p:cSld>
+  <p:clrMapOvr>
+    <a:masterClrMapping/>
+  </p:clrMapOvr>
+</p:notes>
+</file>
+
+<file path=ppt/notesSlides/notesSlide2.xml><?xml version="1.0" encoding="utf-8"?>
+<p:notes xmlns:a="http://schemas.openxmlformats.org/drawingml/2006/main" xmlns:r="http://schemas.openxmlformats.org/officeDocument/2006/relationships" xmlns:p="http://schemas.openxmlformats.org/presentationml/2006/main" showMasterSp="0" showMasterPhAnim="0">
+  <p:cSld>
+    <p:spTree>
+      <p:nvGrpSpPr>
+        <p:cNvPr id="1" name="Shape 299"/>
+        <p:cNvGrpSpPr/>
+        <p:nvPr/>
+      </p:nvGrpSpPr>
+      <p:grpSpPr>
+        <a:xfrm>
+          <a:off x="0" y="0"/>
+          <a:ext cx="0" cy="0"/>
+          <a:chOff x="0" y="0"/>
+          <a:chExt cx="0" cy="0"/>
+        </a:xfrm>
+      </p:grpSpPr>
+      <p:sp>
+        <p:nvSpPr>
+          <p:cNvPr id="300" name="Google Shape;300;p4:notes"/>
+          <p:cNvSpPr txBox="1">
+            <a:spLocks noGrp="1"/>
+          </p:cNvSpPr>
+          <p:nvPr>
+            <p:ph type="body" idx="1"/>
+          </p:nvPr>
+        </p:nvSpPr>
+        <p:spPr>
+          <a:xfrm>
+            <a:off x="685800" y="4343400"/>
+            <a:ext cx="5486400" cy="4114800"/>
+          </a:xfrm>
+          <a:prstGeom prst="rect">
+            <a:avLst/>
+          </a:prstGeom>
+        </p:spPr>
+        <p:txBody>
+          <a:bodyPr spcFirstLastPara="1" wrap="square" lIns="91425" tIns="91425" rIns="91425" bIns="91425" anchor="t" anchorCtr="0">
+            <a:noAutofit/>
+          </a:bodyPr>
+          <a:lstStyle/>
+          <a:p>
+            <a:pPr marL="0" lvl="0" indent="0" algn="l" rtl="0">
+              <a:spcBef>
+                <a:spcPts val="0"/>
+              </a:spcBef>
+              <a:spcAft>
+                <a:spcPts val="0"/>
+              </a:spcAft>
+              <a:buNone/>
+            </a:pPr>
+            <a:endParaRPr/>
+          </a:p>
+        </p:txBody>
+      </p:sp>
+      <p:sp>
+        <p:nvSpPr>
+          <p:cNvPr id="301" name="Google Shape;301;p4:notes"/>
           <p:cNvSpPr>
             <a:spLocks noGrp="1" noRot="1" noChangeAspect="1"/>
           </p:cNvSpPr>
@@ -1047,6 +1153,11 @@
         </p:spPr>
       </p:sp>
     </p:spTree>
+    <p:extLst>
+      <p:ext uri="{BB962C8B-B14F-4D97-AF65-F5344CB8AC3E}">
+        <p14:creationId xmlns:p14="http://schemas.microsoft.com/office/powerpoint/2010/main" val="3785921784"/>
+      </p:ext>
+    </p:extLst>
   </p:cSld>
   <p:clrMapOvr>
     <a:masterClrMapping/>
@@ -1055,6 +1166,219 @@
 </file>
 
 <file path=ppt/notesSlides/notesSlide4.xml><?xml version="1.0" encoding="utf-8"?>
+<p:notes xmlns:a="http://schemas.openxmlformats.org/drawingml/2006/main" xmlns:r="http://schemas.openxmlformats.org/officeDocument/2006/relationships" xmlns:p="http://schemas.openxmlformats.org/presentationml/2006/main" showMasterSp="0" showMasterPhAnim="0">
+  <p:cSld>
+    <p:spTree>
+      <p:nvGrpSpPr>
+        <p:cNvPr id="1" name="Shape 299"/>
+        <p:cNvGrpSpPr/>
+        <p:nvPr/>
+      </p:nvGrpSpPr>
+      <p:grpSpPr>
+        <a:xfrm>
+          <a:off x="0" y="0"/>
+          <a:ext cx="0" cy="0"/>
+          <a:chOff x="0" y="0"/>
+          <a:chExt cx="0" cy="0"/>
+        </a:xfrm>
+      </p:grpSpPr>
+      <p:sp>
+        <p:nvSpPr>
+          <p:cNvPr id="300" name="Google Shape;300;p4:notes"/>
+          <p:cNvSpPr txBox="1">
+            <a:spLocks noGrp="1"/>
+          </p:cNvSpPr>
+          <p:nvPr>
+            <p:ph type="body" idx="1"/>
+          </p:nvPr>
+        </p:nvSpPr>
+        <p:spPr>
+          <a:xfrm>
+            <a:off x="685800" y="4343400"/>
+            <a:ext cx="5486400" cy="4114800"/>
+          </a:xfrm>
+          <a:prstGeom prst="rect">
+            <a:avLst/>
+          </a:prstGeom>
+        </p:spPr>
+        <p:txBody>
+          <a:bodyPr spcFirstLastPara="1" wrap="square" lIns="91425" tIns="91425" rIns="91425" bIns="91425" anchor="t" anchorCtr="0">
+            <a:noAutofit/>
+          </a:bodyPr>
+          <a:lstStyle/>
+          <a:p>
+            <a:pPr marL="0" lvl="0" indent="0" algn="l" rtl="0">
+              <a:spcBef>
+                <a:spcPts val="0"/>
+              </a:spcBef>
+              <a:spcAft>
+                <a:spcPts val="0"/>
+              </a:spcAft>
+              <a:buNone/>
+            </a:pPr>
+            <a:endParaRPr/>
+          </a:p>
+        </p:txBody>
+      </p:sp>
+      <p:sp>
+        <p:nvSpPr>
+          <p:cNvPr id="301" name="Google Shape;301;p4:notes"/>
+          <p:cNvSpPr>
+            <a:spLocks noGrp="1" noRot="1" noChangeAspect="1"/>
+          </p:cNvSpPr>
+          <p:nvPr>
+            <p:ph type="sldImg" idx="2"/>
+          </p:nvPr>
+        </p:nvSpPr>
+        <p:spPr>
+          <a:xfrm>
+            <a:off x="381000" y="685800"/>
+            <a:ext cx="6096000" cy="3429000"/>
+          </a:xfrm>
+          <a:custGeom>
+            <a:avLst/>
+            <a:gdLst/>
+            <a:ahLst/>
+            <a:cxnLst/>
+            <a:rect l="l" t="t" r="r" b="b"/>
+            <a:pathLst>
+              <a:path w="120000" h="120000" extrusionOk="0">
+                <a:moveTo>
+                  <a:pt x="0" y="0"/>
+                </a:moveTo>
+                <a:lnTo>
+                  <a:pt x="120000" y="0"/>
+                </a:lnTo>
+                <a:lnTo>
+                  <a:pt x="120000" y="120000"/>
+                </a:lnTo>
+                <a:lnTo>
+                  <a:pt x="0" y="120000"/>
+                </a:lnTo>
+                <a:close/>
+              </a:path>
+            </a:pathLst>
+          </a:custGeom>
+        </p:spPr>
+      </p:sp>
+    </p:spTree>
+    <p:extLst>
+      <p:ext uri="{BB962C8B-B14F-4D97-AF65-F5344CB8AC3E}">
+        <p14:creationId xmlns:p14="http://schemas.microsoft.com/office/powerpoint/2010/main" val="3609372254"/>
+      </p:ext>
+    </p:extLst>
+  </p:cSld>
+  <p:clrMapOvr>
+    <a:masterClrMapping/>
+  </p:clrMapOvr>
+</p:notes>
+</file>
+
+<file path=ppt/notesSlides/notesSlide5.xml><?xml version="1.0" encoding="utf-8"?>
+<p:notes xmlns:a="http://schemas.openxmlformats.org/drawingml/2006/main" xmlns:r="http://schemas.openxmlformats.org/officeDocument/2006/relationships" xmlns:p="http://schemas.openxmlformats.org/presentationml/2006/main" showMasterSp="0" showMasterPhAnim="0">
+  <p:cSld>
+    <p:spTree>
+      <p:nvGrpSpPr>
+        <p:cNvPr id="1" name="Shape 245"/>
+        <p:cNvGrpSpPr/>
+        <p:nvPr/>
+      </p:nvGrpSpPr>
+      <p:grpSpPr>
+        <a:xfrm>
+          <a:off x="0" y="0"/>
+          <a:ext cx="0" cy="0"/>
+          <a:chOff x="0" y="0"/>
+          <a:chExt cx="0" cy="0"/>
+        </a:xfrm>
+      </p:grpSpPr>
+      <p:sp>
+        <p:nvSpPr>
+          <p:cNvPr id="246" name="Google Shape;246;p2:notes"/>
+          <p:cNvSpPr txBox="1">
+            <a:spLocks noGrp="1"/>
+          </p:cNvSpPr>
+          <p:nvPr>
+            <p:ph type="body" idx="1"/>
+          </p:nvPr>
+        </p:nvSpPr>
+        <p:spPr>
+          <a:xfrm>
+            <a:off x="685800" y="4343400"/>
+            <a:ext cx="5486400" cy="4114800"/>
+          </a:xfrm>
+          <a:prstGeom prst="rect">
+            <a:avLst/>
+          </a:prstGeom>
+        </p:spPr>
+        <p:txBody>
+          <a:bodyPr spcFirstLastPara="1" wrap="square" lIns="91425" tIns="91425" rIns="91425" bIns="91425" anchor="t" anchorCtr="0">
+            <a:noAutofit/>
+          </a:bodyPr>
+          <a:lstStyle/>
+          <a:p>
+            <a:pPr marL="0" lvl="0" indent="0" algn="l" rtl="0">
+              <a:spcBef>
+                <a:spcPts val="0"/>
+              </a:spcBef>
+              <a:spcAft>
+                <a:spcPts val="0"/>
+              </a:spcAft>
+              <a:buNone/>
+            </a:pPr>
+            <a:endParaRPr/>
+          </a:p>
+        </p:txBody>
+      </p:sp>
+      <p:sp>
+        <p:nvSpPr>
+          <p:cNvPr id="247" name="Google Shape;247;p2:notes"/>
+          <p:cNvSpPr>
+            <a:spLocks noGrp="1" noRot="1" noChangeAspect="1"/>
+          </p:cNvSpPr>
+          <p:nvPr>
+            <p:ph type="sldImg" idx="2"/>
+          </p:nvPr>
+        </p:nvSpPr>
+        <p:spPr>
+          <a:xfrm>
+            <a:off x="381000" y="685800"/>
+            <a:ext cx="6096000" cy="3429000"/>
+          </a:xfrm>
+          <a:custGeom>
+            <a:avLst/>
+            <a:gdLst/>
+            <a:ahLst/>
+            <a:cxnLst/>
+            <a:rect l="l" t="t" r="r" b="b"/>
+            <a:pathLst>
+              <a:path w="120000" h="120000" extrusionOk="0">
+                <a:moveTo>
+                  <a:pt x="0" y="0"/>
+                </a:moveTo>
+                <a:lnTo>
+                  <a:pt x="120000" y="0"/>
+                </a:lnTo>
+                <a:lnTo>
+                  <a:pt x="120000" y="120000"/>
+                </a:lnTo>
+                <a:lnTo>
+                  <a:pt x="0" y="120000"/>
+                </a:lnTo>
+                <a:close/>
+              </a:path>
+            </a:pathLst>
+          </a:custGeom>
+        </p:spPr>
+      </p:sp>
+    </p:spTree>
+  </p:cSld>
+  <p:clrMapOvr>
+    <a:masterClrMapping/>
+  </p:clrMapOvr>
+</p:notes>
+</file>
+
+<file path=ppt/notesSlides/notesSlide6.xml><?xml version="1.0" encoding="utf-8"?>
 <p:notes xmlns:a="http://schemas.openxmlformats.org/drawingml/2006/main" xmlns:r="http://schemas.openxmlformats.org/officeDocument/2006/relationships" xmlns:p="http://schemas.openxmlformats.org/presentationml/2006/main" showMasterSp="0" showMasterPhAnim="0">
   <p:cSld>
     <p:spTree>
@@ -1158,7 +1482,7 @@
 </p:notes>
 </file>
 
-<file path=ppt/notesSlides/notesSlide5.xml><?xml version="1.0" encoding="utf-8"?>
+<file path=ppt/notesSlides/notesSlide7.xml><?xml version="1.0" encoding="utf-8"?>
 <p:notes xmlns:a="http://schemas.openxmlformats.org/drawingml/2006/main" xmlns:r="http://schemas.openxmlformats.org/officeDocument/2006/relationships" xmlns:p="http://schemas.openxmlformats.org/presentationml/2006/main" showMasterSp="0" showMasterPhAnim="0">
   <p:cSld>
     <p:spTree>
@@ -1267,7 +1591,7 @@
 </p:notes>
 </file>
 
-<file path=ppt/notesSlides/notesSlide6.xml><?xml version="1.0" encoding="utf-8"?>
+<file path=ppt/notesSlides/notesSlide8.xml><?xml version="1.0" encoding="utf-8"?>
 <p:notes xmlns:a="http://schemas.openxmlformats.org/drawingml/2006/main" xmlns:r="http://schemas.openxmlformats.org/officeDocument/2006/relationships" xmlns:p="http://schemas.openxmlformats.org/presentationml/2006/main" showMasterSp="0" showMasterPhAnim="0">
   <p:cSld>
     <p:spTree>
@@ -1376,7 +1700,7 @@
 </p:notes>
 </file>
 
-<file path=ppt/notesSlides/notesSlide7.xml><?xml version="1.0" encoding="utf-8"?>
+<file path=ppt/notesSlides/notesSlide9.xml><?xml version="1.0" encoding="utf-8"?>
 <p:notes xmlns:a="http://schemas.openxmlformats.org/drawingml/2006/main" xmlns:r="http://schemas.openxmlformats.org/officeDocument/2006/relationships" xmlns:p="http://schemas.openxmlformats.org/presentationml/2006/main" showMasterSp="0" showMasterPhAnim="0">
   <p:cSld>
     <p:spTree>
@@ -1434,110 +1758,6 @@
       <p:sp>
         <p:nvSpPr>
           <p:cNvPr id="386" name="Google Shape;386;p5:notes"/>
-          <p:cNvSpPr>
-            <a:spLocks noGrp="1" noRot="1" noChangeAspect="1"/>
-          </p:cNvSpPr>
-          <p:nvPr>
-            <p:ph type="sldImg" idx="2"/>
-          </p:nvPr>
-        </p:nvSpPr>
-        <p:spPr>
-          <a:xfrm>
-            <a:off x="381000" y="685800"/>
-            <a:ext cx="6096000" cy="3429000"/>
-          </a:xfrm>
-          <a:custGeom>
-            <a:avLst/>
-            <a:gdLst/>
-            <a:ahLst/>
-            <a:cxnLst/>
-            <a:rect l="l" t="t" r="r" b="b"/>
-            <a:pathLst>
-              <a:path w="120000" h="120000" extrusionOk="0">
-                <a:moveTo>
-                  <a:pt x="0" y="0"/>
-                </a:moveTo>
-                <a:lnTo>
-                  <a:pt x="120000" y="0"/>
-                </a:lnTo>
-                <a:lnTo>
-                  <a:pt x="120000" y="120000"/>
-                </a:lnTo>
-                <a:lnTo>
-                  <a:pt x="0" y="120000"/>
-                </a:lnTo>
-                <a:close/>
-              </a:path>
-            </a:pathLst>
-          </a:custGeom>
-        </p:spPr>
-      </p:sp>
-    </p:spTree>
-  </p:cSld>
-  <p:clrMapOvr>
-    <a:masterClrMapping/>
-  </p:clrMapOvr>
-</p:notes>
-</file>
-
-<file path=ppt/notesSlides/notesSlide8.xml><?xml version="1.0" encoding="utf-8"?>
-<p:notes xmlns:a="http://schemas.openxmlformats.org/drawingml/2006/main" xmlns:r="http://schemas.openxmlformats.org/officeDocument/2006/relationships" xmlns:p="http://schemas.openxmlformats.org/presentationml/2006/main" showMasterSp="0" showMasterPhAnim="0">
-  <p:cSld>
-    <p:spTree>
-      <p:nvGrpSpPr>
-        <p:cNvPr id="1" name="Shape 408"/>
-        <p:cNvGrpSpPr/>
-        <p:nvPr/>
-      </p:nvGrpSpPr>
-      <p:grpSpPr>
-        <a:xfrm>
-          <a:off x="0" y="0"/>
-          <a:ext cx="0" cy="0"/>
-          <a:chOff x="0" y="0"/>
-          <a:chExt cx="0" cy="0"/>
-        </a:xfrm>
-      </p:grpSpPr>
-      <p:sp>
-        <p:nvSpPr>
-          <p:cNvPr id="409" name="Google Shape;409;p6:notes"/>
-          <p:cNvSpPr txBox="1">
-            <a:spLocks noGrp="1"/>
-          </p:cNvSpPr>
-          <p:nvPr>
-            <p:ph type="body" idx="1"/>
-          </p:nvPr>
-        </p:nvSpPr>
-        <p:spPr>
-          <a:xfrm>
-            <a:off x="685800" y="4343400"/>
-            <a:ext cx="5486400" cy="4114800"/>
-          </a:xfrm>
-          <a:prstGeom prst="rect">
-            <a:avLst/>
-          </a:prstGeom>
-        </p:spPr>
-        <p:txBody>
-          <a:bodyPr spcFirstLastPara="1" wrap="square" lIns="91425" tIns="91425" rIns="91425" bIns="91425" anchor="t" anchorCtr="0">
-            <a:noAutofit/>
-          </a:bodyPr>
-          <a:lstStyle/>
-          <a:p>
-            <a:pPr marL="0" lvl="0" indent="0" algn="l" rtl="0">
-              <a:spcBef>
-                <a:spcPts val="0"/>
-              </a:spcBef>
-              <a:spcAft>
-                <a:spcPts val="0"/>
-              </a:spcAft>
-              <a:buNone/>
-            </a:pPr>
-            <a:endParaRPr/>
-          </a:p>
-        </p:txBody>
-      </p:sp>
-      <p:sp>
-        <p:nvSpPr>
-          <p:cNvPr id="410" name="Google Shape;410;p6:notes"/>
           <p:cNvSpPr>
             <a:spLocks noGrp="1" noRot="1" noChangeAspect="1"/>
           </p:cNvSpPr>
@@ -11078,177 +11298,6 @@
       </p:grpSpPr>
       <p:grpSp>
         <p:nvGrpSpPr>
-          <p:cNvPr id="209" name="Google Shape;209;p11"/>
-          <p:cNvGrpSpPr/>
-          <p:nvPr/>
-        </p:nvGrpSpPr>
-        <p:grpSpPr>
-          <a:xfrm>
-            <a:off x="1028700" y="915012"/>
-            <a:ext cx="17495249" cy="5766541"/>
-            <a:chOff x="0" y="-38100"/>
-            <a:chExt cx="5863165" cy="1932535"/>
-          </a:xfrm>
-        </p:grpSpPr>
-        <p:sp>
-          <p:nvSpPr>
-            <p:cNvPr id="210" name="Google Shape;210;p11"/>
-            <p:cNvSpPr/>
-            <p:nvPr/>
-          </p:nvSpPr>
-          <p:spPr>
-            <a:xfrm>
-              <a:off x="0" y="0"/>
-              <a:ext cx="5863165" cy="1894435"/>
-            </a:xfrm>
-            <a:custGeom>
-              <a:avLst/>
-              <a:gdLst/>
-              <a:ahLst/>
-              <a:cxnLst/>
-              <a:rect l="l" t="t" r="r" b="b"/>
-              <a:pathLst>
-                <a:path w="5863165" h="1894435" extrusionOk="0">
-                  <a:moveTo>
-                    <a:pt x="8850" y="0"/>
-                  </a:moveTo>
-                  <a:lnTo>
-                    <a:pt x="5854315" y="0"/>
-                  </a:lnTo>
-                  <a:cubicBezTo>
-                    <a:pt x="5859202" y="0"/>
-                    <a:pt x="5863165" y="3962"/>
-                    <a:pt x="5863165" y="8850"/>
-                  </a:cubicBezTo>
-                  <a:lnTo>
-                    <a:pt x="5863165" y="1885585"/>
-                  </a:lnTo>
-                  <a:cubicBezTo>
-                    <a:pt x="5863165" y="1887932"/>
-                    <a:pt x="5862232" y="1890183"/>
-                    <a:pt x="5860573" y="1891842"/>
-                  </a:cubicBezTo>
-                  <a:cubicBezTo>
-                    <a:pt x="5858913" y="1893502"/>
-                    <a:pt x="5856662" y="1894435"/>
-                    <a:pt x="5854315" y="1894435"/>
-                  </a:cubicBezTo>
-                  <a:lnTo>
-                    <a:pt x="8850" y="1894435"/>
-                  </a:lnTo>
-                  <a:cubicBezTo>
-                    <a:pt x="6503" y="1894435"/>
-                    <a:pt x="4252" y="1893502"/>
-                    <a:pt x="2592" y="1891842"/>
-                  </a:cubicBezTo>
-                  <a:cubicBezTo>
-                    <a:pt x="932" y="1890183"/>
-                    <a:pt x="0" y="1887932"/>
-                    <a:pt x="0" y="1885585"/>
-                  </a:cubicBezTo>
-                  <a:lnTo>
-                    <a:pt x="0" y="8850"/>
-                  </a:lnTo>
-                  <a:cubicBezTo>
-                    <a:pt x="0" y="6503"/>
-                    <a:pt x="932" y="4252"/>
-                    <a:pt x="2592" y="2592"/>
-                  </a:cubicBezTo>
-                  <a:cubicBezTo>
-                    <a:pt x="4252" y="932"/>
-                    <a:pt x="6503" y="0"/>
-                    <a:pt x="8850" y="0"/>
-                  </a:cubicBezTo>
-                  <a:close/>
-                </a:path>
-              </a:pathLst>
-            </a:custGeom>
-            <a:solidFill>
-              <a:srgbClr val="000000">
-                <a:alpha val="0"/>
-              </a:srgbClr>
-            </a:solidFill>
-            <a:ln w="38100" cap="sq" cmpd="sng">
-              <a:solidFill>
-                <a:srgbClr val="FFBD4C"/>
-              </a:solidFill>
-              <a:prstDash val="solid"/>
-              <a:miter lim="8000"/>
-              <a:headEnd type="none" w="sm" len="sm"/>
-              <a:tailEnd type="none" w="sm" len="sm"/>
-            </a:ln>
-          </p:spPr>
-          <p:txBody>
-            <a:bodyPr spcFirstLastPara="1" wrap="square" lIns="91425" tIns="91425" rIns="91425" bIns="91425" anchor="ctr" anchorCtr="0">
-              <a:noAutofit/>
-            </a:bodyPr>
-            <a:lstStyle/>
-            <a:p>
-              <a:pPr marL="0" lvl="0" indent="0" algn="l" rtl="0">
-                <a:spcBef>
-                  <a:spcPts val="0"/>
-                </a:spcBef>
-                <a:spcAft>
-                  <a:spcPts val="0"/>
-                </a:spcAft>
-                <a:buNone/>
-              </a:pPr>
-              <a:endParaRPr/>
-            </a:p>
-          </p:txBody>
-        </p:sp>
-        <p:sp>
-          <p:nvSpPr>
-            <p:cNvPr id="211" name="Google Shape;211;p11"/>
-            <p:cNvSpPr txBox="1"/>
-            <p:nvPr/>
-          </p:nvSpPr>
-          <p:spPr>
-            <a:xfrm>
-              <a:off x="0" y="-38100"/>
-              <a:ext cx="5863165" cy="1932535"/>
-            </a:xfrm>
-            <a:prstGeom prst="rect">
-              <a:avLst/>
-            </a:prstGeom>
-            <a:noFill/>
-            <a:ln>
-              <a:noFill/>
-            </a:ln>
-          </p:spPr>
-          <p:txBody>
-            <a:bodyPr spcFirstLastPara="1" wrap="square" lIns="50800" tIns="50800" rIns="50800" bIns="50800" anchor="ctr" anchorCtr="0">
-              <a:noAutofit/>
-            </a:bodyPr>
-            <a:lstStyle/>
-            <a:p>
-              <a:pPr marL="0" marR="0" lvl="0" indent="0" algn="ctr" rtl="0">
-                <a:lnSpc>
-                  <a:spcPct val="186611"/>
-                </a:lnSpc>
-                <a:spcBef>
-                  <a:spcPts val="0"/>
-                </a:spcBef>
-                <a:spcAft>
-                  <a:spcPts val="0"/>
-                </a:spcAft>
-                <a:buNone/>
-              </a:pPr>
-              <a:endParaRPr sz="1800" b="0" i="0" u="none" strike="noStrike" cap="none">
-                <a:solidFill>
-                  <a:schemeClr val="dk1"/>
-                </a:solidFill>
-                <a:latin typeface="Calibri"/>
-                <a:ea typeface="Calibri"/>
-                <a:cs typeface="Calibri"/>
-                <a:sym typeface="Calibri"/>
-              </a:endParaRPr>
-            </a:p>
-          </p:txBody>
-        </p:sp>
-      </p:grpSp>
-      <p:grpSp>
-        <p:nvGrpSpPr>
           <p:cNvPr id="212" name="Google Shape;212;p11"/>
           <p:cNvGrpSpPr/>
           <p:nvPr/>
@@ -12249,10 +12298,3903 @@
   <p:clrMapOvr>
     <a:masterClrMapping/>
   </p:clrMapOvr>
+  <p:timing>
+    <p:tnLst>
+      <p:par>
+        <p:cTn id="1" dur="indefinite" restart="never" nodeType="tmRoot"/>
+      </p:par>
+    </p:tnLst>
+  </p:timing>
+</p:sld>
+</file>
+
+<file path=ppt/slides/slide10.xml><?xml version="1.0" encoding="utf-8"?>
+<p:sld xmlns:a="http://schemas.openxmlformats.org/drawingml/2006/main" xmlns:r="http://schemas.openxmlformats.org/officeDocument/2006/relationships" xmlns:p="http://schemas.openxmlformats.org/presentationml/2006/main">
+  <p:cSld>
+    <p:bg>
+      <p:bgPr>
+        <a:solidFill>
+          <a:srgbClr val="0C0F27"/>
+        </a:solidFill>
+        <a:effectLst/>
+      </p:bgPr>
+    </p:bg>
+    <p:spTree>
+      <p:nvGrpSpPr>
+        <p:cNvPr id="1" name="Shape 411"/>
+        <p:cNvGrpSpPr/>
+        <p:nvPr/>
+      </p:nvGrpSpPr>
+      <p:grpSpPr>
+        <a:xfrm>
+          <a:off x="0" y="0"/>
+          <a:ext cx="0" cy="0"/>
+          <a:chOff x="0" y="0"/>
+          <a:chExt cx="0" cy="0"/>
+        </a:xfrm>
+      </p:grpSpPr>
+      <p:pic>
+        <p:nvPicPr>
+          <p:cNvPr id="412" name="Google Shape;412;p16"/>
+          <p:cNvPicPr preferRelativeResize="0"/>
+          <p:nvPr/>
+        </p:nvPicPr>
+        <p:blipFill>
+          <a:blip r:embed="rId3">
+            <a:alphaModFix/>
+          </a:blip>
+          <a:stretch>
+            <a:fillRect/>
+          </a:stretch>
+        </p:blipFill>
+        <p:spPr>
+          <a:xfrm>
+            <a:off x="16440289" y="-210900"/>
+            <a:ext cx="1409422" cy="1788875"/>
+          </a:xfrm>
+          <a:prstGeom prst="rect">
+            <a:avLst/>
+          </a:prstGeom>
+          <a:noFill/>
+          <a:ln>
+            <a:noFill/>
+          </a:ln>
+        </p:spPr>
+      </p:pic>
+      <p:grpSp>
+        <p:nvGrpSpPr>
+          <p:cNvPr id="423" name="Google Shape;423;p16"/>
+          <p:cNvGrpSpPr/>
+          <p:nvPr/>
+        </p:nvGrpSpPr>
+        <p:grpSpPr>
+          <a:xfrm>
+            <a:off x="1547796" y="1655458"/>
+            <a:ext cx="6620844" cy="6055982"/>
+            <a:chOff x="0" y="-38100"/>
+            <a:chExt cx="1453371" cy="1522554"/>
+          </a:xfrm>
+        </p:grpSpPr>
+        <p:sp>
+          <p:nvSpPr>
+            <p:cNvPr id="424" name="Google Shape;424;p16"/>
+            <p:cNvSpPr/>
+            <p:nvPr/>
+          </p:nvSpPr>
+          <p:spPr>
+            <a:xfrm>
+              <a:off x="0" y="0"/>
+              <a:ext cx="1453371" cy="1484454"/>
+            </a:xfrm>
+            <a:custGeom>
+              <a:avLst/>
+              <a:gdLst/>
+              <a:ahLst/>
+              <a:cxnLst/>
+              <a:rect l="l" t="t" r="r" b="b"/>
+              <a:pathLst>
+                <a:path w="1453371" h="1484454" extrusionOk="0">
+                  <a:moveTo>
+                    <a:pt x="35704" y="0"/>
+                  </a:moveTo>
+                  <a:lnTo>
+                    <a:pt x="1417667" y="0"/>
+                  </a:lnTo>
+                  <a:cubicBezTo>
+                    <a:pt x="1427137" y="0"/>
+                    <a:pt x="1436218" y="3762"/>
+                    <a:pt x="1442914" y="10457"/>
+                  </a:cubicBezTo>
+                  <a:cubicBezTo>
+                    <a:pt x="1449609" y="17153"/>
+                    <a:pt x="1453371" y="26235"/>
+                    <a:pt x="1453371" y="35704"/>
+                  </a:cubicBezTo>
+                  <a:lnTo>
+                    <a:pt x="1453371" y="1448750"/>
+                  </a:lnTo>
+                  <a:cubicBezTo>
+                    <a:pt x="1453371" y="1458219"/>
+                    <a:pt x="1449609" y="1467301"/>
+                    <a:pt x="1442914" y="1473997"/>
+                  </a:cubicBezTo>
+                  <a:cubicBezTo>
+                    <a:pt x="1436218" y="1480692"/>
+                    <a:pt x="1427137" y="1484454"/>
+                    <a:pt x="1417667" y="1484454"/>
+                  </a:cubicBezTo>
+                  <a:lnTo>
+                    <a:pt x="35704" y="1484454"/>
+                  </a:lnTo>
+                  <a:cubicBezTo>
+                    <a:pt x="26235" y="1484454"/>
+                    <a:pt x="17153" y="1480692"/>
+                    <a:pt x="10457" y="1473997"/>
+                  </a:cubicBezTo>
+                  <a:cubicBezTo>
+                    <a:pt x="3762" y="1467301"/>
+                    <a:pt x="0" y="1458219"/>
+                    <a:pt x="0" y="1448750"/>
+                  </a:cubicBezTo>
+                  <a:lnTo>
+                    <a:pt x="0" y="35704"/>
+                  </a:lnTo>
+                  <a:cubicBezTo>
+                    <a:pt x="0" y="26235"/>
+                    <a:pt x="3762" y="17153"/>
+                    <a:pt x="10457" y="10457"/>
+                  </a:cubicBezTo>
+                  <a:cubicBezTo>
+                    <a:pt x="17153" y="3762"/>
+                    <a:pt x="26235" y="0"/>
+                    <a:pt x="35704" y="0"/>
+                  </a:cubicBezTo>
+                  <a:close/>
+                </a:path>
+              </a:pathLst>
+            </a:custGeom>
+            <a:solidFill>
+              <a:srgbClr val="000000">
+                <a:alpha val="0"/>
+              </a:srgbClr>
+            </a:solidFill>
+            <a:ln w="38100" cap="sq" cmpd="sng">
+              <a:solidFill>
+                <a:srgbClr val="FFBD4C"/>
+              </a:solidFill>
+              <a:prstDash val="solid"/>
+              <a:miter lim="8000"/>
+              <a:headEnd type="none" w="sm" len="sm"/>
+              <a:tailEnd type="none" w="sm" len="sm"/>
+            </a:ln>
+          </p:spPr>
+          <p:txBody>
+            <a:bodyPr spcFirstLastPara="1" wrap="square" lIns="91425" tIns="91425" rIns="91425" bIns="91425" anchor="ctr" anchorCtr="0">
+              <a:noAutofit/>
+            </a:bodyPr>
+            <a:lstStyle/>
+            <a:p>
+              <a:pPr marL="0" lvl="0" indent="0" algn="l" rtl="0">
+                <a:spcBef>
+                  <a:spcPts val="0"/>
+                </a:spcBef>
+                <a:spcAft>
+                  <a:spcPts val="0"/>
+                </a:spcAft>
+                <a:buNone/>
+              </a:pPr>
+              <a:endParaRPr/>
+            </a:p>
+          </p:txBody>
+        </p:sp>
+        <p:sp>
+          <p:nvSpPr>
+            <p:cNvPr id="425" name="Google Shape;425;p16"/>
+            <p:cNvSpPr txBox="1"/>
+            <p:nvPr/>
+          </p:nvSpPr>
+          <p:spPr>
+            <a:xfrm>
+              <a:off x="0" y="-38100"/>
+              <a:ext cx="1453371" cy="1522554"/>
+            </a:xfrm>
+            <a:prstGeom prst="rect">
+              <a:avLst/>
+            </a:prstGeom>
+            <a:noFill/>
+            <a:ln>
+              <a:noFill/>
+            </a:ln>
+          </p:spPr>
+          <p:txBody>
+            <a:bodyPr spcFirstLastPara="1" wrap="square" lIns="50800" tIns="50800" rIns="50800" bIns="50800" anchor="ctr" anchorCtr="0">
+              <a:noAutofit/>
+            </a:bodyPr>
+            <a:lstStyle/>
+            <a:p>
+              <a:pPr marL="0" marR="0" lvl="0" indent="0" algn="ctr" rtl="0">
+                <a:lnSpc>
+                  <a:spcPct val="186611"/>
+                </a:lnSpc>
+                <a:spcBef>
+                  <a:spcPts val="0"/>
+                </a:spcBef>
+                <a:spcAft>
+                  <a:spcPts val="0"/>
+                </a:spcAft>
+                <a:buNone/>
+              </a:pPr>
+              <a:endParaRPr sz="1800" b="0" i="0" u="none" strike="noStrike" cap="none">
+                <a:solidFill>
+                  <a:schemeClr val="dk1"/>
+                </a:solidFill>
+                <a:latin typeface="Calibri"/>
+                <a:ea typeface="Calibri"/>
+                <a:cs typeface="Calibri"/>
+                <a:sym typeface="Calibri"/>
+              </a:endParaRPr>
+            </a:p>
+          </p:txBody>
+        </p:sp>
+      </p:grpSp>
+      <p:sp>
+        <p:nvSpPr>
+          <p:cNvPr id="426" name="Google Shape;426;p16"/>
+          <p:cNvSpPr txBox="1"/>
+          <p:nvPr/>
+        </p:nvSpPr>
+        <p:spPr>
+          <a:xfrm>
+            <a:off x="5718311" y="129540"/>
+            <a:ext cx="6425580" cy="1107996"/>
+          </a:xfrm>
+          <a:prstGeom prst="rect">
+            <a:avLst/>
+          </a:prstGeom>
+          <a:noFill/>
+          <a:ln>
+            <a:noFill/>
+          </a:ln>
+        </p:spPr>
+        <p:txBody>
+          <a:bodyPr spcFirstLastPara="1" wrap="square" lIns="0" tIns="0" rIns="0" bIns="0" anchor="t" anchorCtr="0">
+            <a:spAutoFit/>
+          </a:bodyPr>
+          <a:lstStyle/>
+          <a:p>
+            <a:pPr marL="0" marR="0" lvl="0" indent="0" algn="ctr" rtl="0">
+              <a:lnSpc>
+                <a:spcPct val="120000"/>
+              </a:lnSpc>
+              <a:spcBef>
+                <a:spcPts val="0"/>
+              </a:spcBef>
+              <a:spcAft>
+                <a:spcPts val="0"/>
+              </a:spcAft>
+              <a:buNone/>
+            </a:pPr>
+            <a:r>
+              <a:rPr lang="ru-RU" sz="6000" b="0" i="0" u="none" strike="noStrike" cap="none" dirty="0" smtClean="0">
+                <a:solidFill>
+                  <a:srgbClr val="FFBD4C"/>
+                </a:solidFill>
+                <a:latin typeface="Arial Black" panose="020B0A04020102020204" pitchFamily="34" charset="0"/>
+                <a:ea typeface="Montserrat"/>
+                <a:cs typeface="Montserrat"/>
+                <a:sym typeface="Montserrat"/>
+              </a:rPr>
+              <a:t>Заключение </a:t>
+            </a:r>
+            <a:endParaRPr sz="900" dirty="0">
+              <a:latin typeface="Arial Black" panose="020B0A04020102020204" pitchFamily="34" charset="0"/>
+            </a:endParaRPr>
+          </a:p>
+        </p:txBody>
+      </p:sp>
+      <p:sp>
+        <p:nvSpPr>
+          <p:cNvPr id="429" name="Google Shape;429;p16"/>
+          <p:cNvSpPr txBox="1"/>
+          <p:nvPr/>
+        </p:nvSpPr>
+        <p:spPr>
+          <a:xfrm>
+            <a:off x="1547796" y="1142204"/>
+            <a:ext cx="5129090" cy="664797"/>
+          </a:xfrm>
+          <a:prstGeom prst="rect">
+            <a:avLst/>
+          </a:prstGeom>
+          <a:noFill/>
+          <a:ln>
+            <a:noFill/>
+          </a:ln>
+        </p:spPr>
+        <p:txBody>
+          <a:bodyPr spcFirstLastPara="1" wrap="square" lIns="0" tIns="0" rIns="0" bIns="0" anchor="t" anchorCtr="0">
+            <a:spAutoFit/>
+          </a:bodyPr>
+          <a:lstStyle/>
+          <a:p>
+            <a:pPr marL="0" marR="0" lvl="0" indent="0" algn="ctr" rtl="0">
+              <a:lnSpc>
+                <a:spcPct val="120005"/>
+              </a:lnSpc>
+              <a:spcBef>
+                <a:spcPts val="0"/>
+              </a:spcBef>
+              <a:spcAft>
+                <a:spcPts val="0"/>
+              </a:spcAft>
+              <a:buNone/>
+            </a:pPr>
+            <a:r>
+              <a:rPr lang="ru-RU" sz="3600" b="1" i="0" u="none" strike="noStrike" cap="none" dirty="0" smtClean="0">
+                <a:solidFill>
+                  <a:srgbClr val="FFBD4C"/>
+                </a:solidFill>
+                <a:latin typeface="Arial Black" panose="020B0A04020102020204" pitchFamily="34" charset="0"/>
+                <a:ea typeface="Raleway"/>
+                <a:cs typeface="Raleway"/>
+                <a:sym typeface="Raleway"/>
+              </a:rPr>
+              <a:t>Что было сделано</a:t>
+            </a:r>
+            <a:r>
+              <a:rPr lang="en-US" sz="3600" b="1" i="0" u="none" strike="noStrike" cap="none" dirty="0" smtClean="0">
+                <a:solidFill>
+                  <a:srgbClr val="FFBD4C"/>
+                </a:solidFill>
+                <a:latin typeface="Arial Black" panose="020B0A04020102020204" pitchFamily="34" charset="0"/>
+                <a:ea typeface="Raleway"/>
+                <a:cs typeface="Raleway"/>
+                <a:sym typeface="Raleway"/>
+              </a:rPr>
+              <a:t>:</a:t>
+            </a:r>
+            <a:endParaRPr sz="1600" dirty="0">
+              <a:latin typeface="Arial Black" panose="020B0A04020102020204" pitchFamily="34" charset="0"/>
+            </a:endParaRPr>
+          </a:p>
+        </p:txBody>
+      </p:sp>
+      <p:sp>
+        <p:nvSpPr>
+          <p:cNvPr id="430" name="Google Shape;430;p16"/>
+          <p:cNvSpPr txBox="1"/>
+          <p:nvPr/>
+        </p:nvSpPr>
+        <p:spPr>
+          <a:xfrm>
+            <a:off x="1709603" y="2050786"/>
+            <a:ext cx="6586040" cy="5416868"/>
+          </a:xfrm>
+          <a:prstGeom prst="rect">
+            <a:avLst/>
+          </a:prstGeom>
+          <a:noFill/>
+          <a:ln>
+            <a:noFill/>
+          </a:ln>
+        </p:spPr>
+        <p:txBody>
+          <a:bodyPr spcFirstLastPara="1" wrap="square" lIns="0" tIns="0" rIns="0" bIns="0" anchor="t" anchorCtr="0">
+            <a:spAutoFit/>
+          </a:bodyPr>
+          <a:lstStyle/>
+          <a:p>
+            <a:pPr marL="0" marR="0" lvl="0" indent="0" rtl="0">
+              <a:lnSpc>
+                <a:spcPct val="100000"/>
+              </a:lnSpc>
+              <a:spcBef>
+                <a:spcPts val="0"/>
+              </a:spcBef>
+              <a:spcAft>
+                <a:spcPts val="0"/>
+              </a:spcAft>
+              <a:buNone/>
+            </a:pPr>
+            <a:r>
+              <a:rPr lang="en-US" sz="3200" dirty="0" smtClean="0">
+                <a:solidFill>
+                  <a:schemeClr val="bg1"/>
+                </a:solidFill>
+                <a:latin typeface="Arial Black" panose="020B0A04020102020204" pitchFamily="34" charset="0"/>
+              </a:rPr>
+              <a:t>-</a:t>
+            </a:r>
+            <a:r>
+              <a:rPr lang="ru-RU" sz="3200" dirty="0" smtClean="0">
+                <a:solidFill>
+                  <a:schemeClr val="bg1"/>
+                </a:solidFill>
+                <a:latin typeface="Arial Black" panose="020B0A04020102020204" pitchFamily="34" charset="0"/>
+              </a:rPr>
+              <a:t> Составлен сценарий использования веб-сайта</a:t>
+            </a:r>
+            <a:endParaRPr lang="en-US" sz="3200" dirty="0" smtClean="0">
+              <a:solidFill>
+                <a:schemeClr val="bg1"/>
+              </a:solidFill>
+              <a:latin typeface="Arial Black" panose="020B0A04020102020204" pitchFamily="34" charset="0"/>
+            </a:endParaRPr>
+          </a:p>
+          <a:p>
+            <a:pPr marL="0" marR="0" lvl="0" indent="0" rtl="0">
+              <a:lnSpc>
+                <a:spcPct val="100000"/>
+              </a:lnSpc>
+              <a:spcBef>
+                <a:spcPts val="0"/>
+              </a:spcBef>
+              <a:spcAft>
+                <a:spcPts val="0"/>
+              </a:spcAft>
+              <a:buNone/>
+            </a:pPr>
+            <a:endParaRPr lang="ru-RU" sz="3200" dirty="0" smtClean="0">
+              <a:solidFill>
+                <a:schemeClr val="bg1"/>
+              </a:solidFill>
+              <a:latin typeface="Arial Black" panose="020B0A04020102020204" pitchFamily="34" charset="0"/>
+            </a:endParaRPr>
+          </a:p>
+          <a:p>
+            <a:pPr marL="0" marR="0" lvl="0" indent="0" rtl="0">
+              <a:lnSpc>
+                <a:spcPct val="100000"/>
+              </a:lnSpc>
+              <a:spcBef>
+                <a:spcPts val="0"/>
+              </a:spcBef>
+              <a:spcAft>
+                <a:spcPts val="0"/>
+              </a:spcAft>
+              <a:buNone/>
+            </a:pPr>
+            <a:r>
+              <a:rPr lang="en-US" sz="3200" dirty="0" smtClean="0">
+                <a:solidFill>
+                  <a:schemeClr val="bg1"/>
+                </a:solidFill>
+                <a:latin typeface="Arial Black" panose="020B0A04020102020204" pitchFamily="34" charset="0"/>
+              </a:rPr>
+              <a:t>-</a:t>
+            </a:r>
+            <a:r>
+              <a:rPr lang="ru-RU" sz="3200" dirty="0" smtClean="0">
+                <a:solidFill>
+                  <a:schemeClr val="bg1"/>
+                </a:solidFill>
+                <a:latin typeface="Arial Black" panose="020B0A04020102020204" pitchFamily="34" charset="0"/>
+              </a:rPr>
+              <a:t> Было проверено что шифровка и дешифровка работают корректно</a:t>
+            </a:r>
+            <a:endParaRPr lang="en-US" sz="3200" dirty="0" smtClean="0">
+              <a:solidFill>
+                <a:schemeClr val="bg1"/>
+              </a:solidFill>
+              <a:latin typeface="Arial Black" panose="020B0A04020102020204" pitchFamily="34" charset="0"/>
+            </a:endParaRPr>
+          </a:p>
+          <a:p>
+            <a:pPr marL="0" marR="0" lvl="0" indent="0" rtl="0">
+              <a:lnSpc>
+                <a:spcPct val="100000"/>
+              </a:lnSpc>
+              <a:spcBef>
+                <a:spcPts val="0"/>
+              </a:spcBef>
+              <a:spcAft>
+                <a:spcPts val="0"/>
+              </a:spcAft>
+              <a:buNone/>
+            </a:pPr>
+            <a:endParaRPr lang="ru-RU" sz="3200" dirty="0" smtClean="0">
+              <a:solidFill>
+                <a:schemeClr val="bg1"/>
+              </a:solidFill>
+              <a:latin typeface="Arial Black" panose="020B0A04020102020204" pitchFamily="34" charset="0"/>
+            </a:endParaRPr>
+          </a:p>
+          <a:p>
+            <a:pPr marL="0" marR="0" lvl="0" indent="0" rtl="0">
+              <a:lnSpc>
+                <a:spcPct val="100000"/>
+              </a:lnSpc>
+              <a:spcBef>
+                <a:spcPts val="0"/>
+              </a:spcBef>
+              <a:spcAft>
+                <a:spcPts val="0"/>
+              </a:spcAft>
+              <a:buNone/>
+            </a:pPr>
+            <a:r>
+              <a:rPr lang="en-US" sz="3200" dirty="0" smtClean="0">
+                <a:solidFill>
+                  <a:schemeClr val="bg1"/>
+                </a:solidFill>
+                <a:latin typeface="Arial Black" panose="020B0A04020102020204" pitchFamily="34" charset="0"/>
+              </a:rPr>
+              <a:t>-</a:t>
+            </a:r>
+            <a:r>
+              <a:rPr lang="ru-RU" sz="3200" dirty="0" smtClean="0">
+                <a:solidFill>
+                  <a:schemeClr val="bg1"/>
+                </a:solidFill>
+                <a:latin typeface="Arial Black" panose="020B0A04020102020204" pitchFamily="34" charset="0"/>
+              </a:rPr>
+              <a:t> Была составлена таблица описания действий и ожидаемых результатов</a:t>
+            </a:r>
+          </a:p>
+          <a:p>
+            <a:pPr marL="0" marR="0" lvl="0" indent="0" algn="ctr" rtl="0">
+              <a:lnSpc>
+                <a:spcPct val="100000"/>
+              </a:lnSpc>
+              <a:spcBef>
+                <a:spcPts val="0"/>
+              </a:spcBef>
+              <a:spcAft>
+                <a:spcPts val="0"/>
+              </a:spcAft>
+              <a:buNone/>
+            </a:pPr>
+            <a:endParaRPr sz="3200" dirty="0">
+              <a:solidFill>
+                <a:schemeClr val="bg1"/>
+              </a:solidFill>
+            </a:endParaRPr>
+          </a:p>
+        </p:txBody>
+      </p:sp>
+      <p:grpSp>
+        <p:nvGrpSpPr>
+          <p:cNvPr id="444" name="Google Shape;444;p16"/>
+          <p:cNvGrpSpPr/>
+          <p:nvPr/>
+        </p:nvGrpSpPr>
+        <p:grpSpPr>
+          <a:xfrm rot="5400000">
+            <a:off x="-814419" y="2570986"/>
+            <a:ext cx="2137482" cy="475324"/>
+            <a:chOff x="30956" y="22212"/>
+            <a:chExt cx="2849976" cy="633766"/>
+          </a:xfrm>
+        </p:grpSpPr>
+        <p:cxnSp>
+          <p:nvCxnSpPr>
+            <p:cNvPr id="445" name="Google Shape;445;p16"/>
+            <p:cNvCxnSpPr/>
+            <p:nvPr/>
+          </p:nvCxnSpPr>
+          <p:spPr>
+            <a:xfrm rot="10800000" flipH="1">
+              <a:off x="30956" y="22212"/>
+              <a:ext cx="454750" cy="633766"/>
+            </a:xfrm>
+            <a:prstGeom prst="straightConnector1">
+              <a:avLst/>
+            </a:prstGeom>
+            <a:noFill/>
+            <a:ln w="76200" cap="flat" cmpd="sng">
+              <a:solidFill>
+                <a:srgbClr val="FFBD4C"/>
+              </a:solidFill>
+              <a:prstDash val="solid"/>
+              <a:round/>
+              <a:headEnd type="none" w="sm" len="sm"/>
+              <a:tailEnd type="none" w="sm" len="sm"/>
+            </a:ln>
+          </p:spPr>
+        </p:cxnSp>
+        <p:cxnSp>
+          <p:nvCxnSpPr>
+            <p:cNvPr id="446" name="Google Shape;446;p16"/>
+            <p:cNvCxnSpPr/>
+            <p:nvPr/>
+          </p:nvCxnSpPr>
+          <p:spPr>
+            <a:xfrm rot="10800000" flipH="1">
+              <a:off x="430160" y="22212"/>
+              <a:ext cx="454750" cy="633766"/>
+            </a:xfrm>
+            <a:prstGeom prst="straightConnector1">
+              <a:avLst/>
+            </a:prstGeom>
+            <a:noFill/>
+            <a:ln w="76200" cap="flat" cmpd="sng">
+              <a:solidFill>
+                <a:srgbClr val="FFBD4C"/>
+              </a:solidFill>
+              <a:prstDash val="solid"/>
+              <a:round/>
+              <a:headEnd type="none" w="sm" len="sm"/>
+              <a:tailEnd type="none" w="sm" len="sm"/>
+            </a:ln>
+          </p:spPr>
+        </p:cxnSp>
+        <p:cxnSp>
+          <p:nvCxnSpPr>
+            <p:cNvPr id="447" name="Google Shape;447;p16"/>
+            <p:cNvCxnSpPr/>
+            <p:nvPr/>
+          </p:nvCxnSpPr>
+          <p:spPr>
+            <a:xfrm rot="10800000" flipH="1">
+              <a:off x="829364" y="22212"/>
+              <a:ext cx="454750" cy="633766"/>
+            </a:xfrm>
+            <a:prstGeom prst="straightConnector1">
+              <a:avLst/>
+            </a:prstGeom>
+            <a:noFill/>
+            <a:ln w="76200" cap="flat" cmpd="sng">
+              <a:solidFill>
+                <a:srgbClr val="FFBD4C"/>
+              </a:solidFill>
+              <a:prstDash val="solid"/>
+              <a:round/>
+              <a:headEnd type="none" w="sm" len="sm"/>
+              <a:tailEnd type="none" w="sm" len="sm"/>
+            </a:ln>
+          </p:spPr>
+        </p:cxnSp>
+        <p:cxnSp>
+          <p:nvCxnSpPr>
+            <p:cNvPr id="448" name="Google Shape;448;p16"/>
+            <p:cNvCxnSpPr/>
+            <p:nvPr/>
+          </p:nvCxnSpPr>
+          <p:spPr>
+            <a:xfrm rot="10800000" flipH="1">
+              <a:off x="1228569" y="22212"/>
+              <a:ext cx="454750" cy="633766"/>
+            </a:xfrm>
+            <a:prstGeom prst="straightConnector1">
+              <a:avLst/>
+            </a:prstGeom>
+            <a:noFill/>
+            <a:ln w="76200" cap="flat" cmpd="sng">
+              <a:solidFill>
+                <a:srgbClr val="FFBD4C"/>
+              </a:solidFill>
+              <a:prstDash val="solid"/>
+              <a:round/>
+              <a:headEnd type="none" w="sm" len="sm"/>
+              <a:tailEnd type="none" w="sm" len="sm"/>
+            </a:ln>
+          </p:spPr>
+        </p:cxnSp>
+        <p:cxnSp>
+          <p:nvCxnSpPr>
+            <p:cNvPr id="449" name="Google Shape;449;p16"/>
+            <p:cNvCxnSpPr/>
+            <p:nvPr/>
+          </p:nvCxnSpPr>
+          <p:spPr>
+            <a:xfrm rot="10800000" flipH="1">
+              <a:off x="1627773" y="22212"/>
+              <a:ext cx="454750" cy="633766"/>
+            </a:xfrm>
+            <a:prstGeom prst="straightConnector1">
+              <a:avLst/>
+            </a:prstGeom>
+            <a:noFill/>
+            <a:ln w="76200" cap="flat" cmpd="sng">
+              <a:solidFill>
+                <a:srgbClr val="FFBD4C"/>
+              </a:solidFill>
+              <a:prstDash val="solid"/>
+              <a:round/>
+              <a:headEnd type="none" w="sm" len="sm"/>
+              <a:tailEnd type="none" w="sm" len="sm"/>
+            </a:ln>
+          </p:spPr>
+        </p:cxnSp>
+        <p:cxnSp>
+          <p:nvCxnSpPr>
+            <p:cNvPr id="450" name="Google Shape;450;p16"/>
+            <p:cNvCxnSpPr/>
+            <p:nvPr/>
+          </p:nvCxnSpPr>
+          <p:spPr>
+            <a:xfrm rot="10800000" flipH="1">
+              <a:off x="2026977" y="22212"/>
+              <a:ext cx="454750" cy="633766"/>
+            </a:xfrm>
+            <a:prstGeom prst="straightConnector1">
+              <a:avLst/>
+            </a:prstGeom>
+            <a:noFill/>
+            <a:ln w="76200" cap="flat" cmpd="sng">
+              <a:solidFill>
+                <a:srgbClr val="FFBD4C"/>
+              </a:solidFill>
+              <a:prstDash val="solid"/>
+              <a:round/>
+              <a:headEnd type="none" w="sm" len="sm"/>
+              <a:tailEnd type="none" w="sm" len="sm"/>
+            </a:ln>
+          </p:spPr>
+        </p:cxnSp>
+        <p:cxnSp>
+          <p:nvCxnSpPr>
+            <p:cNvPr id="451" name="Google Shape;451;p16"/>
+            <p:cNvCxnSpPr/>
+            <p:nvPr/>
+          </p:nvCxnSpPr>
+          <p:spPr>
+            <a:xfrm rot="10800000" flipH="1">
+              <a:off x="2426182" y="22212"/>
+              <a:ext cx="454750" cy="633766"/>
+            </a:xfrm>
+            <a:prstGeom prst="straightConnector1">
+              <a:avLst/>
+            </a:prstGeom>
+            <a:noFill/>
+            <a:ln w="76200" cap="flat" cmpd="sng">
+              <a:solidFill>
+                <a:srgbClr val="FFBD4C"/>
+              </a:solidFill>
+              <a:prstDash val="solid"/>
+              <a:round/>
+              <a:headEnd type="none" w="sm" len="sm"/>
+              <a:tailEnd type="none" w="sm" len="sm"/>
+            </a:ln>
+          </p:spPr>
+        </p:cxnSp>
+      </p:grpSp>
+      <p:sp>
+        <p:nvSpPr>
+          <p:cNvPr id="44" name="Google Shape;429;p16"/>
+          <p:cNvSpPr txBox="1"/>
+          <p:nvPr/>
+        </p:nvSpPr>
+        <p:spPr>
+          <a:xfrm>
+            <a:off x="8445445" y="1173076"/>
+            <a:ext cx="3304426" cy="664797"/>
+          </a:xfrm>
+          <a:prstGeom prst="rect">
+            <a:avLst/>
+          </a:prstGeom>
+          <a:noFill/>
+          <a:ln>
+            <a:noFill/>
+          </a:ln>
+        </p:spPr>
+        <p:txBody>
+          <a:bodyPr spcFirstLastPara="1" wrap="square" lIns="0" tIns="0" rIns="0" bIns="0" anchor="t" anchorCtr="0">
+            <a:spAutoFit/>
+          </a:bodyPr>
+          <a:lstStyle/>
+          <a:p>
+            <a:pPr marL="0" marR="0" lvl="0" indent="0" algn="ctr" rtl="0">
+              <a:lnSpc>
+                <a:spcPct val="120005"/>
+              </a:lnSpc>
+              <a:spcBef>
+                <a:spcPts val="0"/>
+              </a:spcBef>
+              <a:spcAft>
+                <a:spcPts val="0"/>
+              </a:spcAft>
+              <a:buNone/>
+            </a:pPr>
+            <a:r>
+              <a:rPr lang="ru-RU" sz="3600" dirty="0" smtClean="0">
+                <a:solidFill>
+                  <a:srgbClr val="FFBD4C"/>
+                </a:solidFill>
+                <a:latin typeface="Arial Black" panose="020B0A04020102020204" pitchFamily="34" charset="0"/>
+              </a:rPr>
+              <a:t>Вывод</a:t>
+            </a:r>
+            <a:r>
+              <a:rPr lang="en-US" sz="3600" dirty="0" smtClean="0">
+                <a:solidFill>
+                  <a:srgbClr val="FFBD4C"/>
+                </a:solidFill>
+                <a:latin typeface="Arial Black" panose="020B0A04020102020204" pitchFamily="34" charset="0"/>
+              </a:rPr>
+              <a:t>:</a:t>
+            </a:r>
+            <a:endParaRPr sz="3600" dirty="0">
+              <a:solidFill>
+                <a:srgbClr val="FFBD4C"/>
+              </a:solidFill>
+              <a:latin typeface="Arial Black" panose="020B0A04020102020204" pitchFamily="34" charset="0"/>
+            </a:endParaRPr>
+          </a:p>
+        </p:txBody>
+      </p:sp>
+      <p:grpSp>
+        <p:nvGrpSpPr>
+          <p:cNvPr id="45" name="Google Shape;423;p16"/>
+          <p:cNvGrpSpPr/>
+          <p:nvPr/>
+        </p:nvGrpSpPr>
+        <p:grpSpPr>
+          <a:xfrm>
+            <a:off x="8991600" y="1655457"/>
+            <a:ext cx="9037319" cy="8167599"/>
+            <a:chOff x="0" y="-38100"/>
+            <a:chExt cx="1453371" cy="1522554"/>
+          </a:xfrm>
+        </p:grpSpPr>
+        <p:sp>
+          <p:nvSpPr>
+            <p:cNvPr id="46" name="Google Shape;424;p16"/>
+            <p:cNvSpPr/>
+            <p:nvPr/>
+          </p:nvSpPr>
+          <p:spPr>
+            <a:xfrm>
+              <a:off x="0" y="0"/>
+              <a:ext cx="1453371" cy="1484454"/>
+            </a:xfrm>
+            <a:custGeom>
+              <a:avLst/>
+              <a:gdLst/>
+              <a:ahLst/>
+              <a:cxnLst/>
+              <a:rect l="l" t="t" r="r" b="b"/>
+              <a:pathLst>
+                <a:path w="1453371" h="1484454" extrusionOk="0">
+                  <a:moveTo>
+                    <a:pt x="35704" y="0"/>
+                  </a:moveTo>
+                  <a:lnTo>
+                    <a:pt x="1417667" y="0"/>
+                  </a:lnTo>
+                  <a:cubicBezTo>
+                    <a:pt x="1427137" y="0"/>
+                    <a:pt x="1436218" y="3762"/>
+                    <a:pt x="1442914" y="10457"/>
+                  </a:cubicBezTo>
+                  <a:cubicBezTo>
+                    <a:pt x="1449609" y="17153"/>
+                    <a:pt x="1453371" y="26235"/>
+                    <a:pt x="1453371" y="35704"/>
+                  </a:cubicBezTo>
+                  <a:lnTo>
+                    <a:pt x="1453371" y="1448750"/>
+                  </a:lnTo>
+                  <a:cubicBezTo>
+                    <a:pt x="1453371" y="1458219"/>
+                    <a:pt x="1449609" y="1467301"/>
+                    <a:pt x="1442914" y="1473997"/>
+                  </a:cubicBezTo>
+                  <a:cubicBezTo>
+                    <a:pt x="1436218" y="1480692"/>
+                    <a:pt x="1427137" y="1484454"/>
+                    <a:pt x="1417667" y="1484454"/>
+                  </a:cubicBezTo>
+                  <a:lnTo>
+                    <a:pt x="35704" y="1484454"/>
+                  </a:lnTo>
+                  <a:cubicBezTo>
+                    <a:pt x="26235" y="1484454"/>
+                    <a:pt x="17153" y="1480692"/>
+                    <a:pt x="10457" y="1473997"/>
+                  </a:cubicBezTo>
+                  <a:cubicBezTo>
+                    <a:pt x="3762" y="1467301"/>
+                    <a:pt x="0" y="1458219"/>
+                    <a:pt x="0" y="1448750"/>
+                  </a:cubicBezTo>
+                  <a:lnTo>
+                    <a:pt x="0" y="35704"/>
+                  </a:lnTo>
+                  <a:cubicBezTo>
+                    <a:pt x="0" y="26235"/>
+                    <a:pt x="3762" y="17153"/>
+                    <a:pt x="10457" y="10457"/>
+                  </a:cubicBezTo>
+                  <a:cubicBezTo>
+                    <a:pt x="17153" y="3762"/>
+                    <a:pt x="26235" y="0"/>
+                    <a:pt x="35704" y="0"/>
+                  </a:cubicBezTo>
+                  <a:close/>
+                </a:path>
+              </a:pathLst>
+            </a:custGeom>
+            <a:solidFill>
+              <a:srgbClr val="000000">
+                <a:alpha val="0"/>
+              </a:srgbClr>
+            </a:solidFill>
+            <a:ln w="38100" cap="sq" cmpd="sng">
+              <a:solidFill>
+                <a:srgbClr val="FFBD4C"/>
+              </a:solidFill>
+              <a:prstDash val="solid"/>
+              <a:miter lim="8000"/>
+              <a:headEnd type="none" w="sm" len="sm"/>
+              <a:tailEnd type="none" w="sm" len="sm"/>
+            </a:ln>
+          </p:spPr>
+          <p:txBody>
+            <a:bodyPr spcFirstLastPara="1" wrap="square" lIns="91425" tIns="91425" rIns="91425" bIns="91425" anchor="ctr" anchorCtr="0">
+              <a:noAutofit/>
+            </a:bodyPr>
+            <a:lstStyle/>
+            <a:p>
+              <a:pPr marL="0" lvl="0" indent="0" algn="l" rtl="0">
+                <a:spcBef>
+                  <a:spcPts val="0"/>
+                </a:spcBef>
+                <a:spcAft>
+                  <a:spcPts val="0"/>
+                </a:spcAft>
+                <a:buNone/>
+              </a:pPr>
+              <a:endParaRPr/>
+            </a:p>
+          </p:txBody>
+        </p:sp>
+        <p:sp>
+          <p:nvSpPr>
+            <p:cNvPr id="47" name="Google Shape;425;p16"/>
+            <p:cNvSpPr txBox="1"/>
+            <p:nvPr/>
+          </p:nvSpPr>
+          <p:spPr>
+            <a:xfrm>
+              <a:off x="0" y="-38100"/>
+              <a:ext cx="1453371" cy="1522554"/>
+            </a:xfrm>
+            <a:prstGeom prst="rect">
+              <a:avLst/>
+            </a:prstGeom>
+            <a:noFill/>
+            <a:ln>
+              <a:noFill/>
+            </a:ln>
+          </p:spPr>
+          <p:txBody>
+            <a:bodyPr spcFirstLastPara="1" wrap="square" lIns="50800" tIns="50800" rIns="50800" bIns="50800" anchor="ctr" anchorCtr="0">
+              <a:noAutofit/>
+            </a:bodyPr>
+            <a:lstStyle/>
+            <a:p>
+              <a:pPr marL="0" marR="0" lvl="0" indent="0" algn="ctr" rtl="0">
+                <a:lnSpc>
+                  <a:spcPct val="186611"/>
+                </a:lnSpc>
+                <a:spcBef>
+                  <a:spcPts val="0"/>
+                </a:spcBef>
+                <a:spcAft>
+                  <a:spcPts val="0"/>
+                </a:spcAft>
+                <a:buNone/>
+              </a:pPr>
+              <a:endParaRPr sz="1800" b="0" i="0" u="none" strike="noStrike" cap="none">
+                <a:solidFill>
+                  <a:schemeClr val="dk1"/>
+                </a:solidFill>
+                <a:latin typeface="Calibri"/>
+                <a:ea typeface="Calibri"/>
+                <a:cs typeface="Calibri"/>
+                <a:sym typeface="Calibri"/>
+              </a:endParaRPr>
+            </a:p>
+          </p:txBody>
+        </p:sp>
+      </p:grpSp>
+      <p:sp>
+        <p:nvSpPr>
+          <p:cNvPr id="2" name="TextBox 1"/>
+          <p:cNvSpPr txBox="1"/>
+          <p:nvPr/>
+        </p:nvSpPr>
+        <p:spPr>
+          <a:xfrm>
+            <a:off x="9150715" y="2080970"/>
+            <a:ext cx="9132210" cy="7417415"/>
+          </a:xfrm>
+          <a:prstGeom prst="rect">
+            <a:avLst/>
+          </a:prstGeom>
+          <a:noFill/>
+        </p:spPr>
+        <p:txBody>
+          <a:bodyPr wrap="square" rtlCol="0">
+            <a:spAutoFit/>
+          </a:bodyPr>
+          <a:lstStyle/>
+          <a:p>
+            <a:r>
+              <a:rPr lang="ru-RU" sz="2800" dirty="0">
+                <a:solidFill>
+                  <a:schemeClr val="bg1"/>
+                </a:solidFill>
+                <a:latin typeface="Arial Black" panose="020B0A04020102020204" pitchFamily="34" charset="0"/>
+              </a:rPr>
+              <a:t>В ходе тестирования было подтверждено, что веб-приложение корректно выполняет шифрование и </a:t>
+            </a:r>
+            <a:r>
+              <a:rPr lang="ru-RU" sz="2800" dirty="0" smtClean="0">
+                <a:solidFill>
+                  <a:schemeClr val="bg1"/>
+                </a:solidFill>
+                <a:latin typeface="Arial Black" panose="020B0A04020102020204" pitchFamily="34" charset="0"/>
+              </a:rPr>
+              <a:t>дешифровку </a:t>
+            </a:r>
+            <a:r>
+              <a:rPr lang="ru-RU" sz="2800" dirty="0">
+                <a:solidFill>
+                  <a:schemeClr val="bg1"/>
+                </a:solidFill>
+                <a:latin typeface="Arial Black" panose="020B0A04020102020204" pitchFamily="34" charset="0"/>
+              </a:rPr>
+              <a:t>текста с использованием </a:t>
+            </a:r>
+            <a:r>
+              <a:rPr lang="ru-RU" sz="2800" dirty="0" err="1">
+                <a:solidFill>
+                  <a:schemeClr val="bg1"/>
+                </a:solidFill>
+                <a:latin typeface="Arial Black" panose="020B0A04020102020204" pitchFamily="34" charset="0"/>
+              </a:rPr>
+              <a:t>афинного</a:t>
+            </a:r>
+            <a:r>
+              <a:rPr lang="ru-RU" sz="2800" dirty="0">
+                <a:solidFill>
+                  <a:schemeClr val="bg1"/>
+                </a:solidFill>
+                <a:latin typeface="Arial Black" panose="020B0A04020102020204" pitchFamily="34" charset="0"/>
+              </a:rPr>
+              <a:t> шифра как для английского, так и для русского </a:t>
+            </a:r>
+            <a:r>
+              <a:rPr lang="ru-RU" sz="2800" dirty="0" smtClean="0">
+                <a:solidFill>
+                  <a:schemeClr val="bg1"/>
+                </a:solidFill>
+                <a:latin typeface="Arial Black" panose="020B0A04020102020204" pitchFamily="34" charset="0"/>
+              </a:rPr>
+              <a:t>алфавита.</a:t>
+            </a:r>
+          </a:p>
+          <a:p>
+            <a:r>
+              <a:rPr lang="ru-RU" sz="2800" dirty="0">
+                <a:solidFill>
+                  <a:schemeClr val="bg1"/>
+                </a:solidFill>
+                <a:latin typeface="Arial Black" panose="020B0A04020102020204" pitchFamily="34" charset="0"/>
+              </a:rPr>
+              <a:t/>
+            </a:r>
+            <a:br>
+              <a:rPr lang="ru-RU" sz="2800" dirty="0">
+                <a:solidFill>
+                  <a:schemeClr val="bg1"/>
+                </a:solidFill>
+                <a:latin typeface="Arial Black" panose="020B0A04020102020204" pitchFamily="34" charset="0"/>
+              </a:rPr>
+            </a:br>
+            <a:r>
+              <a:rPr lang="ru-RU" sz="2800" dirty="0">
+                <a:solidFill>
+                  <a:schemeClr val="bg1"/>
+                </a:solidFill>
+                <a:latin typeface="Arial Black" panose="020B0A04020102020204" pitchFamily="34" charset="0"/>
+              </a:rPr>
+              <a:t>Приложение успешно обрабатывает пользовательский ввод, определяет некорректные ключи и выводит соответствующие сообщения об ошибках. </a:t>
+            </a:r>
+            <a:endParaRPr lang="ru-RU" sz="2800" dirty="0" smtClean="0">
+              <a:solidFill>
+                <a:schemeClr val="bg1"/>
+              </a:solidFill>
+              <a:latin typeface="Arial Black" panose="020B0A04020102020204" pitchFamily="34" charset="0"/>
+            </a:endParaRPr>
+          </a:p>
+          <a:p>
+            <a:endParaRPr lang="ru-RU" sz="2800" dirty="0">
+              <a:solidFill>
+                <a:schemeClr val="bg1"/>
+              </a:solidFill>
+              <a:latin typeface="Arial Black" panose="020B0A04020102020204" pitchFamily="34" charset="0"/>
+            </a:endParaRPr>
+          </a:p>
+          <a:p>
+            <a:r>
+              <a:rPr lang="ru-RU" sz="2800" dirty="0" smtClean="0">
+                <a:solidFill>
+                  <a:schemeClr val="bg1"/>
+                </a:solidFill>
+                <a:latin typeface="Arial Black" panose="020B0A04020102020204" pitchFamily="34" charset="0"/>
+              </a:rPr>
+              <a:t>Интерфейс </a:t>
+            </a:r>
+            <a:r>
+              <a:rPr lang="ru-RU" sz="2800" dirty="0">
+                <a:solidFill>
+                  <a:schemeClr val="bg1"/>
+                </a:solidFill>
+                <a:latin typeface="Arial Black" panose="020B0A04020102020204" pitchFamily="34" charset="0"/>
+              </a:rPr>
+              <a:t>работает стабильно и удобен для пользователя</a:t>
+            </a:r>
+            <a:r>
+              <a:rPr lang="ru-RU" sz="2800" dirty="0" smtClean="0">
+                <a:solidFill>
+                  <a:schemeClr val="bg1"/>
+                </a:solidFill>
+                <a:latin typeface="Arial Black" panose="020B0A04020102020204" pitchFamily="34" charset="0"/>
+              </a:rPr>
+              <a:t>.</a:t>
+            </a:r>
+            <a:r>
+              <a:rPr lang="ru-RU" sz="2800" dirty="0">
+                <a:solidFill>
+                  <a:schemeClr val="bg1"/>
+                </a:solidFill>
+                <a:latin typeface="Arial Black" panose="020B0A04020102020204" pitchFamily="34" charset="0"/>
+              </a:rPr>
+              <a:t/>
+            </a:r>
+            <a:br>
+              <a:rPr lang="ru-RU" sz="2800" dirty="0">
+                <a:solidFill>
+                  <a:schemeClr val="bg1"/>
+                </a:solidFill>
+                <a:latin typeface="Arial Black" panose="020B0A04020102020204" pitchFamily="34" charset="0"/>
+              </a:rPr>
+            </a:br>
+            <a:r>
+              <a:rPr lang="ru-RU" sz="2800" dirty="0">
+                <a:solidFill>
+                  <a:schemeClr val="bg1"/>
+                </a:solidFill>
+                <a:latin typeface="Arial Black" panose="020B0A04020102020204" pitchFamily="34" charset="0"/>
+              </a:rPr>
+              <a:t>По результатам проведённого тестирования можно сделать вывод, что приложение соответствует поставленным требованиям и готово к использованию.</a:t>
+            </a:r>
+          </a:p>
+        </p:txBody>
+      </p:sp>
+    </p:spTree>
+  </p:cSld>
+  <p:clrMapOvr>
+    <a:masterClrMapping/>
+  </p:clrMapOvr>
 </p:sld>
 </file>
 
 <file path=ppt/slides/slide2.xml><?xml version="1.0" encoding="utf-8"?>
+<p:sld xmlns:a="http://schemas.openxmlformats.org/drawingml/2006/main" xmlns:r="http://schemas.openxmlformats.org/officeDocument/2006/relationships" xmlns:p="http://schemas.openxmlformats.org/presentationml/2006/main">
+  <p:cSld>
+    <p:bg>
+      <p:bgPr>
+        <a:solidFill>
+          <a:srgbClr val="0C0F27"/>
+        </a:solidFill>
+        <a:effectLst/>
+      </p:bgPr>
+    </p:bg>
+    <p:spTree>
+      <p:nvGrpSpPr>
+        <p:cNvPr id="1" name="Shape 302"/>
+        <p:cNvGrpSpPr/>
+        <p:nvPr/>
+      </p:nvGrpSpPr>
+      <p:grpSpPr>
+        <a:xfrm>
+          <a:off x="0" y="0"/>
+          <a:ext cx="0" cy="0"/>
+          <a:chOff x="0" y="0"/>
+          <a:chExt cx="0" cy="0"/>
+        </a:xfrm>
+      </p:grpSpPr>
+      <p:grpSp>
+        <p:nvGrpSpPr>
+          <p:cNvPr id="303" name="Google Shape;303;p13"/>
+          <p:cNvGrpSpPr/>
+          <p:nvPr/>
+        </p:nvGrpSpPr>
+        <p:grpSpPr>
+          <a:xfrm>
+            <a:off x="581891" y="1551710"/>
+            <a:ext cx="16677409" cy="8617526"/>
+            <a:chOff x="0" y="-38100"/>
+            <a:chExt cx="3606159" cy="1582034"/>
+          </a:xfrm>
+        </p:grpSpPr>
+        <p:sp>
+          <p:nvSpPr>
+            <p:cNvPr id="304" name="Google Shape;304;p13"/>
+            <p:cNvSpPr/>
+            <p:nvPr/>
+          </p:nvSpPr>
+          <p:spPr>
+            <a:xfrm>
+              <a:off x="0" y="0"/>
+              <a:ext cx="3606159" cy="1543934"/>
+            </a:xfrm>
+            <a:custGeom>
+              <a:avLst/>
+              <a:gdLst/>
+              <a:ahLst/>
+              <a:cxnLst/>
+              <a:rect l="l" t="t" r="r" b="b"/>
+              <a:pathLst>
+                <a:path w="3606159" h="1543934" extrusionOk="0">
+                  <a:moveTo>
+                    <a:pt x="14390" y="0"/>
+                  </a:moveTo>
+                  <a:lnTo>
+                    <a:pt x="3591770" y="0"/>
+                  </a:lnTo>
+                  <a:cubicBezTo>
+                    <a:pt x="3599717" y="0"/>
+                    <a:pt x="3606159" y="6442"/>
+                    <a:pt x="3606159" y="14390"/>
+                  </a:cubicBezTo>
+                  <a:lnTo>
+                    <a:pt x="3606159" y="1529544"/>
+                  </a:lnTo>
+                  <a:cubicBezTo>
+                    <a:pt x="3606159" y="1533360"/>
+                    <a:pt x="3604643" y="1537021"/>
+                    <a:pt x="3601945" y="1539719"/>
+                  </a:cubicBezTo>
+                  <a:cubicBezTo>
+                    <a:pt x="3599246" y="1542418"/>
+                    <a:pt x="3595586" y="1543934"/>
+                    <a:pt x="3591770" y="1543934"/>
+                  </a:cubicBezTo>
+                  <a:lnTo>
+                    <a:pt x="14390" y="1543934"/>
+                  </a:lnTo>
+                  <a:cubicBezTo>
+                    <a:pt x="10573" y="1543934"/>
+                    <a:pt x="6913" y="1542418"/>
+                    <a:pt x="4215" y="1539719"/>
+                  </a:cubicBezTo>
+                  <a:cubicBezTo>
+                    <a:pt x="1516" y="1537021"/>
+                    <a:pt x="0" y="1533360"/>
+                    <a:pt x="0" y="1529544"/>
+                  </a:cubicBezTo>
+                  <a:lnTo>
+                    <a:pt x="0" y="14390"/>
+                  </a:lnTo>
+                  <a:cubicBezTo>
+                    <a:pt x="0" y="10573"/>
+                    <a:pt x="1516" y="6913"/>
+                    <a:pt x="4215" y="4215"/>
+                  </a:cubicBezTo>
+                  <a:cubicBezTo>
+                    <a:pt x="6913" y="1516"/>
+                    <a:pt x="10573" y="0"/>
+                    <a:pt x="14390" y="0"/>
+                  </a:cubicBezTo>
+                  <a:close/>
+                </a:path>
+              </a:pathLst>
+            </a:custGeom>
+            <a:solidFill>
+              <a:srgbClr val="000000">
+                <a:alpha val="0"/>
+              </a:srgbClr>
+            </a:solidFill>
+            <a:ln w="38100" cap="sq" cmpd="sng">
+              <a:solidFill>
+                <a:srgbClr val="FFBD4C"/>
+              </a:solidFill>
+              <a:prstDash val="solid"/>
+              <a:miter lim="8000"/>
+              <a:headEnd type="none" w="sm" len="sm"/>
+              <a:tailEnd type="none" w="sm" len="sm"/>
+            </a:ln>
+          </p:spPr>
+          <p:txBody>
+            <a:bodyPr spcFirstLastPara="1" wrap="square" lIns="91425" tIns="91425" rIns="91425" bIns="91425" anchor="ctr" anchorCtr="0">
+              <a:noAutofit/>
+            </a:bodyPr>
+            <a:lstStyle/>
+            <a:p>
+              <a:pPr marL="0" lvl="0" indent="0" algn="l" rtl="0">
+                <a:spcBef>
+                  <a:spcPts val="0"/>
+                </a:spcBef>
+                <a:spcAft>
+                  <a:spcPts val="0"/>
+                </a:spcAft>
+                <a:buNone/>
+              </a:pPr>
+              <a:endParaRPr/>
+            </a:p>
+          </p:txBody>
+        </p:sp>
+        <p:sp>
+          <p:nvSpPr>
+            <p:cNvPr id="305" name="Google Shape;305;p13"/>
+            <p:cNvSpPr txBox="1"/>
+            <p:nvPr/>
+          </p:nvSpPr>
+          <p:spPr>
+            <a:xfrm>
+              <a:off x="0" y="-38100"/>
+              <a:ext cx="3606159" cy="1582034"/>
+            </a:xfrm>
+            <a:prstGeom prst="rect">
+              <a:avLst/>
+            </a:prstGeom>
+            <a:noFill/>
+            <a:ln>
+              <a:noFill/>
+            </a:ln>
+          </p:spPr>
+          <p:txBody>
+            <a:bodyPr spcFirstLastPara="1" wrap="square" lIns="50800" tIns="50800" rIns="50800" bIns="50800" anchor="ctr" anchorCtr="0">
+              <a:noAutofit/>
+            </a:bodyPr>
+            <a:lstStyle/>
+            <a:p>
+              <a:pPr marL="0" marR="0" lvl="0" indent="0" algn="ctr" rtl="0">
+                <a:lnSpc>
+                  <a:spcPct val="186611"/>
+                </a:lnSpc>
+                <a:spcBef>
+                  <a:spcPts val="0"/>
+                </a:spcBef>
+                <a:spcAft>
+                  <a:spcPts val="0"/>
+                </a:spcAft>
+                <a:buNone/>
+              </a:pPr>
+              <a:endParaRPr sz="1800" b="0" i="0" u="none" strike="noStrike" cap="none">
+                <a:solidFill>
+                  <a:schemeClr val="dk1"/>
+                </a:solidFill>
+                <a:latin typeface="Calibri"/>
+                <a:ea typeface="Calibri"/>
+                <a:cs typeface="Calibri"/>
+                <a:sym typeface="Calibri"/>
+              </a:endParaRPr>
+            </a:p>
+          </p:txBody>
+        </p:sp>
+      </p:grpSp>
+      <p:pic>
+        <p:nvPicPr>
+          <p:cNvPr id="307" name="Google Shape;307;p13"/>
+          <p:cNvPicPr preferRelativeResize="0"/>
+          <p:nvPr/>
+        </p:nvPicPr>
+        <p:blipFill>
+          <a:blip r:embed="rId3">
+            <a:alphaModFix/>
+          </a:blip>
+          <a:stretch>
+            <a:fillRect/>
+          </a:stretch>
+        </p:blipFill>
+        <p:spPr>
+          <a:xfrm>
+            <a:off x="16805939" y="9204418"/>
+            <a:ext cx="998450" cy="964818"/>
+          </a:xfrm>
+          <a:prstGeom prst="rect">
+            <a:avLst/>
+          </a:prstGeom>
+          <a:noFill/>
+          <a:ln>
+            <a:noFill/>
+          </a:ln>
+        </p:spPr>
+      </p:pic>
+      <p:sp>
+        <p:nvSpPr>
+          <p:cNvPr id="321" name="Google Shape;321;p13"/>
+          <p:cNvSpPr txBox="1"/>
+          <p:nvPr/>
+        </p:nvSpPr>
+        <p:spPr>
+          <a:xfrm>
+            <a:off x="4341591" y="165808"/>
+            <a:ext cx="9601682" cy="1107996"/>
+          </a:xfrm>
+          <a:prstGeom prst="rect">
+            <a:avLst/>
+          </a:prstGeom>
+          <a:noFill/>
+          <a:ln>
+            <a:noFill/>
+          </a:ln>
+        </p:spPr>
+        <p:txBody>
+          <a:bodyPr spcFirstLastPara="1" wrap="square" lIns="0" tIns="0" rIns="0" bIns="0" anchor="t" anchorCtr="0">
+            <a:spAutoFit/>
+          </a:bodyPr>
+          <a:lstStyle/>
+          <a:p>
+            <a:pPr marL="0" marR="0" lvl="0" indent="0" algn="ctr" rtl="0">
+              <a:lnSpc>
+                <a:spcPct val="120000"/>
+              </a:lnSpc>
+              <a:spcBef>
+                <a:spcPts val="0"/>
+              </a:spcBef>
+              <a:spcAft>
+                <a:spcPts val="0"/>
+              </a:spcAft>
+              <a:buNone/>
+            </a:pPr>
+            <a:r>
+              <a:rPr lang="ru-RU" sz="6000" dirty="0" smtClean="0">
+                <a:solidFill>
+                  <a:srgbClr val="FFBD4C"/>
+                </a:solidFill>
+                <a:latin typeface="Arial Black" panose="020B0A04020102020204" pitchFamily="34" charset="0"/>
+                <a:sym typeface="Montserrat"/>
+              </a:rPr>
+              <a:t>Цель и актуальность</a:t>
+            </a:r>
+            <a:endParaRPr sz="6000" dirty="0">
+              <a:latin typeface="Arial Black" panose="020B0A04020102020204" pitchFamily="34" charset="0"/>
+            </a:endParaRPr>
+          </a:p>
+        </p:txBody>
+      </p:sp>
+      <p:sp>
+        <p:nvSpPr>
+          <p:cNvPr id="322" name="Google Shape;322;p13"/>
+          <p:cNvSpPr txBox="1"/>
+          <p:nvPr/>
+        </p:nvSpPr>
+        <p:spPr>
+          <a:xfrm>
+            <a:off x="961575" y="2322282"/>
+            <a:ext cx="16382169" cy="8322278"/>
+          </a:xfrm>
+          <a:prstGeom prst="rect">
+            <a:avLst/>
+          </a:prstGeom>
+          <a:noFill/>
+          <a:ln>
+            <a:noFill/>
+          </a:ln>
+        </p:spPr>
+        <p:txBody>
+          <a:bodyPr spcFirstLastPara="1" wrap="square" lIns="0" tIns="0" rIns="0" bIns="0" anchor="t" anchorCtr="0">
+            <a:spAutoFit/>
+          </a:bodyPr>
+          <a:lstStyle/>
+          <a:p>
+            <a:pPr>
+              <a:lnSpc>
+                <a:spcPct val="130000"/>
+              </a:lnSpc>
+            </a:pPr>
+            <a:r>
+              <a:rPr lang="ru-RU" sz="3600" dirty="0" smtClean="0">
+                <a:solidFill>
+                  <a:srgbClr val="FFBD4C"/>
+                </a:solidFill>
+                <a:latin typeface="Arial Black" panose="020B0A04020102020204" pitchFamily="34" charset="0"/>
+              </a:rPr>
+              <a:t>Цель проекта</a:t>
+            </a:r>
+            <a:r>
+              <a:rPr lang="en-US" sz="3600" dirty="0" smtClean="0">
+                <a:solidFill>
+                  <a:srgbClr val="FFBD4C"/>
+                </a:solidFill>
+                <a:latin typeface="Arial Black" panose="020B0A04020102020204" pitchFamily="34" charset="0"/>
+              </a:rPr>
+              <a:t>:  </a:t>
+            </a:r>
+            <a:r>
+              <a:rPr lang="ru-RU" sz="3600" dirty="0" smtClean="0">
+                <a:solidFill>
+                  <a:srgbClr val="FFBD4C"/>
+                </a:solidFill>
+                <a:latin typeface="Arial Black" panose="020B0A04020102020204" pitchFamily="34" charset="0"/>
+              </a:rPr>
+              <a:t>Разработка </a:t>
+            </a:r>
+            <a:r>
+              <a:rPr lang="ru-RU" sz="3600" dirty="0">
+                <a:solidFill>
+                  <a:srgbClr val="FFBD4C"/>
+                </a:solidFill>
+                <a:latin typeface="Arial Black" panose="020B0A04020102020204" pitchFamily="34" charset="0"/>
+              </a:rPr>
+              <a:t>веб-приложения для шифрования и расшифровки текстовых сообщений с использованием </a:t>
+            </a:r>
+            <a:r>
+              <a:rPr lang="ru-RU" sz="3600" dirty="0" err="1">
+                <a:solidFill>
+                  <a:srgbClr val="FFBD4C"/>
+                </a:solidFill>
+                <a:latin typeface="Arial Black" panose="020B0A04020102020204" pitchFamily="34" charset="0"/>
+              </a:rPr>
+              <a:t>афинного</a:t>
+            </a:r>
+            <a:r>
+              <a:rPr lang="ru-RU" sz="3600" dirty="0">
+                <a:solidFill>
+                  <a:srgbClr val="FFBD4C"/>
+                </a:solidFill>
+                <a:latin typeface="Arial Black" panose="020B0A04020102020204" pitchFamily="34" charset="0"/>
+              </a:rPr>
+              <a:t> шифра через удобный </a:t>
+            </a:r>
+            <a:r>
+              <a:rPr lang="ru-RU" sz="3600" dirty="0" err="1">
+                <a:solidFill>
+                  <a:srgbClr val="FFBD4C"/>
+                </a:solidFill>
+                <a:latin typeface="Arial Black" panose="020B0A04020102020204" pitchFamily="34" charset="0"/>
+              </a:rPr>
+              <a:t>браузерный</a:t>
+            </a:r>
+            <a:r>
+              <a:rPr lang="ru-RU" sz="3600" dirty="0">
+                <a:solidFill>
+                  <a:srgbClr val="FFBD4C"/>
+                </a:solidFill>
+                <a:latin typeface="Arial Black" panose="020B0A04020102020204" pitchFamily="34" charset="0"/>
+              </a:rPr>
+              <a:t> интерфейс</a:t>
+            </a:r>
+            <a:r>
+              <a:rPr lang="ru-RU" sz="3600" dirty="0" smtClean="0">
+                <a:solidFill>
+                  <a:srgbClr val="FFBD4C"/>
+                </a:solidFill>
+                <a:latin typeface="Arial Black" panose="020B0A04020102020204" pitchFamily="34" charset="0"/>
+              </a:rPr>
+              <a:t>.</a:t>
+            </a:r>
+            <a:endParaRPr lang="en-US" sz="3600" dirty="0" smtClean="0">
+              <a:solidFill>
+                <a:srgbClr val="FFBD4C"/>
+              </a:solidFill>
+              <a:latin typeface="Arial Black" panose="020B0A04020102020204" pitchFamily="34" charset="0"/>
+            </a:endParaRPr>
+          </a:p>
+          <a:p>
+            <a:pPr>
+              <a:lnSpc>
+                <a:spcPct val="130000"/>
+              </a:lnSpc>
+            </a:pPr>
+            <a:endParaRPr lang="en-US" sz="3600" dirty="0" smtClean="0">
+              <a:solidFill>
+                <a:srgbClr val="FFBD4C"/>
+              </a:solidFill>
+              <a:latin typeface="Arial Black" panose="020B0A04020102020204" pitchFamily="34" charset="0"/>
+            </a:endParaRPr>
+          </a:p>
+          <a:p>
+            <a:pPr>
+              <a:lnSpc>
+                <a:spcPct val="130000"/>
+              </a:lnSpc>
+            </a:pPr>
+            <a:r>
+              <a:rPr lang="ru-RU" sz="3600" dirty="0" smtClean="0">
+                <a:solidFill>
+                  <a:srgbClr val="FFBD4C"/>
+                </a:solidFill>
+                <a:latin typeface="Arial Black" panose="020B0A04020102020204" pitchFamily="34" charset="0"/>
+              </a:rPr>
+              <a:t>Актуальность</a:t>
+            </a:r>
+            <a:r>
+              <a:rPr lang="en-US" sz="3600" dirty="0" smtClean="0">
+                <a:solidFill>
+                  <a:srgbClr val="FFBD4C"/>
+                </a:solidFill>
+                <a:latin typeface="Arial Black" panose="020B0A04020102020204" pitchFamily="34" charset="0"/>
+              </a:rPr>
+              <a:t>:</a:t>
+            </a:r>
+            <a:r>
+              <a:rPr lang="ru-RU" sz="3600" dirty="0" smtClean="0">
+                <a:solidFill>
+                  <a:srgbClr val="FFBD4C"/>
+                </a:solidFill>
+                <a:latin typeface="Arial Black" panose="020B0A04020102020204" pitchFamily="34" charset="0"/>
+              </a:rPr>
+              <a:t> </a:t>
+            </a:r>
+            <a:r>
+              <a:rPr lang="en-US" sz="3600" dirty="0" smtClean="0">
+                <a:solidFill>
+                  <a:srgbClr val="FFBD4C"/>
+                </a:solidFill>
+                <a:latin typeface="Arial Black" panose="020B0A04020102020204" pitchFamily="34" charset="0"/>
+              </a:rPr>
+              <a:t> </a:t>
+            </a:r>
+            <a:r>
+              <a:rPr lang="ru-RU" sz="3200" dirty="0" err="1" smtClean="0">
+                <a:solidFill>
+                  <a:srgbClr val="FFBD4C"/>
+                </a:solidFill>
+                <a:latin typeface="Arial Black" panose="020B0A04020102020204" pitchFamily="34" charset="0"/>
+              </a:rPr>
+              <a:t>Афинный</a:t>
+            </a:r>
+            <a:r>
+              <a:rPr lang="ru-RU" sz="3200" dirty="0" smtClean="0">
+                <a:solidFill>
+                  <a:srgbClr val="FFBD4C"/>
+                </a:solidFill>
+                <a:latin typeface="Arial Black" panose="020B0A04020102020204" pitchFamily="34" charset="0"/>
+              </a:rPr>
+              <a:t> </a:t>
+            </a:r>
+            <a:r>
+              <a:rPr lang="ru-RU" sz="3200" dirty="0">
+                <a:solidFill>
+                  <a:srgbClr val="FFBD4C"/>
+                </a:solidFill>
+                <a:latin typeface="Arial Black" panose="020B0A04020102020204" pitchFamily="34" charset="0"/>
+              </a:rPr>
+              <a:t>шифр является одним из классических алгоритмов шифрования, используемых в образовательных целях для изучения криптографии, математики и программирования. Создание </a:t>
+            </a:r>
+            <a:r>
+              <a:rPr lang="ru-RU" sz="3200" dirty="0" smtClean="0">
+                <a:solidFill>
+                  <a:srgbClr val="FFBD4C"/>
+                </a:solidFill>
+                <a:latin typeface="Arial Black" panose="020B0A04020102020204" pitchFamily="34" charset="0"/>
+              </a:rPr>
+              <a:t>веб-сайта </a:t>
+            </a:r>
+            <a:r>
+              <a:rPr lang="ru-RU" sz="3200" dirty="0">
+                <a:solidFill>
+                  <a:srgbClr val="FFBD4C"/>
+                </a:solidFill>
+                <a:latin typeface="Arial Black" panose="020B0A04020102020204" pitchFamily="34" charset="0"/>
+              </a:rPr>
+              <a:t>позволяет сделать процесс шифрования доступным любому пользователю без установки дополнительного программного обеспечения.</a:t>
+            </a:r>
+          </a:p>
+          <a:p>
+            <a:pPr>
+              <a:lnSpc>
+                <a:spcPct val="130000"/>
+              </a:lnSpc>
+            </a:pPr>
+            <a:endParaRPr lang="ru-RU" sz="3600" dirty="0">
+              <a:solidFill>
+                <a:srgbClr val="FFBD4C"/>
+              </a:solidFill>
+              <a:latin typeface="Arial Black" panose="020B0A04020102020204" pitchFamily="34" charset="0"/>
+            </a:endParaRPr>
+          </a:p>
+          <a:p>
+            <a:pPr marL="0" marR="0" lvl="0" indent="0" rtl="0">
+              <a:lnSpc>
+                <a:spcPct val="130000"/>
+              </a:lnSpc>
+              <a:spcBef>
+                <a:spcPts val="0"/>
+              </a:spcBef>
+              <a:spcAft>
+                <a:spcPts val="0"/>
+              </a:spcAft>
+              <a:buNone/>
+            </a:pPr>
+            <a:endParaRPr sz="4000" dirty="0">
+              <a:solidFill>
+                <a:srgbClr val="FFBD4C"/>
+              </a:solidFill>
+              <a:latin typeface="Arial Black" panose="020B0A04020102020204" pitchFamily="34" charset="0"/>
+            </a:endParaRPr>
+          </a:p>
+        </p:txBody>
+      </p:sp>
+      <p:grpSp>
+        <p:nvGrpSpPr>
+          <p:cNvPr id="323" name="Google Shape;323;p13"/>
+          <p:cNvGrpSpPr/>
+          <p:nvPr/>
+        </p:nvGrpSpPr>
+        <p:grpSpPr>
+          <a:xfrm>
+            <a:off x="791044" y="601061"/>
+            <a:ext cx="2137482" cy="475324"/>
+            <a:chOff x="30956" y="22212"/>
+            <a:chExt cx="2849976" cy="633766"/>
+          </a:xfrm>
+        </p:grpSpPr>
+        <p:cxnSp>
+          <p:nvCxnSpPr>
+            <p:cNvPr id="324" name="Google Shape;324;p13"/>
+            <p:cNvCxnSpPr/>
+            <p:nvPr/>
+          </p:nvCxnSpPr>
+          <p:spPr>
+            <a:xfrm rot="10800000" flipH="1">
+              <a:off x="30956" y="22212"/>
+              <a:ext cx="454750" cy="633766"/>
+            </a:xfrm>
+            <a:prstGeom prst="straightConnector1">
+              <a:avLst/>
+            </a:prstGeom>
+            <a:noFill/>
+            <a:ln w="76200" cap="flat" cmpd="sng">
+              <a:solidFill>
+                <a:srgbClr val="FFBD4C"/>
+              </a:solidFill>
+              <a:prstDash val="solid"/>
+              <a:round/>
+              <a:headEnd type="none" w="sm" len="sm"/>
+              <a:tailEnd type="none" w="sm" len="sm"/>
+            </a:ln>
+          </p:spPr>
+        </p:cxnSp>
+        <p:cxnSp>
+          <p:nvCxnSpPr>
+            <p:cNvPr id="325" name="Google Shape;325;p13"/>
+            <p:cNvCxnSpPr/>
+            <p:nvPr/>
+          </p:nvCxnSpPr>
+          <p:spPr>
+            <a:xfrm rot="10800000" flipH="1">
+              <a:off x="430160" y="22212"/>
+              <a:ext cx="454750" cy="633766"/>
+            </a:xfrm>
+            <a:prstGeom prst="straightConnector1">
+              <a:avLst/>
+            </a:prstGeom>
+            <a:noFill/>
+            <a:ln w="76200" cap="flat" cmpd="sng">
+              <a:solidFill>
+                <a:srgbClr val="FFBD4C"/>
+              </a:solidFill>
+              <a:prstDash val="solid"/>
+              <a:round/>
+              <a:headEnd type="none" w="sm" len="sm"/>
+              <a:tailEnd type="none" w="sm" len="sm"/>
+            </a:ln>
+          </p:spPr>
+        </p:cxnSp>
+        <p:cxnSp>
+          <p:nvCxnSpPr>
+            <p:cNvPr id="326" name="Google Shape;326;p13"/>
+            <p:cNvCxnSpPr/>
+            <p:nvPr/>
+          </p:nvCxnSpPr>
+          <p:spPr>
+            <a:xfrm rot="10800000" flipH="1">
+              <a:off x="829364" y="22212"/>
+              <a:ext cx="454750" cy="633766"/>
+            </a:xfrm>
+            <a:prstGeom prst="straightConnector1">
+              <a:avLst/>
+            </a:prstGeom>
+            <a:noFill/>
+            <a:ln w="76200" cap="flat" cmpd="sng">
+              <a:solidFill>
+                <a:srgbClr val="FFBD4C"/>
+              </a:solidFill>
+              <a:prstDash val="solid"/>
+              <a:round/>
+              <a:headEnd type="none" w="sm" len="sm"/>
+              <a:tailEnd type="none" w="sm" len="sm"/>
+            </a:ln>
+          </p:spPr>
+        </p:cxnSp>
+        <p:cxnSp>
+          <p:nvCxnSpPr>
+            <p:cNvPr id="327" name="Google Shape;327;p13"/>
+            <p:cNvCxnSpPr/>
+            <p:nvPr/>
+          </p:nvCxnSpPr>
+          <p:spPr>
+            <a:xfrm rot="10800000" flipH="1">
+              <a:off x="1228569" y="22212"/>
+              <a:ext cx="454750" cy="633766"/>
+            </a:xfrm>
+            <a:prstGeom prst="straightConnector1">
+              <a:avLst/>
+            </a:prstGeom>
+            <a:noFill/>
+            <a:ln w="76200" cap="flat" cmpd="sng">
+              <a:solidFill>
+                <a:srgbClr val="FFBD4C"/>
+              </a:solidFill>
+              <a:prstDash val="solid"/>
+              <a:round/>
+              <a:headEnd type="none" w="sm" len="sm"/>
+              <a:tailEnd type="none" w="sm" len="sm"/>
+            </a:ln>
+          </p:spPr>
+        </p:cxnSp>
+        <p:cxnSp>
+          <p:nvCxnSpPr>
+            <p:cNvPr id="328" name="Google Shape;328;p13"/>
+            <p:cNvCxnSpPr/>
+            <p:nvPr/>
+          </p:nvCxnSpPr>
+          <p:spPr>
+            <a:xfrm rot="10800000" flipH="1">
+              <a:off x="1627773" y="22212"/>
+              <a:ext cx="454750" cy="633766"/>
+            </a:xfrm>
+            <a:prstGeom prst="straightConnector1">
+              <a:avLst/>
+            </a:prstGeom>
+            <a:noFill/>
+            <a:ln w="76200" cap="flat" cmpd="sng">
+              <a:solidFill>
+                <a:srgbClr val="FFBD4C"/>
+              </a:solidFill>
+              <a:prstDash val="solid"/>
+              <a:round/>
+              <a:headEnd type="none" w="sm" len="sm"/>
+              <a:tailEnd type="none" w="sm" len="sm"/>
+            </a:ln>
+          </p:spPr>
+        </p:cxnSp>
+        <p:cxnSp>
+          <p:nvCxnSpPr>
+            <p:cNvPr id="329" name="Google Shape;329;p13"/>
+            <p:cNvCxnSpPr/>
+            <p:nvPr/>
+          </p:nvCxnSpPr>
+          <p:spPr>
+            <a:xfrm rot="10800000" flipH="1">
+              <a:off x="2026977" y="22212"/>
+              <a:ext cx="454750" cy="633766"/>
+            </a:xfrm>
+            <a:prstGeom prst="straightConnector1">
+              <a:avLst/>
+            </a:prstGeom>
+            <a:noFill/>
+            <a:ln w="76200" cap="flat" cmpd="sng">
+              <a:solidFill>
+                <a:srgbClr val="FFBD4C"/>
+              </a:solidFill>
+              <a:prstDash val="solid"/>
+              <a:round/>
+              <a:headEnd type="none" w="sm" len="sm"/>
+              <a:tailEnd type="none" w="sm" len="sm"/>
+            </a:ln>
+          </p:spPr>
+        </p:cxnSp>
+        <p:cxnSp>
+          <p:nvCxnSpPr>
+            <p:cNvPr id="330" name="Google Shape;330;p13"/>
+            <p:cNvCxnSpPr/>
+            <p:nvPr/>
+          </p:nvCxnSpPr>
+          <p:spPr>
+            <a:xfrm rot="10800000" flipH="1">
+              <a:off x="2426182" y="22212"/>
+              <a:ext cx="454750" cy="633766"/>
+            </a:xfrm>
+            <a:prstGeom prst="straightConnector1">
+              <a:avLst/>
+            </a:prstGeom>
+            <a:noFill/>
+            <a:ln w="76200" cap="flat" cmpd="sng">
+              <a:solidFill>
+                <a:srgbClr val="FFBD4C"/>
+              </a:solidFill>
+              <a:prstDash val="solid"/>
+              <a:round/>
+              <a:headEnd type="none" w="sm" len="sm"/>
+              <a:tailEnd type="none" w="sm" len="sm"/>
+            </a:ln>
+          </p:spPr>
+        </p:cxnSp>
+      </p:grpSp>
+      <p:grpSp>
+        <p:nvGrpSpPr>
+          <p:cNvPr id="331" name="Google Shape;331;p13"/>
+          <p:cNvGrpSpPr/>
+          <p:nvPr/>
+        </p:nvGrpSpPr>
+        <p:grpSpPr>
+          <a:xfrm>
+            <a:off x="15376792" y="601061"/>
+            <a:ext cx="2137482" cy="475324"/>
+            <a:chOff x="30956" y="22212"/>
+            <a:chExt cx="2849976" cy="633766"/>
+          </a:xfrm>
+        </p:grpSpPr>
+        <p:cxnSp>
+          <p:nvCxnSpPr>
+            <p:cNvPr id="332" name="Google Shape;332;p13"/>
+            <p:cNvCxnSpPr/>
+            <p:nvPr/>
+          </p:nvCxnSpPr>
+          <p:spPr>
+            <a:xfrm rot="10800000" flipH="1">
+              <a:off x="30956" y="22212"/>
+              <a:ext cx="454750" cy="633766"/>
+            </a:xfrm>
+            <a:prstGeom prst="straightConnector1">
+              <a:avLst/>
+            </a:prstGeom>
+            <a:noFill/>
+            <a:ln w="76200" cap="flat" cmpd="sng">
+              <a:solidFill>
+                <a:srgbClr val="FFBD4C"/>
+              </a:solidFill>
+              <a:prstDash val="solid"/>
+              <a:round/>
+              <a:headEnd type="none" w="sm" len="sm"/>
+              <a:tailEnd type="none" w="sm" len="sm"/>
+            </a:ln>
+          </p:spPr>
+        </p:cxnSp>
+        <p:cxnSp>
+          <p:nvCxnSpPr>
+            <p:cNvPr id="333" name="Google Shape;333;p13"/>
+            <p:cNvCxnSpPr/>
+            <p:nvPr/>
+          </p:nvCxnSpPr>
+          <p:spPr>
+            <a:xfrm rot="10800000" flipH="1">
+              <a:off x="430160" y="22212"/>
+              <a:ext cx="454750" cy="633766"/>
+            </a:xfrm>
+            <a:prstGeom prst="straightConnector1">
+              <a:avLst/>
+            </a:prstGeom>
+            <a:noFill/>
+            <a:ln w="76200" cap="flat" cmpd="sng">
+              <a:solidFill>
+                <a:srgbClr val="FFBD4C"/>
+              </a:solidFill>
+              <a:prstDash val="solid"/>
+              <a:round/>
+              <a:headEnd type="none" w="sm" len="sm"/>
+              <a:tailEnd type="none" w="sm" len="sm"/>
+            </a:ln>
+          </p:spPr>
+        </p:cxnSp>
+        <p:cxnSp>
+          <p:nvCxnSpPr>
+            <p:cNvPr id="334" name="Google Shape;334;p13"/>
+            <p:cNvCxnSpPr/>
+            <p:nvPr/>
+          </p:nvCxnSpPr>
+          <p:spPr>
+            <a:xfrm rot="10800000" flipH="1">
+              <a:off x="829364" y="22212"/>
+              <a:ext cx="454750" cy="633766"/>
+            </a:xfrm>
+            <a:prstGeom prst="straightConnector1">
+              <a:avLst/>
+            </a:prstGeom>
+            <a:noFill/>
+            <a:ln w="76200" cap="flat" cmpd="sng">
+              <a:solidFill>
+                <a:srgbClr val="FFBD4C"/>
+              </a:solidFill>
+              <a:prstDash val="solid"/>
+              <a:round/>
+              <a:headEnd type="none" w="sm" len="sm"/>
+              <a:tailEnd type="none" w="sm" len="sm"/>
+            </a:ln>
+          </p:spPr>
+        </p:cxnSp>
+        <p:cxnSp>
+          <p:nvCxnSpPr>
+            <p:cNvPr id="335" name="Google Shape;335;p13"/>
+            <p:cNvCxnSpPr/>
+            <p:nvPr/>
+          </p:nvCxnSpPr>
+          <p:spPr>
+            <a:xfrm rot="10800000" flipH="1">
+              <a:off x="1228569" y="22212"/>
+              <a:ext cx="454750" cy="633766"/>
+            </a:xfrm>
+            <a:prstGeom prst="straightConnector1">
+              <a:avLst/>
+            </a:prstGeom>
+            <a:noFill/>
+            <a:ln w="76200" cap="flat" cmpd="sng">
+              <a:solidFill>
+                <a:srgbClr val="FFBD4C"/>
+              </a:solidFill>
+              <a:prstDash val="solid"/>
+              <a:round/>
+              <a:headEnd type="none" w="sm" len="sm"/>
+              <a:tailEnd type="none" w="sm" len="sm"/>
+            </a:ln>
+          </p:spPr>
+        </p:cxnSp>
+        <p:cxnSp>
+          <p:nvCxnSpPr>
+            <p:cNvPr id="336" name="Google Shape;336;p13"/>
+            <p:cNvCxnSpPr/>
+            <p:nvPr/>
+          </p:nvCxnSpPr>
+          <p:spPr>
+            <a:xfrm rot="10800000" flipH="1">
+              <a:off x="1627773" y="22212"/>
+              <a:ext cx="454750" cy="633766"/>
+            </a:xfrm>
+            <a:prstGeom prst="straightConnector1">
+              <a:avLst/>
+            </a:prstGeom>
+            <a:noFill/>
+            <a:ln w="76200" cap="flat" cmpd="sng">
+              <a:solidFill>
+                <a:srgbClr val="FFBD4C"/>
+              </a:solidFill>
+              <a:prstDash val="solid"/>
+              <a:round/>
+              <a:headEnd type="none" w="sm" len="sm"/>
+              <a:tailEnd type="none" w="sm" len="sm"/>
+            </a:ln>
+          </p:spPr>
+        </p:cxnSp>
+        <p:cxnSp>
+          <p:nvCxnSpPr>
+            <p:cNvPr id="337" name="Google Shape;337;p13"/>
+            <p:cNvCxnSpPr/>
+            <p:nvPr/>
+          </p:nvCxnSpPr>
+          <p:spPr>
+            <a:xfrm rot="10800000" flipH="1">
+              <a:off x="2026977" y="22212"/>
+              <a:ext cx="454750" cy="633766"/>
+            </a:xfrm>
+            <a:prstGeom prst="straightConnector1">
+              <a:avLst/>
+            </a:prstGeom>
+            <a:noFill/>
+            <a:ln w="76200" cap="flat" cmpd="sng">
+              <a:solidFill>
+                <a:srgbClr val="FFBD4C"/>
+              </a:solidFill>
+              <a:prstDash val="solid"/>
+              <a:round/>
+              <a:headEnd type="none" w="sm" len="sm"/>
+              <a:tailEnd type="none" w="sm" len="sm"/>
+            </a:ln>
+          </p:spPr>
+        </p:cxnSp>
+        <p:cxnSp>
+          <p:nvCxnSpPr>
+            <p:cNvPr id="338" name="Google Shape;338;p13"/>
+            <p:cNvCxnSpPr/>
+            <p:nvPr/>
+          </p:nvCxnSpPr>
+          <p:spPr>
+            <a:xfrm rot="10800000" flipH="1">
+              <a:off x="2426182" y="22212"/>
+              <a:ext cx="454750" cy="633766"/>
+            </a:xfrm>
+            <a:prstGeom prst="straightConnector1">
+              <a:avLst/>
+            </a:prstGeom>
+            <a:noFill/>
+            <a:ln w="76200" cap="flat" cmpd="sng">
+              <a:solidFill>
+                <a:srgbClr val="FFBD4C"/>
+              </a:solidFill>
+              <a:prstDash val="solid"/>
+              <a:round/>
+              <a:headEnd type="none" w="sm" len="sm"/>
+              <a:tailEnd type="none" w="sm" len="sm"/>
+            </a:ln>
+          </p:spPr>
+        </p:cxnSp>
+      </p:grpSp>
+    </p:spTree>
+  </p:cSld>
+  <p:clrMapOvr>
+    <a:masterClrMapping/>
+  </p:clrMapOvr>
+  <p:timing>
+    <p:tnLst>
+      <p:par>
+        <p:cTn id="1" dur="indefinite" restart="never" nodeType="tmRoot"/>
+      </p:par>
+    </p:tnLst>
+  </p:timing>
+</p:sld>
+</file>
+
+<file path=ppt/slides/slide3.xml><?xml version="1.0" encoding="utf-8"?>
+<p:sld xmlns:a="http://schemas.openxmlformats.org/drawingml/2006/main" xmlns:r="http://schemas.openxmlformats.org/officeDocument/2006/relationships" xmlns:p="http://schemas.openxmlformats.org/presentationml/2006/main">
+  <p:cSld>
+    <p:bg>
+      <p:bgPr>
+        <a:solidFill>
+          <a:srgbClr val="0C0F27"/>
+        </a:solidFill>
+        <a:effectLst/>
+      </p:bgPr>
+    </p:bg>
+    <p:spTree>
+      <p:nvGrpSpPr>
+        <p:cNvPr id="1" name="Shape 302"/>
+        <p:cNvGrpSpPr/>
+        <p:nvPr/>
+      </p:nvGrpSpPr>
+      <p:grpSpPr>
+        <a:xfrm>
+          <a:off x="0" y="0"/>
+          <a:ext cx="0" cy="0"/>
+          <a:chOff x="0" y="0"/>
+          <a:chExt cx="0" cy="0"/>
+        </a:xfrm>
+      </p:grpSpPr>
+      <p:pic>
+        <p:nvPicPr>
+          <p:cNvPr id="307" name="Google Shape;307;p13"/>
+          <p:cNvPicPr preferRelativeResize="0"/>
+          <p:nvPr/>
+        </p:nvPicPr>
+        <p:blipFill>
+          <a:blip r:embed="rId3">
+            <a:alphaModFix/>
+          </a:blip>
+          <a:stretch>
+            <a:fillRect/>
+          </a:stretch>
+        </p:blipFill>
+        <p:spPr>
+          <a:xfrm>
+            <a:off x="359295" y="170389"/>
+            <a:ext cx="998450" cy="964818"/>
+          </a:xfrm>
+          <a:prstGeom prst="rect">
+            <a:avLst/>
+          </a:prstGeom>
+          <a:noFill/>
+          <a:ln>
+            <a:noFill/>
+          </a:ln>
+        </p:spPr>
+      </p:pic>
+      <p:sp>
+        <p:nvSpPr>
+          <p:cNvPr id="321" name="Google Shape;321;p13"/>
+          <p:cNvSpPr txBox="1"/>
+          <p:nvPr/>
+        </p:nvSpPr>
+        <p:spPr>
+          <a:xfrm>
+            <a:off x="4512124" y="170389"/>
+            <a:ext cx="10200488" cy="1107996"/>
+          </a:xfrm>
+          <a:prstGeom prst="rect">
+            <a:avLst/>
+          </a:prstGeom>
+          <a:noFill/>
+          <a:ln>
+            <a:noFill/>
+          </a:ln>
+        </p:spPr>
+        <p:txBody>
+          <a:bodyPr spcFirstLastPara="1" wrap="square" lIns="0" tIns="0" rIns="0" bIns="0" anchor="t" anchorCtr="0">
+            <a:spAutoFit/>
+          </a:bodyPr>
+          <a:lstStyle/>
+          <a:p>
+            <a:pPr marL="0" marR="0" lvl="0" indent="0" algn="ctr" rtl="0">
+              <a:lnSpc>
+                <a:spcPct val="120000"/>
+              </a:lnSpc>
+              <a:spcBef>
+                <a:spcPts val="0"/>
+              </a:spcBef>
+              <a:spcAft>
+                <a:spcPts val="0"/>
+              </a:spcAft>
+              <a:buNone/>
+            </a:pPr>
+            <a:r>
+              <a:rPr lang="ru-RU" sz="6000" dirty="0" smtClean="0">
+                <a:solidFill>
+                  <a:srgbClr val="FFBD4C"/>
+                </a:solidFill>
+                <a:latin typeface="Arial Black" panose="020B0A04020102020204" pitchFamily="34" charset="0"/>
+                <a:sym typeface="Montserrat"/>
+              </a:rPr>
+              <a:t>Основной функционал</a:t>
+            </a:r>
+            <a:endParaRPr sz="6000" dirty="0">
+              <a:latin typeface="Arial Black" panose="020B0A04020102020204" pitchFamily="34" charset="0"/>
+            </a:endParaRPr>
+          </a:p>
+        </p:txBody>
+      </p:sp>
+      <p:grpSp>
+        <p:nvGrpSpPr>
+          <p:cNvPr id="323" name="Google Shape;323;p13"/>
+          <p:cNvGrpSpPr/>
+          <p:nvPr/>
+        </p:nvGrpSpPr>
+        <p:grpSpPr>
+          <a:xfrm>
+            <a:off x="13473339" y="9749180"/>
+            <a:ext cx="2137482" cy="475324"/>
+            <a:chOff x="30956" y="22212"/>
+            <a:chExt cx="2849976" cy="633766"/>
+          </a:xfrm>
+        </p:grpSpPr>
+        <p:cxnSp>
+          <p:nvCxnSpPr>
+            <p:cNvPr id="324" name="Google Shape;324;p13"/>
+            <p:cNvCxnSpPr/>
+            <p:nvPr/>
+          </p:nvCxnSpPr>
+          <p:spPr>
+            <a:xfrm rot="10800000" flipH="1">
+              <a:off x="30956" y="22212"/>
+              <a:ext cx="454750" cy="633766"/>
+            </a:xfrm>
+            <a:prstGeom prst="straightConnector1">
+              <a:avLst/>
+            </a:prstGeom>
+            <a:noFill/>
+            <a:ln w="76200" cap="flat" cmpd="sng">
+              <a:solidFill>
+                <a:srgbClr val="FFBD4C"/>
+              </a:solidFill>
+              <a:prstDash val="solid"/>
+              <a:round/>
+              <a:headEnd type="none" w="sm" len="sm"/>
+              <a:tailEnd type="none" w="sm" len="sm"/>
+            </a:ln>
+          </p:spPr>
+        </p:cxnSp>
+        <p:cxnSp>
+          <p:nvCxnSpPr>
+            <p:cNvPr id="325" name="Google Shape;325;p13"/>
+            <p:cNvCxnSpPr/>
+            <p:nvPr/>
+          </p:nvCxnSpPr>
+          <p:spPr>
+            <a:xfrm rot="10800000" flipH="1">
+              <a:off x="430160" y="22212"/>
+              <a:ext cx="454750" cy="633766"/>
+            </a:xfrm>
+            <a:prstGeom prst="straightConnector1">
+              <a:avLst/>
+            </a:prstGeom>
+            <a:noFill/>
+            <a:ln w="76200" cap="flat" cmpd="sng">
+              <a:solidFill>
+                <a:srgbClr val="FFBD4C"/>
+              </a:solidFill>
+              <a:prstDash val="solid"/>
+              <a:round/>
+              <a:headEnd type="none" w="sm" len="sm"/>
+              <a:tailEnd type="none" w="sm" len="sm"/>
+            </a:ln>
+          </p:spPr>
+        </p:cxnSp>
+        <p:cxnSp>
+          <p:nvCxnSpPr>
+            <p:cNvPr id="326" name="Google Shape;326;p13"/>
+            <p:cNvCxnSpPr/>
+            <p:nvPr/>
+          </p:nvCxnSpPr>
+          <p:spPr>
+            <a:xfrm rot="10800000" flipH="1">
+              <a:off x="829364" y="22212"/>
+              <a:ext cx="454750" cy="633766"/>
+            </a:xfrm>
+            <a:prstGeom prst="straightConnector1">
+              <a:avLst/>
+            </a:prstGeom>
+            <a:noFill/>
+            <a:ln w="76200" cap="flat" cmpd="sng">
+              <a:solidFill>
+                <a:srgbClr val="FFBD4C"/>
+              </a:solidFill>
+              <a:prstDash val="solid"/>
+              <a:round/>
+              <a:headEnd type="none" w="sm" len="sm"/>
+              <a:tailEnd type="none" w="sm" len="sm"/>
+            </a:ln>
+          </p:spPr>
+        </p:cxnSp>
+        <p:cxnSp>
+          <p:nvCxnSpPr>
+            <p:cNvPr id="327" name="Google Shape;327;p13"/>
+            <p:cNvCxnSpPr/>
+            <p:nvPr/>
+          </p:nvCxnSpPr>
+          <p:spPr>
+            <a:xfrm rot="10800000" flipH="1">
+              <a:off x="1228569" y="22212"/>
+              <a:ext cx="454750" cy="633766"/>
+            </a:xfrm>
+            <a:prstGeom prst="straightConnector1">
+              <a:avLst/>
+            </a:prstGeom>
+            <a:noFill/>
+            <a:ln w="76200" cap="flat" cmpd="sng">
+              <a:solidFill>
+                <a:srgbClr val="FFBD4C"/>
+              </a:solidFill>
+              <a:prstDash val="solid"/>
+              <a:round/>
+              <a:headEnd type="none" w="sm" len="sm"/>
+              <a:tailEnd type="none" w="sm" len="sm"/>
+            </a:ln>
+          </p:spPr>
+        </p:cxnSp>
+        <p:cxnSp>
+          <p:nvCxnSpPr>
+            <p:cNvPr id="328" name="Google Shape;328;p13"/>
+            <p:cNvCxnSpPr/>
+            <p:nvPr/>
+          </p:nvCxnSpPr>
+          <p:spPr>
+            <a:xfrm rot="10800000" flipH="1">
+              <a:off x="1627773" y="22212"/>
+              <a:ext cx="454750" cy="633766"/>
+            </a:xfrm>
+            <a:prstGeom prst="straightConnector1">
+              <a:avLst/>
+            </a:prstGeom>
+            <a:noFill/>
+            <a:ln w="76200" cap="flat" cmpd="sng">
+              <a:solidFill>
+                <a:srgbClr val="FFBD4C"/>
+              </a:solidFill>
+              <a:prstDash val="solid"/>
+              <a:round/>
+              <a:headEnd type="none" w="sm" len="sm"/>
+              <a:tailEnd type="none" w="sm" len="sm"/>
+            </a:ln>
+          </p:spPr>
+        </p:cxnSp>
+        <p:cxnSp>
+          <p:nvCxnSpPr>
+            <p:cNvPr id="329" name="Google Shape;329;p13"/>
+            <p:cNvCxnSpPr/>
+            <p:nvPr/>
+          </p:nvCxnSpPr>
+          <p:spPr>
+            <a:xfrm rot="10800000" flipH="1">
+              <a:off x="2026977" y="22212"/>
+              <a:ext cx="454750" cy="633766"/>
+            </a:xfrm>
+            <a:prstGeom prst="straightConnector1">
+              <a:avLst/>
+            </a:prstGeom>
+            <a:noFill/>
+            <a:ln w="76200" cap="flat" cmpd="sng">
+              <a:solidFill>
+                <a:srgbClr val="FFBD4C"/>
+              </a:solidFill>
+              <a:prstDash val="solid"/>
+              <a:round/>
+              <a:headEnd type="none" w="sm" len="sm"/>
+              <a:tailEnd type="none" w="sm" len="sm"/>
+            </a:ln>
+          </p:spPr>
+        </p:cxnSp>
+        <p:cxnSp>
+          <p:nvCxnSpPr>
+            <p:cNvPr id="330" name="Google Shape;330;p13"/>
+            <p:cNvCxnSpPr/>
+            <p:nvPr/>
+          </p:nvCxnSpPr>
+          <p:spPr>
+            <a:xfrm rot="10800000" flipH="1">
+              <a:off x="2426182" y="22212"/>
+              <a:ext cx="454750" cy="633766"/>
+            </a:xfrm>
+            <a:prstGeom prst="straightConnector1">
+              <a:avLst/>
+            </a:prstGeom>
+            <a:noFill/>
+            <a:ln w="76200" cap="flat" cmpd="sng">
+              <a:solidFill>
+                <a:srgbClr val="FFBD4C"/>
+              </a:solidFill>
+              <a:prstDash val="solid"/>
+              <a:round/>
+              <a:headEnd type="none" w="sm" len="sm"/>
+              <a:tailEnd type="none" w="sm" len="sm"/>
+            </a:ln>
+          </p:spPr>
+        </p:cxnSp>
+      </p:grpSp>
+      <p:grpSp>
+        <p:nvGrpSpPr>
+          <p:cNvPr id="331" name="Google Shape;331;p13"/>
+          <p:cNvGrpSpPr/>
+          <p:nvPr/>
+        </p:nvGrpSpPr>
+        <p:grpSpPr>
+          <a:xfrm>
+            <a:off x="15590579" y="9749180"/>
+            <a:ext cx="2137482" cy="475324"/>
+            <a:chOff x="30956" y="22212"/>
+            <a:chExt cx="2849976" cy="633766"/>
+          </a:xfrm>
+        </p:grpSpPr>
+        <p:cxnSp>
+          <p:nvCxnSpPr>
+            <p:cNvPr id="332" name="Google Shape;332;p13"/>
+            <p:cNvCxnSpPr/>
+            <p:nvPr/>
+          </p:nvCxnSpPr>
+          <p:spPr>
+            <a:xfrm rot="10800000" flipH="1">
+              <a:off x="30956" y="22212"/>
+              <a:ext cx="454750" cy="633766"/>
+            </a:xfrm>
+            <a:prstGeom prst="straightConnector1">
+              <a:avLst/>
+            </a:prstGeom>
+            <a:noFill/>
+            <a:ln w="76200" cap="flat" cmpd="sng">
+              <a:solidFill>
+                <a:srgbClr val="FFBD4C"/>
+              </a:solidFill>
+              <a:prstDash val="solid"/>
+              <a:round/>
+              <a:headEnd type="none" w="sm" len="sm"/>
+              <a:tailEnd type="none" w="sm" len="sm"/>
+            </a:ln>
+          </p:spPr>
+        </p:cxnSp>
+        <p:cxnSp>
+          <p:nvCxnSpPr>
+            <p:cNvPr id="333" name="Google Shape;333;p13"/>
+            <p:cNvCxnSpPr/>
+            <p:nvPr/>
+          </p:nvCxnSpPr>
+          <p:spPr>
+            <a:xfrm rot="10800000" flipH="1">
+              <a:off x="430160" y="22212"/>
+              <a:ext cx="454750" cy="633766"/>
+            </a:xfrm>
+            <a:prstGeom prst="straightConnector1">
+              <a:avLst/>
+            </a:prstGeom>
+            <a:noFill/>
+            <a:ln w="76200" cap="flat" cmpd="sng">
+              <a:solidFill>
+                <a:srgbClr val="FFBD4C"/>
+              </a:solidFill>
+              <a:prstDash val="solid"/>
+              <a:round/>
+              <a:headEnd type="none" w="sm" len="sm"/>
+              <a:tailEnd type="none" w="sm" len="sm"/>
+            </a:ln>
+          </p:spPr>
+        </p:cxnSp>
+        <p:cxnSp>
+          <p:nvCxnSpPr>
+            <p:cNvPr id="334" name="Google Shape;334;p13"/>
+            <p:cNvCxnSpPr/>
+            <p:nvPr/>
+          </p:nvCxnSpPr>
+          <p:spPr>
+            <a:xfrm rot="10800000" flipH="1">
+              <a:off x="829364" y="22212"/>
+              <a:ext cx="454750" cy="633766"/>
+            </a:xfrm>
+            <a:prstGeom prst="straightConnector1">
+              <a:avLst/>
+            </a:prstGeom>
+            <a:noFill/>
+            <a:ln w="76200" cap="flat" cmpd="sng">
+              <a:solidFill>
+                <a:srgbClr val="FFBD4C"/>
+              </a:solidFill>
+              <a:prstDash val="solid"/>
+              <a:round/>
+              <a:headEnd type="none" w="sm" len="sm"/>
+              <a:tailEnd type="none" w="sm" len="sm"/>
+            </a:ln>
+          </p:spPr>
+        </p:cxnSp>
+        <p:cxnSp>
+          <p:nvCxnSpPr>
+            <p:cNvPr id="335" name="Google Shape;335;p13"/>
+            <p:cNvCxnSpPr/>
+            <p:nvPr/>
+          </p:nvCxnSpPr>
+          <p:spPr>
+            <a:xfrm rot="10800000" flipH="1">
+              <a:off x="1228569" y="22212"/>
+              <a:ext cx="454750" cy="633766"/>
+            </a:xfrm>
+            <a:prstGeom prst="straightConnector1">
+              <a:avLst/>
+            </a:prstGeom>
+            <a:noFill/>
+            <a:ln w="76200" cap="flat" cmpd="sng">
+              <a:solidFill>
+                <a:srgbClr val="FFBD4C"/>
+              </a:solidFill>
+              <a:prstDash val="solid"/>
+              <a:round/>
+              <a:headEnd type="none" w="sm" len="sm"/>
+              <a:tailEnd type="none" w="sm" len="sm"/>
+            </a:ln>
+          </p:spPr>
+        </p:cxnSp>
+        <p:cxnSp>
+          <p:nvCxnSpPr>
+            <p:cNvPr id="336" name="Google Shape;336;p13"/>
+            <p:cNvCxnSpPr/>
+            <p:nvPr/>
+          </p:nvCxnSpPr>
+          <p:spPr>
+            <a:xfrm rot="10800000" flipH="1">
+              <a:off x="1627773" y="22212"/>
+              <a:ext cx="454750" cy="633766"/>
+            </a:xfrm>
+            <a:prstGeom prst="straightConnector1">
+              <a:avLst/>
+            </a:prstGeom>
+            <a:noFill/>
+            <a:ln w="76200" cap="flat" cmpd="sng">
+              <a:solidFill>
+                <a:srgbClr val="FFBD4C"/>
+              </a:solidFill>
+              <a:prstDash val="solid"/>
+              <a:round/>
+              <a:headEnd type="none" w="sm" len="sm"/>
+              <a:tailEnd type="none" w="sm" len="sm"/>
+            </a:ln>
+          </p:spPr>
+        </p:cxnSp>
+        <p:cxnSp>
+          <p:nvCxnSpPr>
+            <p:cNvPr id="337" name="Google Shape;337;p13"/>
+            <p:cNvCxnSpPr/>
+            <p:nvPr/>
+          </p:nvCxnSpPr>
+          <p:spPr>
+            <a:xfrm rot="10800000" flipH="1">
+              <a:off x="2026977" y="22212"/>
+              <a:ext cx="454750" cy="633766"/>
+            </a:xfrm>
+            <a:prstGeom prst="straightConnector1">
+              <a:avLst/>
+            </a:prstGeom>
+            <a:noFill/>
+            <a:ln w="76200" cap="flat" cmpd="sng">
+              <a:solidFill>
+                <a:srgbClr val="FFBD4C"/>
+              </a:solidFill>
+              <a:prstDash val="solid"/>
+              <a:round/>
+              <a:headEnd type="none" w="sm" len="sm"/>
+              <a:tailEnd type="none" w="sm" len="sm"/>
+            </a:ln>
+          </p:spPr>
+        </p:cxnSp>
+        <p:cxnSp>
+          <p:nvCxnSpPr>
+            <p:cNvPr id="338" name="Google Shape;338;p13"/>
+            <p:cNvCxnSpPr/>
+            <p:nvPr/>
+          </p:nvCxnSpPr>
+          <p:spPr>
+            <a:xfrm rot="10800000" flipH="1">
+              <a:off x="2426182" y="22212"/>
+              <a:ext cx="454750" cy="633766"/>
+            </a:xfrm>
+            <a:prstGeom prst="straightConnector1">
+              <a:avLst/>
+            </a:prstGeom>
+            <a:noFill/>
+            <a:ln w="76200" cap="flat" cmpd="sng">
+              <a:solidFill>
+                <a:srgbClr val="FFBD4C"/>
+              </a:solidFill>
+              <a:prstDash val="solid"/>
+              <a:round/>
+              <a:headEnd type="none" w="sm" len="sm"/>
+              <a:tailEnd type="none" w="sm" len="sm"/>
+            </a:ln>
+          </p:spPr>
+        </p:cxnSp>
+      </p:grpSp>
+      <p:sp>
+        <p:nvSpPr>
+          <p:cNvPr id="2" name="Скругленный прямоугольник 1"/>
+          <p:cNvSpPr/>
+          <p:nvPr/>
+        </p:nvSpPr>
+        <p:spPr>
+          <a:xfrm>
+            <a:off x="1357745" y="1648691"/>
+            <a:ext cx="4461164" cy="2493818"/>
+          </a:xfrm>
+          <a:prstGeom prst="roundRect">
+            <a:avLst/>
+          </a:prstGeom>
+          <a:noFill/>
+          <a:ln w="57150">
+            <a:solidFill>
+              <a:srgbClr val="FFBD4C"/>
+            </a:solidFill>
+          </a:ln>
+        </p:spPr>
+        <p:style>
+          <a:lnRef idx="2">
+            <a:schemeClr val="accent1">
+              <a:shade val="50000"/>
+            </a:schemeClr>
+          </a:lnRef>
+          <a:fillRef idx="1">
+            <a:schemeClr val="accent1"/>
+          </a:fillRef>
+          <a:effectRef idx="0">
+            <a:schemeClr val="accent1"/>
+          </a:effectRef>
+          <a:fontRef idx="minor">
+            <a:schemeClr val="lt1"/>
+          </a:fontRef>
+        </p:style>
+        <p:txBody>
+          <a:bodyPr rtlCol="0" anchor="ctr"/>
+          <a:lstStyle/>
+          <a:p>
+            <a:pPr algn="ctr"/>
+            <a:endParaRPr lang="ru-RU"/>
+          </a:p>
+        </p:txBody>
+      </p:sp>
+      <p:sp>
+        <p:nvSpPr>
+          <p:cNvPr id="3" name="TextBox 2"/>
+          <p:cNvSpPr txBox="1"/>
+          <p:nvPr/>
+        </p:nvSpPr>
+        <p:spPr>
+          <a:xfrm>
+            <a:off x="1676399" y="2064326"/>
+            <a:ext cx="3574473" cy="1569660"/>
+          </a:xfrm>
+          <a:prstGeom prst="rect">
+            <a:avLst/>
+          </a:prstGeom>
+          <a:noFill/>
+        </p:spPr>
+        <p:txBody>
+          <a:bodyPr wrap="square" rtlCol="0">
+            <a:spAutoFit/>
+          </a:bodyPr>
+          <a:lstStyle/>
+          <a:p>
+            <a:pPr algn="ctr"/>
+            <a:r>
+              <a:rPr lang="ru-RU" sz="3200" dirty="0" smtClean="0">
+                <a:solidFill>
+                  <a:schemeClr val="bg1"/>
+                </a:solidFill>
+                <a:latin typeface="Arial Black" panose="020B0A04020102020204" pitchFamily="34" charset="0"/>
+              </a:rPr>
+              <a:t>Считывание текста пользователя</a:t>
+            </a:r>
+            <a:endParaRPr lang="ru-RU" sz="3200" dirty="0">
+              <a:solidFill>
+                <a:schemeClr val="bg1"/>
+              </a:solidFill>
+              <a:latin typeface="Arial Black" panose="020B0A04020102020204" pitchFamily="34" charset="0"/>
+            </a:endParaRPr>
+          </a:p>
+        </p:txBody>
+      </p:sp>
+      <p:sp>
+        <p:nvSpPr>
+          <p:cNvPr id="26" name="Скругленный прямоугольник 25"/>
+          <p:cNvSpPr/>
+          <p:nvPr/>
+        </p:nvSpPr>
+        <p:spPr>
+          <a:xfrm>
+            <a:off x="12311498" y="1773055"/>
+            <a:ext cx="4461164" cy="2493818"/>
+          </a:xfrm>
+          <a:prstGeom prst="roundRect">
+            <a:avLst/>
+          </a:prstGeom>
+          <a:noFill/>
+          <a:ln w="57150">
+            <a:solidFill>
+              <a:srgbClr val="FFBD4C"/>
+            </a:solidFill>
+          </a:ln>
+        </p:spPr>
+        <p:style>
+          <a:lnRef idx="2">
+            <a:schemeClr val="accent1">
+              <a:shade val="50000"/>
+            </a:schemeClr>
+          </a:lnRef>
+          <a:fillRef idx="1">
+            <a:schemeClr val="accent1"/>
+          </a:fillRef>
+          <a:effectRef idx="0">
+            <a:schemeClr val="accent1"/>
+          </a:effectRef>
+          <a:fontRef idx="minor">
+            <a:schemeClr val="lt1"/>
+          </a:fontRef>
+        </p:style>
+        <p:txBody>
+          <a:bodyPr rtlCol="0" anchor="ctr"/>
+          <a:lstStyle/>
+          <a:p>
+            <a:pPr algn="ctr"/>
+            <a:endParaRPr lang="ru-RU"/>
+          </a:p>
+        </p:txBody>
+      </p:sp>
+      <p:sp>
+        <p:nvSpPr>
+          <p:cNvPr id="27" name="TextBox 26"/>
+          <p:cNvSpPr txBox="1"/>
+          <p:nvPr/>
+        </p:nvSpPr>
+        <p:spPr>
+          <a:xfrm>
+            <a:off x="12785443" y="2064326"/>
+            <a:ext cx="3574473" cy="1077218"/>
+          </a:xfrm>
+          <a:prstGeom prst="rect">
+            <a:avLst/>
+          </a:prstGeom>
+          <a:noFill/>
+        </p:spPr>
+        <p:txBody>
+          <a:bodyPr wrap="square" rtlCol="0">
+            <a:spAutoFit/>
+          </a:bodyPr>
+          <a:lstStyle/>
+          <a:p>
+            <a:pPr algn="ctr"/>
+            <a:r>
+              <a:rPr lang="ru-RU" sz="3200" dirty="0" smtClean="0">
+                <a:solidFill>
+                  <a:schemeClr val="bg1"/>
+                </a:solidFill>
+                <a:latin typeface="Arial Black" panose="020B0A04020102020204" pitchFamily="34" charset="0"/>
+              </a:rPr>
+              <a:t>Считывание ключей</a:t>
+            </a:r>
+            <a:endParaRPr lang="ru-RU" sz="3200" dirty="0">
+              <a:solidFill>
+                <a:schemeClr val="bg1"/>
+              </a:solidFill>
+              <a:latin typeface="Arial Black" panose="020B0A04020102020204" pitchFamily="34" charset="0"/>
+            </a:endParaRPr>
+          </a:p>
+        </p:txBody>
+      </p:sp>
+      <p:sp>
+        <p:nvSpPr>
+          <p:cNvPr id="28" name="Скругленный прямоугольник 27"/>
+          <p:cNvSpPr/>
+          <p:nvPr/>
+        </p:nvSpPr>
+        <p:spPr>
+          <a:xfrm>
+            <a:off x="6941127" y="1648691"/>
+            <a:ext cx="4461164" cy="2493818"/>
+          </a:xfrm>
+          <a:prstGeom prst="roundRect">
+            <a:avLst/>
+          </a:prstGeom>
+          <a:noFill/>
+          <a:ln w="57150">
+            <a:solidFill>
+              <a:srgbClr val="FFBD4C"/>
+            </a:solidFill>
+          </a:ln>
+        </p:spPr>
+        <p:style>
+          <a:lnRef idx="2">
+            <a:schemeClr val="accent1">
+              <a:shade val="50000"/>
+            </a:schemeClr>
+          </a:lnRef>
+          <a:fillRef idx="1">
+            <a:schemeClr val="accent1"/>
+          </a:fillRef>
+          <a:effectRef idx="0">
+            <a:schemeClr val="accent1"/>
+          </a:effectRef>
+          <a:fontRef idx="minor">
+            <a:schemeClr val="lt1"/>
+          </a:fontRef>
+        </p:style>
+        <p:txBody>
+          <a:bodyPr rtlCol="0" anchor="ctr"/>
+          <a:lstStyle/>
+          <a:p>
+            <a:pPr algn="ctr"/>
+            <a:endParaRPr lang="ru-RU"/>
+          </a:p>
+        </p:txBody>
+      </p:sp>
+      <p:sp>
+        <p:nvSpPr>
+          <p:cNvPr id="30" name="TextBox 29"/>
+          <p:cNvSpPr txBox="1"/>
+          <p:nvPr/>
+        </p:nvSpPr>
+        <p:spPr>
+          <a:xfrm>
+            <a:off x="7384472" y="2064326"/>
+            <a:ext cx="3574473" cy="1569660"/>
+          </a:xfrm>
+          <a:prstGeom prst="rect">
+            <a:avLst/>
+          </a:prstGeom>
+          <a:noFill/>
+        </p:spPr>
+        <p:txBody>
+          <a:bodyPr wrap="square" rtlCol="0">
+            <a:spAutoFit/>
+          </a:bodyPr>
+          <a:lstStyle/>
+          <a:p>
+            <a:pPr algn="ctr"/>
+            <a:r>
+              <a:rPr lang="ru-RU" sz="3200" dirty="0" smtClean="0">
+                <a:solidFill>
+                  <a:schemeClr val="bg1"/>
+                </a:solidFill>
+                <a:latin typeface="Arial Black" panose="020B0A04020102020204" pitchFamily="34" charset="0"/>
+              </a:rPr>
+              <a:t>Текст окна отображается корректно</a:t>
+            </a:r>
+            <a:endParaRPr lang="ru-RU" sz="3200" dirty="0">
+              <a:solidFill>
+                <a:schemeClr val="bg1"/>
+              </a:solidFill>
+              <a:latin typeface="Arial Black" panose="020B0A04020102020204" pitchFamily="34" charset="0"/>
+            </a:endParaRPr>
+          </a:p>
+        </p:txBody>
+      </p:sp>
+      <p:sp>
+        <p:nvSpPr>
+          <p:cNvPr id="31" name="Скругленный прямоугольник 30"/>
+          <p:cNvSpPr/>
+          <p:nvPr/>
+        </p:nvSpPr>
+        <p:spPr>
+          <a:xfrm>
+            <a:off x="3588327" y="5389418"/>
+            <a:ext cx="4461164" cy="2493818"/>
+          </a:xfrm>
+          <a:prstGeom prst="roundRect">
+            <a:avLst/>
+          </a:prstGeom>
+          <a:noFill/>
+          <a:ln w="57150">
+            <a:solidFill>
+              <a:srgbClr val="FFBD4C"/>
+            </a:solidFill>
+          </a:ln>
+        </p:spPr>
+        <p:style>
+          <a:lnRef idx="2">
+            <a:schemeClr val="accent1">
+              <a:shade val="50000"/>
+            </a:schemeClr>
+          </a:lnRef>
+          <a:fillRef idx="1">
+            <a:schemeClr val="accent1"/>
+          </a:fillRef>
+          <a:effectRef idx="0">
+            <a:schemeClr val="accent1"/>
+          </a:effectRef>
+          <a:fontRef idx="minor">
+            <a:schemeClr val="lt1"/>
+          </a:fontRef>
+        </p:style>
+        <p:txBody>
+          <a:bodyPr rtlCol="0" anchor="ctr"/>
+          <a:lstStyle/>
+          <a:p>
+            <a:pPr algn="ctr"/>
+            <a:endParaRPr lang="ru-RU"/>
+          </a:p>
+        </p:txBody>
+      </p:sp>
+      <p:sp>
+        <p:nvSpPr>
+          <p:cNvPr id="32" name="Скругленный прямоугольник 31"/>
+          <p:cNvSpPr/>
+          <p:nvPr/>
+        </p:nvSpPr>
+        <p:spPr>
+          <a:xfrm>
+            <a:off x="10080916" y="5389418"/>
+            <a:ext cx="4461164" cy="2493818"/>
+          </a:xfrm>
+          <a:prstGeom prst="roundRect">
+            <a:avLst/>
+          </a:prstGeom>
+          <a:noFill/>
+          <a:ln w="57150">
+            <a:solidFill>
+              <a:srgbClr val="FFBD4C"/>
+            </a:solidFill>
+          </a:ln>
+        </p:spPr>
+        <p:style>
+          <a:lnRef idx="2">
+            <a:schemeClr val="accent1">
+              <a:shade val="50000"/>
+            </a:schemeClr>
+          </a:lnRef>
+          <a:fillRef idx="1">
+            <a:schemeClr val="accent1"/>
+          </a:fillRef>
+          <a:effectRef idx="0">
+            <a:schemeClr val="accent1"/>
+          </a:effectRef>
+          <a:fontRef idx="minor">
+            <a:schemeClr val="lt1"/>
+          </a:fontRef>
+        </p:style>
+        <p:txBody>
+          <a:bodyPr rtlCol="0" anchor="ctr"/>
+          <a:lstStyle/>
+          <a:p>
+            <a:pPr algn="ctr"/>
+            <a:endParaRPr lang="ru-RU"/>
+          </a:p>
+        </p:txBody>
+      </p:sp>
+      <p:sp>
+        <p:nvSpPr>
+          <p:cNvPr id="33" name="TextBox 32"/>
+          <p:cNvSpPr txBox="1"/>
+          <p:nvPr/>
+        </p:nvSpPr>
+        <p:spPr>
+          <a:xfrm>
+            <a:off x="4031673" y="5682917"/>
+            <a:ext cx="3574472" cy="1077218"/>
+          </a:xfrm>
+          <a:prstGeom prst="rect">
+            <a:avLst/>
+          </a:prstGeom>
+          <a:noFill/>
+        </p:spPr>
+        <p:txBody>
+          <a:bodyPr wrap="square" rtlCol="0">
+            <a:spAutoFit/>
+          </a:bodyPr>
+          <a:lstStyle/>
+          <a:p>
+            <a:pPr algn="ctr"/>
+            <a:r>
+              <a:rPr lang="ru-RU" sz="3200" dirty="0" smtClean="0">
+                <a:solidFill>
+                  <a:schemeClr val="bg1"/>
+                </a:solidFill>
+                <a:latin typeface="Arial Black" panose="020B0A04020102020204" pitchFamily="34" charset="0"/>
+              </a:rPr>
+              <a:t>Вывод текста об ошибке</a:t>
+            </a:r>
+            <a:endParaRPr lang="ru-RU" sz="3200" dirty="0">
+              <a:solidFill>
+                <a:schemeClr val="bg1"/>
+              </a:solidFill>
+              <a:latin typeface="Arial Black" panose="020B0A04020102020204" pitchFamily="34" charset="0"/>
+            </a:endParaRPr>
+          </a:p>
+        </p:txBody>
+      </p:sp>
+      <p:sp>
+        <p:nvSpPr>
+          <p:cNvPr id="34" name="TextBox 33"/>
+          <p:cNvSpPr txBox="1"/>
+          <p:nvPr/>
+        </p:nvSpPr>
+        <p:spPr>
+          <a:xfrm>
+            <a:off x="10539333" y="5682917"/>
+            <a:ext cx="3574472" cy="1077218"/>
+          </a:xfrm>
+          <a:prstGeom prst="rect">
+            <a:avLst/>
+          </a:prstGeom>
+          <a:noFill/>
+        </p:spPr>
+        <p:txBody>
+          <a:bodyPr wrap="square" rtlCol="0">
+            <a:spAutoFit/>
+          </a:bodyPr>
+          <a:lstStyle/>
+          <a:p>
+            <a:pPr algn="ctr"/>
+            <a:r>
+              <a:rPr lang="ru-RU" sz="3200" dirty="0" smtClean="0">
+                <a:solidFill>
+                  <a:schemeClr val="bg1"/>
+                </a:solidFill>
+                <a:latin typeface="Arial Black" panose="020B0A04020102020204" pitchFamily="34" charset="0"/>
+              </a:rPr>
+              <a:t>Кнопки управления</a:t>
+            </a:r>
+            <a:endParaRPr lang="ru-RU" sz="3200" dirty="0">
+              <a:solidFill>
+                <a:schemeClr val="bg1"/>
+              </a:solidFill>
+              <a:latin typeface="Arial Black" panose="020B0A04020102020204" pitchFamily="34" charset="0"/>
+            </a:endParaRPr>
+          </a:p>
+        </p:txBody>
+      </p:sp>
+    </p:spTree>
+    <p:extLst>
+      <p:ext uri="{BB962C8B-B14F-4D97-AF65-F5344CB8AC3E}">
+        <p14:creationId xmlns:p14="http://schemas.microsoft.com/office/powerpoint/2010/main" val="3727154863"/>
+      </p:ext>
+    </p:extLst>
+  </p:cSld>
+  <p:clrMapOvr>
+    <a:masterClrMapping/>
+  </p:clrMapOvr>
+  <p:timing>
+    <p:tnLst>
+      <p:par>
+        <p:cTn id="1" dur="indefinite" restart="never" nodeType="tmRoot"/>
+      </p:par>
+    </p:tnLst>
+  </p:timing>
+</p:sld>
+</file>
+
+<file path=ppt/slides/slide4.xml><?xml version="1.0" encoding="utf-8"?>
+<p:sld xmlns:a="http://schemas.openxmlformats.org/drawingml/2006/main" xmlns:r="http://schemas.openxmlformats.org/officeDocument/2006/relationships" xmlns:p="http://schemas.openxmlformats.org/presentationml/2006/main">
+  <p:cSld>
+    <p:bg>
+      <p:bgPr>
+        <a:solidFill>
+          <a:srgbClr val="0C0F27"/>
+        </a:solidFill>
+        <a:effectLst/>
+      </p:bgPr>
+    </p:bg>
+    <p:spTree>
+      <p:nvGrpSpPr>
+        <p:cNvPr id="1" name="Shape 302"/>
+        <p:cNvGrpSpPr/>
+        <p:nvPr/>
+      </p:nvGrpSpPr>
+      <p:grpSpPr>
+        <a:xfrm>
+          <a:off x="0" y="0"/>
+          <a:ext cx="0" cy="0"/>
+          <a:chOff x="0" y="0"/>
+          <a:chExt cx="0" cy="0"/>
+        </a:xfrm>
+      </p:grpSpPr>
+      <p:grpSp>
+        <p:nvGrpSpPr>
+          <p:cNvPr id="303" name="Google Shape;303;p13"/>
+          <p:cNvGrpSpPr/>
+          <p:nvPr/>
+        </p:nvGrpSpPr>
+        <p:grpSpPr>
+          <a:xfrm>
+            <a:off x="581891" y="1551710"/>
+            <a:ext cx="16677409" cy="6101128"/>
+            <a:chOff x="0" y="-38100"/>
+            <a:chExt cx="3606159" cy="1582034"/>
+          </a:xfrm>
+        </p:grpSpPr>
+        <p:sp>
+          <p:nvSpPr>
+            <p:cNvPr id="304" name="Google Shape;304;p13"/>
+            <p:cNvSpPr/>
+            <p:nvPr/>
+          </p:nvSpPr>
+          <p:spPr>
+            <a:xfrm>
+              <a:off x="0" y="0"/>
+              <a:ext cx="3606159" cy="1543934"/>
+            </a:xfrm>
+            <a:custGeom>
+              <a:avLst/>
+              <a:gdLst/>
+              <a:ahLst/>
+              <a:cxnLst/>
+              <a:rect l="l" t="t" r="r" b="b"/>
+              <a:pathLst>
+                <a:path w="3606159" h="1543934" extrusionOk="0">
+                  <a:moveTo>
+                    <a:pt x="14390" y="0"/>
+                  </a:moveTo>
+                  <a:lnTo>
+                    <a:pt x="3591770" y="0"/>
+                  </a:lnTo>
+                  <a:cubicBezTo>
+                    <a:pt x="3599717" y="0"/>
+                    <a:pt x="3606159" y="6442"/>
+                    <a:pt x="3606159" y="14390"/>
+                  </a:cubicBezTo>
+                  <a:lnTo>
+                    <a:pt x="3606159" y="1529544"/>
+                  </a:lnTo>
+                  <a:cubicBezTo>
+                    <a:pt x="3606159" y="1533360"/>
+                    <a:pt x="3604643" y="1537021"/>
+                    <a:pt x="3601945" y="1539719"/>
+                  </a:cubicBezTo>
+                  <a:cubicBezTo>
+                    <a:pt x="3599246" y="1542418"/>
+                    <a:pt x="3595586" y="1543934"/>
+                    <a:pt x="3591770" y="1543934"/>
+                  </a:cubicBezTo>
+                  <a:lnTo>
+                    <a:pt x="14390" y="1543934"/>
+                  </a:lnTo>
+                  <a:cubicBezTo>
+                    <a:pt x="10573" y="1543934"/>
+                    <a:pt x="6913" y="1542418"/>
+                    <a:pt x="4215" y="1539719"/>
+                  </a:cubicBezTo>
+                  <a:cubicBezTo>
+                    <a:pt x="1516" y="1537021"/>
+                    <a:pt x="0" y="1533360"/>
+                    <a:pt x="0" y="1529544"/>
+                  </a:cubicBezTo>
+                  <a:lnTo>
+                    <a:pt x="0" y="14390"/>
+                  </a:lnTo>
+                  <a:cubicBezTo>
+                    <a:pt x="0" y="10573"/>
+                    <a:pt x="1516" y="6913"/>
+                    <a:pt x="4215" y="4215"/>
+                  </a:cubicBezTo>
+                  <a:cubicBezTo>
+                    <a:pt x="6913" y="1516"/>
+                    <a:pt x="10573" y="0"/>
+                    <a:pt x="14390" y="0"/>
+                  </a:cubicBezTo>
+                  <a:close/>
+                </a:path>
+              </a:pathLst>
+            </a:custGeom>
+            <a:solidFill>
+              <a:srgbClr val="000000">
+                <a:alpha val="0"/>
+              </a:srgbClr>
+            </a:solidFill>
+            <a:ln w="38100" cap="sq" cmpd="sng">
+              <a:solidFill>
+                <a:srgbClr val="FFBD4C"/>
+              </a:solidFill>
+              <a:prstDash val="solid"/>
+              <a:miter lim="8000"/>
+              <a:headEnd type="none" w="sm" len="sm"/>
+              <a:tailEnd type="none" w="sm" len="sm"/>
+            </a:ln>
+          </p:spPr>
+          <p:txBody>
+            <a:bodyPr spcFirstLastPara="1" wrap="square" lIns="91425" tIns="91425" rIns="91425" bIns="91425" anchor="ctr" anchorCtr="0">
+              <a:noAutofit/>
+            </a:bodyPr>
+            <a:lstStyle/>
+            <a:p>
+              <a:pPr marL="0" lvl="0" indent="0" algn="l" rtl="0">
+                <a:spcBef>
+                  <a:spcPts val="0"/>
+                </a:spcBef>
+                <a:spcAft>
+                  <a:spcPts val="0"/>
+                </a:spcAft>
+                <a:buNone/>
+              </a:pPr>
+              <a:endParaRPr/>
+            </a:p>
+          </p:txBody>
+        </p:sp>
+        <p:sp>
+          <p:nvSpPr>
+            <p:cNvPr id="305" name="Google Shape;305;p13"/>
+            <p:cNvSpPr txBox="1"/>
+            <p:nvPr/>
+          </p:nvSpPr>
+          <p:spPr>
+            <a:xfrm>
+              <a:off x="0" y="-38100"/>
+              <a:ext cx="3606159" cy="1582034"/>
+            </a:xfrm>
+            <a:prstGeom prst="rect">
+              <a:avLst/>
+            </a:prstGeom>
+            <a:noFill/>
+            <a:ln>
+              <a:noFill/>
+            </a:ln>
+          </p:spPr>
+          <p:txBody>
+            <a:bodyPr spcFirstLastPara="1" wrap="square" lIns="50800" tIns="50800" rIns="50800" bIns="50800" anchor="ctr" anchorCtr="0">
+              <a:noAutofit/>
+            </a:bodyPr>
+            <a:lstStyle/>
+            <a:p>
+              <a:pPr marL="0" marR="0" lvl="0" indent="0" algn="ctr" rtl="0">
+                <a:lnSpc>
+                  <a:spcPct val="186611"/>
+                </a:lnSpc>
+                <a:spcBef>
+                  <a:spcPts val="0"/>
+                </a:spcBef>
+                <a:spcAft>
+                  <a:spcPts val="0"/>
+                </a:spcAft>
+                <a:buNone/>
+              </a:pPr>
+              <a:endParaRPr sz="1800" b="0" i="0" u="none" strike="noStrike" cap="none">
+                <a:solidFill>
+                  <a:schemeClr val="dk1"/>
+                </a:solidFill>
+                <a:latin typeface="Calibri"/>
+                <a:ea typeface="Calibri"/>
+                <a:cs typeface="Calibri"/>
+                <a:sym typeface="Calibri"/>
+              </a:endParaRPr>
+            </a:p>
+          </p:txBody>
+        </p:sp>
+      </p:grpSp>
+      <p:pic>
+        <p:nvPicPr>
+          <p:cNvPr id="307" name="Google Shape;307;p13"/>
+          <p:cNvPicPr preferRelativeResize="0"/>
+          <p:nvPr/>
+        </p:nvPicPr>
+        <p:blipFill>
+          <a:blip r:embed="rId3">
+            <a:alphaModFix/>
+          </a:blip>
+          <a:stretch>
+            <a:fillRect/>
+          </a:stretch>
+        </p:blipFill>
+        <p:spPr>
+          <a:xfrm>
+            <a:off x="15328799" y="6229971"/>
+            <a:ext cx="998450" cy="964818"/>
+          </a:xfrm>
+          <a:prstGeom prst="rect">
+            <a:avLst/>
+          </a:prstGeom>
+          <a:noFill/>
+          <a:ln>
+            <a:noFill/>
+          </a:ln>
+        </p:spPr>
+      </p:pic>
+      <p:sp>
+        <p:nvSpPr>
+          <p:cNvPr id="321" name="Google Shape;321;p13"/>
+          <p:cNvSpPr txBox="1"/>
+          <p:nvPr/>
+        </p:nvSpPr>
+        <p:spPr>
+          <a:xfrm>
+            <a:off x="5988896" y="114300"/>
+            <a:ext cx="6303424" cy="1107996"/>
+          </a:xfrm>
+          <a:prstGeom prst="rect">
+            <a:avLst/>
+          </a:prstGeom>
+          <a:noFill/>
+          <a:ln>
+            <a:noFill/>
+          </a:ln>
+        </p:spPr>
+        <p:txBody>
+          <a:bodyPr spcFirstLastPara="1" wrap="square" lIns="0" tIns="0" rIns="0" bIns="0" anchor="t" anchorCtr="0">
+            <a:spAutoFit/>
+          </a:bodyPr>
+          <a:lstStyle/>
+          <a:p>
+            <a:pPr marL="0" marR="0" lvl="0" indent="0" algn="ctr" rtl="0">
+              <a:lnSpc>
+                <a:spcPct val="120000"/>
+              </a:lnSpc>
+              <a:spcBef>
+                <a:spcPts val="0"/>
+              </a:spcBef>
+              <a:spcAft>
+                <a:spcPts val="0"/>
+              </a:spcAft>
+              <a:buNone/>
+            </a:pPr>
+            <a:r>
+              <a:rPr lang="ru-RU" sz="6000" b="0" i="0" u="none" strike="noStrike" cap="none" dirty="0" smtClean="0">
+                <a:solidFill>
+                  <a:srgbClr val="FFBD4C"/>
+                </a:solidFill>
+                <a:latin typeface="Arial Black" panose="020B0A04020102020204" pitchFamily="34" charset="0"/>
+                <a:ea typeface="Montserrat"/>
+                <a:cs typeface="Montserrat"/>
+                <a:sym typeface="Montserrat"/>
+              </a:rPr>
+              <a:t>Суть проверки</a:t>
+            </a:r>
+            <a:endParaRPr sz="6000" dirty="0">
+              <a:latin typeface="Arial Black" panose="020B0A04020102020204" pitchFamily="34" charset="0"/>
+            </a:endParaRPr>
+          </a:p>
+        </p:txBody>
+      </p:sp>
+      <p:sp>
+        <p:nvSpPr>
+          <p:cNvPr id="322" name="Google Shape;322;p13"/>
+          <p:cNvSpPr txBox="1"/>
+          <p:nvPr/>
+        </p:nvSpPr>
+        <p:spPr>
+          <a:xfrm>
+            <a:off x="901833" y="1911066"/>
+            <a:ext cx="13769117" cy="4001095"/>
+          </a:xfrm>
+          <a:prstGeom prst="rect">
+            <a:avLst/>
+          </a:prstGeom>
+          <a:noFill/>
+          <a:ln>
+            <a:noFill/>
+          </a:ln>
+        </p:spPr>
+        <p:txBody>
+          <a:bodyPr spcFirstLastPara="1" wrap="square" lIns="0" tIns="0" rIns="0" bIns="0" anchor="t" anchorCtr="0">
+            <a:spAutoFit/>
+          </a:bodyPr>
+          <a:lstStyle/>
+          <a:p>
+            <a:pPr marL="0" marR="0" lvl="0" indent="0" rtl="0">
+              <a:lnSpc>
+                <a:spcPct val="130000"/>
+              </a:lnSpc>
+              <a:spcBef>
+                <a:spcPts val="0"/>
+              </a:spcBef>
+              <a:spcAft>
+                <a:spcPts val="0"/>
+              </a:spcAft>
+              <a:buNone/>
+            </a:pPr>
+            <a:r>
+              <a:rPr lang="ru-RU" sz="4000" dirty="0" smtClean="0">
+                <a:solidFill>
+                  <a:srgbClr val="FFBD4C"/>
+                </a:solidFill>
+                <a:latin typeface="Arial Black" panose="020B0A04020102020204" pitchFamily="34" charset="0"/>
+              </a:rPr>
+              <a:t>1.Корректное шифрование английского текста</a:t>
+            </a:r>
+          </a:p>
+          <a:p>
+            <a:pPr marL="0" marR="0" lvl="0" indent="0" rtl="0">
+              <a:lnSpc>
+                <a:spcPct val="130000"/>
+              </a:lnSpc>
+              <a:spcBef>
+                <a:spcPts val="0"/>
+              </a:spcBef>
+              <a:spcAft>
+                <a:spcPts val="0"/>
+              </a:spcAft>
+              <a:buNone/>
+            </a:pPr>
+            <a:r>
+              <a:rPr lang="ru-RU" sz="4000" dirty="0" smtClean="0">
+                <a:solidFill>
+                  <a:srgbClr val="FFBD4C"/>
+                </a:solidFill>
+                <a:latin typeface="Arial Black" panose="020B0A04020102020204" pitchFamily="34" charset="0"/>
+              </a:rPr>
+              <a:t>2.Корректное шифрование русского текста</a:t>
+            </a:r>
+          </a:p>
+          <a:p>
+            <a:pPr marL="0" marR="0" lvl="0" indent="0" rtl="0">
+              <a:lnSpc>
+                <a:spcPct val="130000"/>
+              </a:lnSpc>
+              <a:spcBef>
+                <a:spcPts val="0"/>
+              </a:spcBef>
+              <a:spcAft>
+                <a:spcPts val="0"/>
+              </a:spcAft>
+              <a:buNone/>
+            </a:pPr>
+            <a:r>
+              <a:rPr lang="ru-RU" sz="4000" dirty="0" smtClean="0">
+                <a:solidFill>
+                  <a:srgbClr val="FFBD4C"/>
+                </a:solidFill>
+                <a:latin typeface="Arial Black" panose="020B0A04020102020204" pitchFamily="34" charset="0"/>
+              </a:rPr>
+              <a:t>3.Корректная расшифровка</a:t>
+            </a:r>
+          </a:p>
+          <a:p>
+            <a:pPr marL="0" marR="0" lvl="0" indent="0" rtl="0">
+              <a:lnSpc>
+                <a:spcPct val="130000"/>
+              </a:lnSpc>
+              <a:spcBef>
+                <a:spcPts val="0"/>
+              </a:spcBef>
+              <a:spcAft>
+                <a:spcPts val="0"/>
+              </a:spcAft>
+              <a:buNone/>
+            </a:pPr>
+            <a:r>
+              <a:rPr lang="ru-RU" sz="4000" dirty="0">
+                <a:solidFill>
+                  <a:srgbClr val="FFBD4C"/>
+                </a:solidFill>
+                <a:latin typeface="Arial Black" panose="020B0A04020102020204" pitchFamily="34" charset="0"/>
+              </a:rPr>
+              <a:t>4</a:t>
+            </a:r>
+            <a:r>
+              <a:rPr lang="ru-RU" sz="4000" dirty="0" smtClean="0">
+                <a:solidFill>
+                  <a:srgbClr val="FFBD4C"/>
+                </a:solidFill>
+                <a:latin typeface="Arial Black" panose="020B0A04020102020204" pitchFamily="34" charset="0"/>
+              </a:rPr>
+              <a:t>.Обработка ошибок при вводе неправильного ключа</a:t>
+            </a:r>
+            <a:endParaRPr sz="4000" dirty="0">
+              <a:solidFill>
+                <a:srgbClr val="FFBD4C"/>
+              </a:solidFill>
+              <a:latin typeface="Arial Black" panose="020B0A04020102020204" pitchFamily="34" charset="0"/>
+            </a:endParaRPr>
+          </a:p>
+        </p:txBody>
+      </p:sp>
+      <p:grpSp>
+        <p:nvGrpSpPr>
+          <p:cNvPr id="323" name="Google Shape;323;p13"/>
+          <p:cNvGrpSpPr/>
+          <p:nvPr/>
+        </p:nvGrpSpPr>
+        <p:grpSpPr>
+          <a:xfrm>
+            <a:off x="13473339" y="9749180"/>
+            <a:ext cx="2137482" cy="475324"/>
+            <a:chOff x="30956" y="22212"/>
+            <a:chExt cx="2849976" cy="633766"/>
+          </a:xfrm>
+        </p:grpSpPr>
+        <p:cxnSp>
+          <p:nvCxnSpPr>
+            <p:cNvPr id="324" name="Google Shape;324;p13"/>
+            <p:cNvCxnSpPr/>
+            <p:nvPr/>
+          </p:nvCxnSpPr>
+          <p:spPr>
+            <a:xfrm rot="10800000" flipH="1">
+              <a:off x="30956" y="22212"/>
+              <a:ext cx="454750" cy="633766"/>
+            </a:xfrm>
+            <a:prstGeom prst="straightConnector1">
+              <a:avLst/>
+            </a:prstGeom>
+            <a:noFill/>
+            <a:ln w="76200" cap="flat" cmpd="sng">
+              <a:solidFill>
+                <a:srgbClr val="FFBD4C"/>
+              </a:solidFill>
+              <a:prstDash val="solid"/>
+              <a:round/>
+              <a:headEnd type="none" w="sm" len="sm"/>
+              <a:tailEnd type="none" w="sm" len="sm"/>
+            </a:ln>
+          </p:spPr>
+        </p:cxnSp>
+        <p:cxnSp>
+          <p:nvCxnSpPr>
+            <p:cNvPr id="325" name="Google Shape;325;p13"/>
+            <p:cNvCxnSpPr/>
+            <p:nvPr/>
+          </p:nvCxnSpPr>
+          <p:spPr>
+            <a:xfrm rot="10800000" flipH="1">
+              <a:off x="430160" y="22212"/>
+              <a:ext cx="454750" cy="633766"/>
+            </a:xfrm>
+            <a:prstGeom prst="straightConnector1">
+              <a:avLst/>
+            </a:prstGeom>
+            <a:noFill/>
+            <a:ln w="76200" cap="flat" cmpd="sng">
+              <a:solidFill>
+                <a:srgbClr val="FFBD4C"/>
+              </a:solidFill>
+              <a:prstDash val="solid"/>
+              <a:round/>
+              <a:headEnd type="none" w="sm" len="sm"/>
+              <a:tailEnd type="none" w="sm" len="sm"/>
+            </a:ln>
+          </p:spPr>
+        </p:cxnSp>
+        <p:cxnSp>
+          <p:nvCxnSpPr>
+            <p:cNvPr id="326" name="Google Shape;326;p13"/>
+            <p:cNvCxnSpPr/>
+            <p:nvPr/>
+          </p:nvCxnSpPr>
+          <p:spPr>
+            <a:xfrm rot="10800000" flipH="1">
+              <a:off x="829364" y="22212"/>
+              <a:ext cx="454750" cy="633766"/>
+            </a:xfrm>
+            <a:prstGeom prst="straightConnector1">
+              <a:avLst/>
+            </a:prstGeom>
+            <a:noFill/>
+            <a:ln w="76200" cap="flat" cmpd="sng">
+              <a:solidFill>
+                <a:srgbClr val="FFBD4C"/>
+              </a:solidFill>
+              <a:prstDash val="solid"/>
+              <a:round/>
+              <a:headEnd type="none" w="sm" len="sm"/>
+              <a:tailEnd type="none" w="sm" len="sm"/>
+            </a:ln>
+          </p:spPr>
+        </p:cxnSp>
+        <p:cxnSp>
+          <p:nvCxnSpPr>
+            <p:cNvPr id="327" name="Google Shape;327;p13"/>
+            <p:cNvCxnSpPr/>
+            <p:nvPr/>
+          </p:nvCxnSpPr>
+          <p:spPr>
+            <a:xfrm rot="10800000" flipH="1">
+              <a:off x="1228569" y="22212"/>
+              <a:ext cx="454750" cy="633766"/>
+            </a:xfrm>
+            <a:prstGeom prst="straightConnector1">
+              <a:avLst/>
+            </a:prstGeom>
+            <a:noFill/>
+            <a:ln w="76200" cap="flat" cmpd="sng">
+              <a:solidFill>
+                <a:srgbClr val="FFBD4C"/>
+              </a:solidFill>
+              <a:prstDash val="solid"/>
+              <a:round/>
+              <a:headEnd type="none" w="sm" len="sm"/>
+              <a:tailEnd type="none" w="sm" len="sm"/>
+            </a:ln>
+          </p:spPr>
+        </p:cxnSp>
+        <p:cxnSp>
+          <p:nvCxnSpPr>
+            <p:cNvPr id="328" name="Google Shape;328;p13"/>
+            <p:cNvCxnSpPr/>
+            <p:nvPr/>
+          </p:nvCxnSpPr>
+          <p:spPr>
+            <a:xfrm rot="10800000" flipH="1">
+              <a:off x="1627773" y="22212"/>
+              <a:ext cx="454750" cy="633766"/>
+            </a:xfrm>
+            <a:prstGeom prst="straightConnector1">
+              <a:avLst/>
+            </a:prstGeom>
+            <a:noFill/>
+            <a:ln w="76200" cap="flat" cmpd="sng">
+              <a:solidFill>
+                <a:srgbClr val="FFBD4C"/>
+              </a:solidFill>
+              <a:prstDash val="solid"/>
+              <a:round/>
+              <a:headEnd type="none" w="sm" len="sm"/>
+              <a:tailEnd type="none" w="sm" len="sm"/>
+            </a:ln>
+          </p:spPr>
+        </p:cxnSp>
+        <p:cxnSp>
+          <p:nvCxnSpPr>
+            <p:cNvPr id="329" name="Google Shape;329;p13"/>
+            <p:cNvCxnSpPr/>
+            <p:nvPr/>
+          </p:nvCxnSpPr>
+          <p:spPr>
+            <a:xfrm rot="10800000" flipH="1">
+              <a:off x="2026977" y="22212"/>
+              <a:ext cx="454750" cy="633766"/>
+            </a:xfrm>
+            <a:prstGeom prst="straightConnector1">
+              <a:avLst/>
+            </a:prstGeom>
+            <a:noFill/>
+            <a:ln w="76200" cap="flat" cmpd="sng">
+              <a:solidFill>
+                <a:srgbClr val="FFBD4C"/>
+              </a:solidFill>
+              <a:prstDash val="solid"/>
+              <a:round/>
+              <a:headEnd type="none" w="sm" len="sm"/>
+              <a:tailEnd type="none" w="sm" len="sm"/>
+            </a:ln>
+          </p:spPr>
+        </p:cxnSp>
+        <p:cxnSp>
+          <p:nvCxnSpPr>
+            <p:cNvPr id="330" name="Google Shape;330;p13"/>
+            <p:cNvCxnSpPr/>
+            <p:nvPr/>
+          </p:nvCxnSpPr>
+          <p:spPr>
+            <a:xfrm rot="10800000" flipH="1">
+              <a:off x="2426182" y="22212"/>
+              <a:ext cx="454750" cy="633766"/>
+            </a:xfrm>
+            <a:prstGeom prst="straightConnector1">
+              <a:avLst/>
+            </a:prstGeom>
+            <a:noFill/>
+            <a:ln w="76200" cap="flat" cmpd="sng">
+              <a:solidFill>
+                <a:srgbClr val="FFBD4C"/>
+              </a:solidFill>
+              <a:prstDash val="solid"/>
+              <a:round/>
+              <a:headEnd type="none" w="sm" len="sm"/>
+              <a:tailEnd type="none" w="sm" len="sm"/>
+            </a:ln>
+          </p:spPr>
+        </p:cxnSp>
+      </p:grpSp>
+      <p:grpSp>
+        <p:nvGrpSpPr>
+          <p:cNvPr id="331" name="Google Shape;331;p13"/>
+          <p:cNvGrpSpPr/>
+          <p:nvPr/>
+        </p:nvGrpSpPr>
+        <p:grpSpPr>
+          <a:xfrm>
+            <a:off x="15590579" y="9749180"/>
+            <a:ext cx="2137482" cy="475324"/>
+            <a:chOff x="30956" y="22212"/>
+            <a:chExt cx="2849976" cy="633766"/>
+          </a:xfrm>
+        </p:grpSpPr>
+        <p:cxnSp>
+          <p:nvCxnSpPr>
+            <p:cNvPr id="332" name="Google Shape;332;p13"/>
+            <p:cNvCxnSpPr/>
+            <p:nvPr/>
+          </p:nvCxnSpPr>
+          <p:spPr>
+            <a:xfrm rot="10800000" flipH="1">
+              <a:off x="30956" y="22212"/>
+              <a:ext cx="454750" cy="633766"/>
+            </a:xfrm>
+            <a:prstGeom prst="straightConnector1">
+              <a:avLst/>
+            </a:prstGeom>
+            <a:noFill/>
+            <a:ln w="76200" cap="flat" cmpd="sng">
+              <a:solidFill>
+                <a:srgbClr val="FFBD4C"/>
+              </a:solidFill>
+              <a:prstDash val="solid"/>
+              <a:round/>
+              <a:headEnd type="none" w="sm" len="sm"/>
+              <a:tailEnd type="none" w="sm" len="sm"/>
+            </a:ln>
+          </p:spPr>
+        </p:cxnSp>
+        <p:cxnSp>
+          <p:nvCxnSpPr>
+            <p:cNvPr id="333" name="Google Shape;333;p13"/>
+            <p:cNvCxnSpPr/>
+            <p:nvPr/>
+          </p:nvCxnSpPr>
+          <p:spPr>
+            <a:xfrm rot="10800000" flipH="1">
+              <a:off x="430160" y="22212"/>
+              <a:ext cx="454750" cy="633766"/>
+            </a:xfrm>
+            <a:prstGeom prst="straightConnector1">
+              <a:avLst/>
+            </a:prstGeom>
+            <a:noFill/>
+            <a:ln w="76200" cap="flat" cmpd="sng">
+              <a:solidFill>
+                <a:srgbClr val="FFBD4C"/>
+              </a:solidFill>
+              <a:prstDash val="solid"/>
+              <a:round/>
+              <a:headEnd type="none" w="sm" len="sm"/>
+              <a:tailEnd type="none" w="sm" len="sm"/>
+            </a:ln>
+          </p:spPr>
+        </p:cxnSp>
+        <p:cxnSp>
+          <p:nvCxnSpPr>
+            <p:cNvPr id="334" name="Google Shape;334;p13"/>
+            <p:cNvCxnSpPr/>
+            <p:nvPr/>
+          </p:nvCxnSpPr>
+          <p:spPr>
+            <a:xfrm rot="10800000" flipH="1">
+              <a:off x="829364" y="22212"/>
+              <a:ext cx="454750" cy="633766"/>
+            </a:xfrm>
+            <a:prstGeom prst="straightConnector1">
+              <a:avLst/>
+            </a:prstGeom>
+            <a:noFill/>
+            <a:ln w="76200" cap="flat" cmpd="sng">
+              <a:solidFill>
+                <a:srgbClr val="FFBD4C"/>
+              </a:solidFill>
+              <a:prstDash val="solid"/>
+              <a:round/>
+              <a:headEnd type="none" w="sm" len="sm"/>
+              <a:tailEnd type="none" w="sm" len="sm"/>
+            </a:ln>
+          </p:spPr>
+        </p:cxnSp>
+        <p:cxnSp>
+          <p:nvCxnSpPr>
+            <p:cNvPr id="335" name="Google Shape;335;p13"/>
+            <p:cNvCxnSpPr/>
+            <p:nvPr/>
+          </p:nvCxnSpPr>
+          <p:spPr>
+            <a:xfrm rot="10800000" flipH="1">
+              <a:off x="1228569" y="22212"/>
+              <a:ext cx="454750" cy="633766"/>
+            </a:xfrm>
+            <a:prstGeom prst="straightConnector1">
+              <a:avLst/>
+            </a:prstGeom>
+            <a:noFill/>
+            <a:ln w="76200" cap="flat" cmpd="sng">
+              <a:solidFill>
+                <a:srgbClr val="FFBD4C"/>
+              </a:solidFill>
+              <a:prstDash val="solid"/>
+              <a:round/>
+              <a:headEnd type="none" w="sm" len="sm"/>
+              <a:tailEnd type="none" w="sm" len="sm"/>
+            </a:ln>
+          </p:spPr>
+        </p:cxnSp>
+        <p:cxnSp>
+          <p:nvCxnSpPr>
+            <p:cNvPr id="336" name="Google Shape;336;p13"/>
+            <p:cNvCxnSpPr/>
+            <p:nvPr/>
+          </p:nvCxnSpPr>
+          <p:spPr>
+            <a:xfrm rot="10800000" flipH="1">
+              <a:off x="1627773" y="22212"/>
+              <a:ext cx="454750" cy="633766"/>
+            </a:xfrm>
+            <a:prstGeom prst="straightConnector1">
+              <a:avLst/>
+            </a:prstGeom>
+            <a:noFill/>
+            <a:ln w="76200" cap="flat" cmpd="sng">
+              <a:solidFill>
+                <a:srgbClr val="FFBD4C"/>
+              </a:solidFill>
+              <a:prstDash val="solid"/>
+              <a:round/>
+              <a:headEnd type="none" w="sm" len="sm"/>
+              <a:tailEnd type="none" w="sm" len="sm"/>
+            </a:ln>
+          </p:spPr>
+        </p:cxnSp>
+        <p:cxnSp>
+          <p:nvCxnSpPr>
+            <p:cNvPr id="337" name="Google Shape;337;p13"/>
+            <p:cNvCxnSpPr/>
+            <p:nvPr/>
+          </p:nvCxnSpPr>
+          <p:spPr>
+            <a:xfrm rot="10800000" flipH="1">
+              <a:off x="2026977" y="22212"/>
+              <a:ext cx="454750" cy="633766"/>
+            </a:xfrm>
+            <a:prstGeom prst="straightConnector1">
+              <a:avLst/>
+            </a:prstGeom>
+            <a:noFill/>
+            <a:ln w="76200" cap="flat" cmpd="sng">
+              <a:solidFill>
+                <a:srgbClr val="FFBD4C"/>
+              </a:solidFill>
+              <a:prstDash val="solid"/>
+              <a:round/>
+              <a:headEnd type="none" w="sm" len="sm"/>
+              <a:tailEnd type="none" w="sm" len="sm"/>
+            </a:ln>
+          </p:spPr>
+        </p:cxnSp>
+        <p:cxnSp>
+          <p:nvCxnSpPr>
+            <p:cNvPr id="338" name="Google Shape;338;p13"/>
+            <p:cNvCxnSpPr/>
+            <p:nvPr/>
+          </p:nvCxnSpPr>
+          <p:spPr>
+            <a:xfrm rot="10800000" flipH="1">
+              <a:off x="2426182" y="22212"/>
+              <a:ext cx="454750" cy="633766"/>
+            </a:xfrm>
+            <a:prstGeom prst="straightConnector1">
+              <a:avLst/>
+            </a:prstGeom>
+            <a:noFill/>
+            <a:ln w="76200" cap="flat" cmpd="sng">
+              <a:solidFill>
+                <a:srgbClr val="FFBD4C"/>
+              </a:solidFill>
+              <a:prstDash val="solid"/>
+              <a:round/>
+              <a:headEnd type="none" w="sm" len="sm"/>
+              <a:tailEnd type="none" w="sm" len="sm"/>
+            </a:ln>
+          </p:spPr>
+        </p:cxnSp>
+      </p:grpSp>
+    </p:spTree>
+    <p:extLst>
+      <p:ext uri="{BB962C8B-B14F-4D97-AF65-F5344CB8AC3E}">
+        <p14:creationId xmlns:p14="http://schemas.microsoft.com/office/powerpoint/2010/main" val="4198887569"/>
+      </p:ext>
+    </p:extLst>
+  </p:cSld>
+  <p:clrMapOvr>
+    <a:masterClrMapping/>
+  </p:clrMapOvr>
+  <p:timing>
+    <p:tnLst>
+      <p:par>
+        <p:cTn id="1" dur="indefinite" restart="never" nodeType="tmRoot"/>
+      </p:par>
+    </p:tnLst>
+  </p:timing>
+</p:sld>
+</file>
+
+<file path=ppt/slides/slide5.xml><?xml version="1.0" encoding="utf-8"?>
 <p:sld xmlns:a="http://schemas.openxmlformats.org/drawingml/2006/main" xmlns:r="http://schemas.openxmlformats.org/officeDocument/2006/relationships" xmlns:p="http://schemas.openxmlformats.org/presentationml/2006/main">
   <p:cSld>
     <p:bg>
@@ -14763,821 +18705,7 @@
 </p:sld>
 </file>
 
-<file path=ppt/slides/slide3.xml><?xml version="1.0" encoding="utf-8"?>
-<p:sld xmlns:a="http://schemas.openxmlformats.org/drawingml/2006/main" xmlns:r="http://schemas.openxmlformats.org/officeDocument/2006/relationships" xmlns:p="http://schemas.openxmlformats.org/presentationml/2006/main">
-  <p:cSld>
-    <p:bg>
-      <p:bgPr>
-        <a:solidFill>
-          <a:srgbClr val="0C0F27"/>
-        </a:solidFill>
-        <a:effectLst/>
-      </p:bgPr>
-    </p:bg>
-    <p:spTree>
-      <p:nvGrpSpPr>
-        <p:cNvPr id="1" name="Shape 302"/>
-        <p:cNvGrpSpPr/>
-        <p:nvPr/>
-      </p:nvGrpSpPr>
-      <p:grpSpPr>
-        <a:xfrm>
-          <a:off x="0" y="0"/>
-          <a:ext cx="0" cy="0"/>
-          <a:chOff x="0" y="0"/>
-          <a:chExt cx="0" cy="0"/>
-        </a:xfrm>
-      </p:grpSpPr>
-      <p:grpSp>
-        <p:nvGrpSpPr>
-          <p:cNvPr id="303" name="Google Shape;303;p13"/>
-          <p:cNvGrpSpPr/>
-          <p:nvPr/>
-        </p:nvGrpSpPr>
-        <p:grpSpPr>
-          <a:xfrm>
-            <a:off x="581891" y="1551710"/>
-            <a:ext cx="16677409" cy="6101128"/>
-            <a:chOff x="0" y="-38100"/>
-            <a:chExt cx="3606159" cy="1582034"/>
-          </a:xfrm>
-        </p:grpSpPr>
-        <p:sp>
-          <p:nvSpPr>
-            <p:cNvPr id="304" name="Google Shape;304;p13"/>
-            <p:cNvSpPr/>
-            <p:nvPr/>
-          </p:nvSpPr>
-          <p:spPr>
-            <a:xfrm>
-              <a:off x="0" y="0"/>
-              <a:ext cx="3606159" cy="1543934"/>
-            </a:xfrm>
-            <a:custGeom>
-              <a:avLst/>
-              <a:gdLst/>
-              <a:ahLst/>
-              <a:cxnLst/>
-              <a:rect l="l" t="t" r="r" b="b"/>
-              <a:pathLst>
-                <a:path w="3606159" h="1543934" extrusionOk="0">
-                  <a:moveTo>
-                    <a:pt x="14390" y="0"/>
-                  </a:moveTo>
-                  <a:lnTo>
-                    <a:pt x="3591770" y="0"/>
-                  </a:lnTo>
-                  <a:cubicBezTo>
-                    <a:pt x="3599717" y="0"/>
-                    <a:pt x="3606159" y="6442"/>
-                    <a:pt x="3606159" y="14390"/>
-                  </a:cubicBezTo>
-                  <a:lnTo>
-                    <a:pt x="3606159" y="1529544"/>
-                  </a:lnTo>
-                  <a:cubicBezTo>
-                    <a:pt x="3606159" y="1533360"/>
-                    <a:pt x="3604643" y="1537021"/>
-                    <a:pt x="3601945" y="1539719"/>
-                  </a:cubicBezTo>
-                  <a:cubicBezTo>
-                    <a:pt x="3599246" y="1542418"/>
-                    <a:pt x="3595586" y="1543934"/>
-                    <a:pt x="3591770" y="1543934"/>
-                  </a:cubicBezTo>
-                  <a:lnTo>
-                    <a:pt x="14390" y="1543934"/>
-                  </a:lnTo>
-                  <a:cubicBezTo>
-                    <a:pt x="10573" y="1543934"/>
-                    <a:pt x="6913" y="1542418"/>
-                    <a:pt x="4215" y="1539719"/>
-                  </a:cubicBezTo>
-                  <a:cubicBezTo>
-                    <a:pt x="1516" y="1537021"/>
-                    <a:pt x="0" y="1533360"/>
-                    <a:pt x="0" y="1529544"/>
-                  </a:cubicBezTo>
-                  <a:lnTo>
-                    <a:pt x="0" y="14390"/>
-                  </a:lnTo>
-                  <a:cubicBezTo>
-                    <a:pt x="0" y="10573"/>
-                    <a:pt x="1516" y="6913"/>
-                    <a:pt x="4215" y="4215"/>
-                  </a:cubicBezTo>
-                  <a:cubicBezTo>
-                    <a:pt x="6913" y="1516"/>
-                    <a:pt x="10573" y="0"/>
-                    <a:pt x="14390" y="0"/>
-                  </a:cubicBezTo>
-                  <a:close/>
-                </a:path>
-              </a:pathLst>
-            </a:custGeom>
-            <a:solidFill>
-              <a:srgbClr val="000000">
-                <a:alpha val="0"/>
-              </a:srgbClr>
-            </a:solidFill>
-            <a:ln w="38100" cap="sq" cmpd="sng">
-              <a:solidFill>
-                <a:srgbClr val="FFBD4C"/>
-              </a:solidFill>
-              <a:prstDash val="solid"/>
-              <a:miter lim="8000"/>
-              <a:headEnd type="none" w="sm" len="sm"/>
-              <a:tailEnd type="none" w="sm" len="sm"/>
-            </a:ln>
-          </p:spPr>
-          <p:txBody>
-            <a:bodyPr spcFirstLastPara="1" wrap="square" lIns="91425" tIns="91425" rIns="91425" bIns="91425" anchor="ctr" anchorCtr="0">
-              <a:noAutofit/>
-            </a:bodyPr>
-            <a:lstStyle/>
-            <a:p>
-              <a:pPr marL="0" lvl="0" indent="0" algn="l" rtl="0">
-                <a:spcBef>
-                  <a:spcPts val="0"/>
-                </a:spcBef>
-                <a:spcAft>
-                  <a:spcPts val="0"/>
-                </a:spcAft>
-                <a:buNone/>
-              </a:pPr>
-              <a:endParaRPr/>
-            </a:p>
-          </p:txBody>
-        </p:sp>
-        <p:sp>
-          <p:nvSpPr>
-            <p:cNvPr id="305" name="Google Shape;305;p13"/>
-            <p:cNvSpPr txBox="1"/>
-            <p:nvPr/>
-          </p:nvSpPr>
-          <p:spPr>
-            <a:xfrm>
-              <a:off x="0" y="-38100"/>
-              <a:ext cx="3606159" cy="1582034"/>
-            </a:xfrm>
-            <a:prstGeom prst="rect">
-              <a:avLst/>
-            </a:prstGeom>
-            <a:noFill/>
-            <a:ln>
-              <a:noFill/>
-            </a:ln>
-          </p:spPr>
-          <p:txBody>
-            <a:bodyPr spcFirstLastPara="1" wrap="square" lIns="50800" tIns="50800" rIns="50800" bIns="50800" anchor="ctr" anchorCtr="0">
-              <a:noAutofit/>
-            </a:bodyPr>
-            <a:lstStyle/>
-            <a:p>
-              <a:pPr marL="0" marR="0" lvl="0" indent="0" algn="ctr" rtl="0">
-                <a:lnSpc>
-                  <a:spcPct val="186611"/>
-                </a:lnSpc>
-                <a:spcBef>
-                  <a:spcPts val="0"/>
-                </a:spcBef>
-                <a:spcAft>
-                  <a:spcPts val="0"/>
-                </a:spcAft>
-                <a:buNone/>
-              </a:pPr>
-              <a:endParaRPr sz="1800" b="0" i="0" u="none" strike="noStrike" cap="none">
-                <a:solidFill>
-                  <a:schemeClr val="dk1"/>
-                </a:solidFill>
-                <a:latin typeface="Calibri"/>
-                <a:ea typeface="Calibri"/>
-                <a:cs typeface="Calibri"/>
-                <a:sym typeface="Calibri"/>
-              </a:endParaRPr>
-            </a:p>
-          </p:txBody>
-        </p:sp>
-      </p:grpSp>
-      <p:pic>
-        <p:nvPicPr>
-          <p:cNvPr id="307" name="Google Shape;307;p13"/>
-          <p:cNvPicPr preferRelativeResize="0"/>
-          <p:nvPr/>
-        </p:nvPicPr>
-        <p:blipFill>
-          <a:blip r:embed="rId3">
-            <a:alphaModFix/>
-          </a:blip>
-          <a:stretch>
-            <a:fillRect/>
-          </a:stretch>
-        </p:blipFill>
-        <p:spPr>
-          <a:xfrm>
-            <a:off x="15328799" y="6229971"/>
-            <a:ext cx="998450" cy="964818"/>
-          </a:xfrm>
-          <a:prstGeom prst="rect">
-            <a:avLst/>
-          </a:prstGeom>
-          <a:noFill/>
-          <a:ln>
-            <a:noFill/>
-          </a:ln>
-        </p:spPr>
-      </p:pic>
-      <p:sp>
-        <p:nvSpPr>
-          <p:cNvPr id="321" name="Google Shape;321;p13"/>
-          <p:cNvSpPr txBox="1"/>
-          <p:nvPr/>
-        </p:nvSpPr>
-        <p:spPr>
-          <a:xfrm>
-            <a:off x="5988896" y="114300"/>
-            <a:ext cx="6303424" cy="1107996"/>
-          </a:xfrm>
-          <a:prstGeom prst="rect">
-            <a:avLst/>
-          </a:prstGeom>
-          <a:noFill/>
-          <a:ln>
-            <a:noFill/>
-          </a:ln>
-        </p:spPr>
-        <p:txBody>
-          <a:bodyPr spcFirstLastPara="1" wrap="square" lIns="0" tIns="0" rIns="0" bIns="0" anchor="t" anchorCtr="0">
-            <a:spAutoFit/>
-          </a:bodyPr>
-          <a:lstStyle/>
-          <a:p>
-            <a:pPr marL="0" marR="0" lvl="0" indent="0" algn="ctr" rtl="0">
-              <a:lnSpc>
-                <a:spcPct val="120000"/>
-              </a:lnSpc>
-              <a:spcBef>
-                <a:spcPts val="0"/>
-              </a:spcBef>
-              <a:spcAft>
-                <a:spcPts val="0"/>
-              </a:spcAft>
-              <a:buNone/>
-            </a:pPr>
-            <a:r>
-              <a:rPr lang="ru-RU" sz="6000" b="0" i="0" u="none" strike="noStrike" cap="none" dirty="0" smtClean="0">
-                <a:solidFill>
-                  <a:srgbClr val="FFBD4C"/>
-                </a:solidFill>
-                <a:latin typeface="Arial Black" panose="020B0A04020102020204" pitchFamily="34" charset="0"/>
-                <a:ea typeface="Montserrat"/>
-                <a:cs typeface="Montserrat"/>
-                <a:sym typeface="Montserrat"/>
-              </a:rPr>
-              <a:t>Суть проверки</a:t>
-            </a:r>
-            <a:endParaRPr sz="6000" dirty="0">
-              <a:latin typeface="Arial Black" panose="020B0A04020102020204" pitchFamily="34" charset="0"/>
-            </a:endParaRPr>
-          </a:p>
-        </p:txBody>
-      </p:sp>
-      <p:sp>
-        <p:nvSpPr>
-          <p:cNvPr id="322" name="Google Shape;322;p13"/>
-          <p:cNvSpPr txBox="1"/>
-          <p:nvPr/>
-        </p:nvSpPr>
-        <p:spPr>
-          <a:xfrm>
-            <a:off x="901833" y="1911066"/>
-            <a:ext cx="13769117" cy="4001095"/>
-          </a:xfrm>
-          <a:prstGeom prst="rect">
-            <a:avLst/>
-          </a:prstGeom>
-          <a:noFill/>
-          <a:ln>
-            <a:noFill/>
-          </a:ln>
-        </p:spPr>
-        <p:txBody>
-          <a:bodyPr spcFirstLastPara="1" wrap="square" lIns="0" tIns="0" rIns="0" bIns="0" anchor="t" anchorCtr="0">
-            <a:spAutoFit/>
-          </a:bodyPr>
-          <a:lstStyle/>
-          <a:p>
-            <a:pPr marL="0" marR="0" lvl="0" indent="0" rtl="0">
-              <a:lnSpc>
-                <a:spcPct val="130000"/>
-              </a:lnSpc>
-              <a:spcBef>
-                <a:spcPts val="0"/>
-              </a:spcBef>
-              <a:spcAft>
-                <a:spcPts val="0"/>
-              </a:spcAft>
-              <a:buNone/>
-            </a:pPr>
-            <a:r>
-              <a:rPr lang="ru-RU" sz="4000" dirty="0" smtClean="0">
-                <a:solidFill>
-                  <a:srgbClr val="FFBD4C"/>
-                </a:solidFill>
-                <a:latin typeface="Arial Black" panose="020B0A04020102020204" pitchFamily="34" charset="0"/>
-              </a:rPr>
-              <a:t>1.Корректное шифрование английского текста</a:t>
-            </a:r>
-          </a:p>
-          <a:p>
-            <a:pPr marL="0" marR="0" lvl="0" indent="0" rtl="0">
-              <a:lnSpc>
-                <a:spcPct val="130000"/>
-              </a:lnSpc>
-              <a:spcBef>
-                <a:spcPts val="0"/>
-              </a:spcBef>
-              <a:spcAft>
-                <a:spcPts val="0"/>
-              </a:spcAft>
-              <a:buNone/>
-            </a:pPr>
-            <a:r>
-              <a:rPr lang="ru-RU" sz="4000" dirty="0" smtClean="0">
-                <a:solidFill>
-                  <a:srgbClr val="FFBD4C"/>
-                </a:solidFill>
-                <a:latin typeface="Arial Black" panose="020B0A04020102020204" pitchFamily="34" charset="0"/>
-              </a:rPr>
-              <a:t>2.Корректное шифрование русского текста</a:t>
-            </a:r>
-          </a:p>
-          <a:p>
-            <a:pPr marL="0" marR="0" lvl="0" indent="0" rtl="0">
-              <a:lnSpc>
-                <a:spcPct val="130000"/>
-              </a:lnSpc>
-              <a:spcBef>
-                <a:spcPts val="0"/>
-              </a:spcBef>
-              <a:spcAft>
-                <a:spcPts val="0"/>
-              </a:spcAft>
-              <a:buNone/>
-            </a:pPr>
-            <a:r>
-              <a:rPr lang="ru-RU" sz="4000" dirty="0" smtClean="0">
-                <a:solidFill>
-                  <a:srgbClr val="FFBD4C"/>
-                </a:solidFill>
-                <a:latin typeface="Arial Black" panose="020B0A04020102020204" pitchFamily="34" charset="0"/>
-              </a:rPr>
-              <a:t>3.Корректная расшифровка</a:t>
-            </a:r>
-          </a:p>
-          <a:p>
-            <a:pPr marL="0" marR="0" lvl="0" indent="0" rtl="0">
-              <a:lnSpc>
-                <a:spcPct val="130000"/>
-              </a:lnSpc>
-              <a:spcBef>
-                <a:spcPts val="0"/>
-              </a:spcBef>
-              <a:spcAft>
-                <a:spcPts val="0"/>
-              </a:spcAft>
-              <a:buNone/>
-            </a:pPr>
-            <a:r>
-              <a:rPr lang="ru-RU" sz="4000" dirty="0">
-                <a:solidFill>
-                  <a:srgbClr val="FFBD4C"/>
-                </a:solidFill>
-                <a:latin typeface="Arial Black" panose="020B0A04020102020204" pitchFamily="34" charset="0"/>
-              </a:rPr>
-              <a:t>4</a:t>
-            </a:r>
-            <a:r>
-              <a:rPr lang="ru-RU" sz="4000" dirty="0" smtClean="0">
-                <a:solidFill>
-                  <a:srgbClr val="FFBD4C"/>
-                </a:solidFill>
-                <a:latin typeface="Arial Black" panose="020B0A04020102020204" pitchFamily="34" charset="0"/>
-              </a:rPr>
-              <a:t>.Обработка ошибок при вводе неправильного ключа</a:t>
-            </a:r>
-            <a:endParaRPr sz="4000" dirty="0">
-              <a:solidFill>
-                <a:srgbClr val="FFBD4C"/>
-              </a:solidFill>
-              <a:latin typeface="Arial Black" panose="020B0A04020102020204" pitchFamily="34" charset="0"/>
-            </a:endParaRPr>
-          </a:p>
-        </p:txBody>
-      </p:sp>
-      <p:grpSp>
-        <p:nvGrpSpPr>
-          <p:cNvPr id="323" name="Google Shape;323;p13"/>
-          <p:cNvGrpSpPr/>
-          <p:nvPr/>
-        </p:nvGrpSpPr>
-        <p:grpSpPr>
-          <a:xfrm>
-            <a:off x="13473339" y="9749180"/>
-            <a:ext cx="2137482" cy="475324"/>
-            <a:chOff x="30956" y="22212"/>
-            <a:chExt cx="2849976" cy="633766"/>
-          </a:xfrm>
-        </p:grpSpPr>
-        <p:cxnSp>
-          <p:nvCxnSpPr>
-            <p:cNvPr id="324" name="Google Shape;324;p13"/>
-            <p:cNvCxnSpPr/>
-            <p:nvPr/>
-          </p:nvCxnSpPr>
-          <p:spPr>
-            <a:xfrm rot="10800000" flipH="1">
-              <a:off x="30956" y="22212"/>
-              <a:ext cx="454750" cy="633766"/>
-            </a:xfrm>
-            <a:prstGeom prst="straightConnector1">
-              <a:avLst/>
-            </a:prstGeom>
-            <a:noFill/>
-            <a:ln w="76200" cap="flat" cmpd="sng">
-              <a:solidFill>
-                <a:srgbClr val="FFBD4C"/>
-              </a:solidFill>
-              <a:prstDash val="solid"/>
-              <a:round/>
-              <a:headEnd type="none" w="sm" len="sm"/>
-              <a:tailEnd type="none" w="sm" len="sm"/>
-            </a:ln>
-          </p:spPr>
-        </p:cxnSp>
-        <p:cxnSp>
-          <p:nvCxnSpPr>
-            <p:cNvPr id="325" name="Google Shape;325;p13"/>
-            <p:cNvCxnSpPr/>
-            <p:nvPr/>
-          </p:nvCxnSpPr>
-          <p:spPr>
-            <a:xfrm rot="10800000" flipH="1">
-              <a:off x="430160" y="22212"/>
-              <a:ext cx="454750" cy="633766"/>
-            </a:xfrm>
-            <a:prstGeom prst="straightConnector1">
-              <a:avLst/>
-            </a:prstGeom>
-            <a:noFill/>
-            <a:ln w="76200" cap="flat" cmpd="sng">
-              <a:solidFill>
-                <a:srgbClr val="FFBD4C"/>
-              </a:solidFill>
-              <a:prstDash val="solid"/>
-              <a:round/>
-              <a:headEnd type="none" w="sm" len="sm"/>
-              <a:tailEnd type="none" w="sm" len="sm"/>
-            </a:ln>
-          </p:spPr>
-        </p:cxnSp>
-        <p:cxnSp>
-          <p:nvCxnSpPr>
-            <p:cNvPr id="326" name="Google Shape;326;p13"/>
-            <p:cNvCxnSpPr/>
-            <p:nvPr/>
-          </p:nvCxnSpPr>
-          <p:spPr>
-            <a:xfrm rot="10800000" flipH="1">
-              <a:off x="829364" y="22212"/>
-              <a:ext cx="454750" cy="633766"/>
-            </a:xfrm>
-            <a:prstGeom prst="straightConnector1">
-              <a:avLst/>
-            </a:prstGeom>
-            <a:noFill/>
-            <a:ln w="76200" cap="flat" cmpd="sng">
-              <a:solidFill>
-                <a:srgbClr val="FFBD4C"/>
-              </a:solidFill>
-              <a:prstDash val="solid"/>
-              <a:round/>
-              <a:headEnd type="none" w="sm" len="sm"/>
-              <a:tailEnd type="none" w="sm" len="sm"/>
-            </a:ln>
-          </p:spPr>
-        </p:cxnSp>
-        <p:cxnSp>
-          <p:nvCxnSpPr>
-            <p:cNvPr id="327" name="Google Shape;327;p13"/>
-            <p:cNvCxnSpPr/>
-            <p:nvPr/>
-          </p:nvCxnSpPr>
-          <p:spPr>
-            <a:xfrm rot="10800000" flipH="1">
-              <a:off x="1228569" y="22212"/>
-              <a:ext cx="454750" cy="633766"/>
-            </a:xfrm>
-            <a:prstGeom prst="straightConnector1">
-              <a:avLst/>
-            </a:prstGeom>
-            <a:noFill/>
-            <a:ln w="76200" cap="flat" cmpd="sng">
-              <a:solidFill>
-                <a:srgbClr val="FFBD4C"/>
-              </a:solidFill>
-              <a:prstDash val="solid"/>
-              <a:round/>
-              <a:headEnd type="none" w="sm" len="sm"/>
-              <a:tailEnd type="none" w="sm" len="sm"/>
-            </a:ln>
-          </p:spPr>
-        </p:cxnSp>
-        <p:cxnSp>
-          <p:nvCxnSpPr>
-            <p:cNvPr id="328" name="Google Shape;328;p13"/>
-            <p:cNvCxnSpPr/>
-            <p:nvPr/>
-          </p:nvCxnSpPr>
-          <p:spPr>
-            <a:xfrm rot="10800000" flipH="1">
-              <a:off x="1627773" y="22212"/>
-              <a:ext cx="454750" cy="633766"/>
-            </a:xfrm>
-            <a:prstGeom prst="straightConnector1">
-              <a:avLst/>
-            </a:prstGeom>
-            <a:noFill/>
-            <a:ln w="76200" cap="flat" cmpd="sng">
-              <a:solidFill>
-                <a:srgbClr val="FFBD4C"/>
-              </a:solidFill>
-              <a:prstDash val="solid"/>
-              <a:round/>
-              <a:headEnd type="none" w="sm" len="sm"/>
-              <a:tailEnd type="none" w="sm" len="sm"/>
-            </a:ln>
-          </p:spPr>
-        </p:cxnSp>
-        <p:cxnSp>
-          <p:nvCxnSpPr>
-            <p:cNvPr id="329" name="Google Shape;329;p13"/>
-            <p:cNvCxnSpPr/>
-            <p:nvPr/>
-          </p:nvCxnSpPr>
-          <p:spPr>
-            <a:xfrm rot="10800000" flipH="1">
-              <a:off x="2026977" y="22212"/>
-              <a:ext cx="454750" cy="633766"/>
-            </a:xfrm>
-            <a:prstGeom prst="straightConnector1">
-              <a:avLst/>
-            </a:prstGeom>
-            <a:noFill/>
-            <a:ln w="76200" cap="flat" cmpd="sng">
-              <a:solidFill>
-                <a:srgbClr val="FFBD4C"/>
-              </a:solidFill>
-              <a:prstDash val="solid"/>
-              <a:round/>
-              <a:headEnd type="none" w="sm" len="sm"/>
-              <a:tailEnd type="none" w="sm" len="sm"/>
-            </a:ln>
-          </p:spPr>
-        </p:cxnSp>
-        <p:cxnSp>
-          <p:nvCxnSpPr>
-            <p:cNvPr id="330" name="Google Shape;330;p13"/>
-            <p:cNvCxnSpPr/>
-            <p:nvPr/>
-          </p:nvCxnSpPr>
-          <p:spPr>
-            <a:xfrm rot="10800000" flipH="1">
-              <a:off x="2426182" y="22212"/>
-              <a:ext cx="454750" cy="633766"/>
-            </a:xfrm>
-            <a:prstGeom prst="straightConnector1">
-              <a:avLst/>
-            </a:prstGeom>
-            <a:noFill/>
-            <a:ln w="76200" cap="flat" cmpd="sng">
-              <a:solidFill>
-                <a:srgbClr val="FFBD4C"/>
-              </a:solidFill>
-              <a:prstDash val="solid"/>
-              <a:round/>
-              <a:headEnd type="none" w="sm" len="sm"/>
-              <a:tailEnd type="none" w="sm" len="sm"/>
-            </a:ln>
-          </p:spPr>
-        </p:cxnSp>
-      </p:grpSp>
-      <p:grpSp>
-        <p:nvGrpSpPr>
-          <p:cNvPr id="331" name="Google Shape;331;p13"/>
-          <p:cNvGrpSpPr/>
-          <p:nvPr/>
-        </p:nvGrpSpPr>
-        <p:grpSpPr>
-          <a:xfrm>
-            <a:off x="15590579" y="9749180"/>
-            <a:ext cx="2137482" cy="475324"/>
-            <a:chOff x="30956" y="22212"/>
-            <a:chExt cx="2849976" cy="633766"/>
-          </a:xfrm>
-        </p:grpSpPr>
-        <p:cxnSp>
-          <p:nvCxnSpPr>
-            <p:cNvPr id="332" name="Google Shape;332;p13"/>
-            <p:cNvCxnSpPr/>
-            <p:nvPr/>
-          </p:nvCxnSpPr>
-          <p:spPr>
-            <a:xfrm rot="10800000" flipH="1">
-              <a:off x="30956" y="22212"/>
-              <a:ext cx="454750" cy="633766"/>
-            </a:xfrm>
-            <a:prstGeom prst="straightConnector1">
-              <a:avLst/>
-            </a:prstGeom>
-            <a:noFill/>
-            <a:ln w="76200" cap="flat" cmpd="sng">
-              <a:solidFill>
-                <a:srgbClr val="FFBD4C"/>
-              </a:solidFill>
-              <a:prstDash val="solid"/>
-              <a:round/>
-              <a:headEnd type="none" w="sm" len="sm"/>
-              <a:tailEnd type="none" w="sm" len="sm"/>
-            </a:ln>
-          </p:spPr>
-        </p:cxnSp>
-        <p:cxnSp>
-          <p:nvCxnSpPr>
-            <p:cNvPr id="333" name="Google Shape;333;p13"/>
-            <p:cNvCxnSpPr/>
-            <p:nvPr/>
-          </p:nvCxnSpPr>
-          <p:spPr>
-            <a:xfrm rot="10800000" flipH="1">
-              <a:off x="430160" y="22212"/>
-              <a:ext cx="454750" cy="633766"/>
-            </a:xfrm>
-            <a:prstGeom prst="straightConnector1">
-              <a:avLst/>
-            </a:prstGeom>
-            <a:noFill/>
-            <a:ln w="76200" cap="flat" cmpd="sng">
-              <a:solidFill>
-                <a:srgbClr val="FFBD4C"/>
-              </a:solidFill>
-              <a:prstDash val="solid"/>
-              <a:round/>
-              <a:headEnd type="none" w="sm" len="sm"/>
-              <a:tailEnd type="none" w="sm" len="sm"/>
-            </a:ln>
-          </p:spPr>
-        </p:cxnSp>
-        <p:cxnSp>
-          <p:nvCxnSpPr>
-            <p:cNvPr id="334" name="Google Shape;334;p13"/>
-            <p:cNvCxnSpPr/>
-            <p:nvPr/>
-          </p:nvCxnSpPr>
-          <p:spPr>
-            <a:xfrm rot="10800000" flipH="1">
-              <a:off x="829364" y="22212"/>
-              <a:ext cx="454750" cy="633766"/>
-            </a:xfrm>
-            <a:prstGeom prst="straightConnector1">
-              <a:avLst/>
-            </a:prstGeom>
-            <a:noFill/>
-            <a:ln w="76200" cap="flat" cmpd="sng">
-              <a:solidFill>
-                <a:srgbClr val="FFBD4C"/>
-              </a:solidFill>
-              <a:prstDash val="solid"/>
-              <a:round/>
-              <a:headEnd type="none" w="sm" len="sm"/>
-              <a:tailEnd type="none" w="sm" len="sm"/>
-            </a:ln>
-          </p:spPr>
-        </p:cxnSp>
-        <p:cxnSp>
-          <p:nvCxnSpPr>
-            <p:cNvPr id="335" name="Google Shape;335;p13"/>
-            <p:cNvCxnSpPr/>
-            <p:nvPr/>
-          </p:nvCxnSpPr>
-          <p:spPr>
-            <a:xfrm rot="10800000" flipH="1">
-              <a:off x="1228569" y="22212"/>
-              <a:ext cx="454750" cy="633766"/>
-            </a:xfrm>
-            <a:prstGeom prst="straightConnector1">
-              <a:avLst/>
-            </a:prstGeom>
-            <a:noFill/>
-            <a:ln w="76200" cap="flat" cmpd="sng">
-              <a:solidFill>
-                <a:srgbClr val="FFBD4C"/>
-              </a:solidFill>
-              <a:prstDash val="solid"/>
-              <a:round/>
-              <a:headEnd type="none" w="sm" len="sm"/>
-              <a:tailEnd type="none" w="sm" len="sm"/>
-            </a:ln>
-          </p:spPr>
-        </p:cxnSp>
-        <p:cxnSp>
-          <p:nvCxnSpPr>
-            <p:cNvPr id="336" name="Google Shape;336;p13"/>
-            <p:cNvCxnSpPr/>
-            <p:nvPr/>
-          </p:nvCxnSpPr>
-          <p:spPr>
-            <a:xfrm rot="10800000" flipH="1">
-              <a:off x="1627773" y="22212"/>
-              <a:ext cx="454750" cy="633766"/>
-            </a:xfrm>
-            <a:prstGeom prst="straightConnector1">
-              <a:avLst/>
-            </a:prstGeom>
-            <a:noFill/>
-            <a:ln w="76200" cap="flat" cmpd="sng">
-              <a:solidFill>
-                <a:srgbClr val="FFBD4C"/>
-              </a:solidFill>
-              <a:prstDash val="solid"/>
-              <a:round/>
-              <a:headEnd type="none" w="sm" len="sm"/>
-              <a:tailEnd type="none" w="sm" len="sm"/>
-            </a:ln>
-          </p:spPr>
-        </p:cxnSp>
-        <p:cxnSp>
-          <p:nvCxnSpPr>
-            <p:cNvPr id="337" name="Google Shape;337;p13"/>
-            <p:cNvCxnSpPr/>
-            <p:nvPr/>
-          </p:nvCxnSpPr>
-          <p:spPr>
-            <a:xfrm rot="10800000" flipH="1">
-              <a:off x="2026977" y="22212"/>
-              <a:ext cx="454750" cy="633766"/>
-            </a:xfrm>
-            <a:prstGeom prst="straightConnector1">
-              <a:avLst/>
-            </a:prstGeom>
-            <a:noFill/>
-            <a:ln w="76200" cap="flat" cmpd="sng">
-              <a:solidFill>
-                <a:srgbClr val="FFBD4C"/>
-              </a:solidFill>
-              <a:prstDash val="solid"/>
-              <a:round/>
-              <a:headEnd type="none" w="sm" len="sm"/>
-              <a:tailEnd type="none" w="sm" len="sm"/>
-            </a:ln>
-          </p:spPr>
-        </p:cxnSp>
-        <p:cxnSp>
-          <p:nvCxnSpPr>
-            <p:cNvPr id="338" name="Google Shape;338;p13"/>
-            <p:cNvCxnSpPr/>
-            <p:nvPr/>
-          </p:nvCxnSpPr>
-          <p:spPr>
-            <a:xfrm rot="10800000" flipH="1">
-              <a:off x="2426182" y="22212"/>
-              <a:ext cx="454750" cy="633766"/>
-            </a:xfrm>
-            <a:prstGeom prst="straightConnector1">
-              <a:avLst/>
-            </a:prstGeom>
-            <a:noFill/>
-            <a:ln w="76200" cap="flat" cmpd="sng">
-              <a:solidFill>
-                <a:srgbClr val="FFBD4C"/>
-              </a:solidFill>
-              <a:prstDash val="solid"/>
-              <a:round/>
-              <a:headEnd type="none" w="sm" len="sm"/>
-              <a:tailEnd type="none" w="sm" len="sm"/>
-            </a:ln>
-          </p:spPr>
-        </p:cxnSp>
-      </p:grpSp>
-    </p:spTree>
-  </p:cSld>
-  <p:clrMapOvr>
-    <a:masterClrMapping/>
-  </p:clrMapOvr>
-</p:sld>
-</file>
-
-<file path=ppt/slides/slide4.xml><?xml version="1.0" encoding="utf-8"?>
+<file path=ppt/slides/slide6.xml><?xml version="1.0" encoding="utf-8"?>
 <p:sld xmlns:a="http://schemas.openxmlformats.org/drawingml/2006/main" xmlns:r="http://schemas.openxmlformats.org/officeDocument/2006/relationships" xmlns:p="http://schemas.openxmlformats.org/presentationml/2006/main">
   <p:cSld>
     <p:bg>
@@ -16268,7 +19396,7 @@
 </p:sld>
 </file>
 
-<file path=ppt/slides/slide5.xml><?xml version="1.0" encoding="utf-8"?>
+<file path=ppt/slides/slide7.xml><?xml version="1.0" encoding="utf-8"?>
 <p:sld xmlns:a="http://schemas.openxmlformats.org/drawingml/2006/main" xmlns:r="http://schemas.openxmlformats.org/officeDocument/2006/relationships" xmlns:p="http://schemas.openxmlformats.org/presentationml/2006/main">
   <p:cSld>
     <p:spTree>
@@ -16937,7 +20065,7 @@
 </p:sld>
 </file>
 
-<file path=ppt/slides/slide6.xml><?xml version="1.0" encoding="utf-8"?>
+<file path=ppt/slides/slide8.xml><?xml version="1.0" encoding="utf-8"?>
 <p:sld xmlns:a="http://schemas.openxmlformats.org/drawingml/2006/main" xmlns:r="http://schemas.openxmlformats.org/officeDocument/2006/relationships" xmlns:p="http://schemas.openxmlformats.org/presentationml/2006/main">
   <p:cSld>
     <p:spTree>
@@ -17617,7 +20745,7 @@
 </p:sld>
 </file>
 
-<file path=ppt/slides/slide7.xml><?xml version="1.0" encoding="utf-8"?>
+<file path=ppt/slides/slide9.xml><?xml version="1.0" encoding="utf-8"?>
 <p:sld xmlns:a="http://schemas.openxmlformats.org/drawingml/2006/main" xmlns:r="http://schemas.openxmlformats.org/officeDocument/2006/relationships" xmlns:p="http://schemas.openxmlformats.org/presentationml/2006/main">
   <p:cSld>
     <p:bg>
@@ -18424,1177 +21552,6 @@
 </p:sld>
 </file>
 
-<file path=ppt/slides/slide8.xml><?xml version="1.0" encoding="utf-8"?>
-<p:sld xmlns:a="http://schemas.openxmlformats.org/drawingml/2006/main" xmlns:r="http://schemas.openxmlformats.org/officeDocument/2006/relationships" xmlns:p="http://schemas.openxmlformats.org/presentationml/2006/main">
-  <p:cSld>
-    <p:bg>
-      <p:bgPr>
-        <a:solidFill>
-          <a:srgbClr val="0C0F27"/>
-        </a:solidFill>
-        <a:effectLst/>
-      </p:bgPr>
-    </p:bg>
-    <p:spTree>
-      <p:nvGrpSpPr>
-        <p:cNvPr id="1" name="Shape 411"/>
-        <p:cNvGrpSpPr/>
-        <p:nvPr/>
-      </p:nvGrpSpPr>
-      <p:grpSpPr>
-        <a:xfrm>
-          <a:off x="0" y="0"/>
-          <a:ext cx="0" cy="0"/>
-          <a:chOff x="0" y="0"/>
-          <a:chExt cx="0" cy="0"/>
-        </a:xfrm>
-      </p:grpSpPr>
-      <p:pic>
-        <p:nvPicPr>
-          <p:cNvPr id="412" name="Google Shape;412;p16"/>
-          <p:cNvPicPr preferRelativeResize="0"/>
-          <p:nvPr/>
-        </p:nvPicPr>
-        <p:blipFill>
-          <a:blip r:embed="rId3">
-            <a:alphaModFix/>
-          </a:blip>
-          <a:stretch>
-            <a:fillRect/>
-          </a:stretch>
-        </p:blipFill>
-        <p:spPr>
-          <a:xfrm>
-            <a:off x="16440289" y="-210900"/>
-            <a:ext cx="1409422" cy="1788875"/>
-          </a:xfrm>
-          <a:prstGeom prst="rect">
-            <a:avLst/>
-          </a:prstGeom>
-          <a:noFill/>
-          <a:ln>
-            <a:noFill/>
-          </a:ln>
-        </p:spPr>
-      </p:pic>
-      <p:grpSp>
-        <p:nvGrpSpPr>
-          <p:cNvPr id="423" name="Google Shape;423;p16"/>
-          <p:cNvGrpSpPr/>
-          <p:nvPr/>
-        </p:nvGrpSpPr>
-        <p:grpSpPr>
-          <a:xfrm>
-            <a:off x="1547796" y="1655458"/>
-            <a:ext cx="6620844" cy="6055982"/>
-            <a:chOff x="0" y="-38100"/>
-            <a:chExt cx="1453371" cy="1522554"/>
-          </a:xfrm>
-        </p:grpSpPr>
-        <p:sp>
-          <p:nvSpPr>
-            <p:cNvPr id="424" name="Google Shape;424;p16"/>
-            <p:cNvSpPr/>
-            <p:nvPr/>
-          </p:nvSpPr>
-          <p:spPr>
-            <a:xfrm>
-              <a:off x="0" y="0"/>
-              <a:ext cx="1453371" cy="1484454"/>
-            </a:xfrm>
-            <a:custGeom>
-              <a:avLst/>
-              <a:gdLst/>
-              <a:ahLst/>
-              <a:cxnLst/>
-              <a:rect l="l" t="t" r="r" b="b"/>
-              <a:pathLst>
-                <a:path w="1453371" h="1484454" extrusionOk="0">
-                  <a:moveTo>
-                    <a:pt x="35704" y="0"/>
-                  </a:moveTo>
-                  <a:lnTo>
-                    <a:pt x="1417667" y="0"/>
-                  </a:lnTo>
-                  <a:cubicBezTo>
-                    <a:pt x="1427137" y="0"/>
-                    <a:pt x="1436218" y="3762"/>
-                    <a:pt x="1442914" y="10457"/>
-                  </a:cubicBezTo>
-                  <a:cubicBezTo>
-                    <a:pt x="1449609" y="17153"/>
-                    <a:pt x="1453371" y="26235"/>
-                    <a:pt x="1453371" y="35704"/>
-                  </a:cubicBezTo>
-                  <a:lnTo>
-                    <a:pt x="1453371" y="1448750"/>
-                  </a:lnTo>
-                  <a:cubicBezTo>
-                    <a:pt x="1453371" y="1458219"/>
-                    <a:pt x="1449609" y="1467301"/>
-                    <a:pt x="1442914" y="1473997"/>
-                  </a:cubicBezTo>
-                  <a:cubicBezTo>
-                    <a:pt x="1436218" y="1480692"/>
-                    <a:pt x="1427137" y="1484454"/>
-                    <a:pt x="1417667" y="1484454"/>
-                  </a:cubicBezTo>
-                  <a:lnTo>
-                    <a:pt x="35704" y="1484454"/>
-                  </a:lnTo>
-                  <a:cubicBezTo>
-                    <a:pt x="26235" y="1484454"/>
-                    <a:pt x="17153" y="1480692"/>
-                    <a:pt x="10457" y="1473997"/>
-                  </a:cubicBezTo>
-                  <a:cubicBezTo>
-                    <a:pt x="3762" y="1467301"/>
-                    <a:pt x="0" y="1458219"/>
-                    <a:pt x="0" y="1448750"/>
-                  </a:cubicBezTo>
-                  <a:lnTo>
-                    <a:pt x="0" y="35704"/>
-                  </a:lnTo>
-                  <a:cubicBezTo>
-                    <a:pt x="0" y="26235"/>
-                    <a:pt x="3762" y="17153"/>
-                    <a:pt x="10457" y="10457"/>
-                  </a:cubicBezTo>
-                  <a:cubicBezTo>
-                    <a:pt x="17153" y="3762"/>
-                    <a:pt x="26235" y="0"/>
-                    <a:pt x="35704" y="0"/>
-                  </a:cubicBezTo>
-                  <a:close/>
-                </a:path>
-              </a:pathLst>
-            </a:custGeom>
-            <a:solidFill>
-              <a:srgbClr val="000000">
-                <a:alpha val="0"/>
-              </a:srgbClr>
-            </a:solidFill>
-            <a:ln w="38100" cap="sq" cmpd="sng">
-              <a:solidFill>
-                <a:srgbClr val="FFBD4C"/>
-              </a:solidFill>
-              <a:prstDash val="solid"/>
-              <a:miter lim="8000"/>
-              <a:headEnd type="none" w="sm" len="sm"/>
-              <a:tailEnd type="none" w="sm" len="sm"/>
-            </a:ln>
-          </p:spPr>
-          <p:txBody>
-            <a:bodyPr spcFirstLastPara="1" wrap="square" lIns="91425" tIns="91425" rIns="91425" bIns="91425" anchor="ctr" anchorCtr="0">
-              <a:noAutofit/>
-            </a:bodyPr>
-            <a:lstStyle/>
-            <a:p>
-              <a:pPr marL="0" lvl="0" indent="0" algn="l" rtl="0">
-                <a:spcBef>
-                  <a:spcPts val="0"/>
-                </a:spcBef>
-                <a:spcAft>
-                  <a:spcPts val="0"/>
-                </a:spcAft>
-                <a:buNone/>
-              </a:pPr>
-              <a:endParaRPr/>
-            </a:p>
-          </p:txBody>
-        </p:sp>
-        <p:sp>
-          <p:nvSpPr>
-            <p:cNvPr id="425" name="Google Shape;425;p16"/>
-            <p:cNvSpPr txBox="1"/>
-            <p:nvPr/>
-          </p:nvSpPr>
-          <p:spPr>
-            <a:xfrm>
-              <a:off x="0" y="-38100"/>
-              <a:ext cx="1453371" cy="1522554"/>
-            </a:xfrm>
-            <a:prstGeom prst="rect">
-              <a:avLst/>
-            </a:prstGeom>
-            <a:noFill/>
-            <a:ln>
-              <a:noFill/>
-            </a:ln>
-          </p:spPr>
-          <p:txBody>
-            <a:bodyPr spcFirstLastPara="1" wrap="square" lIns="50800" tIns="50800" rIns="50800" bIns="50800" anchor="ctr" anchorCtr="0">
-              <a:noAutofit/>
-            </a:bodyPr>
-            <a:lstStyle/>
-            <a:p>
-              <a:pPr marL="0" marR="0" lvl="0" indent="0" algn="ctr" rtl="0">
-                <a:lnSpc>
-                  <a:spcPct val="186611"/>
-                </a:lnSpc>
-                <a:spcBef>
-                  <a:spcPts val="0"/>
-                </a:spcBef>
-                <a:spcAft>
-                  <a:spcPts val="0"/>
-                </a:spcAft>
-                <a:buNone/>
-              </a:pPr>
-              <a:endParaRPr sz="1800" b="0" i="0" u="none" strike="noStrike" cap="none">
-                <a:solidFill>
-                  <a:schemeClr val="dk1"/>
-                </a:solidFill>
-                <a:latin typeface="Calibri"/>
-                <a:ea typeface="Calibri"/>
-                <a:cs typeface="Calibri"/>
-                <a:sym typeface="Calibri"/>
-              </a:endParaRPr>
-            </a:p>
-          </p:txBody>
-        </p:sp>
-      </p:grpSp>
-      <p:sp>
-        <p:nvSpPr>
-          <p:cNvPr id="426" name="Google Shape;426;p16"/>
-          <p:cNvSpPr txBox="1"/>
-          <p:nvPr/>
-        </p:nvSpPr>
-        <p:spPr>
-          <a:xfrm>
-            <a:off x="5718311" y="129540"/>
-            <a:ext cx="6425580" cy="1107996"/>
-          </a:xfrm>
-          <a:prstGeom prst="rect">
-            <a:avLst/>
-          </a:prstGeom>
-          <a:noFill/>
-          <a:ln>
-            <a:noFill/>
-          </a:ln>
-        </p:spPr>
-        <p:txBody>
-          <a:bodyPr spcFirstLastPara="1" wrap="square" lIns="0" tIns="0" rIns="0" bIns="0" anchor="t" anchorCtr="0">
-            <a:spAutoFit/>
-          </a:bodyPr>
-          <a:lstStyle/>
-          <a:p>
-            <a:pPr marL="0" marR="0" lvl="0" indent="0" algn="ctr" rtl="0">
-              <a:lnSpc>
-                <a:spcPct val="120000"/>
-              </a:lnSpc>
-              <a:spcBef>
-                <a:spcPts val="0"/>
-              </a:spcBef>
-              <a:spcAft>
-                <a:spcPts val="0"/>
-              </a:spcAft>
-              <a:buNone/>
-            </a:pPr>
-            <a:r>
-              <a:rPr lang="ru-RU" sz="6000" b="0" i="0" u="none" strike="noStrike" cap="none" dirty="0" smtClean="0">
-                <a:solidFill>
-                  <a:srgbClr val="FFBD4C"/>
-                </a:solidFill>
-                <a:latin typeface="Arial Black" panose="020B0A04020102020204" pitchFamily="34" charset="0"/>
-                <a:ea typeface="Montserrat"/>
-                <a:cs typeface="Montserrat"/>
-                <a:sym typeface="Montserrat"/>
-              </a:rPr>
-              <a:t>Заключение </a:t>
-            </a:r>
-            <a:endParaRPr sz="900" dirty="0">
-              <a:latin typeface="Arial Black" panose="020B0A04020102020204" pitchFamily="34" charset="0"/>
-            </a:endParaRPr>
-          </a:p>
-        </p:txBody>
-      </p:sp>
-      <p:sp>
-        <p:nvSpPr>
-          <p:cNvPr id="429" name="Google Shape;429;p16"/>
-          <p:cNvSpPr txBox="1"/>
-          <p:nvPr/>
-        </p:nvSpPr>
-        <p:spPr>
-          <a:xfrm>
-            <a:off x="1547796" y="1142204"/>
-            <a:ext cx="5129090" cy="664797"/>
-          </a:xfrm>
-          <a:prstGeom prst="rect">
-            <a:avLst/>
-          </a:prstGeom>
-          <a:noFill/>
-          <a:ln>
-            <a:noFill/>
-          </a:ln>
-        </p:spPr>
-        <p:txBody>
-          <a:bodyPr spcFirstLastPara="1" wrap="square" lIns="0" tIns="0" rIns="0" bIns="0" anchor="t" anchorCtr="0">
-            <a:spAutoFit/>
-          </a:bodyPr>
-          <a:lstStyle/>
-          <a:p>
-            <a:pPr marL="0" marR="0" lvl="0" indent="0" algn="ctr" rtl="0">
-              <a:lnSpc>
-                <a:spcPct val="120005"/>
-              </a:lnSpc>
-              <a:spcBef>
-                <a:spcPts val="0"/>
-              </a:spcBef>
-              <a:spcAft>
-                <a:spcPts val="0"/>
-              </a:spcAft>
-              <a:buNone/>
-            </a:pPr>
-            <a:r>
-              <a:rPr lang="ru-RU" sz="3600" b="1" i="0" u="none" strike="noStrike" cap="none" dirty="0" smtClean="0">
-                <a:solidFill>
-                  <a:srgbClr val="FFBD4C"/>
-                </a:solidFill>
-                <a:latin typeface="Arial Black" panose="020B0A04020102020204" pitchFamily="34" charset="0"/>
-                <a:ea typeface="Raleway"/>
-                <a:cs typeface="Raleway"/>
-                <a:sym typeface="Raleway"/>
-              </a:rPr>
-              <a:t>Что было сделано</a:t>
-            </a:r>
-            <a:r>
-              <a:rPr lang="en-US" sz="3600" b="1" i="0" u="none" strike="noStrike" cap="none" dirty="0" smtClean="0">
-                <a:solidFill>
-                  <a:srgbClr val="FFBD4C"/>
-                </a:solidFill>
-                <a:latin typeface="Arial Black" panose="020B0A04020102020204" pitchFamily="34" charset="0"/>
-                <a:ea typeface="Raleway"/>
-                <a:cs typeface="Raleway"/>
-                <a:sym typeface="Raleway"/>
-              </a:rPr>
-              <a:t>:</a:t>
-            </a:r>
-            <a:endParaRPr sz="1600" dirty="0">
-              <a:latin typeface="Arial Black" panose="020B0A04020102020204" pitchFamily="34" charset="0"/>
-            </a:endParaRPr>
-          </a:p>
-        </p:txBody>
-      </p:sp>
-      <p:sp>
-        <p:nvSpPr>
-          <p:cNvPr id="430" name="Google Shape;430;p16"/>
-          <p:cNvSpPr txBox="1"/>
-          <p:nvPr/>
-        </p:nvSpPr>
-        <p:spPr>
-          <a:xfrm>
-            <a:off x="1709603" y="2050786"/>
-            <a:ext cx="6586040" cy="5416868"/>
-          </a:xfrm>
-          <a:prstGeom prst="rect">
-            <a:avLst/>
-          </a:prstGeom>
-          <a:noFill/>
-          <a:ln>
-            <a:noFill/>
-          </a:ln>
-        </p:spPr>
-        <p:txBody>
-          <a:bodyPr spcFirstLastPara="1" wrap="square" lIns="0" tIns="0" rIns="0" bIns="0" anchor="t" anchorCtr="0">
-            <a:spAutoFit/>
-          </a:bodyPr>
-          <a:lstStyle/>
-          <a:p>
-            <a:pPr marL="0" marR="0" lvl="0" indent="0" rtl="0">
-              <a:lnSpc>
-                <a:spcPct val="100000"/>
-              </a:lnSpc>
-              <a:spcBef>
-                <a:spcPts val="0"/>
-              </a:spcBef>
-              <a:spcAft>
-                <a:spcPts val="0"/>
-              </a:spcAft>
-              <a:buNone/>
-            </a:pPr>
-            <a:r>
-              <a:rPr lang="en-US" sz="3200" dirty="0" smtClean="0">
-                <a:solidFill>
-                  <a:schemeClr val="bg1"/>
-                </a:solidFill>
-                <a:latin typeface="Arial Black" panose="020B0A04020102020204" pitchFamily="34" charset="0"/>
-              </a:rPr>
-              <a:t>-</a:t>
-            </a:r>
-            <a:r>
-              <a:rPr lang="ru-RU" sz="3200" dirty="0" smtClean="0">
-                <a:solidFill>
-                  <a:schemeClr val="bg1"/>
-                </a:solidFill>
-                <a:latin typeface="Arial Black" panose="020B0A04020102020204" pitchFamily="34" charset="0"/>
-              </a:rPr>
-              <a:t> Составлен сценарий использования веб-сайта</a:t>
-            </a:r>
-            <a:endParaRPr lang="en-US" sz="3200" dirty="0" smtClean="0">
-              <a:solidFill>
-                <a:schemeClr val="bg1"/>
-              </a:solidFill>
-              <a:latin typeface="Arial Black" panose="020B0A04020102020204" pitchFamily="34" charset="0"/>
-            </a:endParaRPr>
-          </a:p>
-          <a:p>
-            <a:pPr marL="0" marR="0" lvl="0" indent="0" rtl="0">
-              <a:lnSpc>
-                <a:spcPct val="100000"/>
-              </a:lnSpc>
-              <a:spcBef>
-                <a:spcPts val="0"/>
-              </a:spcBef>
-              <a:spcAft>
-                <a:spcPts val="0"/>
-              </a:spcAft>
-              <a:buNone/>
-            </a:pPr>
-            <a:endParaRPr lang="ru-RU" sz="3200" dirty="0" smtClean="0">
-              <a:solidFill>
-                <a:schemeClr val="bg1"/>
-              </a:solidFill>
-              <a:latin typeface="Arial Black" panose="020B0A04020102020204" pitchFamily="34" charset="0"/>
-            </a:endParaRPr>
-          </a:p>
-          <a:p>
-            <a:pPr marL="0" marR="0" lvl="0" indent="0" rtl="0">
-              <a:lnSpc>
-                <a:spcPct val="100000"/>
-              </a:lnSpc>
-              <a:spcBef>
-                <a:spcPts val="0"/>
-              </a:spcBef>
-              <a:spcAft>
-                <a:spcPts val="0"/>
-              </a:spcAft>
-              <a:buNone/>
-            </a:pPr>
-            <a:r>
-              <a:rPr lang="en-US" sz="3200" dirty="0" smtClean="0">
-                <a:solidFill>
-                  <a:schemeClr val="bg1"/>
-                </a:solidFill>
-                <a:latin typeface="Arial Black" panose="020B0A04020102020204" pitchFamily="34" charset="0"/>
-              </a:rPr>
-              <a:t>-</a:t>
-            </a:r>
-            <a:r>
-              <a:rPr lang="ru-RU" sz="3200" dirty="0" smtClean="0">
-                <a:solidFill>
-                  <a:schemeClr val="bg1"/>
-                </a:solidFill>
-                <a:latin typeface="Arial Black" panose="020B0A04020102020204" pitchFamily="34" charset="0"/>
-              </a:rPr>
-              <a:t> Было проверено что шифровка и дешифровка работают корректно</a:t>
-            </a:r>
-            <a:endParaRPr lang="en-US" sz="3200" dirty="0" smtClean="0">
-              <a:solidFill>
-                <a:schemeClr val="bg1"/>
-              </a:solidFill>
-              <a:latin typeface="Arial Black" panose="020B0A04020102020204" pitchFamily="34" charset="0"/>
-            </a:endParaRPr>
-          </a:p>
-          <a:p>
-            <a:pPr marL="0" marR="0" lvl="0" indent="0" rtl="0">
-              <a:lnSpc>
-                <a:spcPct val="100000"/>
-              </a:lnSpc>
-              <a:spcBef>
-                <a:spcPts val="0"/>
-              </a:spcBef>
-              <a:spcAft>
-                <a:spcPts val="0"/>
-              </a:spcAft>
-              <a:buNone/>
-            </a:pPr>
-            <a:endParaRPr lang="ru-RU" sz="3200" dirty="0" smtClean="0">
-              <a:solidFill>
-                <a:schemeClr val="bg1"/>
-              </a:solidFill>
-              <a:latin typeface="Arial Black" panose="020B0A04020102020204" pitchFamily="34" charset="0"/>
-            </a:endParaRPr>
-          </a:p>
-          <a:p>
-            <a:pPr marL="0" marR="0" lvl="0" indent="0" rtl="0">
-              <a:lnSpc>
-                <a:spcPct val="100000"/>
-              </a:lnSpc>
-              <a:spcBef>
-                <a:spcPts val="0"/>
-              </a:spcBef>
-              <a:spcAft>
-                <a:spcPts val="0"/>
-              </a:spcAft>
-              <a:buNone/>
-            </a:pPr>
-            <a:r>
-              <a:rPr lang="en-US" sz="3200" dirty="0" smtClean="0">
-                <a:solidFill>
-                  <a:schemeClr val="bg1"/>
-                </a:solidFill>
-                <a:latin typeface="Arial Black" panose="020B0A04020102020204" pitchFamily="34" charset="0"/>
-              </a:rPr>
-              <a:t>-</a:t>
-            </a:r>
-            <a:r>
-              <a:rPr lang="ru-RU" sz="3200" dirty="0" smtClean="0">
-                <a:solidFill>
-                  <a:schemeClr val="bg1"/>
-                </a:solidFill>
-                <a:latin typeface="Arial Black" panose="020B0A04020102020204" pitchFamily="34" charset="0"/>
-              </a:rPr>
-              <a:t> Была составлена таблица описания действий и ожидаемых результатов</a:t>
-            </a:r>
-          </a:p>
-          <a:p>
-            <a:pPr marL="0" marR="0" lvl="0" indent="0" algn="ctr" rtl="0">
-              <a:lnSpc>
-                <a:spcPct val="100000"/>
-              </a:lnSpc>
-              <a:spcBef>
-                <a:spcPts val="0"/>
-              </a:spcBef>
-              <a:spcAft>
-                <a:spcPts val="0"/>
-              </a:spcAft>
-              <a:buNone/>
-            </a:pPr>
-            <a:endParaRPr sz="3200" dirty="0">
-              <a:solidFill>
-                <a:schemeClr val="bg1"/>
-              </a:solidFill>
-            </a:endParaRPr>
-          </a:p>
-        </p:txBody>
-      </p:sp>
-      <p:grpSp>
-        <p:nvGrpSpPr>
-          <p:cNvPr id="444" name="Google Shape;444;p16"/>
-          <p:cNvGrpSpPr/>
-          <p:nvPr/>
-        </p:nvGrpSpPr>
-        <p:grpSpPr>
-          <a:xfrm rot="5400000">
-            <a:off x="-814419" y="2570986"/>
-            <a:ext cx="2137482" cy="475324"/>
-            <a:chOff x="30956" y="22212"/>
-            <a:chExt cx="2849976" cy="633766"/>
-          </a:xfrm>
-        </p:grpSpPr>
-        <p:cxnSp>
-          <p:nvCxnSpPr>
-            <p:cNvPr id="445" name="Google Shape;445;p16"/>
-            <p:cNvCxnSpPr/>
-            <p:nvPr/>
-          </p:nvCxnSpPr>
-          <p:spPr>
-            <a:xfrm rot="10800000" flipH="1">
-              <a:off x="30956" y="22212"/>
-              <a:ext cx="454750" cy="633766"/>
-            </a:xfrm>
-            <a:prstGeom prst="straightConnector1">
-              <a:avLst/>
-            </a:prstGeom>
-            <a:noFill/>
-            <a:ln w="76200" cap="flat" cmpd="sng">
-              <a:solidFill>
-                <a:srgbClr val="FFBD4C"/>
-              </a:solidFill>
-              <a:prstDash val="solid"/>
-              <a:round/>
-              <a:headEnd type="none" w="sm" len="sm"/>
-              <a:tailEnd type="none" w="sm" len="sm"/>
-            </a:ln>
-          </p:spPr>
-        </p:cxnSp>
-        <p:cxnSp>
-          <p:nvCxnSpPr>
-            <p:cNvPr id="446" name="Google Shape;446;p16"/>
-            <p:cNvCxnSpPr/>
-            <p:nvPr/>
-          </p:nvCxnSpPr>
-          <p:spPr>
-            <a:xfrm rot="10800000" flipH="1">
-              <a:off x="430160" y="22212"/>
-              <a:ext cx="454750" cy="633766"/>
-            </a:xfrm>
-            <a:prstGeom prst="straightConnector1">
-              <a:avLst/>
-            </a:prstGeom>
-            <a:noFill/>
-            <a:ln w="76200" cap="flat" cmpd="sng">
-              <a:solidFill>
-                <a:srgbClr val="FFBD4C"/>
-              </a:solidFill>
-              <a:prstDash val="solid"/>
-              <a:round/>
-              <a:headEnd type="none" w="sm" len="sm"/>
-              <a:tailEnd type="none" w="sm" len="sm"/>
-            </a:ln>
-          </p:spPr>
-        </p:cxnSp>
-        <p:cxnSp>
-          <p:nvCxnSpPr>
-            <p:cNvPr id="447" name="Google Shape;447;p16"/>
-            <p:cNvCxnSpPr/>
-            <p:nvPr/>
-          </p:nvCxnSpPr>
-          <p:spPr>
-            <a:xfrm rot="10800000" flipH="1">
-              <a:off x="829364" y="22212"/>
-              <a:ext cx="454750" cy="633766"/>
-            </a:xfrm>
-            <a:prstGeom prst="straightConnector1">
-              <a:avLst/>
-            </a:prstGeom>
-            <a:noFill/>
-            <a:ln w="76200" cap="flat" cmpd="sng">
-              <a:solidFill>
-                <a:srgbClr val="FFBD4C"/>
-              </a:solidFill>
-              <a:prstDash val="solid"/>
-              <a:round/>
-              <a:headEnd type="none" w="sm" len="sm"/>
-              <a:tailEnd type="none" w="sm" len="sm"/>
-            </a:ln>
-          </p:spPr>
-        </p:cxnSp>
-        <p:cxnSp>
-          <p:nvCxnSpPr>
-            <p:cNvPr id="448" name="Google Shape;448;p16"/>
-            <p:cNvCxnSpPr/>
-            <p:nvPr/>
-          </p:nvCxnSpPr>
-          <p:spPr>
-            <a:xfrm rot="10800000" flipH="1">
-              <a:off x="1228569" y="22212"/>
-              <a:ext cx="454750" cy="633766"/>
-            </a:xfrm>
-            <a:prstGeom prst="straightConnector1">
-              <a:avLst/>
-            </a:prstGeom>
-            <a:noFill/>
-            <a:ln w="76200" cap="flat" cmpd="sng">
-              <a:solidFill>
-                <a:srgbClr val="FFBD4C"/>
-              </a:solidFill>
-              <a:prstDash val="solid"/>
-              <a:round/>
-              <a:headEnd type="none" w="sm" len="sm"/>
-              <a:tailEnd type="none" w="sm" len="sm"/>
-            </a:ln>
-          </p:spPr>
-        </p:cxnSp>
-        <p:cxnSp>
-          <p:nvCxnSpPr>
-            <p:cNvPr id="449" name="Google Shape;449;p16"/>
-            <p:cNvCxnSpPr/>
-            <p:nvPr/>
-          </p:nvCxnSpPr>
-          <p:spPr>
-            <a:xfrm rot="10800000" flipH="1">
-              <a:off x="1627773" y="22212"/>
-              <a:ext cx="454750" cy="633766"/>
-            </a:xfrm>
-            <a:prstGeom prst="straightConnector1">
-              <a:avLst/>
-            </a:prstGeom>
-            <a:noFill/>
-            <a:ln w="76200" cap="flat" cmpd="sng">
-              <a:solidFill>
-                <a:srgbClr val="FFBD4C"/>
-              </a:solidFill>
-              <a:prstDash val="solid"/>
-              <a:round/>
-              <a:headEnd type="none" w="sm" len="sm"/>
-              <a:tailEnd type="none" w="sm" len="sm"/>
-            </a:ln>
-          </p:spPr>
-        </p:cxnSp>
-        <p:cxnSp>
-          <p:nvCxnSpPr>
-            <p:cNvPr id="450" name="Google Shape;450;p16"/>
-            <p:cNvCxnSpPr/>
-            <p:nvPr/>
-          </p:nvCxnSpPr>
-          <p:spPr>
-            <a:xfrm rot="10800000" flipH="1">
-              <a:off x="2026977" y="22212"/>
-              <a:ext cx="454750" cy="633766"/>
-            </a:xfrm>
-            <a:prstGeom prst="straightConnector1">
-              <a:avLst/>
-            </a:prstGeom>
-            <a:noFill/>
-            <a:ln w="76200" cap="flat" cmpd="sng">
-              <a:solidFill>
-                <a:srgbClr val="FFBD4C"/>
-              </a:solidFill>
-              <a:prstDash val="solid"/>
-              <a:round/>
-              <a:headEnd type="none" w="sm" len="sm"/>
-              <a:tailEnd type="none" w="sm" len="sm"/>
-            </a:ln>
-          </p:spPr>
-        </p:cxnSp>
-        <p:cxnSp>
-          <p:nvCxnSpPr>
-            <p:cNvPr id="451" name="Google Shape;451;p16"/>
-            <p:cNvCxnSpPr/>
-            <p:nvPr/>
-          </p:nvCxnSpPr>
-          <p:spPr>
-            <a:xfrm rot="10800000" flipH="1">
-              <a:off x="2426182" y="22212"/>
-              <a:ext cx="454750" cy="633766"/>
-            </a:xfrm>
-            <a:prstGeom prst="straightConnector1">
-              <a:avLst/>
-            </a:prstGeom>
-            <a:noFill/>
-            <a:ln w="76200" cap="flat" cmpd="sng">
-              <a:solidFill>
-                <a:srgbClr val="FFBD4C"/>
-              </a:solidFill>
-              <a:prstDash val="solid"/>
-              <a:round/>
-              <a:headEnd type="none" w="sm" len="sm"/>
-              <a:tailEnd type="none" w="sm" len="sm"/>
-            </a:ln>
-          </p:spPr>
-        </p:cxnSp>
-      </p:grpSp>
-      <p:sp>
-        <p:nvSpPr>
-          <p:cNvPr id="44" name="Google Shape;429;p16"/>
-          <p:cNvSpPr txBox="1"/>
-          <p:nvPr/>
-        </p:nvSpPr>
-        <p:spPr>
-          <a:xfrm>
-            <a:off x="8445445" y="1173076"/>
-            <a:ext cx="3304426" cy="664797"/>
-          </a:xfrm>
-          <a:prstGeom prst="rect">
-            <a:avLst/>
-          </a:prstGeom>
-          <a:noFill/>
-          <a:ln>
-            <a:noFill/>
-          </a:ln>
-        </p:spPr>
-        <p:txBody>
-          <a:bodyPr spcFirstLastPara="1" wrap="square" lIns="0" tIns="0" rIns="0" bIns="0" anchor="t" anchorCtr="0">
-            <a:spAutoFit/>
-          </a:bodyPr>
-          <a:lstStyle/>
-          <a:p>
-            <a:pPr marL="0" marR="0" lvl="0" indent="0" algn="ctr" rtl="0">
-              <a:lnSpc>
-                <a:spcPct val="120005"/>
-              </a:lnSpc>
-              <a:spcBef>
-                <a:spcPts val="0"/>
-              </a:spcBef>
-              <a:spcAft>
-                <a:spcPts val="0"/>
-              </a:spcAft>
-              <a:buNone/>
-            </a:pPr>
-            <a:r>
-              <a:rPr lang="ru-RU" sz="3600" dirty="0" smtClean="0">
-                <a:solidFill>
-                  <a:srgbClr val="FFBD4C"/>
-                </a:solidFill>
-                <a:latin typeface="Arial Black" panose="020B0A04020102020204" pitchFamily="34" charset="0"/>
-              </a:rPr>
-              <a:t>Вывод</a:t>
-            </a:r>
-            <a:r>
-              <a:rPr lang="en-US" sz="3600" dirty="0" smtClean="0">
-                <a:solidFill>
-                  <a:srgbClr val="FFBD4C"/>
-                </a:solidFill>
-                <a:latin typeface="Arial Black" panose="020B0A04020102020204" pitchFamily="34" charset="0"/>
-              </a:rPr>
-              <a:t>:</a:t>
-            </a:r>
-            <a:endParaRPr sz="3600" dirty="0">
-              <a:solidFill>
-                <a:srgbClr val="FFBD4C"/>
-              </a:solidFill>
-              <a:latin typeface="Arial Black" panose="020B0A04020102020204" pitchFamily="34" charset="0"/>
-            </a:endParaRPr>
-          </a:p>
-        </p:txBody>
-      </p:sp>
-      <p:grpSp>
-        <p:nvGrpSpPr>
-          <p:cNvPr id="45" name="Google Shape;423;p16"/>
-          <p:cNvGrpSpPr/>
-          <p:nvPr/>
-        </p:nvGrpSpPr>
-        <p:grpSpPr>
-          <a:xfrm>
-            <a:off x="8991600" y="1655457"/>
-            <a:ext cx="9037319" cy="8167599"/>
-            <a:chOff x="0" y="-38100"/>
-            <a:chExt cx="1453371" cy="1522554"/>
-          </a:xfrm>
-        </p:grpSpPr>
-        <p:sp>
-          <p:nvSpPr>
-            <p:cNvPr id="46" name="Google Shape;424;p16"/>
-            <p:cNvSpPr/>
-            <p:nvPr/>
-          </p:nvSpPr>
-          <p:spPr>
-            <a:xfrm>
-              <a:off x="0" y="0"/>
-              <a:ext cx="1453371" cy="1484454"/>
-            </a:xfrm>
-            <a:custGeom>
-              <a:avLst/>
-              <a:gdLst/>
-              <a:ahLst/>
-              <a:cxnLst/>
-              <a:rect l="l" t="t" r="r" b="b"/>
-              <a:pathLst>
-                <a:path w="1453371" h="1484454" extrusionOk="0">
-                  <a:moveTo>
-                    <a:pt x="35704" y="0"/>
-                  </a:moveTo>
-                  <a:lnTo>
-                    <a:pt x="1417667" y="0"/>
-                  </a:lnTo>
-                  <a:cubicBezTo>
-                    <a:pt x="1427137" y="0"/>
-                    <a:pt x="1436218" y="3762"/>
-                    <a:pt x="1442914" y="10457"/>
-                  </a:cubicBezTo>
-                  <a:cubicBezTo>
-                    <a:pt x="1449609" y="17153"/>
-                    <a:pt x="1453371" y="26235"/>
-                    <a:pt x="1453371" y="35704"/>
-                  </a:cubicBezTo>
-                  <a:lnTo>
-                    <a:pt x="1453371" y="1448750"/>
-                  </a:lnTo>
-                  <a:cubicBezTo>
-                    <a:pt x="1453371" y="1458219"/>
-                    <a:pt x="1449609" y="1467301"/>
-                    <a:pt x="1442914" y="1473997"/>
-                  </a:cubicBezTo>
-                  <a:cubicBezTo>
-                    <a:pt x="1436218" y="1480692"/>
-                    <a:pt x="1427137" y="1484454"/>
-                    <a:pt x="1417667" y="1484454"/>
-                  </a:cubicBezTo>
-                  <a:lnTo>
-                    <a:pt x="35704" y="1484454"/>
-                  </a:lnTo>
-                  <a:cubicBezTo>
-                    <a:pt x="26235" y="1484454"/>
-                    <a:pt x="17153" y="1480692"/>
-                    <a:pt x="10457" y="1473997"/>
-                  </a:cubicBezTo>
-                  <a:cubicBezTo>
-                    <a:pt x="3762" y="1467301"/>
-                    <a:pt x="0" y="1458219"/>
-                    <a:pt x="0" y="1448750"/>
-                  </a:cubicBezTo>
-                  <a:lnTo>
-                    <a:pt x="0" y="35704"/>
-                  </a:lnTo>
-                  <a:cubicBezTo>
-                    <a:pt x="0" y="26235"/>
-                    <a:pt x="3762" y="17153"/>
-                    <a:pt x="10457" y="10457"/>
-                  </a:cubicBezTo>
-                  <a:cubicBezTo>
-                    <a:pt x="17153" y="3762"/>
-                    <a:pt x="26235" y="0"/>
-                    <a:pt x="35704" y="0"/>
-                  </a:cubicBezTo>
-                  <a:close/>
-                </a:path>
-              </a:pathLst>
-            </a:custGeom>
-            <a:solidFill>
-              <a:srgbClr val="000000">
-                <a:alpha val="0"/>
-              </a:srgbClr>
-            </a:solidFill>
-            <a:ln w="38100" cap="sq" cmpd="sng">
-              <a:solidFill>
-                <a:srgbClr val="FFBD4C"/>
-              </a:solidFill>
-              <a:prstDash val="solid"/>
-              <a:miter lim="8000"/>
-              <a:headEnd type="none" w="sm" len="sm"/>
-              <a:tailEnd type="none" w="sm" len="sm"/>
-            </a:ln>
-          </p:spPr>
-          <p:txBody>
-            <a:bodyPr spcFirstLastPara="1" wrap="square" lIns="91425" tIns="91425" rIns="91425" bIns="91425" anchor="ctr" anchorCtr="0">
-              <a:noAutofit/>
-            </a:bodyPr>
-            <a:lstStyle/>
-            <a:p>
-              <a:pPr marL="0" lvl="0" indent="0" algn="l" rtl="0">
-                <a:spcBef>
-                  <a:spcPts val="0"/>
-                </a:spcBef>
-                <a:spcAft>
-                  <a:spcPts val="0"/>
-                </a:spcAft>
-                <a:buNone/>
-              </a:pPr>
-              <a:endParaRPr/>
-            </a:p>
-          </p:txBody>
-        </p:sp>
-        <p:sp>
-          <p:nvSpPr>
-            <p:cNvPr id="47" name="Google Shape;425;p16"/>
-            <p:cNvSpPr txBox="1"/>
-            <p:nvPr/>
-          </p:nvSpPr>
-          <p:spPr>
-            <a:xfrm>
-              <a:off x="0" y="-38100"/>
-              <a:ext cx="1453371" cy="1522554"/>
-            </a:xfrm>
-            <a:prstGeom prst="rect">
-              <a:avLst/>
-            </a:prstGeom>
-            <a:noFill/>
-            <a:ln>
-              <a:noFill/>
-            </a:ln>
-          </p:spPr>
-          <p:txBody>
-            <a:bodyPr spcFirstLastPara="1" wrap="square" lIns="50800" tIns="50800" rIns="50800" bIns="50800" anchor="ctr" anchorCtr="0">
-              <a:noAutofit/>
-            </a:bodyPr>
-            <a:lstStyle/>
-            <a:p>
-              <a:pPr marL="0" marR="0" lvl="0" indent="0" algn="ctr" rtl="0">
-                <a:lnSpc>
-                  <a:spcPct val="186611"/>
-                </a:lnSpc>
-                <a:spcBef>
-                  <a:spcPts val="0"/>
-                </a:spcBef>
-                <a:spcAft>
-                  <a:spcPts val="0"/>
-                </a:spcAft>
-                <a:buNone/>
-              </a:pPr>
-              <a:endParaRPr sz="1800" b="0" i="0" u="none" strike="noStrike" cap="none">
-                <a:solidFill>
-                  <a:schemeClr val="dk1"/>
-                </a:solidFill>
-                <a:latin typeface="Calibri"/>
-                <a:ea typeface="Calibri"/>
-                <a:cs typeface="Calibri"/>
-                <a:sym typeface="Calibri"/>
-              </a:endParaRPr>
-            </a:p>
-          </p:txBody>
-        </p:sp>
-      </p:grpSp>
-      <p:sp>
-        <p:nvSpPr>
-          <p:cNvPr id="2" name="TextBox 1"/>
-          <p:cNvSpPr txBox="1"/>
-          <p:nvPr/>
-        </p:nvSpPr>
-        <p:spPr>
-          <a:xfrm>
-            <a:off x="9150715" y="2080970"/>
-            <a:ext cx="9132210" cy="7417415"/>
-          </a:xfrm>
-          <a:prstGeom prst="rect">
-            <a:avLst/>
-          </a:prstGeom>
-          <a:noFill/>
-        </p:spPr>
-        <p:txBody>
-          <a:bodyPr wrap="square" rtlCol="0">
-            <a:spAutoFit/>
-          </a:bodyPr>
-          <a:lstStyle/>
-          <a:p>
-            <a:r>
-              <a:rPr lang="ru-RU" sz="2800" dirty="0">
-                <a:solidFill>
-                  <a:schemeClr val="bg1"/>
-                </a:solidFill>
-                <a:latin typeface="Arial Black" panose="020B0A04020102020204" pitchFamily="34" charset="0"/>
-              </a:rPr>
-              <a:t>В ходе тестирования было подтверждено, что веб-приложение корректно выполняет шифрование и </a:t>
-            </a:r>
-            <a:r>
-              <a:rPr lang="ru-RU" sz="2800" dirty="0" smtClean="0">
-                <a:solidFill>
-                  <a:schemeClr val="bg1"/>
-                </a:solidFill>
-                <a:latin typeface="Arial Black" panose="020B0A04020102020204" pitchFamily="34" charset="0"/>
-              </a:rPr>
-              <a:t>дешифровку </a:t>
-            </a:r>
-            <a:r>
-              <a:rPr lang="ru-RU" sz="2800" dirty="0">
-                <a:solidFill>
-                  <a:schemeClr val="bg1"/>
-                </a:solidFill>
-                <a:latin typeface="Arial Black" panose="020B0A04020102020204" pitchFamily="34" charset="0"/>
-              </a:rPr>
-              <a:t>текста с использованием </a:t>
-            </a:r>
-            <a:r>
-              <a:rPr lang="ru-RU" sz="2800" dirty="0" err="1">
-                <a:solidFill>
-                  <a:schemeClr val="bg1"/>
-                </a:solidFill>
-                <a:latin typeface="Arial Black" panose="020B0A04020102020204" pitchFamily="34" charset="0"/>
-              </a:rPr>
-              <a:t>афинного</a:t>
-            </a:r>
-            <a:r>
-              <a:rPr lang="ru-RU" sz="2800" dirty="0">
-                <a:solidFill>
-                  <a:schemeClr val="bg1"/>
-                </a:solidFill>
-                <a:latin typeface="Arial Black" panose="020B0A04020102020204" pitchFamily="34" charset="0"/>
-              </a:rPr>
-              <a:t> шифра как для английского, так и для русского </a:t>
-            </a:r>
-            <a:r>
-              <a:rPr lang="ru-RU" sz="2800" dirty="0" smtClean="0">
-                <a:solidFill>
-                  <a:schemeClr val="bg1"/>
-                </a:solidFill>
-                <a:latin typeface="Arial Black" panose="020B0A04020102020204" pitchFamily="34" charset="0"/>
-              </a:rPr>
-              <a:t>алфавита.</a:t>
-            </a:r>
-          </a:p>
-          <a:p>
-            <a:r>
-              <a:rPr lang="ru-RU" sz="2800" dirty="0">
-                <a:solidFill>
-                  <a:schemeClr val="bg1"/>
-                </a:solidFill>
-                <a:latin typeface="Arial Black" panose="020B0A04020102020204" pitchFamily="34" charset="0"/>
-              </a:rPr>
-              <a:t/>
-            </a:r>
-            <a:br>
-              <a:rPr lang="ru-RU" sz="2800" dirty="0">
-                <a:solidFill>
-                  <a:schemeClr val="bg1"/>
-                </a:solidFill>
-                <a:latin typeface="Arial Black" panose="020B0A04020102020204" pitchFamily="34" charset="0"/>
-              </a:rPr>
-            </a:br>
-            <a:r>
-              <a:rPr lang="ru-RU" sz="2800" dirty="0">
-                <a:solidFill>
-                  <a:schemeClr val="bg1"/>
-                </a:solidFill>
-                <a:latin typeface="Arial Black" panose="020B0A04020102020204" pitchFamily="34" charset="0"/>
-              </a:rPr>
-              <a:t>Приложение успешно обрабатывает пользовательский ввод, определяет некорректные ключи и выводит соответствующие сообщения об ошибках. </a:t>
-            </a:r>
-            <a:endParaRPr lang="ru-RU" sz="2800" dirty="0" smtClean="0">
-              <a:solidFill>
-                <a:schemeClr val="bg1"/>
-              </a:solidFill>
-              <a:latin typeface="Arial Black" panose="020B0A04020102020204" pitchFamily="34" charset="0"/>
-            </a:endParaRPr>
-          </a:p>
-          <a:p>
-            <a:endParaRPr lang="ru-RU" sz="2800" dirty="0">
-              <a:solidFill>
-                <a:schemeClr val="bg1"/>
-              </a:solidFill>
-              <a:latin typeface="Arial Black" panose="020B0A04020102020204" pitchFamily="34" charset="0"/>
-            </a:endParaRPr>
-          </a:p>
-          <a:p>
-            <a:r>
-              <a:rPr lang="ru-RU" sz="2800" dirty="0" smtClean="0">
-                <a:solidFill>
-                  <a:schemeClr val="bg1"/>
-                </a:solidFill>
-                <a:latin typeface="Arial Black" panose="020B0A04020102020204" pitchFamily="34" charset="0"/>
-              </a:rPr>
-              <a:t>Интерфейс </a:t>
-            </a:r>
-            <a:r>
-              <a:rPr lang="ru-RU" sz="2800" dirty="0">
-                <a:solidFill>
-                  <a:schemeClr val="bg1"/>
-                </a:solidFill>
-                <a:latin typeface="Arial Black" panose="020B0A04020102020204" pitchFamily="34" charset="0"/>
-              </a:rPr>
-              <a:t>работает стабильно и удобен для пользователя</a:t>
-            </a:r>
-            <a:r>
-              <a:rPr lang="ru-RU" sz="2800" dirty="0" smtClean="0">
-                <a:solidFill>
-                  <a:schemeClr val="bg1"/>
-                </a:solidFill>
-                <a:latin typeface="Arial Black" panose="020B0A04020102020204" pitchFamily="34" charset="0"/>
-              </a:rPr>
-              <a:t>.</a:t>
-            </a:r>
-            <a:r>
-              <a:rPr lang="ru-RU" sz="2800" dirty="0">
-                <a:solidFill>
-                  <a:schemeClr val="bg1"/>
-                </a:solidFill>
-                <a:latin typeface="Arial Black" panose="020B0A04020102020204" pitchFamily="34" charset="0"/>
-              </a:rPr>
-              <a:t/>
-            </a:r>
-            <a:br>
-              <a:rPr lang="ru-RU" sz="2800" dirty="0">
-                <a:solidFill>
-                  <a:schemeClr val="bg1"/>
-                </a:solidFill>
-                <a:latin typeface="Arial Black" panose="020B0A04020102020204" pitchFamily="34" charset="0"/>
-              </a:rPr>
-            </a:br>
-            <a:r>
-              <a:rPr lang="ru-RU" sz="2800" dirty="0">
-                <a:solidFill>
-                  <a:schemeClr val="bg1"/>
-                </a:solidFill>
-                <a:latin typeface="Arial Black" panose="020B0A04020102020204" pitchFamily="34" charset="0"/>
-              </a:rPr>
-              <a:t>По результатам проведённого тестирования можно сделать вывод, что приложение соответствует поставленным требованиям и готово к использованию.</a:t>
-            </a:r>
-            <a:endParaRPr lang="ru-RU" sz="2800" dirty="0">
-              <a:solidFill>
-                <a:schemeClr val="bg1"/>
-              </a:solidFill>
-              <a:latin typeface="Arial Black" panose="020B0A04020102020204" pitchFamily="34" charset="0"/>
-            </a:endParaRPr>
-          </a:p>
-        </p:txBody>
-      </p:sp>
-    </p:spTree>
-  </p:cSld>
-  <p:clrMapOvr>
-    <a:masterClrMapping/>
-  </p:clrMapOvr>
-</p:sld>
-</file>
-
 <file path=ppt/theme/theme1.xml><?xml version="1.0" encoding="utf-8"?>
 <a:theme xmlns:a="http://schemas.openxmlformats.org/drawingml/2006/main" name="Trade Marketing">
   <a:themeElements>

--- a/pr11.pptx
+++ b/pr11.pptx
@@ -5,54 +5,57 @@
     <p:sldMasterId id="2147483657" r:id="rId1"/>
   </p:sldMasterIdLst>
   <p:notesMasterIdLst>
-    <p:notesMasterId r:id="rId12"/>
+    <p:notesMasterId r:id="rId15"/>
   </p:notesMasterIdLst>
   <p:sldIdLst>
     <p:sldId id="256" r:id="rId2"/>
     <p:sldId id="258" r:id="rId3"/>
-    <p:sldId id="277" r:id="rId4"/>
-    <p:sldId id="278" r:id="rId5"/>
-    <p:sldId id="257" r:id="rId6"/>
-    <p:sldId id="259" r:id="rId7"/>
-    <p:sldId id="275" r:id="rId8"/>
-    <p:sldId id="276" r:id="rId9"/>
-    <p:sldId id="260" r:id="rId10"/>
-    <p:sldId id="261" r:id="rId11"/>
+    <p:sldId id="279" r:id="rId4"/>
+    <p:sldId id="282" r:id="rId5"/>
+    <p:sldId id="277" r:id="rId6"/>
+    <p:sldId id="280" r:id="rId7"/>
+    <p:sldId id="278" r:id="rId8"/>
+    <p:sldId id="257" r:id="rId9"/>
+    <p:sldId id="259" r:id="rId10"/>
+    <p:sldId id="275" r:id="rId11"/>
+    <p:sldId id="276" r:id="rId12"/>
+    <p:sldId id="261" r:id="rId13"/>
+    <p:sldId id="281" r:id="rId14"/>
   </p:sldIdLst>
   <p:sldSz cx="18288000" cy="10287000"/>
   <p:notesSz cx="6858000" cy="9144000"/>
   <p:embeddedFontLst>
     <p:embeddedFont>
       <p:font typeface="Calibri" panose="020F0502020204030204" pitchFamily="34" charset="0"/>
-      <p:regular r:id="rId13"/>
-      <p:bold r:id="rId14"/>
-      <p:italic r:id="rId15"/>
-      <p:boldItalic r:id="rId16"/>
+      <p:regular r:id="rId16"/>
+      <p:bold r:id="rId17"/>
+      <p:italic r:id="rId18"/>
+      <p:boldItalic r:id="rId19"/>
+    </p:embeddedFont>
+    <p:embeddedFont>
+      <p:font typeface="Arial Black" panose="020B0A04020102020204" pitchFamily="34" charset="0"/>
+      <p:bold r:id="rId20"/>
+    </p:embeddedFont>
+    <p:embeddedFont>
+      <p:font typeface="Raleway" panose="020B0604020202020204" charset="-52"/>
+      <p:regular r:id="rId21"/>
+      <p:bold r:id="rId22"/>
+      <p:italic r:id="rId23"/>
+      <p:boldItalic r:id="rId24"/>
+    </p:embeddedFont>
+    <p:embeddedFont>
+      <p:font typeface="Roboto Condensed" panose="020B0604020202020204" charset="0"/>
+      <p:regular r:id="rId25"/>
+      <p:bold r:id="rId26"/>
+      <p:italic r:id="rId27"/>
+      <p:boldItalic r:id="rId28"/>
     </p:embeddedFont>
     <p:embeddedFont>
       <p:font typeface="Montserrat" panose="020B0604020202020204" charset="-52"/>
-      <p:regular r:id="rId17"/>
-      <p:bold r:id="rId18"/>
-      <p:italic r:id="rId19"/>
-      <p:boldItalic r:id="rId20"/>
-    </p:embeddedFont>
-    <p:embeddedFont>
-      <p:font typeface="Arial Black" panose="020B0A04020102020204" pitchFamily="34" charset="0"/>
-      <p:bold r:id="rId21"/>
-    </p:embeddedFont>
-    <p:embeddedFont>
-      <p:font typeface="Roboto Condensed" panose="020B0604020202020204" charset="0"/>
-      <p:regular r:id="rId22"/>
-      <p:bold r:id="rId23"/>
-      <p:italic r:id="rId24"/>
-      <p:boldItalic r:id="rId25"/>
-    </p:embeddedFont>
-    <p:embeddedFont>
-      <p:font typeface="Raleway" panose="020B0604020202020204" charset="-52"/>
-      <p:regular r:id="rId26"/>
-      <p:bold r:id="rId27"/>
-      <p:italic r:id="rId28"/>
-      <p:boldItalic r:id="rId29"/>
+      <p:regular r:id="rId29"/>
+      <p:bold r:id="rId30"/>
+      <p:italic r:id="rId31"/>
+      <p:boldItalic r:id="rId32"/>
     </p:embeddedFont>
   </p:embeddedFontLst>
   <p:defaultTextStyle>
@@ -1264,6 +1267,115 @@
     </p:spTree>
     <p:extLst>
       <p:ext uri="{BB962C8B-B14F-4D97-AF65-F5344CB8AC3E}">
+        <p14:creationId xmlns:p14="http://schemas.microsoft.com/office/powerpoint/2010/main" val="350371970"/>
+      </p:ext>
+    </p:extLst>
+  </p:cSld>
+  <p:clrMapOvr>
+    <a:masterClrMapping/>
+  </p:clrMapOvr>
+</p:notes>
+</file>
+
+<file path=ppt/notesSlides/notesSlide5.xml><?xml version="1.0" encoding="utf-8"?>
+<p:notes xmlns:a="http://schemas.openxmlformats.org/drawingml/2006/main" xmlns:r="http://schemas.openxmlformats.org/officeDocument/2006/relationships" xmlns:p="http://schemas.openxmlformats.org/presentationml/2006/main" showMasterSp="0" showMasterPhAnim="0">
+  <p:cSld>
+    <p:spTree>
+      <p:nvGrpSpPr>
+        <p:cNvPr id="1" name="Shape 299"/>
+        <p:cNvGrpSpPr/>
+        <p:nvPr/>
+      </p:nvGrpSpPr>
+      <p:grpSpPr>
+        <a:xfrm>
+          <a:off x="0" y="0"/>
+          <a:ext cx="0" cy="0"/>
+          <a:chOff x="0" y="0"/>
+          <a:chExt cx="0" cy="0"/>
+        </a:xfrm>
+      </p:grpSpPr>
+      <p:sp>
+        <p:nvSpPr>
+          <p:cNvPr id="300" name="Google Shape;300;p4:notes"/>
+          <p:cNvSpPr txBox="1">
+            <a:spLocks noGrp="1"/>
+          </p:cNvSpPr>
+          <p:nvPr>
+            <p:ph type="body" idx="1"/>
+          </p:nvPr>
+        </p:nvSpPr>
+        <p:spPr>
+          <a:xfrm>
+            <a:off x="685800" y="4343400"/>
+            <a:ext cx="5486400" cy="4114800"/>
+          </a:xfrm>
+          <a:prstGeom prst="rect">
+            <a:avLst/>
+          </a:prstGeom>
+        </p:spPr>
+        <p:txBody>
+          <a:bodyPr spcFirstLastPara="1" wrap="square" lIns="91425" tIns="91425" rIns="91425" bIns="91425" anchor="t" anchorCtr="0">
+            <a:noAutofit/>
+          </a:bodyPr>
+          <a:lstStyle/>
+          <a:p>
+            <a:pPr marL="0" lvl="0" indent="0" algn="l" rtl="0">
+              <a:spcBef>
+                <a:spcPts val="0"/>
+              </a:spcBef>
+              <a:spcAft>
+                <a:spcPts val="0"/>
+              </a:spcAft>
+              <a:buNone/>
+            </a:pPr>
+            <a:endParaRPr/>
+          </a:p>
+        </p:txBody>
+      </p:sp>
+      <p:sp>
+        <p:nvSpPr>
+          <p:cNvPr id="301" name="Google Shape;301;p4:notes"/>
+          <p:cNvSpPr>
+            <a:spLocks noGrp="1" noRot="1" noChangeAspect="1"/>
+          </p:cNvSpPr>
+          <p:nvPr>
+            <p:ph type="sldImg" idx="2"/>
+          </p:nvPr>
+        </p:nvSpPr>
+        <p:spPr>
+          <a:xfrm>
+            <a:off x="381000" y="685800"/>
+            <a:ext cx="6096000" cy="3429000"/>
+          </a:xfrm>
+          <a:custGeom>
+            <a:avLst/>
+            <a:gdLst/>
+            <a:ahLst/>
+            <a:cxnLst/>
+            <a:rect l="l" t="t" r="r" b="b"/>
+            <a:pathLst>
+              <a:path w="120000" h="120000" extrusionOk="0">
+                <a:moveTo>
+                  <a:pt x="0" y="0"/>
+                </a:moveTo>
+                <a:lnTo>
+                  <a:pt x="120000" y="0"/>
+                </a:lnTo>
+                <a:lnTo>
+                  <a:pt x="120000" y="120000"/>
+                </a:lnTo>
+                <a:lnTo>
+                  <a:pt x="0" y="120000"/>
+                </a:lnTo>
+                <a:close/>
+              </a:path>
+            </a:pathLst>
+          </a:custGeom>
+        </p:spPr>
+      </p:sp>
+    </p:spTree>
+    <p:extLst>
+      <p:ext uri="{BB962C8B-B14F-4D97-AF65-F5344CB8AC3E}">
         <p14:creationId xmlns:p14="http://schemas.microsoft.com/office/powerpoint/2010/main" val="3609372254"/>
       </p:ext>
     </p:extLst>
@@ -1274,7 +1386,7 @@
 </p:notes>
 </file>
 
-<file path=ppt/notesSlides/notesSlide5.xml><?xml version="1.0" encoding="utf-8"?>
+<file path=ppt/notesSlides/notesSlide6.xml><?xml version="1.0" encoding="utf-8"?>
 <p:notes xmlns:a="http://schemas.openxmlformats.org/drawingml/2006/main" xmlns:r="http://schemas.openxmlformats.org/officeDocument/2006/relationships" xmlns:p="http://schemas.openxmlformats.org/presentationml/2006/main" showMasterSp="0" showMasterPhAnim="0">
   <p:cSld>
     <p:spTree>
@@ -1332,110 +1444,6 @@
       <p:sp>
         <p:nvSpPr>
           <p:cNvPr id="247" name="Google Shape;247;p2:notes"/>
-          <p:cNvSpPr>
-            <a:spLocks noGrp="1" noRot="1" noChangeAspect="1"/>
-          </p:cNvSpPr>
-          <p:nvPr>
-            <p:ph type="sldImg" idx="2"/>
-          </p:nvPr>
-        </p:nvSpPr>
-        <p:spPr>
-          <a:xfrm>
-            <a:off x="381000" y="685800"/>
-            <a:ext cx="6096000" cy="3429000"/>
-          </a:xfrm>
-          <a:custGeom>
-            <a:avLst/>
-            <a:gdLst/>
-            <a:ahLst/>
-            <a:cxnLst/>
-            <a:rect l="l" t="t" r="r" b="b"/>
-            <a:pathLst>
-              <a:path w="120000" h="120000" extrusionOk="0">
-                <a:moveTo>
-                  <a:pt x="0" y="0"/>
-                </a:moveTo>
-                <a:lnTo>
-                  <a:pt x="120000" y="0"/>
-                </a:lnTo>
-                <a:lnTo>
-                  <a:pt x="120000" y="120000"/>
-                </a:lnTo>
-                <a:lnTo>
-                  <a:pt x="0" y="120000"/>
-                </a:lnTo>
-                <a:close/>
-              </a:path>
-            </a:pathLst>
-          </a:custGeom>
-        </p:spPr>
-      </p:sp>
-    </p:spTree>
-  </p:cSld>
-  <p:clrMapOvr>
-    <a:masterClrMapping/>
-  </p:clrMapOvr>
-</p:notes>
-</file>
-
-<file path=ppt/notesSlides/notesSlide6.xml><?xml version="1.0" encoding="utf-8"?>
-<p:notes xmlns:a="http://schemas.openxmlformats.org/drawingml/2006/main" xmlns:r="http://schemas.openxmlformats.org/officeDocument/2006/relationships" xmlns:p="http://schemas.openxmlformats.org/presentationml/2006/main" showMasterSp="0" showMasterPhAnim="0">
-  <p:cSld>
-    <p:spTree>
-      <p:nvGrpSpPr>
-        <p:cNvPr id="1" name="Shape 339"/>
-        <p:cNvGrpSpPr/>
-        <p:nvPr/>
-      </p:nvGrpSpPr>
-      <p:grpSpPr>
-        <a:xfrm>
-          <a:off x="0" y="0"/>
-          <a:ext cx="0" cy="0"/>
-          <a:chOff x="0" y="0"/>
-          <a:chExt cx="0" cy="0"/>
-        </a:xfrm>
-      </p:grpSpPr>
-      <p:sp>
-        <p:nvSpPr>
-          <p:cNvPr id="340" name="Google Shape;340;p3:notes"/>
-          <p:cNvSpPr txBox="1">
-            <a:spLocks noGrp="1"/>
-          </p:cNvSpPr>
-          <p:nvPr>
-            <p:ph type="body" idx="1"/>
-          </p:nvPr>
-        </p:nvSpPr>
-        <p:spPr>
-          <a:xfrm>
-            <a:off x="685800" y="4343400"/>
-            <a:ext cx="5486400" cy="4114800"/>
-          </a:xfrm>
-          <a:prstGeom prst="rect">
-            <a:avLst/>
-          </a:prstGeom>
-        </p:spPr>
-        <p:txBody>
-          <a:bodyPr spcFirstLastPara="1" wrap="square" lIns="91425" tIns="91425" rIns="91425" bIns="91425" anchor="t" anchorCtr="0">
-            <a:noAutofit/>
-          </a:bodyPr>
-          <a:lstStyle/>
-          <a:p>
-            <a:pPr marL="0" lvl="0" indent="0" algn="l" rtl="0">
-              <a:spcBef>
-                <a:spcPts val="0"/>
-              </a:spcBef>
-              <a:spcAft>
-                <a:spcPts val="0"/>
-              </a:spcAft>
-              <a:buNone/>
-            </a:pPr>
-            <a:endParaRPr/>
-          </a:p>
-        </p:txBody>
-      </p:sp>
-      <p:sp>
-        <p:nvSpPr>
-          <p:cNvPr id="341" name="Google Shape;341;p3:notes"/>
           <p:cNvSpPr>
             <a:spLocks noGrp="1" noRot="1" noChangeAspect="1"/>
           </p:cNvSpPr>
@@ -1579,6 +1587,110 @@
         </p:spPr>
       </p:sp>
     </p:spTree>
+  </p:cSld>
+  <p:clrMapOvr>
+    <a:masterClrMapping/>
+  </p:clrMapOvr>
+</p:notes>
+</file>
+
+<file path=ppt/notesSlides/notesSlide8.xml><?xml version="1.0" encoding="utf-8"?>
+<p:notes xmlns:a="http://schemas.openxmlformats.org/drawingml/2006/main" xmlns:r="http://schemas.openxmlformats.org/officeDocument/2006/relationships" xmlns:p="http://schemas.openxmlformats.org/presentationml/2006/main" showMasterSp="0" showMasterPhAnim="0">
+  <p:cSld>
+    <p:spTree>
+      <p:nvGrpSpPr>
+        <p:cNvPr id="1" name="Shape 339"/>
+        <p:cNvGrpSpPr/>
+        <p:nvPr/>
+      </p:nvGrpSpPr>
+      <p:grpSpPr>
+        <a:xfrm>
+          <a:off x="0" y="0"/>
+          <a:ext cx="0" cy="0"/>
+          <a:chOff x="0" y="0"/>
+          <a:chExt cx="0" cy="0"/>
+        </a:xfrm>
+      </p:grpSpPr>
+      <p:sp>
+        <p:nvSpPr>
+          <p:cNvPr id="340" name="Google Shape;340;p3:notes"/>
+          <p:cNvSpPr txBox="1">
+            <a:spLocks noGrp="1"/>
+          </p:cNvSpPr>
+          <p:nvPr>
+            <p:ph type="body" idx="1"/>
+          </p:nvPr>
+        </p:nvSpPr>
+        <p:spPr>
+          <a:xfrm>
+            <a:off x="685800" y="4343400"/>
+            <a:ext cx="5486400" cy="4114800"/>
+          </a:xfrm>
+          <a:prstGeom prst="rect">
+            <a:avLst/>
+          </a:prstGeom>
+        </p:spPr>
+        <p:txBody>
+          <a:bodyPr spcFirstLastPara="1" wrap="square" lIns="91425" tIns="91425" rIns="91425" bIns="91425" anchor="t" anchorCtr="0">
+            <a:noAutofit/>
+          </a:bodyPr>
+          <a:lstStyle/>
+          <a:p>
+            <a:pPr marL="0" lvl="0" indent="0" algn="l" rtl="0">
+              <a:spcBef>
+                <a:spcPts val="0"/>
+              </a:spcBef>
+              <a:spcAft>
+                <a:spcPts val="0"/>
+              </a:spcAft>
+              <a:buNone/>
+            </a:pPr>
+            <a:endParaRPr/>
+          </a:p>
+        </p:txBody>
+      </p:sp>
+      <p:sp>
+        <p:nvSpPr>
+          <p:cNvPr id="341" name="Google Shape;341;p3:notes"/>
+          <p:cNvSpPr>
+            <a:spLocks noGrp="1" noRot="1" noChangeAspect="1"/>
+          </p:cNvSpPr>
+          <p:nvPr>
+            <p:ph type="sldImg" idx="2"/>
+          </p:nvPr>
+        </p:nvSpPr>
+        <p:spPr>
+          <a:xfrm>
+            <a:off x="381000" y="685800"/>
+            <a:ext cx="6096000" cy="3429000"/>
+          </a:xfrm>
+          <a:custGeom>
+            <a:avLst/>
+            <a:gdLst/>
+            <a:ahLst/>
+            <a:cxnLst/>
+            <a:rect l="l" t="t" r="r" b="b"/>
+            <a:pathLst>
+              <a:path w="120000" h="120000" extrusionOk="0">
+                <a:moveTo>
+                  <a:pt x="0" y="0"/>
+                </a:moveTo>
+                <a:lnTo>
+                  <a:pt x="120000" y="0"/>
+                </a:lnTo>
+                <a:lnTo>
+                  <a:pt x="120000" y="120000"/>
+                </a:lnTo>
+                <a:lnTo>
+                  <a:pt x="0" y="120000"/>
+                </a:lnTo>
+                <a:close/>
+              </a:path>
+            </a:pathLst>
+          </a:custGeom>
+        </p:spPr>
+      </p:sp>
+    </p:spTree>
     <p:extLst>
       <p:ext uri="{BB962C8B-B14F-4D97-AF65-F5344CB8AC3E}">
         <p14:creationId xmlns:p14="http://schemas.microsoft.com/office/powerpoint/2010/main" val="3951869640"/>
@@ -1591,7 +1703,7 @@
 </p:notes>
 </file>
 
-<file path=ppt/notesSlides/notesSlide8.xml><?xml version="1.0" encoding="utf-8"?>
+<file path=ppt/notesSlides/notesSlide9.xml><?xml version="1.0" encoding="utf-8"?>
 <p:notes xmlns:a="http://schemas.openxmlformats.org/drawingml/2006/main" xmlns:r="http://schemas.openxmlformats.org/officeDocument/2006/relationships" xmlns:p="http://schemas.openxmlformats.org/presentationml/2006/main" showMasterSp="0" showMasterPhAnim="0">
   <p:cSld>
     <p:spTree>
@@ -1693,110 +1805,6 @@
         <p14:creationId xmlns:p14="http://schemas.microsoft.com/office/powerpoint/2010/main" val="1124284577"/>
       </p:ext>
     </p:extLst>
-  </p:cSld>
-  <p:clrMapOvr>
-    <a:masterClrMapping/>
-  </p:clrMapOvr>
-</p:notes>
-</file>
-
-<file path=ppt/notesSlides/notesSlide9.xml><?xml version="1.0" encoding="utf-8"?>
-<p:notes xmlns:a="http://schemas.openxmlformats.org/drawingml/2006/main" xmlns:r="http://schemas.openxmlformats.org/officeDocument/2006/relationships" xmlns:p="http://schemas.openxmlformats.org/presentationml/2006/main" showMasterSp="0" showMasterPhAnim="0">
-  <p:cSld>
-    <p:spTree>
-      <p:nvGrpSpPr>
-        <p:cNvPr id="1" name="Shape 384"/>
-        <p:cNvGrpSpPr/>
-        <p:nvPr/>
-      </p:nvGrpSpPr>
-      <p:grpSpPr>
-        <a:xfrm>
-          <a:off x="0" y="0"/>
-          <a:ext cx="0" cy="0"/>
-          <a:chOff x="0" y="0"/>
-          <a:chExt cx="0" cy="0"/>
-        </a:xfrm>
-      </p:grpSpPr>
-      <p:sp>
-        <p:nvSpPr>
-          <p:cNvPr id="385" name="Google Shape;385;p5:notes"/>
-          <p:cNvSpPr txBox="1">
-            <a:spLocks noGrp="1"/>
-          </p:cNvSpPr>
-          <p:nvPr>
-            <p:ph type="body" idx="1"/>
-          </p:nvPr>
-        </p:nvSpPr>
-        <p:spPr>
-          <a:xfrm>
-            <a:off x="685800" y="4343400"/>
-            <a:ext cx="5486400" cy="4114800"/>
-          </a:xfrm>
-          <a:prstGeom prst="rect">
-            <a:avLst/>
-          </a:prstGeom>
-        </p:spPr>
-        <p:txBody>
-          <a:bodyPr spcFirstLastPara="1" wrap="square" lIns="91425" tIns="91425" rIns="91425" bIns="91425" anchor="t" anchorCtr="0">
-            <a:noAutofit/>
-          </a:bodyPr>
-          <a:lstStyle/>
-          <a:p>
-            <a:pPr marL="0" lvl="0" indent="0" algn="l" rtl="0">
-              <a:spcBef>
-                <a:spcPts val="0"/>
-              </a:spcBef>
-              <a:spcAft>
-                <a:spcPts val="0"/>
-              </a:spcAft>
-              <a:buNone/>
-            </a:pPr>
-            <a:endParaRPr/>
-          </a:p>
-        </p:txBody>
-      </p:sp>
-      <p:sp>
-        <p:nvSpPr>
-          <p:cNvPr id="386" name="Google Shape;386;p5:notes"/>
-          <p:cNvSpPr>
-            <a:spLocks noGrp="1" noRot="1" noChangeAspect="1"/>
-          </p:cNvSpPr>
-          <p:nvPr>
-            <p:ph type="sldImg" idx="2"/>
-          </p:nvPr>
-        </p:nvSpPr>
-        <p:spPr>
-          <a:xfrm>
-            <a:off x="381000" y="685800"/>
-            <a:ext cx="6096000" cy="3429000"/>
-          </a:xfrm>
-          <a:custGeom>
-            <a:avLst/>
-            <a:gdLst/>
-            <a:ahLst/>
-            <a:cxnLst/>
-            <a:rect l="l" t="t" r="r" b="b"/>
-            <a:pathLst>
-              <a:path w="120000" h="120000" extrusionOk="0">
-                <a:moveTo>
-                  <a:pt x="0" y="0"/>
-                </a:moveTo>
-                <a:lnTo>
-                  <a:pt x="120000" y="0"/>
-                </a:lnTo>
-                <a:lnTo>
-                  <a:pt x="120000" y="120000"/>
-                </a:lnTo>
-                <a:lnTo>
-                  <a:pt x="0" y="120000"/>
-                </a:lnTo>
-                <a:close/>
-              </a:path>
-            </a:pathLst>
-          </a:custGeom>
-        </p:spPr>
-      </p:sp>
-    </p:spTree>
   </p:cSld>
   <p:clrMapOvr>
     <a:masterClrMapping/>
@@ -12253,7 +12261,7 @@
         </p:blipFill>
         <p:spPr>
           <a:xfrm>
-            <a:off x="3320413" y="8660050"/>
+            <a:off x="734290" y="6879456"/>
             <a:ext cx="1793125" cy="356175"/>
           </a:xfrm>
           <a:prstGeom prst="rect">
@@ -12293,6 +12301,108 @@
           </a:ln>
         </p:spPr>
       </p:pic>
+      <p:sp>
+        <p:nvSpPr>
+          <p:cNvPr id="2" name="TextBox 1"/>
+          <p:cNvSpPr txBox="1"/>
+          <p:nvPr/>
+        </p:nvSpPr>
+        <p:spPr>
+          <a:xfrm>
+            <a:off x="734290" y="7307350"/>
+            <a:ext cx="5029200" cy="1569660"/>
+          </a:xfrm>
+          <a:prstGeom prst="rect">
+            <a:avLst/>
+          </a:prstGeom>
+          <a:noFill/>
+        </p:spPr>
+        <p:txBody>
+          <a:bodyPr wrap="square" rtlCol="0">
+            <a:spAutoFit/>
+          </a:bodyPr>
+          <a:lstStyle/>
+          <a:p>
+            <a:r>
+              <a:rPr lang="ru-RU" sz="3200" dirty="0" smtClean="0">
+                <a:solidFill>
+                  <a:srgbClr val="FFBD4C"/>
+                </a:solidFill>
+                <a:latin typeface="Arial Black" panose="020B0A04020102020204" pitchFamily="34" charset="0"/>
+              </a:rPr>
+              <a:t>Выполнили</a:t>
+            </a:r>
+            <a:r>
+              <a:rPr lang="en-US" sz="3200" dirty="0" smtClean="0">
+                <a:solidFill>
+                  <a:srgbClr val="FFBD4C"/>
+                </a:solidFill>
+                <a:latin typeface="Arial Black" panose="020B0A04020102020204" pitchFamily="34" charset="0"/>
+              </a:rPr>
+              <a:t>:</a:t>
+            </a:r>
+            <a:endParaRPr lang="ru-RU" sz="3200" dirty="0" smtClean="0">
+              <a:solidFill>
+                <a:srgbClr val="FFBD4C"/>
+              </a:solidFill>
+              <a:latin typeface="Arial Black" panose="020B0A04020102020204" pitchFamily="34" charset="0"/>
+            </a:endParaRPr>
+          </a:p>
+          <a:p>
+            <a:r>
+              <a:rPr lang="ru-RU" sz="3200" dirty="0" smtClean="0">
+                <a:solidFill>
+                  <a:srgbClr val="FFBD4C"/>
+                </a:solidFill>
+                <a:latin typeface="Arial Black" panose="020B0A04020102020204" pitchFamily="34" charset="0"/>
+              </a:rPr>
+              <a:t>Акбарова </a:t>
+            </a:r>
+            <a:r>
+              <a:rPr lang="ru-RU" sz="3200" dirty="0" err="1" smtClean="0">
+                <a:solidFill>
+                  <a:srgbClr val="FFBD4C"/>
+                </a:solidFill>
+                <a:latin typeface="Arial Black" panose="020B0A04020102020204" pitchFamily="34" charset="0"/>
+              </a:rPr>
+              <a:t>Самира</a:t>
+            </a:r>
+            <a:r>
+              <a:rPr lang="ru-RU" sz="3200" dirty="0" smtClean="0">
+                <a:solidFill>
+                  <a:srgbClr val="FFBD4C"/>
+                </a:solidFill>
+                <a:latin typeface="Arial Black" panose="020B0A04020102020204" pitchFamily="34" charset="0"/>
+              </a:rPr>
+              <a:t>, </a:t>
+            </a:r>
+            <a:r>
+              <a:rPr lang="ru-RU" sz="3200" dirty="0" err="1" smtClean="0">
+                <a:solidFill>
+                  <a:srgbClr val="FFBD4C"/>
+                </a:solidFill>
+                <a:latin typeface="Arial Black" panose="020B0A04020102020204" pitchFamily="34" charset="0"/>
+              </a:rPr>
+              <a:t>Горбатюк</a:t>
+            </a:r>
+            <a:r>
+              <a:rPr lang="ru-RU" sz="3200" dirty="0" smtClean="0">
+                <a:solidFill>
+                  <a:srgbClr val="FFBD4C"/>
+                </a:solidFill>
+                <a:latin typeface="Arial Black" panose="020B0A04020102020204" pitchFamily="34" charset="0"/>
+              </a:rPr>
+              <a:t> Святогор</a:t>
+            </a:r>
+            <a:endParaRPr lang="ru-RU" sz="3200" dirty="0">
+              <a:solidFill>
+                <a:srgbClr val="FFBD4C"/>
+              </a:solidFill>
+              <a:latin typeface="Arial Black" panose="020B0A04020102020204" pitchFamily="34" charset="0"/>
+            </a:endParaRPr>
+          </a:p>
+        </p:txBody>
+      </p:sp>
     </p:spTree>
   </p:cSld>
   <p:clrMapOvr>
@@ -12309,6 +12419,1369 @@
 </file>
 
 <file path=ppt/slides/slide10.xml><?xml version="1.0" encoding="utf-8"?>
+<p:sld xmlns:a="http://schemas.openxmlformats.org/drawingml/2006/main" xmlns:r="http://schemas.openxmlformats.org/officeDocument/2006/relationships" xmlns:p="http://schemas.openxmlformats.org/presentationml/2006/main">
+  <p:cSld>
+    <p:spTree>
+      <p:nvGrpSpPr>
+        <p:cNvPr id="1" name="Shape 342"/>
+        <p:cNvGrpSpPr/>
+        <p:nvPr/>
+      </p:nvGrpSpPr>
+      <p:grpSpPr>
+        <a:xfrm>
+          <a:off x="0" y="0"/>
+          <a:ext cx="0" cy="0"/>
+          <a:chOff x="0" y="0"/>
+          <a:chExt cx="0" cy="0"/>
+        </a:xfrm>
+      </p:grpSpPr>
+      <p:sp>
+        <p:nvSpPr>
+          <p:cNvPr id="351" name="Google Shape;351;p14"/>
+          <p:cNvSpPr txBox="1"/>
+          <p:nvPr/>
+        </p:nvSpPr>
+        <p:spPr>
+          <a:xfrm>
+            <a:off x="491985" y="239416"/>
+            <a:ext cx="8887542" cy="2105192"/>
+          </a:xfrm>
+          <a:prstGeom prst="rect">
+            <a:avLst/>
+          </a:prstGeom>
+          <a:noFill/>
+          <a:ln>
+            <a:noFill/>
+          </a:ln>
+        </p:spPr>
+        <p:txBody>
+          <a:bodyPr spcFirstLastPara="1" wrap="square" lIns="0" tIns="0" rIns="0" bIns="0" anchor="t" anchorCtr="0">
+            <a:spAutoFit/>
+          </a:bodyPr>
+          <a:lstStyle/>
+          <a:p>
+            <a:pPr marL="0" marR="0" lvl="0" indent="0" rtl="0">
+              <a:lnSpc>
+                <a:spcPct val="120000"/>
+              </a:lnSpc>
+              <a:spcBef>
+                <a:spcPts val="0"/>
+              </a:spcBef>
+              <a:spcAft>
+                <a:spcPts val="0"/>
+              </a:spcAft>
+              <a:buNone/>
+            </a:pPr>
+            <a:r>
+              <a:rPr lang="ru-RU" sz="6000" b="0" i="0" u="none" strike="noStrike" cap="none" dirty="0" smtClean="0">
+                <a:solidFill>
+                  <a:srgbClr val="FFBD4C"/>
+                </a:solidFill>
+                <a:latin typeface="Arial Black" panose="020B0A04020102020204" pitchFamily="34" charset="0"/>
+                <a:ea typeface="Montserrat"/>
+                <a:cs typeface="Montserrat"/>
+                <a:sym typeface="Montserrat"/>
+              </a:rPr>
+              <a:t>Тест №</a:t>
+            </a:r>
+            <a:r>
+              <a:rPr lang="ru-RU" sz="6000" dirty="0" smtClean="0">
+                <a:solidFill>
+                  <a:srgbClr val="FFBD4C"/>
+                </a:solidFill>
+                <a:latin typeface="Arial Black" panose="020B0A04020102020204" pitchFamily="34" charset="0"/>
+                <a:ea typeface="Montserrat"/>
+                <a:cs typeface="Montserrat"/>
+                <a:sym typeface="Montserrat"/>
+              </a:rPr>
+              <a:t>2</a:t>
+            </a:r>
+            <a:endParaRPr lang="ru-RU" sz="6000" b="0" i="0" u="none" strike="noStrike" cap="none" dirty="0" smtClean="0">
+              <a:solidFill>
+                <a:srgbClr val="FFBD4C"/>
+              </a:solidFill>
+              <a:latin typeface="Arial Black" panose="020B0A04020102020204" pitchFamily="34" charset="0"/>
+              <a:ea typeface="Montserrat"/>
+              <a:cs typeface="Montserrat"/>
+              <a:sym typeface="Montserrat"/>
+            </a:endParaRPr>
+          </a:p>
+          <a:p>
+            <a:pPr marL="0" marR="0" lvl="0" indent="0" rtl="0">
+              <a:lnSpc>
+                <a:spcPct val="120000"/>
+              </a:lnSpc>
+              <a:spcBef>
+                <a:spcPts val="0"/>
+              </a:spcBef>
+              <a:spcAft>
+                <a:spcPts val="0"/>
+              </a:spcAft>
+              <a:buNone/>
+            </a:pPr>
+            <a:r>
+              <a:rPr lang="ru-RU" sz="5400" dirty="0" smtClean="0">
+                <a:solidFill>
+                  <a:srgbClr val="FFBD4C"/>
+                </a:solidFill>
+                <a:latin typeface="Arial Black" panose="020B0A04020102020204" pitchFamily="34" charset="0"/>
+                <a:sym typeface="Montserrat"/>
+              </a:rPr>
+              <a:t>Английский алфавит</a:t>
+            </a:r>
+            <a:endParaRPr sz="800" dirty="0">
+              <a:latin typeface="Arial Black" panose="020B0A04020102020204" pitchFamily="34" charset="0"/>
+            </a:endParaRPr>
+          </a:p>
+        </p:txBody>
+      </p:sp>
+      <p:grpSp>
+        <p:nvGrpSpPr>
+          <p:cNvPr id="368" name="Google Shape;368;p14"/>
+          <p:cNvGrpSpPr/>
+          <p:nvPr/>
+        </p:nvGrpSpPr>
+        <p:grpSpPr>
+          <a:xfrm>
+            <a:off x="15618305" y="1755"/>
+            <a:ext cx="2137482" cy="475324"/>
+            <a:chOff x="30956" y="22212"/>
+            <a:chExt cx="2849976" cy="633766"/>
+          </a:xfrm>
+        </p:grpSpPr>
+        <p:cxnSp>
+          <p:nvCxnSpPr>
+            <p:cNvPr id="369" name="Google Shape;369;p14"/>
+            <p:cNvCxnSpPr/>
+            <p:nvPr/>
+          </p:nvCxnSpPr>
+          <p:spPr>
+            <a:xfrm rot="10800000" flipH="1">
+              <a:off x="30956" y="22212"/>
+              <a:ext cx="454750" cy="633766"/>
+            </a:xfrm>
+            <a:prstGeom prst="straightConnector1">
+              <a:avLst/>
+            </a:prstGeom>
+            <a:noFill/>
+            <a:ln w="76200" cap="flat" cmpd="sng">
+              <a:solidFill>
+                <a:srgbClr val="FFBD4C"/>
+              </a:solidFill>
+              <a:prstDash val="solid"/>
+              <a:round/>
+              <a:headEnd type="none" w="sm" len="sm"/>
+              <a:tailEnd type="none" w="sm" len="sm"/>
+            </a:ln>
+          </p:spPr>
+        </p:cxnSp>
+        <p:cxnSp>
+          <p:nvCxnSpPr>
+            <p:cNvPr id="370" name="Google Shape;370;p14"/>
+            <p:cNvCxnSpPr/>
+            <p:nvPr/>
+          </p:nvCxnSpPr>
+          <p:spPr>
+            <a:xfrm rot="10800000" flipH="1">
+              <a:off x="430160" y="22212"/>
+              <a:ext cx="454750" cy="633766"/>
+            </a:xfrm>
+            <a:prstGeom prst="straightConnector1">
+              <a:avLst/>
+            </a:prstGeom>
+            <a:noFill/>
+            <a:ln w="76200" cap="flat" cmpd="sng">
+              <a:solidFill>
+                <a:srgbClr val="FFBD4C"/>
+              </a:solidFill>
+              <a:prstDash val="solid"/>
+              <a:round/>
+              <a:headEnd type="none" w="sm" len="sm"/>
+              <a:tailEnd type="none" w="sm" len="sm"/>
+            </a:ln>
+          </p:spPr>
+        </p:cxnSp>
+        <p:cxnSp>
+          <p:nvCxnSpPr>
+            <p:cNvPr id="371" name="Google Shape;371;p14"/>
+            <p:cNvCxnSpPr/>
+            <p:nvPr/>
+          </p:nvCxnSpPr>
+          <p:spPr>
+            <a:xfrm rot="10800000" flipH="1">
+              <a:off x="829364" y="22212"/>
+              <a:ext cx="454750" cy="633766"/>
+            </a:xfrm>
+            <a:prstGeom prst="straightConnector1">
+              <a:avLst/>
+            </a:prstGeom>
+            <a:noFill/>
+            <a:ln w="76200" cap="flat" cmpd="sng">
+              <a:solidFill>
+                <a:srgbClr val="FFBD4C"/>
+              </a:solidFill>
+              <a:prstDash val="solid"/>
+              <a:round/>
+              <a:headEnd type="none" w="sm" len="sm"/>
+              <a:tailEnd type="none" w="sm" len="sm"/>
+            </a:ln>
+          </p:spPr>
+        </p:cxnSp>
+        <p:cxnSp>
+          <p:nvCxnSpPr>
+            <p:cNvPr id="372" name="Google Shape;372;p14"/>
+            <p:cNvCxnSpPr/>
+            <p:nvPr/>
+          </p:nvCxnSpPr>
+          <p:spPr>
+            <a:xfrm rot="10800000" flipH="1">
+              <a:off x="1228569" y="22212"/>
+              <a:ext cx="454750" cy="633766"/>
+            </a:xfrm>
+            <a:prstGeom prst="straightConnector1">
+              <a:avLst/>
+            </a:prstGeom>
+            <a:noFill/>
+            <a:ln w="76200" cap="flat" cmpd="sng">
+              <a:solidFill>
+                <a:srgbClr val="FFBD4C"/>
+              </a:solidFill>
+              <a:prstDash val="solid"/>
+              <a:round/>
+              <a:headEnd type="none" w="sm" len="sm"/>
+              <a:tailEnd type="none" w="sm" len="sm"/>
+            </a:ln>
+          </p:spPr>
+        </p:cxnSp>
+        <p:cxnSp>
+          <p:nvCxnSpPr>
+            <p:cNvPr id="373" name="Google Shape;373;p14"/>
+            <p:cNvCxnSpPr/>
+            <p:nvPr/>
+          </p:nvCxnSpPr>
+          <p:spPr>
+            <a:xfrm rot="10800000" flipH="1">
+              <a:off x="1627773" y="22212"/>
+              <a:ext cx="454750" cy="633766"/>
+            </a:xfrm>
+            <a:prstGeom prst="straightConnector1">
+              <a:avLst/>
+            </a:prstGeom>
+            <a:noFill/>
+            <a:ln w="76200" cap="flat" cmpd="sng">
+              <a:solidFill>
+                <a:srgbClr val="FFBD4C"/>
+              </a:solidFill>
+              <a:prstDash val="solid"/>
+              <a:round/>
+              <a:headEnd type="none" w="sm" len="sm"/>
+              <a:tailEnd type="none" w="sm" len="sm"/>
+            </a:ln>
+          </p:spPr>
+        </p:cxnSp>
+        <p:cxnSp>
+          <p:nvCxnSpPr>
+            <p:cNvPr id="374" name="Google Shape;374;p14"/>
+            <p:cNvCxnSpPr/>
+            <p:nvPr/>
+          </p:nvCxnSpPr>
+          <p:spPr>
+            <a:xfrm rot="10800000" flipH="1">
+              <a:off x="2026977" y="22212"/>
+              <a:ext cx="454750" cy="633766"/>
+            </a:xfrm>
+            <a:prstGeom prst="straightConnector1">
+              <a:avLst/>
+            </a:prstGeom>
+            <a:noFill/>
+            <a:ln w="76200" cap="flat" cmpd="sng">
+              <a:solidFill>
+                <a:srgbClr val="FFBD4C"/>
+              </a:solidFill>
+              <a:prstDash val="solid"/>
+              <a:round/>
+              <a:headEnd type="none" w="sm" len="sm"/>
+              <a:tailEnd type="none" w="sm" len="sm"/>
+            </a:ln>
+          </p:spPr>
+        </p:cxnSp>
+        <p:cxnSp>
+          <p:nvCxnSpPr>
+            <p:cNvPr id="375" name="Google Shape;375;p14"/>
+            <p:cNvCxnSpPr/>
+            <p:nvPr/>
+          </p:nvCxnSpPr>
+          <p:spPr>
+            <a:xfrm rot="10800000" flipH="1">
+              <a:off x="2426182" y="22212"/>
+              <a:ext cx="454750" cy="633766"/>
+            </a:xfrm>
+            <a:prstGeom prst="straightConnector1">
+              <a:avLst/>
+            </a:prstGeom>
+            <a:noFill/>
+            <a:ln w="76200" cap="flat" cmpd="sng">
+              <a:solidFill>
+                <a:srgbClr val="FFBD4C"/>
+              </a:solidFill>
+              <a:prstDash val="solid"/>
+              <a:round/>
+              <a:headEnd type="none" w="sm" len="sm"/>
+              <a:tailEnd type="none" w="sm" len="sm"/>
+            </a:ln>
+          </p:spPr>
+        </p:cxnSp>
+      </p:grpSp>
+      <p:grpSp>
+        <p:nvGrpSpPr>
+          <p:cNvPr id="376" name="Google Shape;376;p14"/>
+          <p:cNvGrpSpPr/>
+          <p:nvPr/>
+        </p:nvGrpSpPr>
+        <p:grpSpPr>
+          <a:xfrm rot="5400000">
+            <a:off x="-814419" y="7426244"/>
+            <a:ext cx="2137482" cy="475324"/>
+            <a:chOff x="30956" y="22212"/>
+            <a:chExt cx="2849976" cy="633766"/>
+          </a:xfrm>
+        </p:grpSpPr>
+        <p:cxnSp>
+          <p:nvCxnSpPr>
+            <p:cNvPr id="377" name="Google Shape;377;p14"/>
+            <p:cNvCxnSpPr/>
+            <p:nvPr/>
+          </p:nvCxnSpPr>
+          <p:spPr>
+            <a:xfrm rot="10800000" flipH="1">
+              <a:off x="30956" y="22212"/>
+              <a:ext cx="454750" cy="633766"/>
+            </a:xfrm>
+            <a:prstGeom prst="straightConnector1">
+              <a:avLst/>
+            </a:prstGeom>
+            <a:noFill/>
+            <a:ln w="76200" cap="flat" cmpd="sng">
+              <a:solidFill>
+                <a:srgbClr val="FFBD4C"/>
+              </a:solidFill>
+              <a:prstDash val="solid"/>
+              <a:round/>
+              <a:headEnd type="none" w="sm" len="sm"/>
+              <a:tailEnd type="none" w="sm" len="sm"/>
+            </a:ln>
+          </p:spPr>
+        </p:cxnSp>
+        <p:cxnSp>
+          <p:nvCxnSpPr>
+            <p:cNvPr id="378" name="Google Shape;378;p14"/>
+            <p:cNvCxnSpPr/>
+            <p:nvPr/>
+          </p:nvCxnSpPr>
+          <p:spPr>
+            <a:xfrm rot="10800000" flipH="1">
+              <a:off x="430160" y="22212"/>
+              <a:ext cx="454750" cy="633766"/>
+            </a:xfrm>
+            <a:prstGeom prst="straightConnector1">
+              <a:avLst/>
+            </a:prstGeom>
+            <a:noFill/>
+            <a:ln w="76200" cap="flat" cmpd="sng">
+              <a:solidFill>
+                <a:srgbClr val="FFBD4C"/>
+              </a:solidFill>
+              <a:prstDash val="solid"/>
+              <a:round/>
+              <a:headEnd type="none" w="sm" len="sm"/>
+              <a:tailEnd type="none" w="sm" len="sm"/>
+            </a:ln>
+          </p:spPr>
+        </p:cxnSp>
+        <p:cxnSp>
+          <p:nvCxnSpPr>
+            <p:cNvPr id="379" name="Google Shape;379;p14"/>
+            <p:cNvCxnSpPr/>
+            <p:nvPr/>
+          </p:nvCxnSpPr>
+          <p:spPr>
+            <a:xfrm rot="10800000" flipH="1">
+              <a:off x="829364" y="22212"/>
+              <a:ext cx="454750" cy="633766"/>
+            </a:xfrm>
+            <a:prstGeom prst="straightConnector1">
+              <a:avLst/>
+            </a:prstGeom>
+            <a:noFill/>
+            <a:ln w="76200" cap="flat" cmpd="sng">
+              <a:solidFill>
+                <a:srgbClr val="FFBD4C"/>
+              </a:solidFill>
+              <a:prstDash val="solid"/>
+              <a:round/>
+              <a:headEnd type="none" w="sm" len="sm"/>
+              <a:tailEnd type="none" w="sm" len="sm"/>
+            </a:ln>
+          </p:spPr>
+        </p:cxnSp>
+        <p:cxnSp>
+          <p:nvCxnSpPr>
+            <p:cNvPr id="380" name="Google Shape;380;p14"/>
+            <p:cNvCxnSpPr/>
+            <p:nvPr/>
+          </p:nvCxnSpPr>
+          <p:spPr>
+            <a:xfrm rot="10800000" flipH="1">
+              <a:off x="1228569" y="22212"/>
+              <a:ext cx="454750" cy="633766"/>
+            </a:xfrm>
+            <a:prstGeom prst="straightConnector1">
+              <a:avLst/>
+            </a:prstGeom>
+            <a:noFill/>
+            <a:ln w="76200" cap="flat" cmpd="sng">
+              <a:solidFill>
+                <a:srgbClr val="FFBD4C"/>
+              </a:solidFill>
+              <a:prstDash val="solid"/>
+              <a:round/>
+              <a:headEnd type="none" w="sm" len="sm"/>
+              <a:tailEnd type="none" w="sm" len="sm"/>
+            </a:ln>
+          </p:spPr>
+        </p:cxnSp>
+        <p:cxnSp>
+          <p:nvCxnSpPr>
+            <p:cNvPr id="381" name="Google Shape;381;p14"/>
+            <p:cNvCxnSpPr/>
+            <p:nvPr/>
+          </p:nvCxnSpPr>
+          <p:spPr>
+            <a:xfrm rot="10800000" flipH="1">
+              <a:off x="1627773" y="22212"/>
+              <a:ext cx="454750" cy="633766"/>
+            </a:xfrm>
+            <a:prstGeom prst="straightConnector1">
+              <a:avLst/>
+            </a:prstGeom>
+            <a:noFill/>
+            <a:ln w="76200" cap="flat" cmpd="sng">
+              <a:solidFill>
+                <a:srgbClr val="FFBD4C"/>
+              </a:solidFill>
+              <a:prstDash val="solid"/>
+              <a:round/>
+              <a:headEnd type="none" w="sm" len="sm"/>
+              <a:tailEnd type="none" w="sm" len="sm"/>
+            </a:ln>
+          </p:spPr>
+        </p:cxnSp>
+        <p:cxnSp>
+          <p:nvCxnSpPr>
+            <p:cNvPr id="382" name="Google Shape;382;p14"/>
+            <p:cNvCxnSpPr/>
+            <p:nvPr/>
+          </p:nvCxnSpPr>
+          <p:spPr>
+            <a:xfrm rot="10800000" flipH="1">
+              <a:off x="2026977" y="22212"/>
+              <a:ext cx="454750" cy="633766"/>
+            </a:xfrm>
+            <a:prstGeom prst="straightConnector1">
+              <a:avLst/>
+            </a:prstGeom>
+            <a:noFill/>
+            <a:ln w="76200" cap="flat" cmpd="sng">
+              <a:solidFill>
+                <a:srgbClr val="FFBD4C"/>
+              </a:solidFill>
+              <a:prstDash val="solid"/>
+              <a:round/>
+              <a:headEnd type="none" w="sm" len="sm"/>
+              <a:tailEnd type="none" w="sm" len="sm"/>
+            </a:ln>
+          </p:spPr>
+        </p:cxnSp>
+        <p:cxnSp>
+          <p:nvCxnSpPr>
+            <p:cNvPr id="383" name="Google Shape;383;p14"/>
+            <p:cNvCxnSpPr/>
+            <p:nvPr/>
+          </p:nvCxnSpPr>
+          <p:spPr>
+            <a:xfrm rot="10800000" flipH="1">
+              <a:off x="2426182" y="22212"/>
+              <a:ext cx="454750" cy="633766"/>
+            </a:xfrm>
+            <a:prstGeom prst="straightConnector1">
+              <a:avLst/>
+            </a:prstGeom>
+            <a:noFill/>
+            <a:ln w="76200" cap="flat" cmpd="sng">
+              <a:solidFill>
+                <a:srgbClr val="FFBD4C"/>
+              </a:solidFill>
+              <a:prstDash val="solid"/>
+              <a:round/>
+              <a:headEnd type="none" w="sm" len="sm"/>
+              <a:tailEnd type="none" w="sm" len="sm"/>
+            </a:ln>
+          </p:spPr>
+        </p:cxnSp>
+      </p:grpSp>
+      <p:sp>
+        <p:nvSpPr>
+          <p:cNvPr id="4" name="TextBox 3"/>
+          <p:cNvSpPr txBox="1"/>
+          <p:nvPr/>
+        </p:nvSpPr>
+        <p:spPr>
+          <a:xfrm>
+            <a:off x="10889673" y="2757055"/>
+            <a:ext cx="5497969" cy="307777"/>
+          </a:xfrm>
+          <a:prstGeom prst="rect">
+            <a:avLst/>
+          </a:prstGeom>
+          <a:noFill/>
+          <a:ln>
+            <a:noFill/>
+          </a:ln>
+        </p:spPr>
+        <p:txBody>
+          <a:bodyPr wrap="square" rtlCol="0">
+            <a:spAutoFit/>
+          </a:bodyPr>
+          <a:lstStyle/>
+          <a:p>
+            <a:r>
+              <a:rPr lang="ru-RU" dirty="0" smtClean="0"/>
+              <a:t>Действия и результат</a:t>
+            </a:r>
+            <a:endParaRPr lang="ru-RU" dirty="0"/>
+          </a:p>
+        </p:txBody>
+      </p:sp>
+      <p:sp>
+        <p:nvSpPr>
+          <p:cNvPr id="8" name="TextBox 7"/>
+          <p:cNvSpPr txBox="1"/>
+          <p:nvPr/>
+        </p:nvSpPr>
+        <p:spPr>
+          <a:xfrm>
+            <a:off x="766437" y="7663069"/>
+            <a:ext cx="9476509" cy="830997"/>
+          </a:xfrm>
+          <a:prstGeom prst="rect">
+            <a:avLst/>
+          </a:prstGeom>
+          <a:noFill/>
+        </p:spPr>
+        <p:txBody>
+          <a:bodyPr wrap="square" rtlCol="0">
+            <a:spAutoFit/>
+          </a:bodyPr>
+          <a:lstStyle/>
+          <a:p>
+            <a:r>
+              <a:rPr lang="ru-RU" sz="2400" dirty="0" smtClean="0">
+                <a:solidFill>
+                  <a:srgbClr val="FFBD4C"/>
+                </a:solidFill>
+                <a:latin typeface="Arial Black" panose="020B0A04020102020204" pitchFamily="34" charset="0"/>
+              </a:rPr>
+              <a:t>Результат</a:t>
+            </a:r>
+            <a:r>
+              <a:rPr lang="en-US" sz="2400" dirty="0" smtClean="0">
+                <a:solidFill>
+                  <a:srgbClr val="FFBD4C"/>
+                </a:solidFill>
+                <a:latin typeface="Arial Black" panose="020B0A04020102020204" pitchFamily="34" charset="0"/>
+              </a:rPr>
+              <a:t>:</a:t>
+            </a:r>
+          </a:p>
+          <a:p>
+            <a:r>
+              <a:rPr lang="ru-RU" sz="2400" dirty="0" smtClean="0">
+                <a:solidFill>
+                  <a:srgbClr val="FFBD4C"/>
+                </a:solidFill>
+                <a:latin typeface="Arial Black" panose="020B0A04020102020204" pitchFamily="34" charset="0"/>
+              </a:rPr>
+              <a:t>Текст корректно зашифровался и расшифровался </a:t>
+            </a:r>
+            <a:endParaRPr lang="ru-RU" sz="2400" dirty="0">
+              <a:solidFill>
+                <a:srgbClr val="FFBD4C"/>
+              </a:solidFill>
+              <a:latin typeface="Arial Black" panose="020B0A04020102020204" pitchFamily="34" charset="0"/>
+            </a:endParaRPr>
+          </a:p>
+        </p:txBody>
+      </p:sp>
+      <p:pic>
+        <p:nvPicPr>
+          <p:cNvPr id="2" name="Рисунок 1"/>
+          <p:cNvPicPr>
+            <a:picLocks noChangeAspect="1"/>
+          </p:cNvPicPr>
+          <p:nvPr/>
+        </p:nvPicPr>
+        <p:blipFill>
+          <a:blip r:embed="rId3"/>
+          <a:stretch>
+            <a:fillRect/>
+          </a:stretch>
+        </p:blipFill>
+        <p:spPr>
+          <a:xfrm>
+            <a:off x="766437" y="2371159"/>
+            <a:ext cx="7754432" cy="4829849"/>
+          </a:xfrm>
+          <a:prstGeom prst="roundRect">
+            <a:avLst>
+              <a:gd name="adj" fmla="val 10069"/>
+            </a:avLst>
+          </a:prstGeom>
+        </p:spPr>
+      </p:pic>
+      <p:pic>
+        <p:nvPicPr>
+          <p:cNvPr id="3" name="Рисунок 2"/>
+          <p:cNvPicPr>
+            <a:picLocks noChangeAspect="1"/>
+          </p:cNvPicPr>
+          <p:nvPr/>
+        </p:nvPicPr>
+        <p:blipFill>
+          <a:blip r:embed="rId4"/>
+          <a:stretch>
+            <a:fillRect/>
+          </a:stretch>
+        </p:blipFill>
+        <p:spPr>
+          <a:xfrm>
+            <a:off x="9531420" y="2357483"/>
+            <a:ext cx="7754432" cy="4932917"/>
+          </a:xfrm>
+          <a:prstGeom prst="roundRect">
+            <a:avLst>
+              <a:gd name="adj" fmla="val 8793"/>
+            </a:avLst>
+          </a:prstGeom>
+        </p:spPr>
+      </p:pic>
+    </p:spTree>
+    <p:extLst>
+      <p:ext uri="{BB962C8B-B14F-4D97-AF65-F5344CB8AC3E}">
+        <p14:creationId xmlns:p14="http://schemas.microsoft.com/office/powerpoint/2010/main" val="1067429878"/>
+      </p:ext>
+    </p:extLst>
+  </p:cSld>
+  <p:clrMapOvr>
+    <a:masterClrMapping/>
+  </p:clrMapOvr>
+  <p:timing>
+    <p:tnLst>
+      <p:par>
+        <p:cTn id="1" dur="indefinite" restart="never" nodeType="tmRoot"/>
+      </p:par>
+    </p:tnLst>
+  </p:timing>
+</p:sld>
+</file>
+
+<file path=ppt/slides/slide11.xml><?xml version="1.0" encoding="utf-8"?>
+<p:sld xmlns:a="http://schemas.openxmlformats.org/drawingml/2006/main" xmlns:r="http://schemas.openxmlformats.org/officeDocument/2006/relationships" xmlns:p="http://schemas.openxmlformats.org/presentationml/2006/main">
+  <p:cSld>
+    <p:spTree>
+      <p:nvGrpSpPr>
+        <p:cNvPr id="1" name="Shape 342"/>
+        <p:cNvGrpSpPr/>
+        <p:nvPr/>
+      </p:nvGrpSpPr>
+      <p:grpSpPr>
+        <a:xfrm>
+          <a:off x="0" y="0"/>
+          <a:ext cx="0" cy="0"/>
+          <a:chOff x="0" y="0"/>
+          <a:chExt cx="0" cy="0"/>
+        </a:xfrm>
+      </p:grpSpPr>
+      <p:sp>
+        <p:nvSpPr>
+          <p:cNvPr id="351" name="Google Shape;351;p14"/>
+          <p:cNvSpPr txBox="1"/>
+          <p:nvPr/>
+        </p:nvSpPr>
+        <p:spPr>
+          <a:xfrm>
+            <a:off x="491985" y="239416"/>
+            <a:ext cx="13653506" cy="3102388"/>
+          </a:xfrm>
+          <a:prstGeom prst="rect">
+            <a:avLst/>
+          </a:prstGeom>
+          <a:noFill/>
+          <a:ln>
+            <a:noFill/>
+          </a:ln>
+        </p:spPr>
+        <p:txBody>
+          <a:bodyPr spcFirstLastPara="1" wrap="square" lIns="0" tIns="0" rIns="0" bIns="0" anchor="t" anchorCtr="0">
+            <a:spAutoFit/>
+          </a:bodyPr>
+          <a:lstStyle/>
+          <a:p>
+            <a:pPr marL="0" marR="0" lvl="0" indent="0" rtl="0">
+              <a:lnSpc>
+                <a:spcPct val="120000"/>
+              </a:lnSpc>
+              <a:spcBef>
+                <a:spcPts val="0"/>
+              </a:spcBef>
+              <a:spcAft>
+                <a:spcPts val="0"/>
+              </a:spcAft>
+              <a:buNone/>
+            </a:pPr>
+            <a:r>
+              <a:rPr lang="ru-RU" sz="6000" b="0" i="0" u="none" strike="noStrike" cap="none" dirty="0" smtClean="0">
+                <a:solidFill>
+                  <a:srgbClr val="FFBD4C"/>
+                </a:solidFill>
+                <a:latin typeface="Arial Black" panose="020B0A04020102020204" pitchFamily="34" charset="0"/>
+                <a:ea typeface="Montserrat"/>
+                <a:cs typeface="Montserrat"/>
+                <a:sym typeface="Montserrat"/>
+              </a:rPr>
+              <a:t>Тест №</a:t>
+            </a:r>
+            <a:r>
+              <a:rPr lang="en-US" sz="6000" dirty="0" smtClean="0">
+                <a:solidFill>
+                  <a:srgbClr val="FFBD4C"/>
+                </a:solidFill>
+                <a:latin typeface="Arial Black" panose="020B0A04020102020204" pitchFamily="34" charset="0"/>
+                <a:ea typeface="Montserrat"/>
+                <a:cs typeface="Montserrat"/>
+                <a:sym typeface="Montserrat"/>
+              </a:rPr>
+              <a:t>3</a:t>
+            </a:r>
+            <a:endParaRPr lang="ru-RU" sz="6000" b="0" i="0" u="none" strike="noStrike" cap="none" dirty="0" smtClean="0">
+              <a:solidFill>
+                <a:srgbClr val="FFBD4C"/>
+              </a:solidFill>
+              <a:latin typeface="Arial Black" panose="020B0A04020102020204" pitchFamily="34" charset="0"/>
+              <a:ea typeface="Montserrat"/>
+              <a:cs typeface="Montserrat"/>
+              <a:sym typeface="Montserrat"/>
+            </a:endParaRPr>
+          </a:p>
+          <a:p>
+            <a:pPr marL="0" marR="0" lvl="0" indent="0" rtl="0">
+              <a:lnSpc>
+                <a:spcPct val="120000"/>
+              </a:lnSpc>
+              <a:spcBef>
+                <a:spcPts val="0"/>
+              </a:spcBef>
+              <a:spcAft>
+                <a:spcPts val="0"/>
+              </a:spcAft>
+              <a:buNone/>
+            </a:pPr>
+            <a:r>
+              <a:rPr lang="ru-RU" sz="5400" dirty="0" smtClean="0">
+                <a:solidFill>
+                  <a:srgbClr val="FFBD4C"/>
+                </a:solidFill>
+                <a:latin typeface="Arial Black" panose="020B0A04020102020204" pitchFamily="34" charset="0"/>
+                <a:sym typeface="Montserrat"/>
+              </a:rPr>
+              <a:t>Обработка некорректных ключей	</a:t>
+            </a:r>
+            <a:endParaRPr sz="800" dirty="0">
+              <a:latin typeface="Arial Black" panose="020B0A04020102020204" pitchFamily="34" charset="0"/>
+            </a:endParaRPr>
+          </a:p>
+        </p:txBody>
+      </p:sp>
+      <p:grpSp>
+        <p:nvGrpSpPr>
+          <p:cNvPr id="368" name="Google Shape;368;p14"/>
+          <p:cNvGrpSpPr/>
+          <p:nvPr/>
+        </p:nvGrpSpPr>
+        <p:grpSpPr>
+          <a:xfrm>
+            <a:off x="15618305" y="1755"/>
+            <a:ext cx="2137482" cy="475324"/>
+            <a:chOff x="30956" y="22212"/>
+            <a:chExt cx="2849976" cy="633766"/>
+          </a:xfrm>
+        </p:grpSpPr>
+        <p:cxnSp>
+          <p:nvCxnSpPr>
+            <p:cNvPr id="369" name="Google Shape;369;p14"/>
+            <p:cNvCxnSpPr/>
+            <p:nvPr/>
+          </p:nvCxnSpPr>
+          <p:spPr>
+            <a:xfrm rot="10800000" flipH="1">
+              <a:off x="30956" y="22212"/>
+              <a:ext cx="454750" cy="633766"/>
+            </a:xfrm>
+            <a:prstGeom prst="straightConnector1">
+              <a:avLst/>
+            </a:prstGeom>
+            <a:noFill/>
+            <a:ln w="76200" cap="flat" cmpd="sng">
+              <a:solidFill>
+                <a:srgbClr val="FFBD4C"/>
+              </a:solidFill>
+              <a:prstDash val="solid"/>
+              <a:round/>
+              <a:headEnd type="none" w="sm" len="sm"/>
+              <a:tailEnd type="none" w="sm" len="sm"/>
+            </a:ln>
+          </p:spPr>
+        </p:cxnSp>
+        <p:cxnSp>
+          <p:nvCxnSpPr>
+            <p:cNvPr id="370" name="Google Shape;370;p14"/>
+            <p:cNvCxnSpPr/>
+            <p:nvPr/>
+          </p:nvCxnSpPr>
+          <p:spPr>
+            <a:xfrm rot="10800000" flipH="1">
+              <a:off x="430160" y="22212"/>
+              <a:ext cx="454750" cy="633766"/>
+            </a:xfrm>
+            <a:prstGeom prst="straightConnector1">
+              <a:avLst/>
+            </a:prstGeom>
+            <a:noFill/>
+            <a:ln w="76200" cap="flat" cmpd="sng">
+              <a:solidFill>
+                <a:srgbClr val="FFBD4C"/>
+              </a:solidFill>
+              <a:prstDash val="solid"/>
+              <a:round/>
+              <a:headEnd type="none" w="sm" len="sm"/>
+              <a:tailEnd type="none" w="sm" len="sm"/>
+            </a:ln>
+          </p:spPr>
+        </p:cxnSp>
+        <p:cxnSp>
+          <p:nvCxnSpPr>
+            <p:cNvPr id="371" name="Google Shape;371;p14"/>
+            <p:cNvCxnSpPr/>
+            <p:nvPr/>
+          </p:nvCxnSpPr>
+          <p:spPr>
+            <a:xfrm rot="10800000" flipH="1">
+              <a:off x="829364" y="22212"/>
+              <a:ext cx="454750" cy="633766"/>
+            </a:xfrm>
+            <a:prstGeom prst="straightConnector1">
+              <a:avLst/>
+            </a:prstGeom>
+            <a:noFill/>
+            <a:ln w="76200" cap="flat" cmpd="sng">
+              <a:solidFill>
+                <a:srgbClr val="FFBD4C"/>
+              </a:solidFill>
+              <a:prstDash val="solid"/>
+              <a:round/>
+              <a:headEnd type="none" w="sm" len="sm"/>
+              <a:tailEnd type="none" w="sm" len="sm"/>
+            </a:ln>
+          </p:spPr>
+        </p:cxnSp>
+        <p:cxnSp>
+          <p:nvCxnSpPr>
+            <p:cNvPr id="372" name="Google Shape;372;p14"/>
+            <p:cNvCxnSpPr/>
+            <p:nvPr/>
+          </p:nvCxnSpPr>
+          <p:spPr>
+            <a:xfrm rot="10800000" flipH="1">
+              <a:off x="1228569" y="22212"/>
+              <a:ext cx="454750" cy="633766"/>
+            </a:xfrm>
+            <a:prstGeom prst="straightConnector1">
+              <a:avLst/>
+            </a:prstGeom>
+            <a:noFill/>
+            <a:ln w="76200" cap="flat" cmpd="sng">
+              <a:solidFill>
+                <a:srgbClr val="FFBD4C"/>
+              </a:solidFill>
+              <a:prstDash val="solid"/>
+              <a:round/>
+              <a:headEnd type="none" w="sm" len="sm"/>
+              <a:tailEnd type="none" w="sm" len="sm"/>
+            </a:ln>
+          </p:spPr>
+        </p:cxnSp>
+        <p:cxnSp>
+          <p:nvCxnSpPr>
+            <p:cNvPr id="373" name="Google Shape;373;p14"/>
+            <p:cNvCxnSpPr/>
+            <p:nvPr/>
+          </p:nvCxnSpPr>
+          <p:spPr>
+            <a:xfrm rot="10800000" flipH="1">
+              <a:off x="1627773" y="22212"/>
+              <a:ext cx="454750" cy="633766"/>
+            </a:xfrm>
+            <a:prstGeom prst="straightConnector1">
+              <a:avLst/>
+            </a:prstGeom>
+            <a:noFill/>
+            <a:ln w="76200" cap="flat" cmpd="sng">
+              <a:solidFill>
+                <a:srgbClr val="FFBD4C"/>
+              </a:solidFill>
+              <a:prstDash val="solid"/>
+              <a:round/>
+              <a:headEnd type="none" w="sm" len="sm"/>
+              <a:tailEnd type="none" w="sm" len="sm"/>
+            </a:ln>
+          </p:spPr>
+        </p:cxnSp>
+        <p:cxnSp>
+          <p:nvCxnSpPr>
+            <p:cNvPr id="374" name="Google Shape;374;p14"/>
+            <p:cNvCxnSpPr/>
+            <p:nvPr/>
+          </p:nvCxnSpPr>
+          <p:spPr>
+            <a:xfrm rot="10800000" flipH="1">
+              <a:off x="2026977" y="22212"/>
+              <a:ext cx="454750" cy="633766"/>
+            </a:xfrm>
+            <a:prstGeom prst="straightConnector1">
+              <a:avLst/>
+            </a:prstGeom>
+            <a:noFill/>
+            <a:ln w="76200" cap="flat" cmpd="sng">
+              <a:solidFill>
+                <a:srgbClr val="FFBD4C"/>
+              </a:solidFill>
+              <a:prstDash val="solid"/>
+              <a:round/>
+              <a:headEnd type="none" w="sm" len="sm"/>
+              <a:tailEnd type="none" w="sm" len="sm"/>
+            </a:ln>
+          </p:spPr>
+        </p:cxnSp>
+        <p:cxnSp>
+          <p:nvCxnSpPr>
+            <p:cNvPr id="375" name="Google Shape;375;p14"/>
+            <p:cNvCxnSpPr/>
+            <p:nvPr/>
+          </p:nvCxnSpPr>
+          <p:spPr>
+            <a:xfrm rot="10800000" flipH="1">
+              <a:off x="2426182" y="22212"/>
+              <a:ext cx="454750" cy="633766"/>
+            </a:xfrm>
+            <a:prstGeom prst="straightConnector1">
+              <a:avLst/>
+            </a:prstGeom>
+            <a:noFill/>
+            <a:ln w="76200" cap="flat" cmpd="sng">
+              <a:solidFill>
+                <a:srgbClr val="FFBD4C"/>
+              </a:solidFill>
+              <a:prstDash val="solid"/>
+              <a:round/>
+              <a:headEnd type="none" w="sm" len="sm"/>
+              <a:tailEnd type="none" w="sm" len="sm"/>
+            </a:ln>
+          </p:spPr>
+        </p:cxnSp>
+      </p:grpSp>
+      <p:grpSp>
+        <p:nvGrpSpPr>
+          <p:cNvPr id="376" name="Google Shape;376;p14"/>
+          <p:cNvGrpSpPr/>
+          <p:nvPr/>
+        </p:nvGrpSpPr>
+        <p:grpSpPr>
+          <a:xfrm rot="5400000">
+            <a:off x="-814419" y="7426244"/>
+            <a:ext cx="2137482" cy="475324"/>
+            <a:chOff x="30956" y="22212"/>
+            <a:chExt cx="2849976" cy="633766"/>
+          </a:xfrm>
+        </p:grpSpPr>
+        <p:cxnSp>
+          <p:nvCxnSpPr>
+            <p:cNvPr id="377" name="Google Shape;377;p14"/>
+            <p:cNvCxnSpPr/>
+            <p:nvPr/>
+          </p:nvCxnSpPr>
+          <p:spPr>
+            <a:xfrm rot="10800000" flipH="1">
+              <a:off x="30956" y="22212"/>
+              <a:ext cx="454750" cy="633766"/>
+            </a:xfrm>
+            <a:prstGeom prst="straightConnector1">
+              <a:avLst/>
+            </a:prstGeom>
+            <a:noFill/>
+            <a:ln w="76200" cap="flat" cmpd="sng">
+              <a:solidFill>
+                <a:srgbClr val="FFBD4C"/>
+              </a:solidFill>
+              <a:prstDash val="solid"/>
+              <a:round/>
+              <a:headEnd type="none" w="sm" len="sm"/>
+              <a:tailEnd type="none" w="sm" len="sm"/>
+            </a:ln>
+          </p:spPr>
+        </p:cxnSp>
+        <p:cxnSp>
+          <p:nvCxnSpPr>
+            <p:cNvPr id="378" name="Google Shape;378;p14"/>
+            <p:cNvCxnSpPr/>
+            <p:nvPr/>
+          </p:nvCxnSpPr>
+          <p:spPr>
+            <a:xfrm rot="10800000" flipH="1">
+              <a:off x="430160" y="22212"/>
+              <a:ext cx="454750" cy="633766"/>
+            </a:xfrm>
+            <a:prstGeom prst="straightConnector1">
+              <a:avLst/>
+            </a:prstGeom>
+            <a:noFill/>
+            <a:ln w="76200" cap="flat" cmpd="sng">
+              <a:solidFill>
+                <a:srgbClr val="FFBD4C"/>
+              </a:solidFill>
+              <a:prstDash val="solid"/>
+              <a:round/>
+              <a:headEnd type="none" w="sm" len="sm"/>
+              <a:tailEnd type="none" w="sm" len="sm"/>
+            </a:ln>
+          </p:spPr>
+        </p:cxnSp>
+        <p:cxnSp>
+          <p:nvCxnSpPr>
+            <p:cNvPr id="379" name="Google Shape;379;p14"/>
+            <p:cNvCxnSpPr/>
+            <p:nvPr/>
+          </p:nvCxnSpPr>
+          <p:spPr>
+            <a:xfrm rot="10800000" flipH="1">
+              <a:off x="829364" y="22212"/>
+              <a:ext cx="454750" cy="633766"/>
+            </a:xfrm>
+            <a:prstGeom prst="straightConnector1">
+              <a:avLst/>
+            </a:prstGeom>
+            <a:noFill/>
+            <a:ln w="76200" cap="flat" cmpd="sng">
+              <a:solidFill>
+                <a:srgbClr val="FFBD4C"/>
+              </a:solidFill>
+              <a:prstDash val="solid"/>
+              <a:round/>
+              <a:headEnd type="none" w="sm" len="sm"/>
+              <a:tailEnd type="none" w="sm" len="sm"/>
+            </a:ln>
+          </p:spPr>
+        </p:cxnSp>
+        <p:cxnSp>
+          <p:nvCxnSpPr>
+            <p:cNvPr id="380" name="Google Shape;380;p14"/>
+            <p:cNvCxnSpPr/>
+            <p:nvPr/>
+          </p:nvCxnSpPr>
+          <p:spPr>
+            <a:xfrm rot="10800000" flipH="1">
+              <a:off x="1228569" y="22212"/>
+              <a:ext cx="454750" cy="633766"/>
+            </a:xfrm>
+            <a:prstGeom prst="straightConnector1">
+              <a:avLst/>
+            </a:prstGeom>
+            <a:noFill/>
+            <a:ln w="76200" cap="flat" cmpd="sng">
+              <a:solidFill>
+                <a:srgbClr val="FFBD4C"/>
+              </a:solidFill>
+              <a:prstDash val="solid"/>
+              <a:round/>
+              <a:headEnd type="none" w="sm" len="sm"/>
+              <a:tailEnd type="none" w="sm" len="sm"/>
+            </a:ln>
+          </p:spPr>
+        </p:cxnSp>
+        <p:cxnSp>
+          <p:nvCxnSpPr>
+            <p:cNvPr id="381" name="Google Shape;381;p14"/>
+            <p:cNvCxnSpPr/>
+            <p:nvPr/>
+          </p:nvCxnSpPr>
+          <p:spPr>
+            <a:xfrm rot="10800000" flipH="1">
+              <a:off x="1627773" y="22212"/>
+              <a:ext cx="454750" cy="633766"/>
+            </a:xfrm>
+            <a:prstGeom prst="straightConnector1">
+              <a:avLst/>
+            </a:prstGeom>
+            <a:noFill/>
+            <a:ln w="76200" cap="flat" cmpd="sng">
+              <a:solidFill>
+                <a:srgbClr val="FFBD4C"/>
+              </a:solidFill>
+              <a:prstDash val="solid"/>
+              <a:round/>
+              <a:headEnd type="none" w="sm" len="sm"/>
+              <a:tailEnd type="none" w="sm" len="sm"/>
+            </a:ln>
+          </p:spPr>
+        </p:cxnSp>
+        <p:cxnSp>
+          <p:nvCxnSpPr>
+            <p:cNvPr id="382" name="Google Shape;382;p14"/>
+            <p:cNvCxnSpPr/>
+            <p:nvPr/>
+          </p:nvCxnSpPr>
+          <p:spPr>
+            <a:xfrm rot="10800000" flipH="1">
+              <a:off x="2026977" y="22212"/>
+              <a:ext cx="454750" cy="633766"/>
+            </a:xfrm>
+            <a:prstGeom prst="straightConnector1">
+              <a:avLst/>
+            </a:prstGeom>
+            <a:noFill/>
+            <a:ln w="76200" cap="flat" cmpd="sng">
+              <a:solidFill>
+                <a:srgbClr val="FFBD4C"/>
+              </a:solidFill>
+              <a:prstDash val="solid"/>
+              <a:round/>
+              <a:headEnd type="none" w="sm" len="sm"/>
+              <a:tailEnd type="none" w="sm" len="sm"/>
+            </a:ln>
+          </p:spPr>
+        </p:cxnSp>
+        <p:cxnSp>
+          <p:nvCxnSpPr>
+            <p:cNvPr id="383" name="Google Shape;383;p14"/>
+            <p:cNvCxnSpPr/>
+            <p:nvPr/>
+          </p:nvCxnSpPr>
+          <p:spPr>
+            <a:xfrm rot="10800000" flipH="1">
+              <a:off x="2426182" y="22212"/>
+              <a:ext cx="454750" cy="633766"/>
+            </a:xfrm>
+            <a:prstGeom prst="straightConnector1">
+              <a:avLst/>
+            </a:prstGeom>
+            <a:noFill/>
+            <a:ln w="76200" cap="flat" cmpd="sng">
+              <a:solidFill>
+                <a:srgbClr val="FFBD4C"/>
+              </a:solidFill>
+              <a:prstDash val="solid"/>
+              <a:round/>
+              <a:headEnd type="none" w="sm" len="sm"/>
+              <a:tailEnd type="none" w="sm" len="sm"/>
+            </a:ln>
+          </p:spPr>
+        </p:cxnSp>
+      </p:grpSp>
+      <p:sp>
+        <p:nvSpPr>
+          <p:cNvPr id="4" name="TextBox 3"/>
+          <p:cNvSpPr txBox="1"/>
+          <p:nvPr/>
+        </p:nvSpPr>
+        <p:spPr>
+          <a:xfrm>
+            <a:off x="10889673" y="2757055"/>
+            <a:ext cx="5497969" cy="307777"/>
+          </a:xfrm>
+          <a:prstGeom prst="rect">
+            <a:avLst/>
+          </a:prstGeom>
+          <a:noFill/>
+          <a:ln>
+            <a:noFill/>
+          </a:ln>
+        </p:spPr>
+        <p:txBody>
+          <a:bodyPr wrap="square" rtlCol="0">
+            <a:spAutoFit/>
+          </a:bodyPr>
+          <a:lstStyle/>
+          <a:p>
+            <a:r>
+              <a:rPr lang="ru-RU" dirty="0" smtClean="0"/>
+              <a:t>Действия и результат</a:t>
+            </a:r>
+            <a:endParaRPr lang="ru-RU" dirty="0"/>
+          </a:p>
+        </p:txBody>
+      </p:sp>
+      <p:sp>
+        <p:nvSpPr>
+          <p:cNvPr id="8" name="TextBox 7"/>
+          <p:cNvSpPr txBox="1"/>
+          <p:nvPr/>
+        </p:nvSpPr>
+        <p:spPr>
+          <a:xfrm>
+            <a:off x="766437" y="7663069"/>
+            <a:ext cx="9476509" cy="1200329"/>
+          </a:xfrm>
+          <a:prstGeom prst="rect">
+            <a:avLst/>
+          </a:prstGeom>
+          <a:noFill/>
+        </p:spPr>
+        <p:txBody>
+          <a:bodyPr wrap="square" rtlCol="0">
+            <a:spAutoFit/>
+          </a:bodyPr>
+          <a:lstStyle/>
+          <a:p>
+            <a:r>
+              <a:rPr lang="ru-RU" sz="2400" dirty="0" smtClean="0">
+                <a:solidFill>
+                  <a:srgbClr val="FFBD4C"/>
+                </a:solidFill>
+                <a:latin typeface="Arial Black" panose="020B0A04020102020204" pitchFamily="34" charset="0"/>
+              </a:rPr>
+              <a:t>Результат</a:t>
+            </a:r>
+            <a:r>
+              <a:rPr lang="en-US" sz="2400" dirty="0" smtClean="0">
+                <a:solidFill>
+                  <a:srgbClr val="FFBD4C"/>
+                </a:solidFill>
+                <a:latin typeface="Arial Black" panose="020B0A04020102020204" pitchFamily="34" charset="0"/>
+              </a:rPr>
+              <a:t>:</a:t>
+            </a:r>
+          </a:p>
+          <a:p>
+            <a:r>
+              <a:rPr lang="ru-RU" sz="2400" dirty="0" smtClean="0">
+                <a:solidFill>
+                  <a:srgbClr val="FFBD4C"/>
+                </a:solidFill>
+                <a:latin typeface="Arial Black" panose="020B0A04020102020204" pitchFamily="34" charset="0"/>
+              </a:rPr>
+              <a:t>Некорректные ключи определяются правильно</a:t>
+            </a:r>
+          </a:p>
+          <a:p>
+            <a:r>
+              <a:rPr lang="ru-RU" sz="2400" dirty="0" smtClean="0">
+                <a:solidFill>
+                  <a:srgbClr val="FFBD4C"/>
+                </a:solidFill>
+                <a:latin typeface="Arial Black" panose="020B0A04020102020204" pitchFamily="34" charset="0"/>
+              </a:rPr>
+              <a:t>Выводится сообщение об ошибке  </a:t>
+            </a:r>
+            <a:endParaRPr lang="ru-RU" sz="2400" dirty="0">
+              <a:solidFill>
+                <a:srgbClr val="FFBD4C"/>
+              </a:solidFill>
+              <a:latin typeface="Arial Black" panose="020B0A04020102020204" pitchFamily="34" charset="0"/>
+            </a:endParaRPr>
+          </a:p>
+        </p:txBody>
+      </p:sp>
+      <p:pic>
+        <p:nvPicPr>
+          <p:cNvPr id="2" name="Рисунок 1"/>
+          <p:cNvPicPr>
+            <a:picLocks noChangeAspect="1"/>
+          </p:cNvPicPr>
+          <p:nvPr/>
+        </p:nvPicPr>
+        <p:blipFill>
+          <a:blip r:embed="rId3"/>
+          <a:stretch>
+            <a:fillRect/>
+          </a:stretch>
+        </p:blipFill>
+        <p:spPr>
+          <a:xfrm>
+            <a:off x="807353" y="2348624"/>
+            <a:ext cx="7840169" cy="4887007"/>
+          </a:xfrm>
+          <a:prstGeom prst="roundRect">
+            <a:avLst>
+              <a:gd name="adj" fmla="val 8729"/>
+            </a:avLst>
+          </a:prstGeom>
+        </p:spPr>
+      </p:pic>
+      <p:pic>
+        <p:nvPicPr>
+          <p:cNvPr id="3" name="Рисунок 2"/>
+          <p:cNvPicPr>
+            <a:picLocks noChangeAspect="1"/>
+          </p:cNvPicPr>
+          <p:nvPr/>
+        </p:nvPicPr>
+        <p:blipFill>
+          <a:blip r:embed="rId4"/>
+          <a:stretch>
+            <a:fillRect/>
+          </a:stretch>
+        </p:blipFill>
+        <p:spPr>
+          <a:xfrm>
+            <a:off x="9663847" y="2348624"/>
+            <a:ext cx="7792537" cy="4810796"/>
+          </a:xfrm>
+          <a:prstGeom prst="roundRect">
+            <a:avLst>
+              <a:gd name="adj" fmla="val 8939"/>
+            </a:avLst>
+          </a:prstGeom>
+        </p:spPr>
+      </p:pic>
+    </p:spTree>
+    <p:extLst>
+      <p:ext uri="{BB962C8B-B14F-4D97-AF65-F5344CB8AC3E}">
+        <p14:creationId xmlns:p14="http://schemas.microsoft.com/office/powerpoint/2010/main" val="2637820430"/>
+      </p:ext>
+    </p:extLst>
+  </p:cSld>
+  <p:clrMapOvr>
+    <a:masterClrMapping/>
+  </p:clrMapOvr>
+  <p:timing>
+    <p:tnLst>
+      <p:par>
+        <p:cTn id="1" dur="indefinite" restart="never" nodeType="tmRoot"/>
+      </p:par>
+    </p:tnLst>
+  </p:timing>
+</p:sld>
+</file>
+
+<file path=ppt/slides/slide12.xml><?xml version="1.0" encoding="utf-8"?>
 <p:sld xmlns:a="http://schemas.openxmlformats.org/drawingml/2006/main" xmlns:r="http://schemas.openxmlformats.org/officeDocument/2006/relationships" xmlns:p="http://schemas.openxmlformats.org/presentationml/2006/main">
   <p:cSld>
     <p:bg>
@@ -12333,210 +13806,6 @@
           <a:chExt cx="0" cy="0"/>
         </a:xfrm>
       </p:grpSpPr>
-      <p:pic>
-        <p:nvPicPr>
-          <p:cNvPr id="412" name="Google Shape;412;p16"/>
-          <p:cNvPicPr preferRelativeResize="0"/>
-          <p:nvPr/>
-        </p:nvPicPr>
-        <p:blipFill>
-          <a:blip r:embed="rId3">
-            <a:alphaModFix/>
-          </a:blip>
-          <a:stretch>
-            <a:fillRect/>
-          </a:stretch>
-        </p:blipFill>
-        <p:spPr>
-          <a:xfrm>
-            <a:off x="16440289" y="-210900"/>
-            <a:ext cx="1409422" cy="1788875"/>
-          </a:xfrm>
-          <a:prstGeom prst="rect">
-            <a:avLst/>
-          </a:prstGeom>
-          <a:noFill/>
-          <a:ln>
-            <a:noFill/>
-          </a:ln>
-        </p:spPr>
-      </p:pic>
-      <p:grpSp>
-        <p:nvGrpSpPr>
-          <p:cNvPr id="423" name="Google Shape;423;p16"/>
-          <p:cNvGrpSpPr/>
-          <p:nvPr/>
-        </p:nvGrpSpPr>
-        <p:grpSpPr>
-          <a:xfrm>
-            <a:off x="1547796" y="1655458"/>
-            <a:ext cx="6620844" cy="6055982"/>
-            <a:chOff x="0" y="-38100"/>
-            <a:chExt cx="1453371" cy="1522554"/>
-          </a:xfrm>
-        </p:grpSpPr>
-        <p:sp>
-          <p:nvSpPr>
-            <p:cNvPr id="424" name="Google Shape;424;p16"/>
-            <p:cNvSpPr/>
-            <p:nvPr/>
-          </p:nvSpPr>
-          <p:spPr>
-            <a:xfrm>
-              <a:off x="0" y="0"/>
-              <a:ext cx="1453371" cy="1484454"/>
-            </a:xfrm>
-            <a:custGeom>
-              <a:avLst/>
-              <a:gdLst/>
-              <a:ahLst/>
-              <a:cxnLst/>
-              <a:rect l="l" t="t" r="r" b="b"/>
-              <a:pathLst>
-                <a:path w="1453371" h="1484454" extrusionOk="0">
-                  <a:moveTo>
-                    <a:pt x="35704" y="0"/>
-                  </a:moveTo>
-                  <a:lnTo>
-                    <a:pt x="1417667" y="0"/>
-                  </a:lnTo>
-                  <a:cubicBezTo>
-                    <a:pt x="1427137" y="0"/>
-                    <a:pt x="1436218" y="3762"/>
-                    <a:pt x="1442914" y="10457"/>
-                  </a:cubicBezTo>
-                  <a:cubicBezTo>
-                    <a:pt x="1449609" y="17153"/>
-                    <a:pt x="1453371" y="26235"/>
-                    <a:pt x="1453371" y="35704"/>
-                  </a:cubicBezTo>
-                  <a:lnTo>
-                    <a:pt x="1453371" y="1448750"/>
-                  </a:lnTo>
-                  <a:cubicBezTo>
-                    <a:pt x="1453371" y="1458219"/>
-                    <a:pt x="1449609" y="1467301"/>
-                    <a:pt x="1442914" y="1473997"/>
-                  </a:cubicBezTo>
-                  <a:cubicBezTo>
-                    <a:pt x="1436218" y="1480692"/>
-                    <a:pt x="1427137" y="1484454"/>
-                    <a:pt x="1417667" y="1484454"/>
-                  </a:cubicBezTo>
-                  <a:lnTo>
-                    <a:pt x="35704" y="1484454"/>
-                  </a:lnTo>
-                  <a:cubicBezTo>
-                    <a:pt x="26235" y="1484454"/>
-                    <a:pt x="17153" y="1480692"/>
-                    <a:pt x="10457" y="1473997"/>
-                  </a:cubicBezTo>
-                  <a:cubicBezTo>
-                    <a:pt x="3762" y="1467301"/>
-                    <a:pt x="0" y="1458219"/>
-                    <a:pt x="0" y="1448750"/>
-                  </a:cubicBezTo>
-                  <a:lnTo>
-                    <a:pt x="0" y="35704"/>
-                  </a:lnTo>
-                  <a:cubicBezTo>
-                    <a:pt x="0" y="26235"/>
-                    <a:pt x="3762" y="17153"/>
-                    <a:pt x="10457" y="10457"/>
-                  </a:cubicBezTo>
-                  <a:cubicBezTo>
-                    <a:pt x="17153" y="3762"/>
-                    <a:pt x="26235" y="0"/>
-                    <a:pt x="35704" y="0"/>
-                  </a:cubicBezTo>
-                  <a:close/>
-                </a:path>
-              </a:pathLst>
-            </a:custGeom>
-            <a:solidFill>
-              <a:srgbClr val="000000">
-                <a:alpha val="0"/>
-              </a:srgbClr>
-            </a:solidFill>
-            <a:ln w="38100" cap="sq" cmpd="sng">
-              <a:solidFill>
-                <a:srgbClr val="FFBD4C"/>
-              </a:solidFill>
-              <a:prstDash val="solid"/>
-              <a:miter lim="8000"/>
-              <a:headEnd type="none" w="sm" len="sm"/>
-              <a:tailEnd type="none" w="sm" len="sm"/>
-            </a:ln>
-          </p:spPr>
-          <p:txBody>
-            <a:bodyPr spcFirstLastPara="1" wrap="square" lIns="91425" tIns="91425" rIns="91425" bIns="91425" anchor="ctr" anchorCtr="0">
-              <a:noAutofit/>
-            </a:bodyPr>
-            <a:lstStyle/>
-            <a:p>
-              <a:pPr marL="0" lvl="0" indent="0" algn="l" rtl="0">
-                <a:spcBef>
-                  <a:spcPts val="0"/>
-                </a:spcBef>
-                <a:spcAft>
-                  <a:spcPts val="0"/>
-                </a:spcAft>
-                <a:buNone/>
-              </a:pPr>
-              <a:endParaRPr/>
-            </a:p>
-          </p:txBody>
-        </p:sp>
-        <p:sp>
-          <p:nvSpPr>
-            <p:cNvPr id="425" name="Google Shape;425;p16"/>
-            <p:cNvSpPr txBox="1"/>
-            <p:nvPr/>
-          </p:nvSpPr>
-          <p:spPr>
-            <a:xfrm>
-              <a:off x="0" y="-38100"/>
-              <a:ext cx="1453371" cy="1522554"/>
-            </a:xfrm>
-            <a:prstGeom prst="rect">
-              <a:avLst/>
-            </a:prstGeom>
-            <a:noFill/>
-            <a:ln>
-              <a:noFill/>
-            </a:ln>
-          </p:spPr>
-          <p:txBody>
-            <a:bodyPr spcFirstLastPara="1" wrap="square" lIns="50800" tIns="50800" rIns="50800" bIns="50800" anchor="ctr" anchorCtr="0">
-              <a:noAutofit/>
-            </a:bodyPr>
-            <a:lstStyle/>
-            <a:p>
-              <a:pPr marL="0" marR="0" lvl="0" indent="0" algn="ctr" rtl="0">
-                <a:lnSpc>
-                  <a:spcPct val="186611"/>
-                </a:lnSpc>
-                <a:spcBef>
-                  <a:spcPts val="0"/>
-                </a:spcBef>
-                <a:spcAft>
-                  <a:spcPts val="0"/>
-                </a:spcAft>
-                <a:buNone/>
-              </a:pPr>
-              <a:endParaRPr sz="1800" b="0" i="0" u="none" strike="noStrike" cap="none">
-                <a:solidFill>
-                  <a:schemeClr val="dk1"/>
-                </a:solidFill>
-                <a:latin typeface="Calibri"/>
-                <a:ea typeface="Calibri"/>
-                <a:cs typeface="Calibri"/>
-                <a:sym typeface="Calibri"/>
-              </a:endParaRPr>
-            </a:p>
-          </p:txBody>
-        </p:sp>
-      </p:grpSp>
       <p:sp>
         <p:nvSpPr>
           <p:cNvPr id="426" name="Google Shape;426;p16"/>
@@ -12600,8 +13869,8 @@
         </p:nvSpPr>
         <p:spPr>
           <a:xfrm>
-            <a:off x="1547796" y="1142204"/>
-            <a:ext cx="5129090" cy="664797"/>
+            <a:off x="900545" y="1577975"/>
+            <a:ext cx="16833272" cy="7682103"/>
           </a:xfrm>
           <a:prstGeom prst="rect">
             <a:avLst/>
@@ -12617,237 +13886,136 @@
           </a:bodyPr>
           <a:lstStyle/>
           <a:p>
-            <a:pPr marL="0" marR="0" lvl="0" indent="0" algn="ctr" rtl="0">
+            <a:pPr lvl="0">
               <a:lnSpc>
                 <a:spcPct val="120005"/>
               </a:lnSpc>
-              <a:spcBef>
-                <a:spcPts val="0"/>
-              </a:spcBef>
-              <a:spcAft>
-                <a:spcPts val="0"/>
-              </a:spcAft>
-              <a:buNone/>
             </a:pPr>
             <a:r>
-              <a:rPr lang="ru-RU" sz="3600" b="1" i="0" u="none" strike="noStrike" cap="none" dirty="0" smtClean="0">
+              <a:rPr lang="ru-RU" sz="3200" dirty="0">
                 <a:solidFill>
                   <a:srgbClr val="FFBD4C"/>
                 </a:solidFill>
                 <a:latin typeface="Arial Black" panose="020B0A04020102020204" pitchFamily="34" charset="0"/>
-                <a:ea typeface="Raleway"/>
-                <a:cs typeface="Raleway"/>
-                <a:sym typeface="Raleway"/>
               </a:rPr>
-              <a:t>Что было сделано</a:t>
+              <a:t>В ходе выполнения проекта был разработан сайт для шифрования текста с использованием </a:t>
             </a:r>
             <a:r>
-              <a:rPr lang="en-US" sz="3600" b="1" i="0" u="none" strike="noStrike" cap="none" dirty="0" smtClean="0">
+              <a:rPr lang="ru-RU" sz="3200" dirty="0" err="1">
                 <a:solidFill>
                   <a:srgbClr val="FFBD4C"/>
                 </a:solidFill>
                 <a:latin typeface="Arial Black" panose="020B0A04020102020204" pitchFamily="34" charset="0"/>
-                <a:ea typeface="Raleway"/>
-                <a:cs typeface="Raleway"/>
-                <a:sym typeface="Raleway"/>
               </a:rPr>
-              <a:t>:</a:t>
+              <a:t>афинного</a:t>
             </a:r>
-            <a:endParaRPr sz="1600" dirty="0">
-              <a:latin typeface="Arial Black" panose="020B0A04020102020204" pitchFamily="34" charset="0"/>
-            </a:endParaRPr>
-          </a:p>
-        </p:txBody>
-      </p:sp>
-      <p:sp>
-        <p:nvSpPr>
-          <p:cNvPr id="430" name="Google Shape;430;p16"/>
-          <p:cNvSpPr txBox="1"/>
-          <p:nvPr/>
-        </p:nvSpPr>
-        <p:spPr>
-          <a:xfrm>
-            <a:off x="1709603" y="2050786"/>
-            <a:ext cx="6586040" cy="5416868"/>
-          </a:xfrm>
-          <a:prstGeom prst="rect">
-            <a:avLst/>
-          </a:prstGeom>
-          <a:noFill/>
-          <a:ln>
-            <a:noFill/>
-          </a:ln>
-        </p:spPr>
-        <p:txBody>
-          <a:bodyPr spcFirstLastPara="1" wrap="square" lIns="0" tIns="0" rIns="0" bIns="0" anchor="t" anchorCtr="0">
-            <a:spAutoFit/>
-          </a:bodyPr>
-          <a:lstStyle/>
-          <a:p>
-            <a:pPr marL="0" marR="0" lvl="0" indent="0" rtl="0">
-              <a:lnSpc>
-                <a:spcPct val="100000"/>
-              </a:lnSpc>
-              <a:spcBef>
-                <a:spcPts val="0"/>
-              </a:spcBef>
-              <a:spcAft>
-                <a:spcPts val="0"/>
-              </a:spcAft>
-              <a:buNone/>
-            </a:pPr>
             <a:r>
-              <a:rPr lang="en-US" sz="3200" dirty="0" smtClean="0">
+              <a:rPr lang="ru-RU" sz="3200" dirty="0">
                 <a:solidFill>
-                  <a:schemeClr val="bg1"/>
+                  <a:srgbClr val="FFBD4C"/>
                 </a:solidFill>
                 <a:latin typeface="Arial Black" panose="020B0A04020102020204" pitchFamily="34" charset="0"/>
               </a:rPr>
-              <a:t>-</a:t>
+              <a:t> шифра. Были изучены основы криптографии, принцип работы алгоритма и особенности веб-разработки</a:t>
             </a:r>
             <a:r>
               <a:rPr lang="ru-RU" sz="3200" dirty="0" smtClean="0">
                 <a:solidFill>
-                  <a:schemeClr val="bg1"/>
+                  <a:srgbClr val="FFBD4C"/>
                 </a:solidFill>
                 <a:latin typeface="Arial Black" panose="020B0A04020102020204" pitchFamily="34" charset="0"/>
               </a:rPr>
-              <a:t> Составлен сценарий использования веб-сайта</a:t>
+              <a:t>.</a:t>
             </a:r>
-            <a:endParaRPr lang="en-US" sz="3200" dirty="0" smtClean="0">
-              <a:solidFill>
-                <a:schemeClr val="bg1"/>
+            <a:endParaRPr lang="ru-RU" sz="3200" dirty="0">
+              <a:solidFill>
+                <a:srgbClr val="FFBD4C"/>
               </a:solidFill>
               <a:latin typeface="Arial Black" panose="020B0A04020102020204" pitchFamily="34" charset="0"/>
             </a:endParaRPr>
           </a:p>
           <a:p>
-            <a:pPr marL="0" marR="0" lvl="0" indent="0" rtl="0">
+            <a:pPr lvl="0">
               <a:lnSpc>
-                <a:spcPct val="100000"/>
+                <a:spcPct val="120005"/>
               </a:lnSpc>
-              <a:spcBef>
-                <a:spcPts val="0"/>
-              </a:spcBef>
-              <a:spcAft>
-                <a:spcPts val="0"/>
-              </a:spcAft>
-              <a:buNone/>
             </a:pPr>
-            <a:endParaRPr lang="ru-RU" sz="3200" dirty="0" smtClean="0">
-              <a:solidFill>
-                <a:schemeClr val="bg1"/>
+            <a:r>
+              <a:rPr lang="ru-RU" sz="3200" dirty="0">
+                <a:solidFill>
+                  <a:srgbClr val="FFBD4C"/>
+                </a:solidFill>
+                <a:latin typeface="Arial Black" panose="020B0A04020102020204" pitchFamily="34" charset="0"/>
+              </a:rPr>
+              <a:t>В процессе создания проекта реализованы функции шифрования и дешифрования текста, настройка параметров шифра и автоматический вывод результата</a:t>
+            </a:r>
+            <a:r>
+              <a:rPr lang="ru-RU" sz="3200" dirty="0" smtClean="0">
+                <a:solidFill>
+                  <a:srgbClr val="FFBD4C"/>
+                </a:solidFill>
+                <a:latin typeface="Arial Black" panose="020B0A04020102020204" pitchFamily="34" charset="0"/>
+              </a:rPr>
+              <a:t>.</a:t>
+            </a:r>
+            <a:endParaRPr lang="ru-RU" sz="3200" dirty="0">
+              <a:solidFill>
+                <a:srgbClr val="FFBD4C"/>
               </a:solidFill>
               <a:latin typeface="Arial Black" panose="020B0A04020102020204" pitchFamily="34" charset="0"/>
             </a:endParaRPr>
           </a:p>
           <a:p>
-            <a:pPr marL="0" marR="0" lvl="0" indent="0" rtl="0">
+            <a:pPr lvl="0">
               <a:lnSpc>
-                <a:spcPct val="100000"/>
+                <a:spcPct val="120005"/>
               </a:lnSpc>
-              <a:spcBef>
-                <a:spcPts val="0"/>
-              </a:spcBef>
-              <a:spcAft>
-                <a:spcPts val="0"/>
-              </a:spcAft>
-              <a:buNone/>
             </a:pPr>
             <a:r>
-              <a:rPr lang="en-US" sz="3200" dirty="0" smtClean="0">
+              <a:rPr lang="ru-RU" sz="3200" dirty="0">
                 <a:solidFill>
-                  <a:schemeClr val="bg1"/>
+                  <a:srgbClr val="FFBD4C"/>
                 </a:solidFill>
                 <a:latin typeface="Arial Black" panose="020B0A04020102020204" pitchFamily="34" charset="0"/>
               </a:rPr>
-              <a:t>-</a:t>
+              <a:t>Также было проведено тестирование веб-приложения, которое показало корректную работу алгоритма и правильность обработки пользовательских данных</a:t>
             </a:r>
             <a:r>
               <a:rPr lang="ru-RU" sz="3200" dirty="0" smtClean="0">
                 <a:solidFill>
-                  <a:schemeClr val="bg1"/>
+                  <a:srgbClr val="FFBD4C"/>
                 </a:solidFill>
                 <a:latin typeface="Arial Black" panose="020B0A04020102020204" pitchFamily="34" charset="0"/>
               </a:rPr>
-              <a:t> Было проверено что шифровка и дешифровка работают корректно</a:t>
+              <a:t>.</a:t>
             </a:r>
-            <a:endParaRPr lang="en-US" sz="3200" dirty="0" smtClean="0">
-              <a:solidFill>
-                <a:schemeClr val="bg1"/>
+            <a:endParaRPr lang="ru-RU" sz="3200" dirty="0">
+              <a:solidFill>
+                <a:srgbClr val="FFBD4C"/>
               </a:solidFill>
               <a:latin typeface="Arial Black" panose="020B0A04020102020204" pitchFamily="34" charset="0"/>
             </a:endParaRPr>
           </a:p>
           <a:p>
-            <a:pPr marL="0" marR="0" lvl="0" indent="0" rtl="0">
+            <a:pPr lvl="0">
               <a:lnSpc>
-                <a:spcPct val="100000"/>
+                <a:spcPct val="120005"/>
               </a:lnSpc>
-              <a:spcBef>
-                <a:spcPts val="0"/>
-              </a:spcBef>
-              <a:spcAft>
-                <a:spcPts val="0"/>
-              </a:spcAft>
-              <a:buNone/>
-            </a:pPr>
-            <a:endParaRPr lang="ru-RU" sz="3200" dirty="0" smtClean="0">
-              <a:solidFill>
-                <a:schemeClr val="bg1"/>
-              </a:solidFill>
-              <a:latin typeface="Arial Black" panose="020B0A04020102020204" pitchFamily="34" charset="0"/>
-            </a:endParaRPr>
-          </a:p>
-          <a:p>
-            <a:pPr marL="0" marR="0" lvl="0" indent="0" rtl="0">
-              <a:lnSpc>
-                <a:spcPct val="100000"/>
-              </a:lnSpc>
-              <a:spcBef>
-                <a:spcPts val="0"/>
-              </a:spcBef>
-              <a:spcAft>
-                <a:spcPts val="0"/>
-              </a:spcAft>
-              <a:buNone/>
             </a:pPr>
             <a:r>
-              <a:rPr lang="en-US" sz="3200" dirty="0" smtClean="0">
+              <a:rPr lang="ru-RU" sz="3200" dirty="0">
                 <a:solidFill>
-                  <a:schemeClr val="bg1"/>
+                  <a:srgbClr val="FFBD4C"/>
                 </a:solidFill>
                 <a:latin typeface="Arial Black" panose="020B0A04020102020204" pitchFamily="34" charset="0"/>
               </a:rPr>
-              <a:t>-</a:t>
+              <a:t>Разработанный сайт может использоваться в образовательных целях для изучения основ криптографии, защиты информации и методов шифрования текста.</a:t>
             </a:r>
-            <a:r>
-              <a:rPr lang="ru-RU" sz="3200" dirty="0" smtClean="0">
-                <a:solidFill>
-                  <a:schemeClr val="bg1"/>
-                </a:solidFill>
-                <a:latin typeface="Arial Black" panose="020B0A04020102020204" pitchFamily="34" charset="0"/>
-              </a:rPr>
-              <a:t> Была составлена таблица описания действий и ожидаемых результатов</a:t>
-            </a:r>
-          </a:p>
-          <a:p>
-            <a:pPr marL="0" marR="0" lvl="0" indent="0" algn="ctr" rtl="0">
-              <a:lnSpc>
-                <a:spcPct val="100000"/>
-              </a:lnSpc>
-              <a:spcBef>
-                <a:spcPts val="0"/>
-              </a:spcBef>
-              <a:spcAft>
-                <a:spcPts val="0"/>
-              </a:spcAft>
-              <a:buNone/>
-            </a:pPr>
             <a:endParaRPr sz="3200" dirty="0">
               <a:solidFill>
-                <a:schemeClr val="bg1"/>
-              </a:solidFill>
+                <a:srgbClr val="FFBD4C"/>
+              </a:solidFill>
+              <a:latin typeface="Arial Black" panose="020B0A04020102020204" pitchFamily="34" charset="0"/>
             </a:endParaRPr>
           </a:p>
         </p:txBody>
@@ -13049,427 +14217,89 @@
           </p:spPr>
         </p:cxnSp>
       </p:grpSp>
+    </p:spTree>
+  </p:cSld>
+  <p:clrMapOvr>
+    <a:masterClrMapping/>
+  </p:clrMapOvr>
+  <p:timing>
+    <p:tnLst>
+      <p:par>
+        <p:cTn id="1" dur="indefinite" restart="never" nodeType="tmRoot"/>
+      </p:par>
+    </p:tnLst>
+  </p:timing>
+</p:sld>
+</file>
+
+<file path=ppt/slides/slide13.xml><?xml version="1.0" encoding="utf-8"?>
+<p:sld xmlns:a="http://schemas.openxmlformats.org/drawingml/2006/main" xmlns:r="http://schemas.openxmlformats.org/officeDocument/2006/relationships" xmlns:p="http://schemas.openxmlformats.org/presentationml/2006/main">
+  <p:cSld>
+    <p:spTree>
+      <p:nvGrpSpPr>
+        <p:cNvPr id="1" name=""/>
+        <p:cNvGrpSpPr/>
+        <p:nvPr/>
+      </p:nvGrpSpPr>
+      <p:grpSpPr>
+        <a:xfrm>
+          <a:off x="0" y="0"/>
+          <a:ext cx="0" cy="0"/>
+          <a:chOff x="0" y="0"/>
+          <a:chExt cx="0" cy="0"/>
+        </a:xfrm>
+      </p:grpSpPr>
       <p:sp>
         <p:nvSpPr>
-          <p:cNvPr id="44" name="Google Shape;429;p16"/>
-          <p:cNvSpPr txBox="1"/>
-          <p:nvPr/>
+          <p:cNvPr id="3" name="Заголовок 2"/>
+          <p:cNvSpPr>
+            <a:spLocks noGrp="1"/>
+          </p:cNvSpPr>
+          <p:nvPr>
+            <p:ph type="title"/>
+          </p:nvPr>
         </p:nvSpPr>
         <p:spPr>
           <a:xfrm>
-            <a:off x="8445445" y="1173076"/>
-            <a:ext cx="3304426" cy="664797"/>
+            <a:off x="2507537" y="4410038"/>
+            <a:ext cx="13383627" cy="1143000"/>
           </a:xfrm>
-          <a:prstGeom prst="rect">
-            <a:avLst/>
-          </a:prstGeom>
-          <a:noFill/>
-          <a:ln>
-            <a:noFill/>
-          </a:ln>
         </p:spPr>
         <p:txBody>
-          <a:bodyPr spcFirstLastPara="1" wrap="square" lIns="0" tIns="0" rIns="0" bIns="0" anchor="t" anchorCtr="0">
-            <a:spAutoFit/>
+          <a:bodyPr>
+            <a:normAutofit fontScale="90000"/>
           </a:bodyPr>
           <a:lstStyle/>
           <a:p>
-            <a:pPr marL="0" marR="0" lvl="0" indent="0" algn="ctr" rtl="0">
-              <a:lnSpc>
-                <a:spcPct val="120005"/>
-              </a:lnSpc>
-              <a:spcBef>
-                <a:spcPts val="0"/>
-              </a:spcBef>
-              <a:spcAft>
-                <a:spcPts val="0"/>
-              </a:spcAft>
-              <a:buNone/>
-            </a:pPr>
             <a:r>
-              <a:rPr lang="ru-RU" sz="3600" dirty="0" smtClean="0">
-                <a:solidFill>
-                  <a:srgbClr val="FFBD4C"/>
-                </a:solidFill>
+              <a:rPr lang="ru-RU" dirty="0" smtClean="0">
                 <a:latin typeface="Arial Black" panose="020B0A04020102020204" pitchFamily="34" charset="0"/>
               </a:rPr>
-              <a:t>Вывод</a:t>
+              <a:t>Спасибо за внимание!</a:t>
             </a:r>
-            <a:r>
-              <a:rPr lang="en-US" sz="3600" dirty="0" smtClean="0">
-                <a:solidFill>
-                  <a:srgbClr val="FFBD4C"/>
-                </a:solidFill>
-                <a:latin typeface="Arial Black" panose="020B0A04020102020204" pitchFamily="34" charset="0"/>
-              </a:rPr>
-              <a:t>:</a:t>
-            </a:r>
-            <a:endParaRPr sz="3600" dirty="0">
-              <a:solidFill>
-                <a:srgbClr val="FFBD4C"/>
-              </a:solidFill>
+            <a:endParaRPr lang="ru-RU" dirty="0">
               <a:latin typeface="Arial Black" panose="020B0A04020102020204" pitchFamily="34" charset="0"/>
             </a:endParaRPr>
           </a:p>
         </p:txBody>
       </p:sp>
-      <p:grpSp>
-        <p:nvGrpSpPr>
-          <p:cNvPr id="45" name="Google Shape;423;p16"/>
-          <p:cNvGrpSpPr/>
-          <p:nvPr/>
-        </p:nvGrpSpPr>
-        <p:grpSpPr>
-          <a:xfrm>
-            <a:off x="8991600" y="1655457"/>
-            <a:ext cx="9037319" cy="8167599"/>
-            <a:chOff x="0" y="-38100"/>
-            <a:chExt cx="1453371" cy="1522554"/>
-          </a:xfrm>
-        </p:grpSpPr>
-        <p:sp>
-          <p:nvSpPr>
-            <p:cNvPr id="46" name="Google Shape;424;p16"/>
-            <p:cNvSpPr/>
-            <p:nvPr/>
-          </p:nvSpPr>
-          <p:spPr>
-            <a:xfrm>
-              <a:off x="0" y="0"/>
-              <a:ext cx="1453371" cy="1484454"/>
-            </a:xfrm>
-            <a:custGeom>
-              <a:avLst/>
-              <a:gdLst/>
-              <a:ahLst/>
-              <a:cxnLst/>
-              <a:rect l="l" t="t" r="r" b="b"/>
-              <a:pathLst>
-                <a:path w="1453371" h="1484454" extrusionOk="0">
-                  <a:moveTo>
-                    <a:pt x="35704" y="0"/>
-                  </a:moveTo>
-                  <a:lnTo>
-                    <a:pt x="1417667" y="0"/>
-                  </a:lnTo>
-                  <a:cubicBezTo>
-                    <a:pt x="1427137" y="0"/>
-                    <a:pt x="1436218" y="3762"/>
-                    <a:pt x="1442914" y="10457"/>
-                  </a:cubicBezTo>
-                  <a:cubicBezTo>
-                    <a:pt x="1449609" y="17153"/>
-                    <a:pt x="1453371" y="26235"/>
-                    <a:pt x="1453371" y="35704"/>
-                  </a:cubicBezTo>
-                  <a:lnTo>
-                    <a:pt x="1453371" y="1448750"/>
-                  </a:lnTo>
-                  <a:cubicBezTo>
-                    <a:pt x="1453371" y="1458219"/>
-                    <a:pt x="1449609" y="1467301"/>
-                    <a:pt x="1442914" y="1473997"/>
-                  </a:cubicBezTo>
-                  <a:cubicBezTo>
-                    <a:pt x="1436218" y="1480692"/>
-                    <a:pt x="1427137" y="1484454"/>
-                    <a:pt x="1417667" y="1484454"/>
-                  </a:cubicBezTo>
-                  <a:lnTo>
-                    <a:pt x="35704" y="1484454"/>
-                  </a:lnTo>
-                  <a:cubicBezTo>
-                    <a:pt x="26235" y="1484454"/>
-                    <a:pt x="17153" y="1480692"/>
-                    <a:pt x="10457" y="1473997"/>
-                  </a:cubicBezTo>
-                  <a:cubicBezTo>
-                    <a:pt x="3762" y="1467301"/>
-                    <a:pt x="0" y="1458219"/>
-                    <a:pt x="0" y="1448750"/>
-                  </a:cubicBezTo>
-                  <a:lnTo>
-                    <a:pt x="0" y="35704"/>
-                  </a:lnTo>
-                  <a:cubicBezTo>
-                    <a:pt x="0" y="26235"/>
-                    <a:pt x="3762" y="17153"/>
-                    <a:pt x="10457" y="10457"/>
-                  </a:cubicBezTo>
-                  <a:cubicBezTo>
-                    <a:pt x="17153" y="3762"/>
-                    <a:pt x="26235" y="0"/>
-                    <a:pt x="35704" y="0"/>
-                  </a:cubicBezTo>
-                  <a:close/>
-                </a:path>
-              </a:pathLst>
-            </a:custGeom>
-            <a:solidFill>
-              <a:srgbClr val="000000">
-                <a:alpha val="0"/>
-              </a:srgbClr>
-            </a:solidFill>
-            <a:ln w="38100" cap="sq" cmpd="sng">
-              <a:solidFill>
-                <a:srgbClr val="FFBD4C"/>
-              </a:solidFill>
-              <a:prstDash val="solid"/>
-              <a:miter lim="8000"/>
-              <a:headEnd type="none" w="sm" len="sm"/>
-              <a:tailEnd type="none" w="sm" len="sm"/>
-            </a:ln>
-          </p:spPr>
-          <p:txBody>
-            <a:bodyPr spcFirstLastPara="1" wrap="square" lIns="91425" tIns="91425" rIns="91425" bIns="91425" anchor="ctr" anchorCtr="0">
-              <a:noAutofit/>
-            </a:bodyPr>
-            <a:lstStyle/>
-            <a:p>
-              <a:pPr marL="0" lvl="0" indent="0" algn="l" rtl="0">
-                <a:spcBef>
-                  <a:spcPts val="0"/>
-                </a:spcBef>
-                <a:spcAft>
-                  <a:spcPts val="0"/>
-                </a:spcAft>
-                <a:buNone/>
-              </a:pPr>
-              <a:endParaRPr/>
-            </a:p>
-          </p:txBody>
-        </p:sp>
-        <p:sp>
-          <p:nvSpPr>
-            <p:cNvPr id="47" name="Google Shape;425;p16"/>
-            <p:cNvSpPr txBox="1"/>
-            <p:nvPr/>
-          </p:nvSpPr>
-          <p:spPr>
-            <a:xfrm>
-              <a:off x="0" y="-38100"/>
-              <a:ext cx="1453371" cy="1522554"/>
-            </a:xfrm>
-            <a:prstGeom prst="rect">
-              <a:avLst/>
-            </a:prstGeom>
-            <a:noFill/>
-            <a:ln>
-              <a:noFill/>
-            </a:ln>
-          </p:spPr>
-          <p:txBody>
-            <a:bodyPr spcFirstLastPara="1" wrap="square" lIns="50800" tIns="50800" rIns="50800" bIns="50800" anchor="ctr" anchorCtr="0">
-              <a:noAutofit/>
-            </a:bodyPr>
-            <a:lstStyle/>
-            <a:p>
-              <a:pPr marL="0" marR="0" lvl="0" indent="0" algn="ctr" rtl="0">
-                <a:lnSpc>
-                  <a:spcPct val="186611"/>
-                </a:lnSpc>
-                <a:spcBef>
-                  <a:spcPts val="0"/>
-                </a:spcBef>
-                <a:spcAft>
-                  <a:spcPts val="0"/>
-                </a:spcAft>
-                <a:buNone/>
-              </a:pPr>
-              <a:endParaRPr sz="1800" b="0" i="0" u="none" strike="noStrike" cap="none">
-                <a:solidFill>
-                  <a:schemeClr val="dk1"/>
-                </a:solidFill>
-                <a:latin typeface="Calibri"/>
-                <a:ea typeface="Calibri"/>
-                <a:cs typeface="Calibri"/>
-                <a:sym typeface="Calibri"/>
-              </a:endParaRPr>
-            </a:p>
-          </p:txBody>
-        </p:sp>
-      </p:grpSp>
-      <p:sp>
-        <p:nvSpPr>
-          <p:cNvPr id="2" name="TextBox 1"/>
-          <p:cNvSpPr txBox="1"/>
-          <p:nvPr/>
-        </p:nvSpPr>
-        <p:spPr>
-          <a:xfrm>
-            <a:off x="9150715" y="2080970"/>
-            <a:ext cx="9132210" cy="7417415"/>
-          </a:xfrm>
-          <a:prstGeom prst="rect">
-            <a:avLst/>
-          </a:prstGeom>
-          <a:noFill/>
-        </p:spPr>
-        <p:txBody>
-          <a:bodyPr wrap="square" rtlCol="0">
-            <a:spAutoFit/>
-          </a:bodyPr>
-          <a:lstStyle/>
-          <a:p>
-            <a:r>
-              <a:rPr lang="ru-RU" sz="2800" dirty="0">
-                <a:solidFill>
-                  <a:schemeClr val="bg1"/>
-                </a:solidFill>
-                <a:latin typeface="Arial Black" panose="020B0A04020102020204" pitchFamily="34" charset="0"/>
-              </a:rPr>
-              <a:t>В ходе тестирования было подтверждено, что веб-приложение корректно выполняет шифрование и </a:t>
-            </a:r>
-            <a:r>
-              <a:rPr lang="ru-RU" sz="2800" dirty="0" smtClean="0">
-                <a:solidFill>
-                  <a:schemeClr val="bg1"/>
-                </a:solidFill>
-                <a:latin typeface="Arial Black" panose="020B0A04020102020204" pitchFamily="34" charset="0"/>
-              </a:rPr>
-              <a:t>дешифровку </a:t>
-            </a:r>
-            <a:r>
-              <a:rPr lang="ru-RU" sz="2800" dirty="0">
-                <a:solidFill>
-                  <a:schemeClr val="bg1"/>
-                </a:solidFill>
-                <a:latin typeface="Arial Black" panose="020B0A04020102020204" pitchFamily="34" charset="0"/>
-              </a:rPr>
-              <a:t>текста с использованием </a:t>
-            </a:r>
-            <a:r>
-              <a:rPr lang="ru-RU" sz="2800" dirty="0" err="1">
-                <a:solidFill>
-                  <a:schemeClr val="bg1"/>
-                </a:solidFill>
-                <a:latin typeface="Arial Black" panose="020B0A04020102020204" pitchFamily="34" charset="0"/>
-              </a:rPr>
-              <a:t>афинного</a:t>
-            </a:r>
-            <a:r>
-              <a:rPr lang="ru-RU" sz="2800" dirty="0">
-                <a:solidFill>
-                  <a:schemeClr val="bg1"/>
-                </a:solidFill>
-                <a:latin typeface="Arial Black" panose="020B0A04020102020204" pitchFamily="34" charset="0"/>
-              </a:rPr>
-              <a:t> шифра как для английского, так и для русского </a:t>
-            </a:r>
-            <a:r>
-              <a:rPr lang="ru-RU" sz="2800" dirty="0" smtClean="0">
-                <a:solidFill>
-                  <a:schemeClr val="bg1"/>
-                </a:solidFill>
-                <a:latin typeface="Arial Black" panose="020B0A04020102020204" pitchFamily="34" charset="0"/>
-              </a:rPr>
-              <a:t>алфавита.</a:t>
-            </a:r>
-          </a:p>
-          <a:p>
-            <a:r>
-              <a:rPr lang="ru-RU" sz="2800" dirty="0">
-                <a:solidFill>
-                  <a:schemeClr val="bg1"/>
-                </a:solidFill>
-                <a:latin typeface="Arial Black" panose="020B0A04020102020204" pitchFamily="34" charset="0"/>
-              </a:rPr>
-              <a:t/>
-            </a:r>
-            <a:br>
-              <a:rPr lang="ru-RU" sz="2800" dirty="0">
-                <a:solidFill>
-                  <a:schemeClr val="bg1"/>
-                </a:solidFill>
-                <a:latin typeface="Arial Black" panose="020B0A04020102020204" pitchFamily="34" charset="0"/>
-              </a:rPr>
-            </a:br>
-            <a:r>
-              <a:rPr lang="ru-RU" sz="2800" dirty="0">
-                <a:solidFill>
-                  <a:schemeClr val="bg1"/>
-                </a:solidFill>
-                <a:latin typeface="Arial Black" panose="020B0A04020102020204" pitchFamily="34" charset="0"/>
-              </a:rPr>
-              <a:t>Приложение успешно обрабатывает пользовательский ввод, определяет некорректные ключи и выводит соответствующие сообщения об ошибках. </a:t>
-            </a:r>
-            <a:endParaRPr lang="ru-RU" sz="2800" dirty="0" smtClean="0">
-              <a:solidFill>
-                <a:schemeClr val="bg1"/>
-              </a:solidFill>
-              <a:latin typeface="Arial Black" panose="020B0A04020102020204" pitchFamily="34" charset="0"/>
-            </a:endParaRPr>
-          </a:p>
-          <a:p>
-            <a:endParaRPr lang="ru-RU" sz="2800" dirty="0">
-              <a:solidFill>
-                <a:schemeClr val="bg1"/>
-              </a:solidFill>
-              <a:latin typeface="Arial Black" panose="020B0A04020102020204" pitchFamily="34" charset="0"/>
-            </a:endParaRPr>
-          </a:p>
-          <a:p>
-            <a:r>
-              <a:rPr lang="ru-RU" sz="2800" dirty="0" smtClean="0">
-                <a:solidFill>
-                  <a:schemeClr val="bg1"/>
-                </a:solidFill>
-                <a:latin typeface="Arial Black" panose="020B0A04020102020204" pitchFamily="34" charset="0"/>
-              </a:rPr>
-              <a:t>Интерфейс </a:t>
-            </a:r>
-            <a:r>
-              <a:rPr lang="ru-RU" sz="2800" dirty="0">
-                <a:solidFill>
-                  <a:schemeClr val="bg1"/>
-                </a:solidFill>
-                <a:latin typeface="Arial Black" panose="020B0A04020102020204" pitchFamily="34" charset="0"/>
-              </a:rPr>
-              <a:t>работает стабильно и удобен для пользователя</a:t>
-            </a:r>
-            <a:r>
-              <a:rPr lang="ru-RU" sz="2800" dirty="0" smtClean="0">
-                <a:solidFill>
-                  <a:schemeClr val="bg1"/>
-                </a:solidFill>
-                <a:latin typeface="Arial Black" panose="020B0A04020102020204" pitchFamily="34" charset="0"/>
-              </a:rPr>
-              <a:t>.</a:t>
-            </a:r>
-            <a:r>
-              <a:rPr lang="ru-RU" sz="2800" dirty="0">
-                <a:solidFill>
-                  <a:schemeClr val="bg1"/>
-                </a:solidFill>
-                <a:latin typeface="Arial Black" panose="020B0A04020102020204" pitchFamily="34" charset="0"/>
-              </a:rPr>
-              <a:t/>
-            </a:r>
-            <a:br>
-              <a:rPr lang="ru-RU" sz="2800" dirty="0">
-                <a:solidFill>
-                  <a:schemeClr val="bg1"/>
-                </a:solidFill>
-                <a:latin typeface="Arial Black" panose="020B0A04020102020204" pitchFamily="34" charset="0"/>
-              </a:rPr>
-            </a:br>
-            <a:r>
-              <a:rPr lang="ru-RU" sz="2800" dirty="0">
-                <a:solidFill>
-                  <a:schemeClr val="bg1"/>
-                </a:solidFill>
-                <a:latin typeface="Arial Black" panose="020B0A04020102020204" pitchFamily="34" charset="0"/>
-              </a:rPr>
-              <a:t>По результатам проведённого тестирования можно сделать вывод, что приложение соответствует поставленным требованиям и готово к использованию.</a:t>
-            </a:r>
-          </a:p>
-        </p:txBody>
-      </p:sp>
     </p:spTree>
+    <p:extLst>
+      <p:ext uri="{BB962C8B-B14F-4D97-AF65-F5344CB8AC3E}">
+        <p14:creationId xmlns:p14="http://schemas.microsoft.com/office/powerpoint/2010/main" val="2430608098"/>
+      </p:ext>
+    </p:extLst>
   </p:cSld>
   <p:clrMapOvr>
     <a:masterClrMapping/>
   </p:clrMapOvr>
+  <p:timing>
+    <p:tnLst>
+      <p:par>
+        <p:cTn id="1" dur="indefinite" restart="never" nodeType="tmRoot"/>
+      </p:par>
+    </p:tnLst>
+  </p:timing>
 </p:sld>
 </file>
 
@@ -13506,8 +14336,8 @@
         </p:nvGrpSpPr>
         <p:grpSpPr>
           <a:xfrm>
-            <a:off x="581891" y="1551710"/>
-            <a:ext cx="16677409" cy="8617526"/>
+            <a:off x="581891" y="1076385"/>
+            <a:ext cx="16677409" cy="9092851"/>
             <a:chOff x="0" y="-38100"/>
             <a:chExt cx="3606159" cy="1582034"/>
           </a:xfrm>
@@ -13742,7 +14572,7 @@
                 <a:latin typeface="Arial Black" panose="020B0A04020102020204" pitchFamily="34" charset="0"/>
                 <a:sym typeface="Montserrat"/>
               </a:rPr>
-              <a:t>Цель и актуальность</a:t>
+              <a:t>Цель и задачи</a:t>
             </a:r>
             <a:endParaRPr sz="6000" dirty="0">
               <a:latin typeface="Arial Black" panose="020B0A04020102020204" pitchFamily="34" charset="0"/>
@@ -13758,8 +14588,8 @@
         </p:nvSpPr>
         <p:spPr>
           <a:xfrm>
-            <a:off x="961575" y="2322282"/>
-            <a:ext cx="16382169" cy="8322278"/>
+            <a:off x="791043" y="1295366"/>
+            <a:ext cx="16382169" cy="9504140"/>
           </a:xfrm>
           <a:prstGeom prst="rect">
             <a:avLst/>
@@ -13781,7 +14611,7 @@
               </a:lnSpc>
             </a:pPr>
             <a:r>
-              <a:rPr lang="ru-RU" sz="3600" dirty="0" smtClean="0">
+              <a:rPr lang="ru-RU" sz="2800" dirty="0" smtClean="0">
                 <a:solidFill>
                   <a:srgbClr val="FFBD4C"/>
                 </a:solidFill>
@@ -13790,7 +14620,7 @@
               <a:t>Цель проекта</a:t>
             </a:r>
             <a:r>
-              <a:rPr lang="en-US" sz="3600" dirty="0" smtClean="0">
+              <a:rPr lang="en-US" sz="2800" dirty="0" smtClean="0">
                 <a:solidFill>
                   <a:srgbClr val="FFBD4C"/>
                 </a:solidFill>
@@ -13799,7 +14629,7 @@
               <a:t>:  </a:t>
             </a:r>
             <a:r>
-              <a:rPr lang="ru-RU" sz="3600" dirty="0" smtClean="0">
+              <a:rPr lang="ru-RU" sz="2800" dirty="0" smtClean="0">
                 <a:solidFill>
                   <a:srgbClr val="FFBD4C"/>
                 </a:solidFill>
@@ -13808,7 +14638,7 @@
               <a:t>Разработка </a:t>
             </a:r>
             <a:r>
-              <a:rPr lang="ru-RU" sz="3600" dirty="0">
+              <a:rPr lang="ru-RU" sz="2800" dirty="0">
                 <a:solidFill>
                   <a:srgbClr val="FFBD4C"/>
                 </a:solidFill>
@@ -13817,7 +14647,7 @@
               <a:t>веб-приложения для шифрования и расшифровки текстовых сообщений с использованием </a:t>
             </a:r>
             <a:r>
-              <a:rPr lang="ru-RU" sz="3600" dirty="0" err="1">
+              <a:rPr lang="ru-RU" sz="2800" dirty="0" err="1">
                 <a:solidFill>
                   <a:srgbClr val="FFBD4C"/>
                 </a:solidFill>
@@ -13826,7 +14656,7 @@
               <a:t>афинного</a:t>
             </a:r>
             <a:r>
-              <a:rPr lang="ru-RU" sz="3600" dirty="0">
+              <a:rPr lang="ru-RU" sz="2800" dirty="0">
                 <a:solidFill>
                   <a:srgbClr val="FFBD4C"/>
                 </a:solidFill>
@@ -13835,7 +14665,7 @@
               <a:t> шифра через удобный </a:t>
             </a:r>
             <a:r>
-              <a:rPr lang="ru-RU" sz="3600" dirty="0" err="1">
+              <a:rPr lang="ru-RU" sz="2800" dirty="0" err="1">
                 <a:solidFill>
                   <a:srgbClr val="FFBD4C"/>
                 </a:solidFill>
@@ -13844,7 +14674,7 @@
               <a:t>браузерный</a:t>
             </a:r>
             <a:r>
-              <a:rPr lang="ru-RU" sz="3600" dirty="0">
+              <a:rPr lang="ru-RU" sz="2800" dirty="0">
                 <a:solidFill>
                   <a:srgbClr val="FFBD4C"/>
                 </a:solidFill>
@@ -13853,7 +14683,7 @@
               <a:t> интерфейс</a:t>
             </a:r>
             <a:r>
-              <a:rPr lang="ru-RU" sz="3600" dirty="0" smtClean="0">
+              <a:rPr lang="ru-RU" sz="2800" dirty="0" smtClean="0">
                 <a:solidFill>
                   <a:srgbClr val="FFBD4C"/>
                 </a:solidFill>
@@ -13861,7 +14691,7 @@
               </a:rPr>
               <a:t>.</a:t>
             </a:r>
-            <a:endParaRPr lang="en-US" sz="3600" dirty="0" smtClean="0">
+            <a:endParaRPr lang="en-US" sz="2800" dirty="0" smtClean="0">
               <a:solidFill>
                 <a:srgbClr val="FFBD4C"/>
               </a:solidFill>
@@ -13874,7 +14704,7 @@
                 <a:spcPct val="130000"/>
               </a:lnSpc>
             </a:pPr>
-            <a:endParaRPr lang="en-US" sz="3600" dirty="0" smtClean="0">
+            <a:endParaRPr lang="en-US" sz="2800" dirty="0" smtClean="0">
               <a:solidFill>
                 <a:srgbClr val="FFBD4C"/>
               </a:solidFill>
@@ -13882,22 +14712,17 @@
             </a:endParaRPr>
           </a:p>
           <a:p>
-            <a:pPr>
-              <a:lnSpc>
-                <a:spcPct val="130000"/>
-              </a:lnSpc>
-            </a:pPr>
             <a:r>
-              <a:rPr lang="ru-RU" sz="3600" dirty="0" smtClean="0">
+              <a:rPr lang="ru-RU" sz="2800" dirty="0" smtClean="0">
                 <a:solidFill>
                   <a:srgbClr val="FFBD4C"/>
                 </a:solidFill>
                 <a:latin typeface="Arial Black" panose="020B0A04020102020204" pitchFamily="34" charset="0"/>
               </a:rPr>
-              <a:t>Актуальность</a:t>
+              <a:t>Задачи</a:t>
             </a:r>
             <a:r>
-              <a:rPr lang="en-US" sz="3600" dirty="0" smtClean="0">
+              <a:rPr lang="en-US" sz="2800" dirty="0" smtClean="0">
                 <a:solidFill>
                   <a:srgbClr val="FFBD4C"/>
                 </a:solidFill>
@@ -13905,82 +14730,143 @@
               </a:rPr>
               <a:t>:</a:t>
             </a:r>
+            <a:endParaRPr lang="ru-RU" sz="2800" dirty="0" smtClean="0">
+              <a:solidFill>
+                <a:srgbClr val="FFBD4C"/>
+              </a:solidFill>
+              <a:latin typeface="Arial Black" panose="020B0A04020102020204" pitchFamily="34" charset="0"/>
+            </a:endParaRPr>
+          </a:p>
+          <a:p>
             <a:r>
-              <a:rPr lang="ru-RU" sz="3600" dirty="0" smtClean="0">
+              <a:rPr lang="ru-RU" sz="2800" dirty="0">
                 <a:solidFill>
                   <a:srgbClr val="FFBD4C"/>
                 </a:solidFill>
                 <a:latin typeface="Arial Black" panose="020B0A04020102020204" pitchFamily="34" charset="0"/>
               </a:rPr>
-              <a:t> </a:t>
+              <a:t>1. Провести анализ предметной области, изучить методы шифрования текста и особенности применения </a:t>
             </a:r>
             <a:r>
-              <a:rPr lang="en-US" sz="3600" dirty="0" smtClean="0">
+              <a:rPr lang="ru-RU" sz="2800" dirty="0" err="1">
                 <a:solidFill>
                   <a:srgbClr val="FFBD4C"/>
                 </a:solidFill>
                 <a:latin typeface="Arial Black" panose="020B0A04020102020204" pitchFamily="34" charset="0"/>
               </a:rPr>
-              <a:t> </a:t>
+              <a:t>афинного</a:t>
             </a:r>
             <a:r>
-              <a:rPr lang="ru-RU" sz="3200" dirty="0" err="1" smtClean="0">
+              <a:rPr lang="ru-RU" sz="2800" dirty="0">
                 <a:solidFill>
                   <a:srgbClr val="FFBD4C"/>
                 </a:solidFill>
                 <a:latin typeface="Arial Black" panose="020B0A04020102020204" pitchFamily="34" charset="0"/>
               </a:rPr>
-              <a:t>Афинный</a:t>
+              <a:t> шифра в современных веб-приложениях.</a:t>
             </a:r>
+          </a:p>
+          <a:p>
             <a:r>
-              <a:rPr lang="ru-RU" sz="3200" dirty="0" smtClean="0">
+              <a:rPr lang="ru-RU" sz="2800" dirty="0">
                 <a:solidFill>
                   <a:srgbClr val="FFBD4C"/>
                 </a:solidFill>
                 <a:latin typeface="Arial Black" panose="020B0A04020102020204" pitchFamily="34" charset="0"/>
               </a:rPr>
-              <a:t> </a:t>
+              <a:t>2. Изучить принцип работы </a:t>
             </a:r>
             <a:r>
-              <a:rPr lang="ru-RU" sz="3200" dirty="0">
+              <a:rPr lang="ru-RU" sz="2800" dirty="0" err="1">
                 <a:solidFill>
                   <a:srgbClr val="FFBD4C"/>
                 </a:solidFill>
                 <a:latin typeface="Arial Black" panose="020B0A04020102020204" pitchFamily="34" charset="0"/>
               </a:rPr>
-              <a:t>шифр является одним из классических алгоритмов шифрования, используемых в образовательных целях для изучения криптографии, математики и программирования. Создание </a:t>
+              <a:t>афинного</a:t>
             </a:r>
             <a:r>
-              <a:rPr lang="ru-RU" sz="3200" dirty="0" smtClean="0">
+              <a:rPr lang="ru-RU" sz="2800" dirty="0">
                 <a:solidFill>
                   <a:srgbClr val="FFBD4C"/>
                 </a:solidFill>
                 <a:latin typeface="Arial Black" panose="020B0A04020102020204" pitchFamily="34" charset="0"/>
               </a:rPr>
-              <a:t>веб-сайта </a:t>
+              <a:t> шифра и математические основы алгоритма.</a:t>
             </a:r>
+          </a:p>
+          <a:p>
             <a:r>
-              <a:rPr lang="ru-RU" sz="3200" dirty="0">
+              <a:rPr lang="ru-RU" sz="2800" dirty="0">
                 <a:solidFill>
                   <a:srgbClr val="FFBD4C"/>
                 </a:solidFill>
                 <a:latin typeface="Arial Black" panose="020B0A04020102020204" pitchFamily="34" charset="0"/>
               </a:rPr>
-              <a:t>позволяет сделать процесс шифрования доступным любому пользователю без установки дополнительного программного обеспечения.</a:t>
+              <a:t>3. Разработать структуру и интерфейс веб-сайта для шифрования и дешифрования текста.</a:t>
             </a:r>
           </a:p>
           <a:p>
-            <a:pPr>
-              <a:lnSpc>
-                <a:spcPct val="130000"/>
-              </a:lnSpc>
-            </a:pPr>
-            <a:endParaRPr lang="ru-RU" sz="3600" dirty="0">
-              <a:solidFill>
-                <a:srgbClr val="FFBD4C"/>
-              </a:solidFill>
-              <a:latin typeface="Arial Black" panose="020B0A04020102020204" pitchFamily="34" charset="0"/>
-            </a:endParaRPr>
+            <a:r>
+              <a:rPr lang="ru-RU" sz="2800" dirty="0">
+                <a:solidFill>
+                  <a:srgbClr val="FFBD4C"/>
+                </a:solidFill>
+                <a:latin typeface="Arial Black" panose="020B0A04020102020204" pitchFamily="34" charset="0"/>
+              </a:rPr>
+              <a:t>4. Реализовать алгоритм </a:t>
+            </a:r>
+            <a:r>
+              <a:rPr lang="ru-RU" sz="2800" dirty="0" err="1">
+                <a:solidFill>
+                  <a:srgbClr val="FFBD4C"/>
+                </a:solidFill>
+                <a:latin typeface="Arial Black" panose="020B0A04020102020204" pitchFamily="34" charset="0"/>
+              </a:rPr>
+              <a:t>афинного</a:t>
+            </a:r>
+            <a:r>
+              <a:rPr lang="ru-RU" sz="2800" dirty="0">
+                <a:solidFill>
+                  <a:srgbClr val="FFBD4C"/>
+                </a:solidFill>
+                <a:latin typeface="Arial Black" panose="020B0A04020102020204" pitchFamily="34" charset="0"/>
+              </a:rPr>
+              <a:t> шифра на выбранном языке программирования.</a:t>
+            </a:r>
+          </a:p>
+          <a:p>
+            <a:r>
+              <a:rPr lang="ru-RU" sz="2800" dirty="0">
+                <a:solidFill>
+                  <a:srgbClr val="FFBD4C"/>
+                </a:solidFill>
+                <a:latin typeface="Arial Black" panose="020B0A04020102020204" pitchFamily="34" charset="0"/>
+              </a:rPr>
+              <a:t>5. Обеспечить возможность ввода, шифрования и расшифровки текста пользователем через веб-интерфейс.</a:t>
+            </a:r>
+          </a:p>
+          <a:p>
+            <a:r>
+              <a:rPr lang="ru-RU" sz="2800" dirty="0">
+                <a:solidFill>
+                  <a:srgbClr val="FFBD4C"/>
+                </a:solidFill>
+                <a:latin typeface="Arial Black" panose="020B0A04020102020204" pitchFamily="34" charset="0"/>
+              </a:rPr>
+              <a:t>6. Провести тестирование работы сайта и проверить корректность шифрования и дешифрования данных.</a:t>
+            </a:r>
+          </a:p>
+          <a:p>
+            <a:r>
+              <a:rPr lang="ru-RU" sz="2800" dirty="0">
+                <a:solidFill>
+                  <a:srgbClr val="FFBD4C"/>
+                </a:solidFill>
+                <a:latin typeface="Arial Black" panose="020B0A04020102020204" pitchFamily="34" charset="0"/>
+              </a:rPr>
+              <a:t>7. Оценить удобство использования и эффективность разработанного веб-приложения.</a:t>
+            </a:r>
           </a:p>
           <a:p>
             <a:pPr marL="0" marR="0" lvl="0" indent="0" rtl="0">
@@ -13995,7 +14881,7 @@
               </a:spcAft>
               <a:buNone/>
             </a:pPr>
-            <a:endParaRPr sz="4000" dirty="0">
+            <a:endParaRPr sz="2800" dirty="0">
               <a:solidFill>
                 <a:srgbClr val="FFBD4C"/>
               </a:solidFill>
@@ -14414,6 +15300,750 @@
 </file>
 
 <file path=ppt/slides/slide3.xml><?xml version="1.0" encoding="utf-8"?>
+<p:sld xmlns:a="http://schemas.openxmlformats.org/drawingml/2006/main" xmlns:r="http://schemas.openxmlformats.org/officeDocument/2006/relationships" xmlns:p="http://schemas.openxmlformats.org/presentationml/2006/main">
+  <p:cSld>
+    <p:spTree>
+      <p:nvGrpSpPr>
+        <p:cNvPr id="1" name=""/>
+        <p:cNvGrpSpPr/>
+        <p:nvPr/>
+      </p:nvGrpSpPr>
+      <p:grpSpPr>
+        <a:xfrm>
+          <a:off x="0" y="0"/>
+          <a:ext cx="0" cy="0"/>
+          <a:chOff x="0" y="0"/>
+          <a:chExt cx="0" cy="0"/>
+        </a:xfrm>
+      </p:grpSpPr>
+      <p:sp>
+        <p:nvSpPr>
+          <p:cNvPr id="2" name="Подзаголовок 1"/>
+          <p:cNvSpPr>
+            <a:spLocks noGrp="1"/>
+          </p:cNvSpPr>
+          <p:nvPr>
+            <p:ph type="subTitle" idx="1"/>
+          </p:nvPr>
+        </p:nvSpPr>
+        <p:spPr>
+          <a:xfrm>
+            <a:off x="928255" y="2185669"/>
+            <a:ext cx="16736290" cy="7574858"/>
+          </a:xfrm>
+        </p:spPr>
+        <p:txBody>
+          <a:bodyPr>
+            <a:noAutofit/>
+          </a:bodyPr>
+          <a:lstStyle/>
+          <a:p>
+            <a:pPr algn="l">
+              <a:lnSpc>
+                <a:spcPct val="130000"/>
+              </a:lnSpc>
+            </a:pPr>
+            <a:r>
+              <a:rPr lang="ru-RU" sz="2800" dirty="0" smtClean="0">
+                <a:solidFill>
+                  <a:srgbClr val="FFBD4C"/>
+                </a:solidFill>
+                <a:latin typeface="Arial Black" panose="020B0A04020102020204" pitchFamily="34" charset="0"/>
+              </a:rPr>
+              <a:t>   В </a:t>
+            </a:r>
+            <a:r>
+              <a:rPr lang="ru-RU" sz="2800" dirty="0">
+                <a:solidFill>
+                  <a:srgbClr val="FFBD4C"/>
+                </a:solidFill>
+                <a:latin typeface="Arial Black" panose="020B0A04020102020204" pitchFamily="34" charset="0"/>
+              </a:rPr>
+              <a:t>современном мире защита информации становится всё более важной из-за роста количества данных, передаваемых через интернет. Шифрование помогает обеспечивать безопасность сообщений и персональной информации</a:t>
+            </a:r>
+            <a:r>
+              <a:rPr lang="ru-RU" sz="2800" dirty="0" smtClean="0">
+                <a:solidFill>
+                  <a:srgbClr val="FFBD4C"/>
+                </a:solidFill>
+                <a:latin typeface="Arial Black" panose="020B0A04020102020204" pitchFamily="34" charset="0"/>
+              </a:rPr>
+              <a:t>.</a:t>
+            </a:r>
+            <a:endParaRPr lang="ru-RU" sz="2800" dirty="0">
+              <a:solidFill>
+                <a:srgbClr val="FFBD4C"/>
+              </a:solidFill>
+              <a:latin typeface="Arial Black" panose="020B0A04020102020204" pitchFamily="34" charset="0"/>
+            </a:endParaRPr>
+          </a:p>
+          <a:p>
+            <a:pPr algn="l">
+              <a:lnSpc>
+                <a:spcPct val="130000"/>
+              </a:lnSpc>
+            </a:pPr>
+            <a:r>
+              <a:rPr lang="ru-RU" sz="2800" dirty="0" smtClean="0">
+                <a:solidFill>
+                  <a:srgbClr val="FFBD4C"/>
+                </a:solidFill>
+                <a:latin typeface="Arial Black" panose="020B0A04020102020204" pitchFamily="34" charset="0"/>
+              </a:rPr>
+              <a:t>   Тема </a:t>
+            </a:r>
+            <a:r>
+              <a:rPr lang="ru-RU" sz="2800" dirty="0">
+                <a:solidFill>
+                  <a:srgbClr val="FFBD4C"/>
+                </a:solidFill>
+                <a:latin typeface="Arial Black" panose="020B0A04020102020204" pitchFamily="34" charset="0"/>
+              </a:rPr>
+              <a:t>проекта актуальна, так как криптография используется во многих цифровых сервисах и системах защиты данных. Изучение </a:t>
+            </a:r>
+            <a:r>
+              <a:rPr lang="ru-RU" sz="2800" dirty="0" err="1">
+                <a:solidFill>
+                  <a:srgbClr val="FFBD4C"/>
+                </a:solidFill>
+                <a:latin typeface="Arial Black" panose="020B0A04020102020204" pitchFamily="34" charset="0"/>
+              </a:rPr>
+              <a:t>афинного</a:t>
+            </a:r>
+            <a:r>
+              <a:rPr lang="ru-RU" sz="2800" dirty="0">
+                <a:solidFill>
+                  <a:srgbClr val="FFBD4C"/>
+                </a:solidFill>
+                <a:latin typeface="Arial Black" panose="020B0A04020102020204" pitchFamily="34" charset="0"/>
+              </a:rPr>
+              <a:t> шифра позволяет понять основные принципы работы методов шифрования и применение математики в информационных технологиях</a:t>
+            </a:r>
+            <a:r>
+              <a:rPr lang="ru-RU" sz="2800" dirty="0" smtClean="0">
+                <a:solidFill>
+                  <a:srgbClr val="FFBD4C"/>
+                </a:solidFill>
+                <a:latin typeface="Arial Black" panose="020B0A04020102020204" pitchFamily="34" charset="0"/>
+              </a:rPr>
+              <a:t>.</a:t>
+            </a:r>
+            <a:endParaRPr lang="ru-RU" sz="2800" dirty="0">
+              <a:solidFill>
+                <a:srgbClr val="FFBD4C"/>
+              </a:solidFill>
+              <a:latin typeface="Arial Black" panose="020B0A04020102020204" pitchFamily="34" charset="0"/>
+            </a:endParaRPr>
+          </a:p>
+          <a:p>
+            <a:pPr algn="l">
+              <a:lnSpc>
+                <a:spcPct val="130000"/>
+              </a:lnSpc>
+            </a:pPr>
+            <a:r>
+              <a:rPr lang="ru-RU" sz="2800" dirty="0" smtClean="0">
+                <a:solidFill>
+                  <a:srgbClr val="FFBD4C"/>
+                </a:solidFill>
+                <a:latin typeface="Arial Black" panose="020B0A04020102020204" pitchFamily="34" charset="0"/>
+              </a:rPr>
+              <a:t>   Проблема </a:t>
+            </a:r>
+            <a:r>
+              <a:rPr lang="ru-RU" sz="2800" dirty="0">
+                <a:solidFill>
+                  <a:srgbClr val="FFBD4C"/>
+                </a:solidFill>
+                <a:latin typeface="Arial Black" panose="020B0A04020102020204" pitchFamily="34" charset="0"/>
+              </a:rPr>
+              <a:t>проекта заключается в недостатке простых и наглядных веб-приложений для изучения основ криптографии. Разрабатываемый сайт позволит пользователям удобно изучать процесс шифрования и дешифрования текста на практике.</a:t>
+            </a:r>
+          </a:p>
+        </p:txBody>
+      </p:sp>
+      <p:sp>
+        <p:nvSpPr>
+          <p:cNvPr id="3" name="Заголовок 2"/>
+          <p:cNvSpPr>
+            <a:spLocks noGrp="1"/>
+          </p:cNvSpPr>
+          <p:nvPr>
+            <p:ph type="title"/>
+          </p:nvPr>
+        </p:nvSpPr>
+        <p:spPr>
+          <a:xfrm>
+            <a:off x="1939500" y="295239"/>
+            <a:ext cx="14713800" cy="1143000"/>
+          </a:xfrm>
+        </p:spPr>
+        <p:txBody>
+          <a:bodyPr>
+            <a:normAutofit fontScale="90000"/>
+          </a:bodyPr>
+          <a:lstStyle/>
+          <a:p>
+            <a:r>
+              <a:rPr lang="ru-RU" dirty="0" smtClean="0">
+                <a:latin typeface="Arial Black" panose="020B0A04020102020204" pitchFamily="34" charset="0"/>
+              </a:rPr>
+              <a:t>Актуальность</a:t>
+            </a:r>
+            <a:endParaRPr lang="ru-RU" dirty="0">
+              <a:latin typeface="Arial Black" panose="020B0A04020102020204" pitchFamily="34" charset="0"/>
+            </a:endParaRPr>
+          </a:p>
+        </p:txBody>
+      </p:sp>
+    </p:spTree>
+    <p:extLst>
+      <p:ext uri="{BB962C8B-B14F-4D97-AF65-F5344CB8AC3E}">
+        <p14:creationId xmlns:p14="http://schemas.microsoft.com/office/powerpoint/2010/main" val="4155430540"/>
+      </p:ext>
+    </p:extLst>
+  </p:cSld>
+  <p:clrMapOvr>
+    <a:masterClrMapping/>
+  </p:clrMapOvr>
+  <p:timing>
+    <p:tnLst>
+      <p:par>
+        <p:cTn id="1" dur="indefinite" restart="never" nodeType="tmRoot"/>
+      </p:par>
+    </p:tnLst>
+  </p:timing>
+</p:sld>
+</file>
+
+<file path=ppt/slides/slide4.xml><?xml version="1.0" encoding="utf-8"?>
+<p:sld xmlns:a="http://schemas.openxmlformats.org/drawingml/2006/main" xmlns:r="http://schemas.openxmlformats.org/officeDocument/2006/relationships" xmlns:p="http://schemas.openxmlformats.org/presentationml/2006/main">
+  <p:cSld>
+    <p:spTree>
+      <p:nvGrpSpPr>
+        <p:cNvPr id="1" name=""/>
+        <p:cNvGrpSpPr/>
+        <p:nvPr/>
+      </p:nvGrpSpPr>
+      <p:grpSpPr>
+        <a:xfrm>
+          <a:off x="0" y="0"/>
+          <a:ext cx="0" cy="0"/>
+          <a:chOff x="0" y="0"/>
+          <a:chExt cx="0" cy="0"/>
+        </a:xfrm>
+      </p:grpSpPr>
+      <p:sp>
+        <p:nvSpPr>
+          <p:cNvPr id="3" name="Заголовок 2"/>
+          <p:cNvSpPr>
+            <a:spLocks noGrp="1"/>
+          </p:cNvSpPr>
+          <p:nvPr>
+            <p:ph type="title"/>
+          </p:nvPr>
+        </p:nvSpPr>
+        <p:spPr/>
+        <p:txBody>
+          <a:bodyPr>
+            <a:normAutofit fontScale="90000"/>
+          </a:bodyPr>
+          <a:lstStyle/>
+          <a:p>
+            <a:r>
+              <a:rPr lang="ru-RU" dirty="0" err="1" smtClean="0">
+                <a:latin typeface="Arial Black" panose="020B0A04020102020204" pitchFamily="34" charset="0"/>
+              </a:rPr>
+              <a:t>Афинный</a:t>
+            </a:r>
+            <a:r>
+              <a:rPr lang="ru-RU" dirty="0" smtClean="0">
+                <a:latin typeface="Arial Black" panose="020B0A04020102020204" pitchFamily="34" charset="0"/>
+              </a:rPr>
+              <a:t> шифр</a:t>
+            </a:r>
+            <a:endParaRPr lang="ru-RU" dirty="0">
+              <a:latin typeface="Arial Black" panose="020B0A04020102020204" pitchFamily="34" charset="0"/>
+            </a:endParaRPr>
+          </a:p>
+        </p:txBody>
+      </p:sp>
+      <p:pic>
+        <p:nvPicPr>
+          <p:cNvPr id="1028" name="Picture 4" descr="https://i.pinimg.com/736x/39/29/fc/3929fc6839dca2c59f4a978555722656.jpg"/>
+          <p:cNvPicPr>
+            <a:picLocks noChangeAspect="1" noChangeArrowheads="1"/>
+          </p:cNvPicPr>
+          <p:nvPr/>
+        </p:nvPicPr>
+        <p:blipFill>
+          <a:blip r:embed="rId2">
+            <a:extLst>
+              <a:ext uri="{28A0092B-C50C-407E-A947-70E740481C1C}">
+                <a14:useLocalDpi xmlns:a14="http://schemas.microsoft.com/office/drawing/2010/main" val="0"/>
+              </a:ext>
+            </a:extLst>
+          </a:blip>
+          <a:srcRect/>
+          <a:stretch>
+            <a:fillRect/>
+          </a:stretch>
+        </p:blipFill>
+        <p:spPr bwMode="auto">
+          <a:xfrm>
+            <a:off x="1191491" y="2496767"/>
+            <a:ext cx="6131214" cy="3445159"/>
+          </a:xfrm>
+          <a:prstGeom prst="roundRect">
+            <a:avLst>
+              <a:gd name="adj" fmla="val 19482"/>
+            </a:avLst>
+          </a:prstGeom>
+          <a:noFill/>
+          <a:extLst>
+            <a:ext uri="{909E8E84-426E-40DD-AFC4-6F175D3DCCD1}">
+              <a14:hiddenFill xmlns:a14="http://schemas.microsoft.com/office/drawing/2010/main">
+                <a:solidFill>
+                  <a:srgbClr val="FFFFFF"/>
+                </a:solidFill>
+              </a14:hiddenFill>
+            </a:ext>
+          </a:extLst>
+        </p:spPr>
+      </p:pic>
+      <p:sp>
+        <p:nvSpPr>
+          <p:cNvPr id="4" name="Подзаголовок 3"/>
+          <p:cNvSpPr>
+            <a:spLocks noGrp="1"/>
+          </p:cNvSpPr>
+          <p:nvPr>
+            <p:ph type="subTitle" idx="1"/>
+          </p:nvPr>
+        </p:nvSpPr>
+        <p:spPr>
+          <a:xfrm>
+            <a:off x="6927273" y="2927409"/>
+            <a:ext cx="11554690" cy="2323463"/>
+          </a:xfrm>
+        </p:spPr>
+        <p:txBody>
+          <a:bodyPr>
+            <a:noAutofit/>
+          </a:bodyPr>
+          <a:lstStyle/>
+          <a:p>
+            <a:pPr algn="l"/>
+            <a:r>
+              <a:rPr lang="ru-RU" sz="2800" dirty="0" smtClean="0">
+                <a:solidFill>
+                  <a:srgbClr val="FFBD4C"/>
+                </a:solidFill>
+                <a:latin typeface="Arial Black" panose="020B0A04020102020204" pitchFamily="34" charset="0"/>
+              </a:rPr>
+              <a:t>   </a:t>
+            </a:r>
+            <a:r>
+              <a:rPr lang="ru-RU" sz="2800" dirty="0" err="1" smtClean="0">
+                <a:solidFill>
+                  <a:srgbClr val="FFBD4C"/>
+                </a:solidFill>
+                <a:latin typeface="Arial Black" panose="020B0A04020102020204" pitchFamily="34" charset="0"/>
+              </a:rPr>
+              <a:t>Афинный</a:t>
+            </a:r>
+            <a:r>
+              <a:rPr lang="ru-RU" sz="2800" dirty="0" smtClean="0">
+                <a:solidFill>
+                  <a:srgbClr val="FFBD4C"/>
+                </a:solidFill>
+                <a:latin typeface="Arial Black" panose="020B0A04020102020204" pitchFamily="34" charset="0"/>
+              </a:rPr>
+              <a:t> </a:t>
+            </a:r>
+            <a:r>
+              <a:rPr lang="ru-RU" sz="2800" dirty="0">
+                <a:solidFill>
+                  <a:srgbClr val="FFBD4C"/>
+                </a:solidFill>
+                <a:latin typeface="Arial Black" panose="020B0A04020102020204" pitchFamily="34" charset="0"/>
+              </a:rPr>
+              <a:t>шифр — это метод шифрования текста, основанный на математических преобразованиях букв алфавита. Он относится к классу шифров простой замены, где каждая буква заменяется другой по определённой формуле.</a:t>
+            </a:r>
+          </a:p>
+        </p:txBody>
+      </p:sp>
+      <p:sp>
+        <p:nvSpPr>
+          <p:cNvPr id="5" name="TextBox 4"/>
+          <p:cNvSpPr txBox="1"/>
+          <p:nvPr/>
+        </p:nvSpPr>
+        <p:spPr>
+          <a:xfrm>
+            <a:off x="1191491" y="6015108"/>
+            <a:ext cx="16500763" cy="3970318"/>
+          </a:xfrm>
+          <a:prstGeom prst="rect">
+            <a:avLst/>
+          </a:prstGeom>
+          <a:noFill/>
+        </p:spPr>
+        <p:txBody>
+          <a:bodyPr wrap="square" rtlCol="0">
+            <a:spAutoFit/>
+          </a:bodyPr>
+          <a:lstStyle/>
+          <a:p>
+            <a:r>
+              <a:rPr lang="ru-RU" sz="2800" dirty="0">
+                <a:solidFill>
+                  <a:srgbClr val="FFBD4C"/>
+                </a:solidFill>
+                <a:latin typeface="Arial Black" panose="020B0A04020102020204" pitchFamily="34" charset="0"/>
+              </a:rPr>
+              <a:t>Суть </a:t>
+            </a:r>
+            <a:r>
+              <a:rPr lang="ru-RU" sz="2800" dirty="0" err="1">
+                <a:solidFill>
+                  <a:srgbClr val="FFBD4C"/>
+                </a:solidFill>
+                <a:latin typeface="Arial Black" panose="020B0A04020102020204" pitchFamily="34" charset="0"/>
+              </a:rPr>
+              <a:t>афинного</a:t>
+            </a:r>
+            <a:r>
+              <a:rPr lang="ru-RU" sz="2800" dirty="0">
+                <a:solidFill>
+                  <a:srgbClr val="FFBD4C"/>
+                </a:solidFill>
+                <a:latin typeface="Arial Black" panose="020B0A04020102020204" pitchFamily="34" charset="0"/>
+              </a:rPr>
+              <a:t> шифра заключается в использовании функции</a:t>
+            </a:r>
+            <a:r>
+              <a:rPr lang="ru-RU" sz="2800" dirty="0" smtClean="0">
+                <a:solidFill>
+                  <a:srgbClr val="FFBD4C"/>
+                </a:solidFill>
+                <a:latin typeface="Arial Black" panose="020B0A04020102020204" pitchFamily="34" charset="0"/>
+              </a:rPr>
+              <a:t>:</a:t>
+            </a:r>
+            <a:r>
+              <a:rPr lang="ru-RU" sz="2800" dirty="0">
+                <a:solidFill>
+                  <a:srgbClr val="FFBD4C"/>
+                </a:solidFill>
+                <a:latin typeface="Arial Black" panose="020B0A04020102020204" pitchFamily="34" charset="0"/>
+              </a:rPr>
+              <a:t/>
+            </a:r>
+            <a:br>
+              <a:rPr lang="ru-RU" sz="2800" dirty="0">
+                <a:solidFill>
+                  <a:srgbClr val="FFBD4C"/>
+                </a:solidFill>
+                <a:latin typeface="Arial Black" panose="020B0A04020102020204" pitchFamily="34" charset="0"/>
+              </a:rPr>
+            </a:br>
+            <a:r>
+              <a:rPr lang="ru-RU" sz="2800" dirty="0">
+                <a:solidFill>
+                  <a:srgbClr val="FFBD4C"/>
+                </a:solidFill>
+                <a:latin typeface="Arial Black" panose="020B0A04020102020204" pitchFamily="34" charset="0"/>
+              </a:rPr>
+              <a:t>E(x)=(</a:t>
+            </a:r>
+            <a:r>
+              <a:rPr lang="ru-RU" sz="2800" dirty="0" err="1" smtClean="0">
+                <a:solidFill>
+                  <a:srgbClr val="FFBD4C"/>
+                </a:solidFill>
+                <a:latin typeface="Arial Black" panose="020B0A04020102020204" pitchFamily="34" charset="0"/>
+              </a:rPr>
+              <a:t>ax+b</a:t>
+            </a:r>
+            <a:r>
+              <a:rPr lang="ru-RU" sz="2800" dirty="0" smtClean="0">
+                <a:solidFill>
+                  <a:srgbClr val="FFBD4C"/>
+                </a:solidFill>
+                <a:latin typeface="Arial Black" panose="020B0A04020102020204" pitchFamily="34" charset="0"/>
+              </a:rPr>
+              <a:t>)</a:t>
+            </a:r>
+            <a:r>
+              <a:rPr lang="ru-RU" sz="2800" dirty="0">
+                <a:solidFill>
+                  <a:srgbClr val="FFBD4C"/>
+                </a:solidFill>
+                <a:latin typeface="Arial Black" panose="020B0A04020102020204" pitchFamily="34" charset="0"/>
+              </a:rPr>
+              <a:t> </a:t>
+            </a:r>
+            <a:r>
+              <a:rPr lang="ru-RU" sz="2800" dirty="0" err="1" smtClean="0">
+                <a:solidFill>
+                  <a:srgbClr val="FFBD4C"/>
+                </a:solidFill>
+                <a:latin typeface="Arial Black" panose="020B0A04020102020204" pitchFamily="34" charset="0"/>
+              </a:rPr>
+              <a:t>mod</a:t>
+            </a:r>
+            <a:r>
+              <a:rPr lang="ru-RU" sz="2800" dirty="0" smtClean="0">
+                <a:solidFill>
+                  <a:srgbClr val="FFBD4C"/>
+                </a:solidFill>
+                <a:latin typeface="Arial Black" panose="020B0A04020102020204" pitchFamily="34" charset="0"/>
+              </a:rPr>
+              <a:t> m</a:t>
+            </a:r>
+            <a:r>
+              <a:rPr lang="ru-RU" sz="2800" dirty="0">
+                <a:solidFill>
+                  <a:srgbClr val="FFBD4C"/>
+                </a:solidFill>
+                <a:latin typeface="Arial Black" panose="020B0A04020102020204" pitchFamily="34" charset="0"/>
+              </a:rPr>
+              <a:t/>
+            </a:r>
+            <a:br>
+              <a:rPr lang="ru-RU" sz="2800" dirty="0">
+                <a:solidFill>
+                  <a:srgbClr val="FFBD4C"/>
+                </a:solidFill>
+                <a:latin typeface="Arial Black" panose="020B0A04020102020204" pitchFamily="34" charset="0"/>
+              </a:rPr>
+            </a:br>
+            <a:r>
+              <a:rPr lang="ru-RU" sz="2800" dirty="0">
+                <a:solidFill>
+                  <a:srgbClr val="FFBD4C"/>
+                </a:solidFill>
+                <a:latin typeface="Arial Black" panose="020B0A04020102020204" pitchFamily="34" charset="0"/>
+              </a:rPr>
+              <a:t>где</a:t>
+            </a:r>
+            <a:r>
+              <a:rPr lang="ru-RU" sz="2800" dirty="0" smtClean="0">
+                <a:solidFill>
+                  <a:srgbClr val="FFBD4C"/>
+                </a:solidFill>
+                <a:latin typeface="Arial Black" panose="020B0A04020102020204" pitchFamily="34" charset="0"/>
+              </a:rPr>
+              <a:t>:</a:t>
+            </a:r>
+            <a:r>
+              <a:rPr lang="ru-RU" sz="2800" dirty="0">
+                <a:solidFill>
+                  <a:srgbClr val="FFBD4C"/>
+                </a:solidFill>
+                <a:latin typeface="Arial Black" panose="020B0A04020102020204" pitchFamily="34" charset="0"/>
+              </a:rPr>
+              <a:t/>
+            </a:r>
+            <a:br>
+              <a:rPr lang="ru-RU" sz="2800" dirty="0">
+                <a:solidFill>
+                  <a:srgbClr val="FFBD4C"/>
+                </a:solidFill>
+                <a:latin typeface="Arial Black" panose="020B0A04020102020204" pitchFamily="34" charset="0"/>
+              </a:rPr>
+            </a:br>
+            <a:r>
+              <a:rPr lang="ru-RU" sz="2800" dirty="0">
+                <a:solidFill>
+                  <a:srgbClr val="FFBD4C"/>
+                </a:solidFill>
+                <a:latin typeface="Arial Black" panose="020B0A04020102020204" pitchFamily="34" charset="0"/>
+              </a:rPr>
+              <a:t>* x — номер буквы исходного текста;</a:t>
+            </a:r>
+            <a:br>
+              <a:rPr lang="ru-RU" sz="2800" dirty="0">
+                <a:solidFill>
+                  <a:srgbClr val="FFBD4C"/>
+                </a:solidFill>
+                <a:latin typeface="Arial Black" panose="020B0A04020102020204" pitchFamily="34" charset="0"/>
+              </a:rPr>
+            </a:br>
+            <a:r>
+              <a:rPr lang="ru-RU" sz="2800" dirty="0">
+                <a:solidFill>
+                  <a:srgbClr val="FFBD4C"/>
+                </a:solidFill>
+                <a:latin typeface="Arial Black" panose="020B0A04020102020204" pitchFamily="34" charset="0"/>
+              </a:rPr>
+              <a:t>* a и b — ключи шифрования;</a:t>
+            </a:r>
+            <a:br>
+              <a:rPr lang="ru-RU" sz="2800" dirty="0">
+                <a:solidFill>
+                  <a:srgbClr val="FFBD4C"/>
+                </a:solidFill>
+                <a:latin typeface="Arial Black" panose="020B0A04020102020204" pitchFamily="34" charset="0"/>
+              </a:rPr>
+            </a:br>
+            <a:r>
+              <a:rPr lang="ru-RU" sz="2800" dirty="0">
+                <a:solidFill>
+                  <a:srgbClr val="FFBD4C"/>
+                </a:solidFill>
+                <a:latin typeface="Arial Black" panose="020B0A04020102020204" pitchFamily="34" charset="0"/>
+              </a:rPr>
+              <a:t>* m — количество символов в алфавите;</a:t>
+            </a:r>
+            <a:br>
+              <a:rPr lang="ru-RU" sz="2800" dirty="0">
+                <a:solidFill>
+                  <a:srgbClr val="FFBD4C"/>
+                </a:solidFill>
+                <a:latin typeface="Arial Black" panose="020B0A04020102020204" pitchFamily="34" charset="0"/>
+              </a:rPr>
+            </a:br>
+            <a:r>
+              <a:rPr lang="ru-RU" sz="2800" dirty="0">
+                <a:solidFill>
+                  <a:srgbClr val="FFBD4C"/>
+                </a:solidFill>
+                <a:latin typeface="Arial Black" panose="020B0A04020102020204" pitchFamily="34" charset="0"/>
+              </a:rPr>
+              <a:t>* E(x) — номер зашифрованной буквы</a:t>
+            </a:r>
+            <a:r>
+              <a:rPr lang="ru-RU" sz="2800" dirty="0" smtClean="0">
+                <a:solidFill>
+                  <a:srgbClr val="FFBD4C"/>
+                </a:solidFill>
+                <a:latin typeface="Arial Black" panose="020B0A04020102020204" pitchFamily="34" charset="0"/>
+              </a:rPr>
+              <a:t>.</a:t>
+            </a:r>
+            <a:r>
+              <a:rPr lang="ru-RU" sz="2800" dirty="0">
+                <a:solidFill>
+                  <a:srgbClr val="FFBD4C"/>
+                </a:solidFill>
+                <a:latin typeface="Arial Black" panose="020B0A04020102020204" pitchFamily="34" charset="0"/>
+              </a:rPr>
+              <a:t/>
+            </a:r>
+            <a:br>
+              <a:rPr lang="ru-RU" sz="2800" dirty="0">
+                <a:solidFill>
+                  <a:srgbClr val="FFBD4C"/>
+                </a:solidFill>
+                <a:latin typeface="Arial Black" panose="020B0A04020102020204" pitchFamily="34" charset="0"/>
+              </a:rPr>
+            </a:br>
+            <a:r>
+              <a:rPr lang="ru-RU" sz="2800" dirty="0">
+                <a:solidFill>
+                  <a:srgbClr val="FFBD4C"/>
+                </a:solidFill>
+                <a:latin typeface="Arial Black" panose="020B0A04020102020204" pitchFamily="34" charset="0"/>
+              </a:rPr>
+              <a:t>Для расшифровки используется обратная формула</a:t>
+            </a:r>
+            <a:r>
+              <a:rPr lang="ru-RU" sz="2800" dirty="0" smtClean="0">
+                <a:solidFill>
+                  <a:srgbClr val="FFBD4C"/>
+                </a:solidFill>
+                <a:latin typeface="Arial Black" panose="020B0A04020102020204" pitchFamily="34" charset="0"/>
+              </a:rPr>
+              <a:t>:</a:t>
+            </a:r>
+            <a:r>
+              <a:rPr lang="ru-RU" sz="2800" dirty="0">
+                <a:solidFill>
+                  <a:srgbClr val="FFBD4C"/>
+                </a:solidFill>
+                <a:latin typeface="Arial Black" panose="020B0A04020102020204" pitchFamily="34" charset="0"/>
+              </a:rPr>
+              <a:t/>
+            </a:r>
+            <a:br>
+              <a:rPr lang="ru-RU" sz="2800" dirty="0">
+                <a:solidFill>
+                  <a:srgbClr val="FFBD4C"/>
+                </a:solidFill>
+                <a:latin typeface="Arial Black" panose="020B0A04020102020204" pitchFamily="34" charset="0"/>
+              </a:rPr>
+            </a:br>
+            <a:r>
+              <a:rPr lang="ru-RU" sz="2800" dirty="0">
+                <a:solidFill>
+                  <a:srgbClr val="FFBD4C"/>
+                </a:solidFill>
+                <a:latin typeface="Arial Black" panose="020B0A04020102020204" pitchFamily="34" charset="0"/>
+              </a:rPr>
+              <a:t>D(x)=a</a:t>
+            </a:r>
+            <a:r>
+              <a:rPr lang="ru-RU" sz="2800" dirty="0" smtClean="0">
+                <a:solidFill>
+                  <a:srgbClr val="FFBD4C"/>
+                </a:solidFill>
+                <a:latin typeface="Arial Black" panose="020B0A04020102020204" pitchFamily="34" charset="0"/>
+              </a:rPr>
+              <a:t>^-1(x-b) </a:t>
+            </a:r>
+            <a:r>
+              <a:rPr lang="ru-RU" sz="2800" dirty="0" err="1" smtClean="0">
+                <a:solidFill>
+                  <a:srgbClr val="FFBD4C"/>
+                </a:solidFill>
+                <a:latin typeface="Arial Black" panose="020B0A04020102020204" pitchFamily="34" charset="0"/>
+              </a:rPr>
+              <a:t>mod</a:t>
+            </a:r>
+            <a:r>
+              <a:rPr lang="ru-RU" sz="2800" dirty="0" smtClean="0">
+                <a:solidFill>
+                  <a:srgbClr val="FFBD4C"/>
+                </a:solidFill>
+                <a:latin typeface="Arial Black" panose="020B0A04020102020204" pitchFamily="34" charset="0"/>
+              </a:rPr>
+              <a:t> </a:t>
+            </a:r>
+            <a:r>
+              <a:rPr lang="ru-RU" sz="2800" dirty="0">
+                <a:solidFill>
+                  <a:srgbClr val="FFBD4C"/>
+                </a:solidFill>
+                <a:latin typeface="Arial Black" panose="020B0A04020102020204" pitchFamily="34" charset="0"/>
+              </a:rPr>
+              <a:t>m</a:t>
+            </a:r>
+          </a:p>
+        </p:txBody>
+      </p:sp>
+    </p:spTree>
+    <p:extLst>
+      <p:ext uri="{BB962C8B-B14F-4D97-AF65-F5344CB8AC3E}">
+        <p14:creationId xmlns:p14="http://schemas.microsoft.com/office/powerpoint/2010/main" val="3729900276"/>
+      </p:ext>
+    </p:extLst>
+  </p:cSld>
+  <p:clrMapOvr>
+    <a:masterClrMapping/>
+  </p:clrMapOvr>
+  <p:timing>
+    <p:tnLst>
+      <p:par>
+        <p:cTn id="1" dur="indefinite" restart="never" nodeType="tmRoot"/>
+      </p:par>
+    </p:tnLst>
+  </p:timing>
+</p:sld>
+</file>
+
+<file path=ppt/slides/slide5.xml><?xml version="1.0" encoding="utf-8"?>
 <p:sld xmlns:a="http://schemas.openxmlformats.org/drawingml/2006/main" xmlns:r="http://schemas.openxmlformats.org/officeDocument/2006/relationships" xmlns:p="http://schemas.openxmlformats.org/presentationml/2006/main">
   <p:cSld>
     <p:bg>
@@ -14967,8 +16597,8 @@
         </p:nvSpPr>
         <p:spPr>
           <a:xfrm>
-            <a:off x="1676399" y="2064326"/>
-            <a:ext cx="3574473" cy="1569660"/>
+            <a:off x="1676399" y="2019059"/>
+            <a:ext cx="3574473" cy="1077218"/>
           </a:xfrm>
           <a:prstGeom prst="rect">
             <a:avLst/>
@@ -14989,7 +16619,7 @@
                 </a:solidFill>
                 <a:latin typeface="Arial Black" panose="020B0A04020102020204" pitchFamily="34" charset="0"/>
               </a:rPr>
-              <a:t>Считывание текста пользователя</a:t>
+              <a:t>Шифрование текста</a:t>
             </a:r>
             <a:endParaRPr lang="ru-RU" sz="3200" dirty="0">
               <a:solidFill>
@@ -15054,8 +16684,8 @@
         </p:nvSpPr>
         <p:spPr>
           <a:xfrm>
-            <a:off x="12785443" y="2064326"/>
-            <a:ext cx="3574473" cy="1077218"/>
+            <a:off x="12517962" y="2256683"/>
+            <a:ext cx="4044409" cy="1077218"/>
           </a:xfrm>
           <a:prstGeom prst="rect">
             <a:avLst/>
@@ -15076,7 +16706,7 @@
                 </a:solidFill>
                 <a:latin typeface="Arial Black" panose="020B0A04020102020204" pitchFamily="34" charset="0"/>
               </a:rPr>
-              <a:t>Считывание ключей</a:t>
+              <a:t>Дешифрование текста</a:t>
             </a:r>
             <a:endParaRPr lang="ru-RU" sz="3200" dirty="0">
               <a:solidFill>
@@ -15095,7 +16725,7 @@
         </p:nvSpPr>
         <p:spPr>
           <a:xfrm>
-            <a:off x="6941127" y="1648691"/>
+            <a:off x="3948545" y="5389418"/>
             <a:ext cx="4461164" cy="2493818"/>
           </a:xfrm>
           <a:prstGeom prst="roundRect">
@@ -15141,7 +16771,7 @@
         </p:nvSpPr>
         <p:spPr>
           <a:xfrm>
-            <a:off x="7384472" y="2064326"/>
+            <a:off x="4391890" y="5851497"/>
             <a:ext cx="3574473" cy="1569660"/>
           </a:xfrm>
           <a:prstGeom prst="rect">
@@ -15163,7 +16793,7 @@
                 </a:solidFill>
                 <a:latin typeface="Arial Black" panose="020B0A04020102020204" pitchFamily="34" charset="0"/>
               </a:rPr>
-              <a:t>Текст окна отображается корректно</a:t>
+              <a:t>Настройка параметров шифра</a:t>
             </a:r>
             <a:endParaRPr lang="ru-RU" sz="3200" dirty="0">
               <a:solidFill>
@@ -15171,52 +16801,6 @@
               </a:solidFill>
               <a:latin typeface="Arial Black" panose="020B0A04020102020204" pitchFamily="34" charset="0"/>
             </a:endParaRPr>
-          </a:p>
-        </p:txBody>
-      </p:sp>
-      <p:sp>
-        <p:nvSpPr>
-          <p:cNvPr id="31" name="Скругленный прямоугольник 30"/>
-          <p:cNvSpPr/>
-          <p:nvPr/>
-        </p:nvSpPr>
-        <p:spPr>
-          <a:xfrm>
-            <a:off x="3588327" y="5389418"/>
-            <a:ext cx="4461164" cy="2493818"/>
-          </a:xfrm>
-          <a:prstGeom prst="roundRect">
-            <a:avLst/>
-          </a:prstGeom>
-          <a:noFill/>
-          <a:ln w="57150">
-            <a:solidFill>
-              <a:srgbClr val="FFBD4C"/>
-            </a:solidFill>
-          </a:ln>
-        </p:spPr>
-        <p:style>
-          <a:lnRef idx="2">
-            <a:schemeClr val="accent1">
-              <a:shade val="50000"/>
-            </a:schemeClr>
-          </a:lnRef>
-          <a:fillRef idx="1">
-            <a:schemeClr val="accent1"/>
-          </a:fillRef>
-          <a:effectRef idx="0">
-            <a:schemeClr val="accent1"/>
-          </a:effectRef>
-          <a:fontRef idx="minor">
-            <a:schemeClr val="lt1"/>
-          </a:fontRef>
-        </p:style>
-        <p:txBody>
-          <a:bodyPr rtlCol="0" anchor="ctr"/>
-          <a:lstStyle/>
-          <a:p>
-            <a:pPr algn="ctr"/>
-            <a:endParaRPr lang="ru-RU"/>
           </a:p>
         </p:txBody>
       </p:sp>
@@ -15268,14 +16852,14 @@
       </p:sp>
       <p:sp>
         <p:nvSpPr>
-          <p:cNvPr id="33" name="TextBox 32"/>
+          <p:cNvPr id="34" name="TextBox 33"/>
           <p:cNvSpPr txBox="1"/>
           <p:nvPr/>
         </p:nvSpPr>
         <p:spPr>
           <a:xfrm>
-            <a:off x="4031673" y="5682917"/>
-            <a:ext cx="3574472" cy="1077218"/>
+            <a:off x="10539333" y="5682917"/>
+            <a:ext cx="3574472" cy="1569660"/>
           </a:xfrm>
           <a:prstGeom prst="rect">
             <a:avLst/>
@@ -15296,48 +16880,7 @@
                 </a:solidFill>
                 <a:latin typeface="Arial Black" panose="020B0A04020102020204" pitchFamily="34" charset="0"/>
               </a:rPr>
-              <a:t>Вывод текста об ошибке</a:t>
-            </a:r>
-            <a:endParaRPr lang="ru-RU" sz="3200" dirty="0">
-              <a:solidFill>
-                <a:schemeClr val="bg1"/>
-              </a:solidFill>
-              <a:latin typeface="Arial Black" panose="020B0A04020102020204" pitchFamily="34" charset="0"/>
-            </a:endParaRPr>
-          </a:p>
-        </p:txBody>
-      </p:sp>
-      <p:sp>
-        <p:nvSpPr>
-          <p:cNvPr id="34" name="TextBox 33"/>
-          <p:cNvSpPr txBox="1"/>
-          <p:nvPr/>
-        </p:nvSpPr>
-        <p:spPr>
-          <a:xfrm>
-            <a:off x="10539333" y="5682917"/>
-            <a:ext cx="3574472" cy="1077218"/>
-          </a:xfrm>
-          <a:prstGeom prst="rect">
-            <a:avLst/>
-          </a:prstGeom>
-          <a:noFill/>
-        </p:spPr>
-        <p:txBody>
-          <a:bodyPr wrap="square" rtlCol="0">
-            <a:spAutoFit/>
-          </a:bodyPr>
-          <a:lstStyle/>
-          <a:p>
-            <a:pPr algn="ctr"/>
-            <a:r>
-              <a:rPr lang="ru-RU" sz="3200" dirty="0" smtClean="0">
-                <a:solidFill>
-                  <a:schemeClr val="bg1"/>
-                </a:solidFill>
-                <a:latin typeface="Arial Black" panose="020B0A04020102020204" pitchFamily="34" charset="0"/>
-              </a:rPr>
-              <a:t>Кнопки управления</a:t>
+              <a:t>Мгновенное отображение результата</a:t>
             </a:r>
             <a:endParaRPr lang="ru-RU" sz="3200" dirty="0">
               <a:solidFill>
@@ -15368,7 +16911,712 @@
 </p:sld>
 </file>
 
-<file path=ppt/slides/slide4.xml><?xml version="1.0" encoding="utf-8"?>
+<file path=ppt/slides/slide6.xml><?xml version="1.0" encoding="utf-8"?>
+<p:sld xmlns:a="http://schemas.openxmlformats.org/drawingml/2006/main" xmlns:r="http://schemas.openxmlformats.org/officeDocument/2006/relationships" xmlns:p="http://schemas.openxmlformats.org/presentationml/2006/main">
+  <p:cSld>
+    <p:spTree>
+      <p:nvGrpSpPr>
+        <p:cNvPr id="1" name="Shape 302"/>
+        <p:cNvGrpSpPr/>
+        <p:nvPr/>
+      </p:nvGrpSpPr>
+      <p:grpSpPr>
+        <a:xfrm>
+          <a:off x="0" y="0"/>
+          <a:ext cx="0" cy="0"/>
+          <a:chOff x="0" y="0"/>
+          <a:chExt cx="0" cy="0"/>
+        </a:xfrm>
+      </p:grpSpPr>
+      <p:pic>
+        <p:nvPicPr>
+          <p:cNvPr id="307" name="Google Shape;307;p13"/>
+          <p:cNvPicPr preferRelativeResize="0"/>
+          <p:nvPr/>
+        </p:nvPicPr>
+        <p:blipFill>
+          <a:blip r:embed="rId3">
+            <a:alphaModFix/>
+          </a:blip>
+          <a:stretch>
+            <a:fillRect/>
+          </a:stretch>
+        </p:blipFill>
+        <p:spPr>
+          <a:xfrm>
+            <a:off x="359295" y="170389"/>
+            <a:ext cx="998450" cy="964818"/>
+          </a:xfrm>
+          <a:prstGeom prst="rect">
+            <a:avLst/>
+          </a:prstGeom>
+          <a:noFill/>
+          <a:ln>
+            <a:noFill/>
+          </a:ln>
+        </p:spPr>
+      </p:pic>
+      <p:sp>
+        <p:nvSpPr>
+          <p:cNvPr id="321" name="Google Shape;321;p13"/>
+          <p:cNvSpPr txBox="1"/>
+          <p:nvPr/>
+        </p:nvSpPr>
+        <p:spPr>
+          <a:xfrm>
+            <a:off x="7643252" y="146814"/>
+            <a:ext cx="2013367" cy="1107996"/>
+          </a:xfrm>
+          <a:prstGeom prst="rect">
+            <a:avLst/>
+          </a:prstGeom>
+          <a:noFill/>
+          <a:ln>
+            <a:noFill/>
+          </a:ln>
+        </p:spPr>
+        <p:txBody>
+          <a:bodyPr spcFirstLastPara="1" wrap="square" lIns="0" tIns="0" rIns="0" bIns="0" anchor="t" anchorCtr="0">
+            <a:spAutoFit/>
+          </a:bodyPr>
+          <a:lstStyle/>
+          <a:p>
+            <a:pPr marL="0" marR="0" lvl="0" indent="0" algn="ctr" rtl="0">
+              <a:lnSpc>
+                <a:spcPct val="120000"/>
+              </a:lnSpc>
+              <a:spcBef>
+                <a:spcPts val="0"/>
+              </a:spcBef>
+              <a:spcAft>
+                <a:spcPts val="0"/>
+              </a:spcAft>
+              <a:buNone/>
+            </a:pPr>
+            <a:r>
+              <a:rPr lang="ru-RU" sz="6000" dirty="0" smtClean="0">
+                <a:solidFill>
+                  <a:srgbClr val="FFBD4C"/>
+                </a:solidFill>
+                <a:latin typeface="Arial Black" panose="020B0A04020102020204" pitchFamily="34" charset="0"/>
+                <a:sym typeface="Montserrat"/>
+              </a:rPr>
+              <a:t>Стек</a:t>
+            </a:r>
+            <a:endParaRPr sz="6000" dirty="0">
+              <a:latin typeface="Arial Black" panose="020B0A04020102020204" pitchFamily="34" charset="0"/>
+            </a:endParaRPr>
+          </a:p>
+        </p:txBody>
+      </p:sp>
+      <p:grpSp>
+        <p:nvGrpSpPr>
+          <p:cNvPr id="323" name="Google Shape;323;p13"/>
+          <p:cNvGrpSpPr/>
+          <p:nvPr/>
+        </p:nvGrpSpPr>
+        <p:grpSpPr>
+          <a:xfrm>
+            <a:off x="13473339" y="9749180"/>
+            <a:ext cx="2137482" cy="475324"/>
+            <a:chOff x="30956" y="22212"/>
+            <a:chExt cx="2849976" cy="633766"/>
+          </a:xfrm>
+        </p:grpSpPr>
+        <p:cxnSp>
+          <p:nvCxnSpPr>
+            <p:cNvPr id="324" name="Google Shape;324;p13"/>
+            <p:cNvCxnSpPr/>
+            <p:nvPr/>
+          </p:nvCxnSpPr>
+          <p:spPr>
+            <a:xfrm rot="10800000" flipH="1">
+              <a:off x="30956" y="22212"/>
+              <a:ext cx="454750" cy="633766"/>
+            </a:xfrm>
+            <a:prstGeom prst="straightConnector1">
+              <a:avLst/>
+            </a:prstGeom>
+            <a:noFill/>
+            <a:ln w="76200" cap="flat" cmpd="sng">
+              <a:solidFill>
+                <a:srgbClr val="FFBD4C"/>
+              </a:solidFill>
+              <a:prstDash val="solid"/>
+              <a:round/>
+              <a:headEnd type="none" w="sm" len="sm"/>
+              <a:tailEnd type="none" w="sm" len="sm"/>
+            </a:ln>
+          </p:spPr>
+        </p:cxnSp>
+        <p:cxnSp>
+          <p:nvCxnSpPr>
+            <p:cNvPr id="325" name="Google Shape;325;p13"/>
+            <p:cNvCxnSpPr/>
+            <p:nvPr/>
+          </p:nvCxnSpPr>
+          <p:spPr>
+            <a:xfrm rot="10800000" flipH="1">
+              <a:off x="430160" y="22212"/>
+              <a:ext cx="454750" cy="633766"/>
+            </a:xfrm>
+            <a:prstGeom prst="straightConnector1">
+              <a:avLst/>
+            </a:prstGeom>
+            <a:noFill/>
+            <a:ln w="76200" cap="flat" cmpd="sng">
+              <a:solidFill>
+                <a:srgbClr val="FFBD4C"/>
+              </a:solidFill>
+              <a:prstDash val="solid"/>
+              <a:round/>
+              <a:headEnd type="none" w="sm" len="sm"/>
+              <a:tailEnd type="none" w="sm" len="sm"/>
+            </a:ln>
+          </p:spPr>
+        </p:cxnSp>
+        <p:cxnSp>
+          <p:nvCxnSpPr>
+            <p:cNvPr id="326" name="Google Shape;326;p13"/>
+            <p:cNvCxnSpPr/>
+            <p:nvPr/>
+          </p:nvCxnSpPr>
+          <p:spPr>
+            <a:xfrm rot="10800000" flipH="1">
+              <a:off x="829364" y="22212"/>
+              <a:ext cx="454750" cy="633766"/>
+            </a:xfrm>
+            <a:prstGeom prst="straightConnector1">
+              <a:avLst/>
+            </a:prstGeom>
+            <a:noFill/>
+            <a:ln w="76200" cap="flat" cmpd="sng">
+              <a:solidFill>
+                <a:srgbClr val="FFBD4C"/>
+              </a:solidFill>
+              <a:prstDash val="solid"/>
+              <a:round/>
+              <a:headEnd type="none" w="sm" len="sm"/>
+              <a:tailEnd type="none" w="sm" len="sm"/>
+            </a:ln>
+          </p:spPr>
+        </p:cxnSp>
+        <p:cxnSp>
+          <p:nvCxnSpPr>
+            <p:cNvPr id="327" name="Google Shape;327;p13"/>
+            <p:cNvCxnSpPr/>
+            <p:nvPr/>
+          </p:nvCxnSpPr>
+          <p:spPr>
+            <a:xfrm rot="10800000" flipH="1">
+              <a:off x="1228569" y="22212"/>
+              <a:ext cx="454750" cy="633766"/>
+            </a:xfrm>
+            <a:prstGeom prst="straightConnector1">
+              <a:avLst/>
+            </a:prstGeom>
+            <a:noFill/>
+            <a:ln w="76200" cap="flat" cmpd="sng">
+              <a:solidFill>
+                <a:srgbClr val="FFBD4C"/>
+              </a:solidFill>
+              <a:prstDash val="solid"/>
+              <a:round/>
+              <a:headEnd type="none" w="sm" len="sm"/>
+              <a:tailEnd type="none" w="sm" len="sm"/>
+            </a:ln>
+          </p:spPr>
+        </p:cxnSp>
+        <p:cxnSp>
+          <p:nvCxnSpPr>
+            <p:cNvPr id="328" name="Google Shape;328;p13"/>
+            <p:cNvCxnSpPr/>
+            <p:nvPr/>
+          </p:nvCxnSpPr>
+          <p:spPr>
+            <a:xfrm rot="10800000" flipH="1">
+              <a:off x="1627773" y="22212"/>
+              <a:ext cx="454750" cy="633766"/>
+            </a:xfrm>
+            <a:prstGeom prst="straightConnector1">
+              <a:avLst/>
+            </a:prstGeom>
+            <a:noFill/>
+            <a:ln w="76200" cap="flat" cmpd="sng">
+              <a:solidFill>
+                <a:srgbClr val="FFBD4C"/>
+              </a:solidFill>
+              <a:prstDash val="solid"/>
+              <a:round/>
+              <a:headEnd type="none" w="sm" len="sm"/>
+              <a:tailEnd type="none" w="sm" len="sm"/>
+            </a:ln>
+          </p:spPr>
+        </p:cxnSp>
+        <p:cxnSp>
+          <p:nvCxnSpPr>
+            <p:cNvPr id="329" name="Google Shape;329;p13"/>
+            <p:cNvCxnSpPr/>
+            <p:nvPr/>
+          </p:nvCxnSpPr>
+          <p:spPr>
+            <a:xfrm rot="10800000" flipH="1">
+              <a:off x="2026977" y="22212"/>
+              <a:ext cx="454750" cy="633766"/>
+            </a:xfrm>
+            <a:prstGeom prst="straightConnector1">
+              <a:avLst/>
+            </a:prstGeom>
+            <a:noFill/>
+            <a:ln w="76200" cap="flat" cmpd="sng">
+              <a:solidFill>
+                <a:srgbClr val="FFBD4C"/>
+              </a:solidFill>
+              <a:prstDash val="solid"/>
+              <a:round/>
+              <a:headEnd type="none" w="sm" len="sm"/>
+              <a:tailEnd type="none" w="sm" len="sm"/>
+            </a:ln>
+          </p:spPr>
+        </p:cxnSp>
+        <p:cxnSp>
+          <p:nvCxnSpPr>
+            <p:cNvPr id="330" name="Google Shape;330;p13"/>
+            <p:cNvCxnSpPr/>
+            <p:nvPr/>
+          </p:nvCxnSpPr>
+          <p:spPr>
+            <a:xfrm rot="10800000" flipH="1">
+              <a:off x="2426182" y="22212"/>
+              <a:ext cx="454750" cy="633766"/>
+            </a:xfrm>
+            <a:prstGeom prst="straightConnector1">
+              <a:avLst/>
+            </a:prstGeom>
+            <a:noFill/>
+            <a:ln w="76200" cap="flat" cmpd="sng">
+              <a:solidFill>
+                <a:srgbClr val="FFBD4C"/>
+              </a:solidFill>
+              <a:prstDash val="solid"/>
+              <a:round/>
+              <a:headEnd type="none" w="sm" len="sm"/>
+              <a:tailEnd type="none" w="sm" len="sm"/>
+            </a:ln>
+          </p:spPr>
+        </p:cxnSp>
+      </p:grpSp>
+      <p:grpSp>
+        <p:nvGrpSpPr>
+          <p:cNvPr id="331" name="Google Shape;331;p13"/>
+          <p:cNvGrpSpPr/>
+          <p:nvPr/>
+        </p:nvGrpSpPr>
+        <p:grpSpPr>
+          <a:xfrm>
+            <a:off x="15590579" y="9749180"/>
+            <a:ext cx="2137482" cy="475324"/>
+            <a:chOff x="30956" y="22212"/>
+            <a:chExt cx="2849976" cy="633766"/>
+          </a:xfrm>
+        </p:grpSpPr>
+        <p:cxnSp>
+          <p:nvCxnSpPr>
+            <p:cNvPr id="332" name="Google Shape;332;p13"/>
+            <p:cNvCxnSpPr/>
+            <p:nvPr/>
+          </p:nvCxnSpPr>
+          <p:spPr>
+            <a:xfrm rot="10800000" flipH="1">
+              <a:off x="30956" y="22212"/>
+              <a:ext cx="454750" cy="633766"/>
+            </a:xfrm>
+            <a:prstGeom prst="straightConnector1">
+              <a:avLst/>
+            </a:prstGeom>
+            <a:noFill/>
+            <a:ln w="76200" cap="flat" cmpd="sng">
+              <a:solidFill>
+                <a:srgbClr val="FFBD4C"/>
+              </a:solidFill>
+              <a:prstDash val="solid"/>
+              <a:round/>
+              <a:headEnd type="none" w="sm" len="sm"/>
+              <a:tailEnd type="none" w="sm" len="sm"/>
+            </a:ln>
+          </p:spPr>
+        </p:cxnSp>
+        <p:cxnSp>
+          <p:nvCxnSpPr>
+            <p:cNvPr id="333" name="Google Shape;333;p13"/>
+            <p:cNvCxnSpPr/>
+            <p:nvPr/>
+          </p:nvCxnSpPr>
+          <p:spPr>
+            <a:xfrm rot="10800000" flipH="1">
+              <a:off x="430160" y="22212"/>
+              <a:ext cx="454750" cy="633766"/>
+            </a:xfrm>
+            <a:prstGeom prst="straightConnector1">
+              <a:avLst/>
+            </a:prstGeom>
+            <a:noFill/>
+            <a:ln w="76200" cap="flat" cmpd="sng">
+              <a:solidFill>
+                <a:srgbClr val="FFBD4C"/>
+              </a:solidFill>
+              <a:prstDash val="solid"/>
+              <a:round/>
+              <a:headEnd type="none" w="sm" len="sm"/>
+              <a:tailEnd type="none" w="sm" len="sm"/>
+            </a:ln>
+          </p:spPr>
+        </p:cxnSp>
+        <p:cxnSp>
+          <p:nvCxnSpPr>
+            <p:cNvPr id="334" name="Google Shape;334;p13"/>
+            <p:cNvCxnSpPr/>
+            <p:nvPr/>
+          </p:nvCxnSpPr>
+          <p:spPr>
+            <a:xfrm rot="10800000" flipH="1">
+              <a:off x="829364" y="22212"/>
+              <a:ext cx="454750" cy="633766"/>
+            </a:xfrm>
+            <a:prstGeom prst="straightConnector1">
+              <a:avLst/>
+            </a:prstGeom>
+            <a:noFill/>
+            <a:ln w="76200" cap="flat" cmpd="sng">
+              <a:solidFill>
+                <a:srgbClr val="FFBD4C"/>
+              </a:solidFill>
+              <a:prstDash val="solid"/>
+              <a:round/>
+              <a:headEnd type="none" w="sm" len="sm"/>
+              <a:tailEnd type="none" w="sm" len="sm"/>
+            </a:ln>
+          </p:spPr>
+        </p:cxnSp>
+        <p:cxnSp>
+          <p:nvCxnSpPr>
+            <p:cNvPr id="335" name="Google Shape;335;p13"/>
+            <p:cNvCxnSpPr/>
+            <p:nvPr/>
+          </p:nvCxnSpPr>
+          <p:spPr>
+            <a:xfrm rot="10800000" flipH="1">
+              <a:off x="1228569" y="22212"/>
+              <a:ext cx="454750" cy="633766"/>
+            </a:xfrm>
+            <a:prstGeom prst="straightConnector1">
+              <a:avLst/>
+            </a:prstGeom>
+            <a:noFill/>
+            <a:ln w="76200" cap="flat" cmpd="sng">
+              <a:solidFill>
+                <a:srgbClr val="FFBD4C"/>
+              </a:solidFill>
+              <a:prstDash val="solid"/>
+              <a:round/>
+              <a:headEnd type="none" w="sm" len="sm"/>
+              <a:tailEnd type="none" w="sm" len="sm"/>
+            </a:ln>
+          </p:spPr>
+        </p:cxnSp>
+        <p:cxnSp>
+          <p:nvCxnSpPr>
+            <p:cNvPr id="336" name="Google Shape;336;p13"/>
+            <p:cNvCxnSpPr/>
+            <p:nvPr/>
+          </p:nvCxnSpPr>
+          <p:spPr>
+            <a:xfrm rot="10800000" flipH="1">
+              <a:off x="1627773" y="22212"/>
+              <a:ext cx="454750" cy="633766"/>
+            </a:xfrm>
+            <a:prstGeom prst="straightConnector1">
+              <a:avLst/>
+            </a:prstGeom>
+            <a:noFill/>
+            <a:ln w="76200" cap="flat" cmpd="sng">
+              <a:solidFill>
+                <a:srgbClr val="FFBD4C"/>
+              </a:solidFill>
+              <a:prstDash val="solid"/>
+              <a:round/>
+              <a:headEnd type="none" w="sm" len="sm"/>
+              <a:tailEnd type="none" w="sm" len="sm"/>
+            </a:ln>
+          </p:spPr>
+        </p:cxnSp>
+        <p:cxnSp>
+          <p:nvCxnSpPr>
+            <p:cNvPr id="337" name="Google Shape;337;p13"/>
+            <p:cNvCxnSpPr/>
+            <p:nvPr/>
+          </p:nvCxnSpPr>
+          <p:spPr>
+            <a:xfrm rot="10800000" flipH="1">
+              <a:off x="2026977" y="22212"/>
+              <a:ext cx="454750" cy="633766"/>
+            </a:xfrm>
+            <a:prstGeom prst="straightConnector1">
+              <a:avLst/>
+            </a:prstGeom>
+            <a:noFill/>
+            <a:ln w="76200" cap="flat" cmpd="sng">
+              <a:solidFill>
+                <a:srgbClr val="FFBD4C"/>
+              </a:solidFill>
+              <a:prstDash val="solid"/>
+              <a:round/>
+              <a:headEnd type="none" w="sm" len="sm"/>
+              <a:tailEnd type="none" w="sm" len="sm"/>
+            </a:ln>
+          </p:spPr>
+        </p:cxnSp>
+        <p:cxnSp>
+          <p:nvCxnSpPr>
+            <p:cNvPr id="338" name="Google Shape;338;p13"/>
+            <p:cNvCxnSpPr/>
+            <p:nvPr/>
+          </p:nvCxnSpPr>
+          <p:spPr>
+            <a:xfrm rot="10800000" flipH="1">
+              <a:off x="2426182" y="22212"/>
+              <a:ext cx="454750" cy="633766"/>
+            </a:xfrm>
+            <a:prstGeom prst="straightConnector1">
+              <a:avLst/>
+            </a:prstGeom>
+            <a:noFill/>
+            <a:ln w="76200" cap="flat" cmpd="sng">
+              <a:solidFill>
+                <a:srgbClr val="FFBD4C"/>
+              </a:solidFill>
+              <a:prstDash val="solid"/>
+              <a:round/>
+              <a:headEnd type="none" w="sm" len="sm"/>
+              <a:tailEnd type="none" w="sm" len="sm"/>
+            </a:ln>
+          </p:spPr>
+        </p:cxnSp>
+      </p:grpSp>
+      <p:sp>
+        <p:nvSpPr>
+          <p:cNvPr id="4" name="TextBox 3"/>
+          <p:cNvSpPr txBox="1"/>
+          <p:nvPr/>
+        </p:nvSpPr>
+        <p:spPr>
+          <a:xfrm>
+            <a:off x="2963657" y="1759527"/>
+            <a:ext cx="13995066" cy="6463308"/>
+          </a:xfrm>
+          <a:prstGeom prst="rect">
+            <a:avLst/>
+          </a:prstGeom>
+          <a:noFill/>
+        </p:spPr>
+        <p:txBody>
+          <a:bodyPr wrap="square" rtlCol="0">
+            <a:spAutoFit/>
+          </a:bodyPr>
+          <a:lstStyle/>
+          <a:p>
+            <a:r>
+              <a:rPr lang="ru-RU" sz="4000" dirty="0">
+                <a:solidFill>
+                  <a:srgbClr val="FFBD4C"/>
+                </a:solidFill>
+                <a:latin typeface="Arial Black" panose="020B0A04020102020204" pitchFamily="34" charset="0"/>
+              </a:rPr>
+              <a:t>1.Язык программирования </a:t>
+            </a:r>
+            <a:r>
+              <a:rPr lang="ru-RU" sz="4000" dirty="0" err="1">
+                <a:solidFill>
+                  <a:srgbClr val="FFBD4C"/>
+                </a:solidFill>
+                <a:latin typeface="Arial Black" panose="020B0A04020102020204" pitchFamily="34" charset="0"/>
+              </a:rPr>
+              <a:t>Python</a:t>
+            </a:r>
+            <a:r>
+              <a:rPr lang="ru-RU" sz="4000" dirty="0" smtClean="0">
+                <a:solidFill>
+                  <a:srgbClr val="FFBD4C"/>
+                </a:solidFill>
+                <a:latin typeface="Arial Black" panose="020B0A04020102020204" pitchFamily="34" charset="0"/>
+              </a:rPr>
+              <a:t>.</a:t>
+            </a:r>
+          </a:p>
+          <a:p>
+            <a:endParaRPr lang="ru-RU" sz="4000" dirty="0" smtClean="0">
+              <a:solidFill>
+                <a:srgbClr val="FFBD4C"/>
+              </a:solidFill>
+              <a:latin typeface="Arial Black" panose="020B0A04020102020204" pitchFamily="34" charset="0"/>
+            </a:endParaRPr>
+          </a:p>
+          <a:p>
+            <a:r>
+              <a:rPr lang="ru-RU" sz="4000" dirty="0">
+                <a:solidFill>
+                  <a:srgbClr val="FFBD4C"/>
+                </a:solidFill>
+                <a:latin typeface="Arial Black" panose="020B0A04020102020204" pitchFamily="34" charset="0"/>
+              </a:rPr>
+              <a:t>2.Flask</a:t>
+            </a:r>
+            <a:r>
+              <a:rPr lang="ru-RU" sz="4000" dirty="0" smtClean="0">
+                <a:solidFill>
+                  <a:srgbClr val="FFBD4C"/>
+                </a:solidFill>
+                <a:latin typeface="Arial Black" panose="020B0A04020102020204" pitchFamily="34" charset="0"/>
+              </a:rPr>
+              <a:t>.</a:t>
+            </a:r>
+            <a:r>
+              <a:rPr lang="ru-RU" sz="4000" dirty="0">
+                <a:solidFill>
+                  <a:srgbClr val="FFBD4C"/>
+                </a:solidFill>
+                <a:latin typeface="Arial Black" panose="020B0A04020102020204" pitchFamily="34" charset="0"/>
+              </a:rPr>
+              <a:t> </a:t>
+            </a:r>
+            <a:r>
+              <a:rPr lang="ru-RU" sz="4000" dirty="0" err="1">
+                <a:solidFill>
+                  <a:srgbClr val="FFBD4C"/>
+                </a:solidFill>
+                <a:latin typeface="Arial Black" panose="020B0A04020102020204" pitchFamily="34" charset="0"/>
+              </a:rPr>
+              <a:t>микрофреймворк</a:t>
+            </a:r>
+            <a:r>
+              <a:rPr lang="ru-RU" sz="4000" dirty="0">
+                <a:solidFill>
+                  <a:srgbClr val="FFBD4C"/>
+                </a:solidFill>
+                <a:latin typeface="Arial Black" panose="020B0A04020102020204" pitchFamily="34" charset="0"/>
+              </a:rPr>
+              <a:t> для создания веб-приложений на </a:t>
+            </a:r>
+            <a:r>
+              <a:rPr lang="ru-RU" sz="4000" dirty="0" err="1">
+                <a:solidFill>
+                  <a:srgbClr val="FFBD4C"/>
+                </a:solidFill>
+                <a:latin typeface="Arial Black" panose="020B0A04020102020204" pitchFamily="34" charset="0"/>
+              </a:rPr>
+              <a:t>Python</a:t>
+            </a:r>
+            <a:r>
+              <a:rPr lang="ru-RU" sz="4000" dirty="0" smtClean="0">
+                <a:solidFill>
+                  <a:srgbClr val="FFBD4C"/>
+                </a:solidFill>
+                <a:latin typeface="Arial Black" panose="020B0A04020102020204" pitchFamily="34" charset="0"/>
+              </a:rPr>
+              <a:t>.</a:t>
+            </a:r>
+          </a:p>
+          <a:p>
+            <a:endParaRPr lang="ru-RU" sz="4000" dirty="0">
+              <a:solidFill>
+                <a:srgbClr val="FFBD4C"/>
+              </a:solidFill>
+              <a:latin typeface="Arial Black" panose="020B0A04020102020204" pitchFamily="34" charset="0"/>
+            </a:endParaRPr>
+          </a:p>
+          <a:p>
+            <a:r>
+              <a:rPr lang="ru-RU" sz="4000" dirty="0" smtClean="0">
+                <a:solidFill>
+                  <a:srgbClr val="FFBD4C"/>
+                </a:solidFill>
+                <a:latin typeface="Arial Black" panose="020B0A04020102020204" pitchFamily="34" charset="0"/>
+              </a:rPr>
+              <a:t>3.HTML </a:t>
+            </a:r>
+            <a:r>
+              <a:rPr lang="ru-RU" sz="4000" dirty="0">
+                <a:solidFill>
+                  <a:srgbClr val="FFBD4C"/>
+                </a:solidFill>
+                <a:latin typeface="Arial Black" panose="020B0A04020102020204" pitchFamily="34" charset="0"/>
+              </a:rPr>
+              <a:t>используется для создания структуры веб-страницы</a:t>
+            </a:r>
+            <a:r>
+              <a:rPr lang="ru-RU" sz="4000" dirty="0" smtClean="0">
+                <a:solidFill>
+                  <a:srgbClr val="FFBD4C"/>
+                </a:solidFill>
+                <a:latin typeface="Arial Black" panose="020B0A04020102020204" pitchFamily="34" charset="0"/>
+              </a:rPr>
+              <a:t>.</a:t>
+            </a:r>
+          </a:p>
+          <a:p>
+            <a:endParaRPr lang="ru-RU" sz="4000" dirty="0">
+              <a:solidFill>
+                <a:srgbClr val="FFBD4C"/>
+              </a:solidFill>
+              <a:latin typeface="Arial Black" panose="020B0A04020102020204" pitchFamily="34" charset="0"/>
+            </a:endParaRPr>
+          </a:p>
+          <a:p>
+            <a:r>
+              <a:rPr lang="ru-RU" sz="4000" dirty="0" smtClean="0">
+                <a:solidFill>
+                  <a:srgbClr val="FFBD4C"/>
+                </a:solidFill>
+                <a:latin typeface="Arial Black" panose="020B0A04020102020204" pitchFamily="34" charset="0"/>
+              </a:rPr>
+              <a:t>4.CSS </a:t>
+            </a:r>
+            <a:r>
+              <a:rPr lang="ru-RU" sz="4000" dirty="0">
+                <a:solidFill>
+                  <a:srgbClr val="FFBD4C"/>
+                </a:solidFill>
+                <a:latin typeface="Arial Black" panose="020B0A04020102020204" pitchFamily="34" charset="0"/>
+              </a:rPr>
+              <a:t>используется для оформления интерфейса.</a:t>
+            </a:r>
+          </a:p>
+          <a:p>
+            <a:endParaRPr lang="ru-RU" dirty="0"/>
+          </a:p>
+        </p:txBody>
+      </p:sp>
+    </p:spTree>
+    <p:extLst>
+      <p:ext uri="{BB962C8B-B14F-4D97-AF65-F5344CB8AC3E}">
+        <p14:creationId xmlns:p14="http://schemas.microsoft.com/office/powerpoint/2010/main" val="3196203979"/>
+      </p:ext>
+    </p:extLst>
+  </p:cSld>
+  <p:clrMapOvr>
+    <a:masterClrMapping/>
+  </p:clrMapOvr>
+  <p:timing>
+    <p:tnLst>
+      <p:par>
+        <p:cTn id="1" dur="indefinite" restart="never" nodeType="tmRoot"/>
+      </p:par>
+    </p:tnLst>
+  </p:timing>
+</p:sld>
+</file>
+
+<file path=ppt/slides/slide7.xml><?xml version="1.0" encoding="utf-8"?>
 <p:sld xmlns:a="http://schemas.openxmlformats.org/drawingml/2006/main" xmlns:r="http://schemas.openxmlformats.org/officeDocument/2006/relationships" xmlns:p="http://schemas.openxmlformats.org/presentationml/2006/main">
   <p:cSld>
     <p:bg>
@@ -16194,7 +18442,7 @@
 </p:sld>
 </file>
 
-<file path=ppt/slides/slide5.xml><?xml version="1.0" encoding="utf-8"?>
+<file path=ppt/slides/slide8.xml><?xml version="1.0" encoding="utf-8"?>
 <p:sld xmlns:a="http://schemas.openxmlformats.org/drawingml/2006/main" xmlns:r="http://schemas.openxmlformats.org/officeDocument/2006/relationships" xmlns:p="http://schemas.openxmlformats.org/presentationml/2006/main">
   <p:cSld>
     <p:bg>
@@ -16227,7 +18475,7 @@
         </p:nvGrpSpPr>
         <p:grpSpPr>
           <a:xfrm>
-            <a:off x="3982638" y="2370807"/>
+            <a:off x="4975110" y="2357256"/>
             <a:ext cx="1430070" cy="1505747"/>
             <a:chOff x="0" y="0"/>
             <a:chExt cx="812800" cy="812800"/>
@@ -16727,7 +18975,7 @@
         </p:nvGrpSpPr>
         <p:grpSpPr>
           <a:xfrm>
-            <a:off x="3647241" y="2815675"/>
+            <a:off x="4630111" y="2803583"/>
             <a:ext cx="2075056" cy="3026010"/>
             <a:chOff x="0" y="-38100"/>
             <a:chExt cx="1143386" cy="1442558"/>
@@ -17039,7 +19287,7 @@
         </p:nvSpPr>
         <p:spPr>
           <a:xfrm>
-            <a:off x="3721533" y="4035206"/>
+            <a:off x="4683333" y="4035205"/>
             <a:ext cx="1968612" cy="904863"/>
           </a:xfrm>
           <a:prstGeom prst="rect">
@@ -17119,7 +19367,7 @@
         </p:nvSpPr>
         <p:spPr>
           <a:xfrm>
-            <a:off x="6813438" y="4035206"/>
+            <a:off x="8552078" y="4035205"/>
             <a:ext cx="1968612" cy="904863"/>
           </a:xfrm>
           <a:prstGeom prst="rect">
@@ -17199,7 +19447,7 @@
         </p:nvGrpSpPr>
         <p:grpSpPr>
           <a:xfrm>
-            <a:off x="6739982" y="2821588"/>
+            <a:off x="8498856" y="2803583"/>
             <a:ext cx="2075056" cy="3026010"/>
             <a:chOff x="0" y="-38100"/>
             <a:chExt cx="1143386" cy="1442558"/>
@@ -17370,7 +19618,7 @@
         </p:nvGrpSpPr>
         <p:grpSpPr>
           <a:xfrm>
-            <a:off x="6987717" y="2331742"/>
+            <a:off x="8632347" y="2281257"/>
             <a:ext cx="1620054" cy="1583870"/>
             <a:chOff x="0" y="0"/>
             <a:chExt cx="812800" cy="812800"/>
@@ -17505,13 +19753,13 @@
       </p:grpSp>
       <p:grpSp>
         <p:nvGrpSpPr>
-          <p:cNvPr id="72" name="Google Shape;253;p12"/>
+          <p:cNvPr id="80" name="Google Shape;253;p12"/>
           <p:cNvGrpSpPr/>
           <p:nvPr/>
         </p:nvGrpSpPr>
         <p:grpSpPr>
           <a:xfrm>
-            <a:off x="9861590" y="2806548"/>
+            <a:off x="11978483" y="2803583"/>
             <a:ext cx="2075056" cy="3026010"/>
             <a:chOff x="0" y="-38100"/>
             <a:chExt cx="1143386" cy="1442558"/>
@@ -17519,7 +19767,7 @@
         </p:grpSpPr>
         <p:sp>
           <p:nvSpPr>
-            <p:cNvPr id="73" name="Google Shape;254;p12"/>
+            <p:cNvPr id="81" name="Google Shape;254;p12"/>
             <p:cNvSpPr/>
             <p:nvPr/>
           </p:nvSpPr>
@@ -17626,7 +19874,7 @@
         </p:sp>
         <p:sp>
           <p:nvSpPr>
-            <p:cNvPr id="74" name="Google Shape;255;p12"/>
+            <p:cNvPr id="82" name="Google Shape;255;p12"/>
             <p:cNvSpPr txBox="1"/>
             <p:nvPr/>
           </p:nvSpPr>
@@ -17676,234 +19924,13 @@
       </p:grpSp>
       <p:grpSp>
         <p:nvGrpSpPr>
-          <p:cNvPr id="76" name="Google Shape;250;p12"/>
+          <p:cNvPr id="83" name="Google Shape;253;p12"/>
           <p:cNvGrpSpPr/>
           <p:nvPr/>
         </p:nvGrpSpPr>
         <p:grpSpPr>
           <a:xfrm>
-            <a:off x="10089091" y="2258140"/>
-            <a:ext cx="1620054" cy="1583870"/>
-            <a:chOff x="0" y="0"/>
-            <a:chExt cx="812800" cy="812800"/>
-          </a:xfrm>
-        </p:grpSpPr>
-        <p:sp>
-          <p:nvSpPr>
-            <p:cNvPr id="77" name="Google Shape;251;p12"/>
-            <p:cNvSpPr/>
-            <p:nvPr/>
-          </p:nvSpPr>
-          <p:spPr>
-            <a:xfrm>
-              <a:off x="0" y="0"/>
-              <a:ext cx="812800" cy="812800"/>
-            </a:xfrm>
-            <a:custGeom>
-              <a:avLst/>
-              <a:gdLst/>
-              <a:ahLst/>
-              <a:cxnLst/>
-              <a:rect l="l" t="t" r="r" b="b"/>
-              <a:pathLst>
-                <a:path w="812800" h="812800" extrusionOk="0">
-                  <a:moveTo>
-                    <a:pt x="406400" y="0"/>
-                  </a:moveTo>
-                  <a:cubicBezTo>
-                    <a:pt x="181951" y="0"/>
-                    <a:pt x="0" y="181951"/>
-                    <a:pt x="0" y="406400"/>
-                  </a:cubicBezTo>
-                  <a:cubicBezTo>
-                    <a:pt x="0" y="630849"/>
-                    <a:pt x="181951" y="812800"/>
-                    <a:pt x="406400" y="812800"/>
-                  </a:cubicBezTo>
-                  <a:cubicBezTo>
-                    <a:pt x="630849" y="812800"/>
-                    <a:pt x="812800" y="630849"/>
-                    <a:pt x="812800" y="406400"/>
-                  </a:cubicBezTo>
-                  <a:cubicBezTo>
-                    <a:pt x="812800" y="181951"/>
-                    <a:pt x="630849" y="0"/>
-                    <a:pt x="406400" y="0"/>
-                  </a:cubicBezTo>
-                  <a:close/>
-                </a:path>
-              </a:pathLst>
-            </a:custGeom>
-            <a:solidFill>
-              <a:srgbClr val="FFBD4C"/>
-            </a:solidFill>
-            <a:ln>
-              <a:noFill/>
-            </a:ln>
-          </p:spPr>
-          <p:txBody>
-            <a:bodyPr spcFirstLastPara="1" wrap="square" lIns="91425" tIns="91425" rIns="91425" bIns="91425" anchor="ctr" anchorCtr="0">
-              <a:noAutofit/>
-            </a:bodyPr>
-            <a:lstStyle/>
-            <a:p>
-              <a:pPr marL="0" lvl="0" indent="0" algn="l" rtl="0">
-                <a:spcBef>
-                  <a:spcPts val="0"/>
-                </a:spcBef>
-                <a:spcAft>
-                  <a:spcPts val="0"/>
-                </a:spcAft>
-                <a:buNone/>
-              </a:pPr>
-              <a:endParaRPr/>
-            </a:p>
-          </p:txBody>
-        </p:sp>
-        <p:sp>
-          <p:nvSpPr>
-            <p:cNvPr id="78" name="Google Shape;252;p12"/>
-            <p:cNvSpPr txBox="1"/>
-            <p:nvPr/>
-          </p:nvSpPr>
-          <p:spPr>
-            <a:xfrm>
-              <a:off x="76200" y="27292"/>
-              <a:ext cx="677096" cy="709308"/>
-            </a:xfrm>
-            <a:prstGeom prst="rect">
-              <a:avLst/>
-            </a:prstGeom>
-            <a:noFill/>
-            <a:ln>
-              <a:noFill/>
-            </a:ln>
-          </p:spPr>
-          <p:txBody>
-            <a:bodyPr spcFirstLastPara="1" wrap="square" lIns="50800" tIns="50800" rIns="50800" bIns="50800" anchor="ctr" anchorCtr="0">
-              <a:noAutofit/>
-            </a:bodyPr>
-            <a:lstStyle/>
-            <a:p>
-              <a:pPr lvl="1" algn="ctr">
-                <a:lnSpc>
-                  <a:spcPct val="186611"/>
-                </a:lnSpc>
-              </a:pPr>
-              <a:r>
-                <a:rPr lang="ru-RU" sz="6000" dirty="0">
-                  <a:solidFill>
-                    <a:schemeClr val="dk1"/>
-                  </a:solidFill>
-                  <a:latin typeface="Arial Black" panose="020B0A04020102020204" pitchFamily="34" charset="0"/>
-                  <a:ea typeface="Calibri"/>
-                  <a:cs typeface="Calibri"/>
-                  <a:sym typeface="Calibri"/>
-                </a:rPr>
-                <a:t>4</a:t>
-              </a:r>
-              <a:endParaRPr sz="6000" b="0" i="0" u="none" strike="noStrike" cap="none" dirty="0">
-                <a:solidFill>
-                  <a:schemeClr val="dk1"/>
-                </a:solidFill>
-                <a:latin typeface="Arial Black" panose="020B0A04020102020204" pitchFamily="34" charset="0"/>
-                <a:ea typeface="Calibri"/>
-                <a:cs typeface="Calibri"/>
-                <a:sym typeface="Calibri"/>
-              </a:endParaRPr>
-            </a:p>
-          </p:txBody>
-        </p:sp>
-      </p:grpSp>
-      <p:sp>
-        <p:nvSpPr>
-          <p:cNvPr id="79" name="Google Shape;285;p12"/>
-          <p:cNvSpPr txBox="1"/>
-          <p:nvPr/>
-        </p:nvSpPr>
-        <p:spPr>
-          <a:xfrm>
-            <a:off x="9914812" y="4037309"/>
-            <a:ext cx="1968612" cy="904863"/>
-          </a:xfrm>
-          <a:prstGeom prst="rect">
-            <a:avLst/>
-          </a:prstGeom>
-          <a:noFill/>
-          <a:ln>
-            <a:noFill/>
-          </a:ln>
-        </p:spPr>
-        <p:txBody>
-          <a:bodyPr spcFirstLastPara="1" wrap="square" lIns="0" tIns="0" rIns="0" bIns="0" anchor="t" anchorCtr="0">
-            <a:spAutoFit/>
-          </a:bodyPr>
-          <a:lstStyle/>
-          <a:p>
-            <a:pPr marL="0" marR="0" lvl="0" indent="0" algn="ctr" rtl="0">
-              <a:lnSpc>
-                <a:spcPct val="139958"/>
-              </a:lnSpc>
-              <a:spcBef>
-                <a:spcPts val="0"/>
-              </a:spcBef>
-              <a:spcAft>
-                <a:spcPts val="0"/>
-              </a:spcAft>
-              <a:buNone/>
-            </a:pPr>
-            <a:r>
-              <a:rPr lang="ru-RU" sz="2400" b="0" i="0" u="none" strike="noStrike" cap="none" dirty="0" smtClean="0">
-                <a:solidFill>
-                  <a:srgbClr val="FFFFFF"/>
-                </a:solidFill>
-                <a:latin typeface="+mj-lt"/>
-                <a:ea typeface="Roboto Condensed"/>
-                <a:cs typeface="Roboto Condensed"/>
-                <a:sym typeface="Roboto Condensed"/>
-              </a:rPr>
-              <a:t>Ввод</a:t>
-            </a:r>
-          </a:p>
-          <a:p>
-            <a:pPr marL="0" marR="0" lvl="0" indent="0" algn="ctr" rtl="0">
-              <a:lnSpc>
-                <a:spcPct val="139958"/>
-              </a:lnSpc>
-              <a:spcBef>
-                <a:spcPts val="0"/>
-              </a:spcBef>
-              <a:spcAft>
-                <a:spcPts val="0"/>
-              </a:spcAft>
-              <a:buNone/>
-            </a:pPr>
-            <a:r>
-              <a:rPr lang="ru-RU" sz="1800" dirty="0" smtClean="0">
-                <a:solidFill>
-                  <a:srgbClr val="FFFFFF"/>
-                </a:solidFill>
-                <a:latin typeface="+mj-lt"/>
-                <a:ea typeface="Roboto Condensed"/>
-                <a:sym typeface="Roboto Condensed"/>
-              </a:rPr>
-              <a:t>Текст и ключи</a:t>
-            </a:r>
-            <a:endParaRPr sz="1000" dirty="0">
-              <a:latin typeface="+mj-lt"/>
-            </a:endParaRPr>
-          </a:p>
-        </p:txBody>
-      </p:sp>
-      <p:grpSp>
-        <p:nvGrpSpPr>
-          <p:cNvPr id="80" name="Google Shape;253;p12"/>
-          <p:cNvGrpSpPr/>
-          <p:nvPr/>
-        </p:nvGrpSpPr>
-        <p:grpSpPr>
-          <a:xfrm>
-            <a:off x="12671961" y="2806548"/>
+            <a:off x="15708605" y="2815675"/>
             <a:ext cx="2075056" cy="3026010"/>
             <a:chOff x="0" y="-38100"/>
             <a:chExt cx="1143386" cy="1442558"/>
@@ -17911,7 +19938,7 @@
         </p:grpSpPr>
         <p:sp>
           <p:nvSpPr>
-            <p:cNvPr id="81" name="Google Shape;254;p12"/>
+            <p:cNvPr id="84" name="Google Shape;254;p12"/>
             <p:cNvSpPr/>
             <p:nvPr/>
           </p:nvSpPr>
@@ -18018,177 +20045,6 @@
         </p:sp>
         <p:sp>
           <p:nvSpPr>
-            <p:cNvPr id="82" name="Google Shape;255;p12"/>
-            <p:cNvSpPr txBox="1"/>
-            <p:nvPr/>
-          </p:nvSpPr>
-          <p:spPr>
-            <a:xfrm>
-              <a:off x="0" y="-38100"/>
-              <a:ext cx="1143386" cy="1442558"/>
-            </a:xfrm>
-            <a:prstGeom prst="rect">
-              <a:avLst/>
-            </a:prstGeom>
-            <a:noFill/>
-            <a:ln>
-              <a:noFill/>
-            </a:ln>
-          </p:spPr>
-          <p:txBody>
-            <a:bodyPr spcFirstLastPara="1" wrap="square" lIns="50800" tIns="50800" rIns="50800" bIns="50800" anchor="ctr" anchorCtr="0">
-              <a:noAutofit/>
-            </a:bodyPr>
-            <a:lstStyle/>
-            <a:p>
-              <a:pPr marL="0" marR="0" lvl="0" indent="0" algn="ctr" rtl="0">
-                <a:lnSpc>
-                  <a:spcPct val="186611"/>
-                </a:lnSpc>
-                <a:spcBef>
-                  <a:spcPts val="0"/>
-                </a:spcBef>
-                <a:spcAft>
-                  <a:spcPts val="0"/>
-                </a:spcAft>
-                <a:buNone/>
-              </a:pPr>
-              <a:endParaRPr sz="1800" b="0" i="0" u="none" strike="noStrike" cap="none">
-                <a:solidFill>
-                  <a:schemeClr val="dk1"/>
-                </a:solidFill>
-                <a:latin typeface="Calibri"/>
-                <a:ea typeface="Calibri"/>
-                <a:cs typeface="Calibri"/>
-                <a:sym typeface="Calibri"/>
-              </a:endParaRPr>
-            </a:p>
-          </p:txBody>
-        </p:sp>
-      </p:grpSp>
-      <p:grpSp>
-        <p:nvGrpSpPr>
-          <p:cNvPr id="83" name="Google Shape;253;p12"/>
-          <p:cNvGrpSpPr/>
-          <p:nvPr/>
-        </p:nvGrpSpPr>
-        <p:grpSpPr>
-          <a:xfrm>
-            <a:off x="15708605" y="2815675"/>
-            <a:ext cx="2075056" cy="3026010"/>
-            <a:chOff x="0" y="-38100"/>
-            <a:chExt cx="1143386" cy="1442558"/>
-          </a:xfrm>
-        </p:grpSpPr>
-        <p:sp>
-          <p:nvSpPr>
-            <p:cNvPr id="84" name="Google Shape;254;p12"/>
-            <p:cNvSpPr/>
-            <p:nvPr/>
-          </p:nvSpPr>
-          <p:spPr>
-            <a:xfrm>
-              <a:off x="0" y="0"/>
-              <a:ext cx="1143386" cy="1404458"/>
-            </a:xfrm>
-            <a:custGeom>
-              <a:avLst/>
-              <a:gdLst/>
-              <a:ahLst/>
-              <a:cxnLst/>
-              <a:rect l="l" t="t" r="r" b="b"/>
-              <a:pathLst>
-                <a:path w="1143386" h="1404458" extrusionOk="0">
-                  <a:moveTo>
-                    <a:pt x="45383" y="0"/>
-                  </a:moveTo>
-                  <a:lnTo>
-                    <a:pt x="1098002" y="0"/>
-                  </a:lnTo>
-                  <a:cubicBezTo>
-                    <a:pt x="1110038" y="0"/>
-                    <a:pt x="1121582" y="4781"/>
-                    <a:pt x="1130093" y="13293"/>
-                  </a:cubicBezTo>
-                  <a:cubicBezTo>
-                    <a:pt x="1138604" y="21804"/>
-                    <a:pt x="1143386" y="33347"/>
-                    <a:pt x="1143386" y="45383"/>
-                  </a:cubicBezTo>
-                  <a:lnTo>
-                    <a:pt x="1143386" y="1359074"/>
-                  </a:lnTo>
-                  <a:cubicBezTo>
-                    <a:pt x="1143386" y="1371111"/>
-                    <a:pt x="1138604" y="1382654"/>
-                    <a:pt x="1130093" y="1391165"/>
-                  </a:cubicBezTo>
-                  <a:cubicBezTo>
-                    <a:pt x="1121582" y="1399676"/>
-                    <a:pt x="1110038" y="1404458"/>
-                    <a:pt x="1098002" y="1404458"/>
-                  </a:cubicBezTo>
-                  <a:lnTo>
-                    <a:pt x="45383" y="1404458"/>
-                  </a:lnTo>
-                  <a:cubicBezTo>
-                    <a:pt x="20319" y="1404458"/>
-                    <a:pt x="0" y="1384139"/>
-                    <a:pt x="0" y="1359074"/>
-                  </a:cubicBezTo>
-                  <a:lnTo>
-                    <a:pt x="0" y="45383"/>
-                  </a:lnTo>
-                  <a:cubicBezTo>
-                    <a:pt x="0" y="33347"/>
-                    <a:pt x="4781" y="21804"/>
-                    <a:pt x="13293" y="13293"/>
-                  </a:cubicBezTo>
-                  <a:cubicBezTo>
-                    <a:pt x="21804" y="4781"/>
-                    <a:pt x="33347" y="0"/>
-                    <a:pt x="45383" y="0"/>
-                  </a:cubicBezTo>
-                  <a:close/>
-                </a:path>
-              </a:pathLst>
-            </a:custGeom>
-            <a:solidFill>
-              <a:srgbClr val="000000">
-                <a:alpha val="0"/>
-              </a:srgbClr>
-            </a:solidFill>
-            <a:ln w="38100" cap="sq" cmpd="sng">
-              <a:solidFill>
-                <a:srgbClr val="FFBD4C"/>
-              </a:solidFill>
-              <a:prstDash val="solid"/>
-              <a:miter lim="8000"/>
-              <a:headEnd type="none" w="sm" len="sm"/>
-              <a:tailEnd type="none" w="sm" len="sm"/>
-            </a:ln>
-          </p:spPr>
-          <p:txBody>
-            <a:bodyPr spcFirstLastPara="1" wrap="square" lIns="91425" tIns="91425" rIns="91425" bIns="91425" anchor="ctr" anchorCtr="0">
-              <a:noAutofit/>
-            </a:bodyPr>
-            <a:lstStyle/>
-            <a:p>
-              <a:pPr marL="0" lvl="0" indent="0" algn="l" rtl="0">
-                <a:spcBef>
-                  <a:spcPts val="0"/>
-                </a:spcBef>
-                <a:spcAft>
-                  <a:spcPts val="0"/>
-                </a:spcAft>
-                <a:buNone/>
-              </a:pPr>
-              <a:endParaRPr/>
-            </a:p>
-          </p:txBody>
-        </p:sp>
-        <p:sp>
-          <p:nvSpPr>
             <p:cNvPr id="85" name="Google Shape;255;p12"/>
             <p:cNvSpPr txBox="1"/>
             <p:nvPr/>
@@ -18245,7 +20101,7 @@
         </p:nvGrpSpPr>
         <p:grpSpPr>
           <a:xfrm>
-            <a:off x="12898234" y="2210487"/>
+            <a:off x="12205984" y="2231480"/>
             <a:ext cx="1620054" cy="1583870"/>
             <a:chOff x="0" y="0"/>
             <a:chExt cx="812800" cy="812800"/>
@@ -18354,7 +20210,7 @@
                 </a:lnSpc>
               </a:pPr>
               <a:r>
-                <a:rPr lang="ru-RU" sz="6000" dirty="0" smtClean="0">
+                <a:rPr lang="ru-RU" sz="6000" dirty="0">
                   <a:solidFill>
                     <a:schemeClr val="dk1"/>
                   </a:solidFill>
@@ -18363,7 +20219,7 @@
                   <a:cs typeface="Calibri"/>
                   <a:sym typeface="Calibri"/>
                 </a:rPr>
-                <a:t>5</a:t>
+                <a:t>4</a:t>
               </a:r>
               <a:endParaRPr sz="6000" b="0" i="0" u="none" strike="noStrike" cap="none" dirty="0">
                 <a:solidFill>
@@ -18495,7 +20351,7 @@
                 </a:lnSpc>
               </a:pPr>
               <a:r>
-                <a:rPr lang="ru-RU" sz="6000" dirty="0" smtClean="0">
+                <a:rPr lang="ru-RU" sz="6000" dirty="0">
                   <a:solidFill>
                     <a:schemeClr val="dk1"/>
                   </a:solidFill>
@@ -18504,7 +20360,7 @@
                   <a:cs typeface="Calibri"/>
                   <a:sym typeface="Calibri"/>
                 </a:rPr>
-                <a:t>6</a:t>
+                <a:t>5</a:t>
               </a:r>
               <a:endParaRPr sz="6000" b="0" i="0" u="none" strike="noStrike" cap="none" dirty="0">
                 <a:solidFill>
@@ -18616,7 +20472,7 @@
         </p:nvSpPr>
         <p:spPr>
           <a:xfrm>
-            <a:off x="12720550" y="4038384"/>
+            <a:off x="12084927" y="4025968"/>
             <a:ext cx="1968612" cy="1292662"/>
           </a:xfrm>
           <a:prstGeom prst="rect">
@@ -18702,10 +20558,17 @@
   <p:clrMapOvr>
     <a:masterClrMapping/>
   </p:clrMapOvr>
+  <p:timing>
+    <p:tnLst>
+      <p:par>
+        <p:cTn id="1" dur="indefinite" restart="never" nodeType="tmRoot"/>
+      </p:par>
+    </p:tnLst>
+  </p:timing>
 </p:sld>
 </file>
 
-<file path=ppt/slides/slide6.xml><?xml version="1.0" encoding="utf-8"?>
+<file path=ppt/slides/slide9.xml><?xml version="1.0" encoding="utf-8"?>
 <p:sld xmlns:a="http://schemas.openxmlformats.org/drawingml/2006/main" xmlns:r="http://schemas.openxmlformats.org/officeDocument/2006/relationships" xmlns:p="http://schemas.openxmlformats.org/presentationml/2006/main">
   <p:cSld>
     <p:bg>
@@ -19393,2162 +21256,13 @@
   <p:clrMapOvr>
     <a:masterClrMapping/>
   </p:clrMapOvr>
-</p:sld>
-</file>
-
-<file path=ppt/slides/slide7.xml><?xml version="1.0" encoding="utf-8"?>
-<p:sld xmlns:a="http://schemas.openxmlformats.org/drawingml/2006/main" xmlns:r="http://schemas.openxmlformats.org/officeDocument/2006/relationships" xmlns:p="http://schemas.openxmlformats.org/presentationml/2006/main">
-  <p:cSld>
-    <p:spTree>
-      <p:nvGrpSpPr>
-        <p:cNvPr id="1" name="Shape 342"/>
-        <p:cNvGrpSpPr/>
-        <p:nvPr/>
-      </p:nvGrpSpPr>
-      <p:grpSpPr>
-        <a:xfrm>
-          <a:off x="0" y="0"/>
-          <a:ext cx="0" cy="0"/>
-          <a:chOff x="0" y="0"/>
-          <a:chExt cx="0" cy="0"/>
-        </a:xfrm>
-      </p:grpSpPr>
-      <p:sp>
-        <p:nvSpPr>
-          <p:cNvPr id="351" name="Google Shape;351;p14"/>
-          <p:cNvSpPr txBox="1"/>
-          <p:nvPr/>
-        </p:nvSpPr>
-        <p:spPr>
-          <a:xfrm>
-            <a:off x="491985" y="239416"/>
-            <a:ext cx="8887542" cy="2105192"/>
-          </a:xfrm>
-          <a:prstGeom prst="rect">
-            <a:avLst/>
-          </a:prstGeom>
-          <a:noFill/>
-          <a:ln>
-            <a:noFill/>
-          </a:ln>
-        </p:spPr>
-        <p:txBody>
-          <a:bodyPr spcFirstLastPara="1" wrap="square" lIns="0" tIns="0" rIns="0" bIns="0" anchor="t" anchorCtr="0">
-            <a:spAutoFit/>
-          </a:bodyPr>
-          <a:lstStyle/>
-          <a:p>
-            <a:pPr marL="0" marR="0" lvl="0" indent="0" rtl="0">
-              <a:lnSpc>
-                <a:spcPct val="120000"/>
-              </a:lnSpc>
-              <a:spcBef>
-                <a:spcPts val="0"/>
-              </a:spcBef>
-              <a:spcAft>
-                <a:spcPts val="0"/>
-              </a:spcAft>
-              <a:buNone/>
-            </a:pPr>
-            <a:r>
-              <a:rPr lang="ru-RU" sz="6000" b="0" i="0" u="none" strike="noStrike" cap="none" dirty="0" smtClean="0">
-                <a:solidFill>
-                  <a:srgbClr val="FFBD4C"/>
-                </a:solidFill>
-                <a:latin typeface="Arial Black" panose="020B0A04020102020204" pitchFamily="34" charset="0"/>
-                <a:ea typeface="Montserrat"/>
-                <a:cs typeface="Montserrat"/>
-                <a:sym typeface="Montserrat"/>
-              </a:rPr>
-              <a:t>Тест №</a:t>
-            </a:r>
-            <a:r>
-              <a:rPr lang="ru-RU" sz="6000" dirty="0" smtClean="0">
-                <a:solidFill>
-                  <a:srgbClr val="FFBD4C"/>
-                </a:solidFill>
-                <a:latin typeface="Arial Black" panose="020B0A04020102020204" pitchFamily="34" charset="0"/>
-                <a:ea typeface="Montserrat"/>
-                <a:cs typeface="Montserrat"/>
-                <a:sym typeface="Montserrat"/>
-              </a:rPr>
-              <a:t>2</a:t>
-            </a:r>
-            <a:endParaRPr lang="ru-RU" sz="6000" b="0" i="0" u="none" strike="noStrike" cap="none" dirty="0" smtClean="0">
-              <a:solidFill>
-                <a:srgbClr val="FFBD4C"/>
-              </a:solidFill>
-              <a:latin typeface="Arial Black" panose="020B0A04020102020204" pitchFamily="34" charset="0"/>
-              <a:ea typeface="Montserrat"/>
-              <a:cs typeface="Montserrat"/>
-              <a:sym typeface="Montserrat"/>
-            </a:endParaRPr>
-          </a:p>
-          <a:p>
-            <a:pPr marL="0" marR="0" lvl="0" indent="0" rtl="0">
-              <a:lnSpc>
-                <a:spcPct val="120000"/>
-              </a:lnSpc>
-              <a:spcBef>
-                <a:spcPts val="0"/>
-              </a:spcBef>
-              <a:spcAft>
-                <a:spcPts val="0"/>
-              </a:spcAft>
-              <a:buNone/>
-            </a:pPr>
-            <a:r>
-              <a:rPr lang="ru-RU" sz="5400" dirty="0" smtClean="0">
-                <a:solidFill>
-                  <a:srgbClr val="FFBD4C"/>
-                </a:solidFill>
-                <a:latin typeface="Arial Black" panose="020B0A04020102020204" pitchFamily="34" charset="0"/>
-                <a:sym typeface="Montserrat"/>
-              </a:rPr>
-              <a:t>Английский алфавит</a:t>
-            </a:r>
-            <a:endParaRPr sz="800" dirty="0">
-              <a:latin typeface="Arial Black" panose="020B0A04020102020204" pitchFamily="34" charset="0"/>
-            </a:endParaRPr>
-          </a:p>
-        </p:txBody>
-      </p:sp>
-      <p:grpSp>
-        <p:nvGrpSpPr>
-          <p:cNvPr id="368" name="Google Shape;368;p14"/>
-          <p:cNvGrpSpPr/>
-          <p:nvPr/>
-        </p:nvGrpSpPr>
-        <p:grpSpPr>
-          <a:xfrm>
-            <a:off x="15618305" y="1755"/>
-            <a:ext cx="2137482" cy="475324"/>
-            <a:chOff x="30956" y="22212"/>
-            <a:chExt cx="2849976" cy="633766"/>
-          </a:xfrm>
-        </p:grpSpPr>
-        <p:cxnSp>
-          <p:nvCxnSpPr>
-            <p:cNvPr id="369" name="Google Shape;369;p14"/>
-            <p:cNvCxnSpPr/>
-            <p:nvPr/>
-          </p:nvCxnSpPr>
-          <p:spPr>
-            <a:xfrm rot="10800000" flipH="1">
-              <a:off x="30956" y="22212"/>
-              <a:ext cx="454750" cy="633766"/>
-            </a:xfrm>
-            <a:prstGeom prst="straightConnector1">
-              <a:avLst/>
-            </a:prstGeom>
-            <a:noFill/>
-            <a:ln w="76200" cap="flat" cmpd="sng">
-              <a:solidFill>
-                <a:srgbClr val="FFBD4C"/>
-              </a:solidFill>
-              <a:prstDash val="solid"/>
-              <a:round/>
-              <a:headEnd type="none" w="sm" len="sm"/>
-              <a:tailEnd type="none" w="sm" len="sm"/>
-            </a:ln>
-          </p:spPr>
-        </p:cxnSp>
-        <p:cxnSp>
-          <p:nvCxnSpPr>
-            <p:cNvPr id="370" name="Google Shape;370;p14"/>
-            <p:cNvCxnSpPr/>
-            <p:nvPr/>
-          </p:nvCxnSpPr>
-          <p:spPr>
-            <a:xfrm rot="10800000" flipH="1">
-              <a:off x="430160" y="22212"/>
-              <a:ext cx="454750" cy="633766"/>
-            </a:xfrm>
-            <a:prstGeom prst="straightConnector1">
-              <a:avLst/>
-            </a:prstGeom>
-            <a:noFill/>
-            <a:ln w="76200" cap="flat" cmpd="sng">
-              <a:solidFill>
-                <a:srgbClr val="FFBD4C"/>
-              </a:solidFill>
-              <a:prstDash val="solid"/>
-              <a:round/>
-              <a:headEnd type="none" w="sm" len="sm"/>
-              <a:tailEnd type="none" w="sm" len="sm"/>
-            </a:ln>
-          </p:spPr>
-        </p:cxnSp>
-        <p:cxnSp>
-          <p:nvCxnSpPr>
-            <p:cNvPr id="371" name="Google Shape;371;p14"/>
-            <p:cNvCxnSpPr/>
-            <p:nvPr/>
-          </p:nvCxnSpPr>
-          <p:spPr>
-            <a:xfrm rot="10800000" flipH="1">
-              <a:off x="829364" y="22212"/>
-              <a:ext cx="454750" cy="633766"/>
-            </a:xfrm>
-            <a:prstGeom prst="straightConnector1">
-              <a:avLst/>
-            </a:prstGeom>
-            <a:noFill/>
-            <a:ln w="76200" cap="flat" cmpd="sng">
-              <a:solidFill>
-                <a:srgbClr val="FFBD4C"/>
-              </a:solidFill>
-              <a:prstDash val="solid"/>
-              <a:round/>
-              <a:headEnd type="none" w="sm" len="sm"/>
-              <a:tailEnd type="none" w="sm" len="sm"/>
-            </a:ln>
-          </p:spPr>
-        </p:cxnSp>
-        <p:cxnSp>
-          <p:nvCxnSpPr>
-            <p:cNvPr id="372" name="Google Shape;372;p14"/>
-            <p:cNvCxnSpPr/>
-            <p:nvPr/>
-          </p:nvCxnSpPr>
-          <p:spPr>
-            <a:xfrm rot="10800000" flipH="1">
-              <a:off x="1228569" y="22212"/>
-              <a:ext cx="454750" cy="633766"/>
-            </a:xfrm>
-            <a:prstGeom prst="straightConnector1">
-              <a:avLst/>
-            </a:prstGeom>
-            <a:noFill/>
-            <a:ln w="76200" cap="flat" cmpd="sng">
-              <a:solidFill>
-                <a:srgbClr val="FFBD4C"/>
-              </a:solidFill>
-              <a:prstDash val="solid"/>
-              <a:round/>
-              <a:headEnd type="none" w="sm" len="sm"/>
-              <a:tailEnd type="none" w="sm" len="sm"/>
-            </a:ln>
-          </p:spPr>
-        </p:cxnSp>
-        <p:cxnSp>
-          <p:nvCxnSpPr>
-            <p:cNvPr id="373" name="Google Shape;373;p14"/>
-            <p:cNvCxnSpPr/>
-            <p:nvPr/>
-          </p:nvCxnSpPr>
-          <p:spPr>
-            <a:xfrm rot="10800000" flipH="1">
-              <a:off x="1627773" y="22212"/>
-              <a:ext cx="454750" cy="633766"/>
-            </a:xfrm>
-            <a:prstGeom prst="straightConnector1">
-              <a:avLst/>
-            </a:prstGeom>
-            <a:noFill/>
-            <a:ln w="76200" cap="flat" cmpd="sng">
-              <a:solidFill>
-                <a:srgbClr val="FFBD4C"/>
-              </a:solidFill>
-              <a:prstDash val="solid"/>
-              <a:round/>
-              <a:headEnd type="none" w="sm" len="sm"/>
-              <a:tailEnd type="none" w="sm" len="sm"/>
-            </a:ln>
-          </p:spPr>
-        </p:cxnSp>
-        <p:cxnSp>
-          <p:nvCxnSpPr>
-            <p:cNvPr id="374" name="Google Shape;374;p14"/>
-            <p:cNvCxnSpPr/>
-            <p:nvPr/>
-          </p:nvCxnSpPr>
-          <p:spPr>
-            <a:xfrm rot="10800000" flipH="1">
-              <a:off x="2026977" y="22212"/>
-              <a:ext cx="454750" cy="633766"/>
-            </a:xfrm>
-            <a:prstGeom prst="straightConnector1">
-              <a:avLst/>
-            </a:prstGeom>
-            <a:noFill/>
-            <a:ln w="76200" cap="flat" cmpd="sng">
-              <a:solidFill>
-                <a:srgbClr val="FFBD4C"/>
-              </a:solidFill>
-              <a:prstDash val="solid"/>
-              <a:round/>
-              <a:headEnd type="none" w="sm" len="sm"/>
-              <a:tailEnd type="none" w="sm" len="sm"/>
-            </a:ln>
-          </p:spPr>
-        </p:cxnSp>
-        <p:cxnSp>
-          <p:nvCxnSpPr>
-            <p:cNvPr id="375" name="Google Shape;375;p14"/>
-            <p:cNvCxnSpPr/>
-            <p:nvPr/>
-          </p:nvCxnSpPr>
-          <p:spPr>
-            <a:xfrm rot="10800000" flipH="1">
-              <a:off x="2426182" y="22212"/>
-              <a:ext cx="454750" cy="633766"/>
-            </a:xfrm>
-            <a:prstGeom prst="straightConnector1">
-              <a:avLst/>
-            </a:prstGeom>
-            <a:noFill/>
-            <a:ln w="76200" cap="flat" cmpd="sng">
-              <a:solidFill>
-                <a:srgbClr val="FFBD4C"/>
-              </a:solidFill>
-              <a:prstDash val="solid"/>
-              <a:round/>
-              <a:headEnd type="none" w="sm" len="sm"/>
-              <a:tailEnd type="none" w="sm" len="sm"/>
-            </a:ln>
-          </p:spPr>
-        </p:cxnSp>
-      </p:grpSp>
-      <p:grpSp>
-        <p:nvGrpSpPr>
-          <p:cNvPr id="376" name="Google Shape;376;p14"/>
-          <p:cNvGrpSpPr/>
-          <p:nvPr/>
-        </p:nvGrpSpPr>
-        <p:grpSpPr>
-          <a:xfrm rot="5400000">
-            <a:off x="-814419" y="7426244"/>
-            <a:ext cx="2137482" cy="475324"/>
-            <a:chOff x="30956" y="22212"/>
-            <a:chExt cx="2849976" cy="633766"/>
-          </a:xfrm>
-        </p:grpSpPr>
-        <p:cxnSp>
-          <p:nvCxnSpPr>
-            <p:cNvPr id="377" name="Google Shape;377;p14"/>
-            <p:cNvCxnSpPr/>
-            <p:nvPr/>
-          </p:nvCxnSpPr>
-          <p:spPr>
-            <a:xfrm rot="10800000" flipH="1">
-              <a:off x="30956" y="22212"/>
-              <a:ext cx="454750" cy="633766"/>
-            </a:xfrm>
-            <a:prstGeom prst="straightConnector1">
-              <a:avLst/>
-            </a:prstGeom>
-            <a:noFill/>
-            <a:ln w="76200" cap="flat" cmpd="sng">
-              <a:solidFill>
-                <a:srgbClr val="FFBD4C"/>
-              </a:solidFill>
-              <a:prstDash val="solid"/>
-              <a:round/>
-              <a:headEnd type="none" w="sm" len="sm"/>
-              <a:tailEnd type="none" w="sm" len="sm"/>
-            </a:ln>
-          </p:spPr>
-        </p:cxnSp>
-        <p:cxnSp>
-          <p:nvCxnSpPr>
-            <p:cNvPr id="378" name="Google Shape;378;p14"/>
-            <p:cNvCxnSpPr/>
-            <p:nvPr/>
-          </p:nvCxnSpPr>
-          <p:spPr>
-            <a:xfrm rot="10800000" flipH="1">
-              <a:off x="430160" y="22212"/>
-              <a:ext cx="454750" cy="633766"/>
-            </a:xfrm>
-            <a:prstGeom prst="straightConnector1">
-              <a:avLst/>
-            </a:prstGeom>
-            <a:noFill/>
-            <a:ln w="76200" cap="flat" cmpd="sng">
-              <a:solidFill>
-                <a:srgbClr val="FFBD4C"/>
-              </a:solidFill>
-              <a:prstDash val="solid"/>
-              <a:round/>
-              <a:headEnd type="none" w="sm" len="sm"/>
-              <a:tailEnd type="none" w="sm" len="sm"/>
-            </a:ln>
-          </p:spPr>
-        </p:cxnSp>
-        <p:cxnSp>
-          <p:nvCxnSpPr>
-            <p:cNvPr id="379" name="Google Shape;379;p14"/>
-            <p:cNvCxnSpPr/>
-            <p:nvPr/>
-          </p:nvCxnSpPr>
-          <p:spPr>
-            <a:xfrm rot="10800000" flipH="1">
-              <a:off x="829364" y="22212"/>
-              <a:ext cx="454750" cy="633766"/>
-            </a:xfrm>
-            <a:prstGeom prst="straightConnector1">
-              <a:avLst/>
-            </a:prstGeom>
-            <a:noFill/>
-            <a:ln w="76200" cap="flat" cmpd="sng">
-              <a:solidFill>
-                <a:srgbClr val="FFBD4C"/>
-              </a:solidFill>
-              <a:prstDash val="solid"/>
-              <a:round/>
-              <a:headEnd type="none" w="sm" len="sm"/>
-              <a:tailEnd type="none" w="sm" len="sm"/>
-            </a:ln>
-          </p:spPr>
-        </p:cxnSp>
-        <p:cxnSp>
-          <p:nvCxnSpPr>
-            <p:cNvPr id="380" name="Google Shape;380;p14"/>
-            <p:cNvCxnSpPr/>
-            <p:nvPr/>
-          </p:nvCxnSpPr>
-          <p:spPr>
-            <a:xfrm rot="10800000" flipH="1">
-              <a:off x="1228569" y="22212"/>
-              <a:ext cx="454750" cy="633766"/>
-            </a:xfrm>
-            <a:prstGeom prst="straightConnector1">
-              <a:avLst/>
-            </a:prstGeom>
-            <a:noFill/>
-            <a:ln w="76200" cap="flat" cmpd="sng">
-              <a:solidFill>
-                <a:srgbClr val="FFBD4C"/>
-              </a:solidFill>
-              <a:prstDash val="solid"/>
-              <a:round/>
-              <a:headEnd type="none" w="sm" len="sm"/>
-              <a:tailEnd type="none" w="sm" len="sm"/>
-            </a:ln>
-          </p:spPr>
-        </p:cxnSp>
-        <p:cxnSp>
-          <p:nvCxnSpPr>
-            <p:cNvPr id="381" name="Google Shape;381;p14"/>
-            <p:cNvCxnSpPr/>
-            <p:nvPr/>
-          </p:nvCxnSpPr>
-          <p:spPr>
-            <a:xfrm rot="10800000" flipH="1">
-              <a:off x="1627773" y="22212"/>
-              <a:ext cx="454750" cy="633766"/>
-            </a:xfrm>
-            <a:prstGeom prst="straightConnector1">
-              <a:avLst/>
-            </a:prstGeom>
-            <a:noFill/>
-            <a:ln w="76200" cap="flat" cmpd="sng">
-              <a:solidFill>
-                <a:srgbClr val="FFBD4C"/>
-              </a:solidFill>
-              <a:prstDash val="solid"/>
-              <a:round/>
-              <a:headEnd type="none" w="sm" len="sm"/>
-              <a:tailEnd type="none" w="sm" len="sm"/>
-            </a:ln>
-          </p:spPr>
-        </p:cxnSp>
-        <p:cxnSp>
-          <p:nvCxnSpPr>
-            <p:cNvPr id="382" name="Google Shape;382;p14"/>
-            <p:cNvCxnSpPr/>
-            <p:nvPr/>
-          </p:nvCxnSpPr>
-          <p:spPr>
-            <a:xfrm rot="10800000" flipH="1">
-              <a:off x="2026977" y="22212"/>
-              <a:ext cx="454750" cy="633766"/>
-            </a:xfrm>
-            <a:prstGeom prst="straightConnector1">
-              <a:avLst/>
-            </a:prstGeom>
-            <a:noFill/>
-            <a:ln w="76200" cap="flat" cmpd="sng">
-              <a:solidFill>
-                <a:srgbClr val="FFBD4C"/>
-              </a:solidFill>
-              <a:prstDash val="solid"/>
-              <a:round/>
-              <a:headEnd type="none" w="sm" len="sm"/>
-              <a:tailEnd type="none" w="sm" len="sm"/>
-            </a:ln>
-          </p:spPr>
-        </p:cxnSp>
-        <p:cxnSp>
-          <p:nvCxnSpPr>
-            <p:cNvPr id="383" name="Google Shape;383;p14"/>
-            <p:cNvCxnSpPr/>
-            <p:nvPr/>
-          </p:nvCxnSpPr>
-          <p:spPr>
-            <a:xfrm rot="10800000" flipH="1">
-              <a:off x="2426182" y="22212"/>
-              <a:ext cx="454750" cy="633766"/>
-            </a:xfrm>
-            <a:prstGeom prst="straightConnector1">
-              <a:avLst/>
-            </a:prstGeom>
-            <a:noFill/>
-            <a:ln w="76200" cap="flat" cmpd="sng">
-              <a:solidFill>
-                <a:srgbClr val="FFBD4C"/>
-              </a:solidFill>
-              <a:prstDash val="solid"/>
-              <a:round/>
-              <a:headEnd type="none" w="sm" len="sm"/>
-              <a:tailEnd type="none" w="sm" len="sm"/>
-            </a:ln>
-          </p:spPr>
-        </p:cxnSp>
-      </p:grpSp>
-      <p:sp>
-        <p:nvSpPr>
-          <p:cNvPr id="4" name="TextBox 3"/>
-          <p:cNvSpPr txBox="1"/>
-          <p:nvPr/>
-        </p:nvSpPr>
-        <p:spPr>
-          <a:xfrm>
-            <a:off x="10889673" y="2757055"/>
-            <a:ext cx="5497969" cy="307777"/>
-          </a:xfrm>
-          <a:prstGeom prst="rect">
-            <a:avLst/>
-          </a:prstGeom>
-          <a:noFill/>
-          <a:ln>
-            <a:noFill/>
-          </a:ln>
-        </p:spPr>
-        <p:txBody>
-          <a:bodyPr wrap="square" rtlCol="0">
-            <a:spAutoFit/>
-          </a:bodyPr>
-          <a:lstStyle/>
-          <a:p>
-            <a:r>
-              <a:rPr lang="ru-RU" dirty="0" smtClean="0"/>
-              <a:t>Действия и результат</a:t>
-            </a:r>
-            <a:endParaRPr lang="ru-RU" dirty="0"/>
-          </a:p>
-        </p:txBody>
-      </p:sp>
-      <p:sp>
-        <p:nvSpPr>
-          <p:cNvPr id="8" name="TextBox 7"/>
-          <p:cNvSpPr txBox="1"/>
-          <p:nvPr/>
-        </p:nvSpPr>
-        <p:spPr>
-          <a:xfrm>
-            <a:off x="766437" y="7663069"/>
-            <a:ext cx="9476509" cy="830997"/>
-          </a:xfrm>
-          <a:prstGeom prst="rect">
-            <a:avLst/>
-          </a:prstGeom>
-          <a:noFill/>
-        </p:spPr>
-        <p:txBody>
-          <a:bodyPr wrap="square" rtlCol="0">
-            <a:spAutoFit/>
-          </a:bodyPr>
-          <a:lstStyle/>
-          <a:p>
-            <a:r>
-              <a:rPr lang="ru-RU" sz="2400" dirty="0" smtClean="0">
-                <a:solidFill>
-                  <a:srgbClr val="FFBD4C"/>
-                </a:solidFill>
-                <a:latin typeface="Arial Black" panose="020B0A04020102020204" pitchFamily="34" charset="0"/>
-              </a:rPr>
-              <a:t>Результат</a:t>
-            </a:r>
-            <a:r>
-              <a:rPr lang="en-US" sz="2400" dirty="0" smtClean="0">
-                <a:solidFill>
-                  <a:srgbClr val="FFBD4C"/>
-                </a:solidFill>
-                <a:latin typeface="Arial Black" panose="020B0A04020102020204" pitchFamily="34" charset="0"/>
-              </a:rPr>
-              <a:t>:</a:t>
-            </a:r>
-          </a:p>
-          <a:p>
-            <a:r>
-              <a:rPr lang="ru-RU" sz="2400" dirty="0" smtClean="0">
-                <a:solidFill>
-                  <a:srgbClr val="FFBD4C"/>
-                </a:solidFill>
-                <a:latin typeface="Arial Black" panose="020B0A04020102020204" pitchFamily="34" charset="0"/>
-              </a:rPr>
-              <a:t>Текст корректно зашифровался и расшифровался </a:t>
-            </a:r>
-            <a:endParaRPr lang="ru-RU" sz="2400" dirty="0">
-              <a:solidFill>
-                <a:srgbClr val="FFBD4C"/>
-              </a:solidFill>
-              <a:latin typeface="Arial Black" panose="020B0A04020102020204" pitchFamily="34" charset="0"/>
-            </a:endParaRPr>
-          </a:p>
-        </p:txBody>
-      </p:sp>
-      <p:pic>
-        <p:nvPicPr>
-          <p:cNvPr id="2" name="Рисунок 1"/>
-          <p:cNvPicPr>
-            <a:picLocks noChangeAspect="1"/>
-          </p:cNvPicPr>
-          <p:nvPr/>
-        </p:nvPicPr>
-        <p:blipFill>
-          <a:blip r:embed="rId3"/>
-          <a:stretch>
-            <a:fillRect/>
-          </a:stretch>
-        </p:blipFill>
-        <p:spPr>
-          <a:xfrm>
-            <a:off x="766437" y="2371159"/>
-            <a:ext cx="7754432" cy="4829849"/>
-          </a:xfrm>
-          <a:prstGeom prst="roundRect">
-            <a:avLst>
-              <a:gd name="adj" fmla="val 10069"/>
-            </a:avLst>
-          </a:prstGeom>
-        </p:spPr>
-      </p:pic>
-      <p:pic>
-        <p:nvPicPr>
-          <p:cNvPr id="3" name="Рисунок 2"/>
-          <p:cNvPicPr>
-            <a:picLocks noChangeAspect="1"/>
-          </p:cNvPicPr>
-          <p:nvPr/>
-        </p:nvPicPr>
-        <p:blipFill>
-          <a:blip r:embed="rId4"/>
-          <a:stretch>
-            <a:fillRect/>
-          </a:stretch>
-        </p:blipFill>
-        <p:spPr>
-          <a:xfrm>
-            <a:off x="9531420" y="2357483"/>
-            <a:ext cx="7754432" cy="4932917"/>
-          </a:xfrm>
-          <a:prstGeom prst="roundRect">
-            <a:avLst>
-              <a:gd name="adj" fmla="val 8793"/>
-            </a:avLst>
-          </a:prstGeom>
-        </p:spPr>
-      </p:pic>
-    </p:spTree>
-    <p:extLst>
-      <p:ext uri="{BB962C8B-B14F-4D97-AF65-F5344CB8AC3E}">
-        <p14:creationId xmlns:p14="http://schemas.microsoft.com/office/powerpoint/2010/main" val="1067429878"/>
-      </p:ext>
-    </p:extLst>
-  </p:cSld>
-  <p:clrMapOvr>
-    <a:masterClrMapping/>
-  </p:clrMapOvr>
-</p:sld>
-</file>
-
-<file path=ppt/slides/slide8.xml><?xml version="1.0" encoding="utf-8"?>
-<p:sld xmlns:a="http://schemas.openxmlformats.org/drawingml/2006/main" xmlns:r="http://schemas.openxmlformats.org/officeDocument/2006/relationships" xmlns:p="http://schemas.openxmlformats.org/presentationml/2006/main">
-  <p:cSld>
-    <p:spTree>
-      <p:nvGrpSpPr>
-        <p:cNvPr id="1" name="Shape 342"/>
-        <p:cNvGrpSpPr/>
-        <p:nvPr/>
-      </p:nvGrpSpPr>
-      <p:grpSpPr>
-        <a:xfrm>
-          <a:off x="0" y="0"/>
-          <a:ext cx="0" cy="0"/>
-          <a:chOff x="0" y="0"/>
-          <a:chExt cx="0" cy="0"/>
-        </a:xfrm>
-      </p:grpSpPr>
-      <p:sp>
-        <p:nvSpPr>
-          <p:cNvPr id="351" name="Google Shape;351;p14"/>
-          <p:cNvSpPr txBox="1"/>
-          <p:nvPr/>
-        </p:nvSpPr>
-        <p:spPr>
-          <a:xfrm>
-            <a:off x="491985" y="239416"/>
-            <a:ext cx="13653506" cy="3102388"/>
-          </a:xfrm>
-          <a:prstGeom prst="rect">
-            <a:avLst/>
-          </a:prstGeom>
-          <a:noFill/>
-          <a:ln>
-            <a:noFill/>
-          </a:ln>
-        </p:spPr>
-        <p:txBody>
-          <a:bodyPr spcFirstLastPara="1" wrap="square" lIns="0" tIns="0" rIns="0" bIns="0" anchor="t" anchorCtr="0">
-            <a:spAutoFit/>
-          </a:bodyPr>
-          <a:lstStyle/>
-          <a:p>
-            <a:pPr marL="0" marR="0" lvl="0" indent="0" rtl="0">
-              <a:lnSpc>
-                <a:spcPct val="120000"/>
-              </a:lnSpc>
-              <a:spcBef>
-                <a:spcPts val="0"/>
-              </a:spcBef>
-              <a:spcAft>
-                <a:spcPts val="0"/>
-              </a:spcAft>
-              <a:buNone/>
-            </a:pPr>
-            <a:r>
-              <a:rPr lang="ru-RU" sz="6000" b="0" i="0" u="none" strike="noStrike" cap="none" dirty="0" smtClean="0">
-                <a:solidFill>
-                  <a:srgbClr val="FFBD4C"/>
-                </a:solidFill>
-                <a:latin typeface="Arial Black" panose="020B0A04020102020204" pitchFamily="34" charset="0"/>
-                <a:ea typeface="Montserrat"/>
-                <a:cs typeface="Montserrat"/>
-                <a:sym typeface="Montserrat"/>
-              </a:rPr>
-              <a:t>Тест №</a:t>
-            </a:r>
-            <a:r>
-              <a:rPr lang="en-US" sz="6000" dirty="0" smtClean="0">
-                <a:solidFill>
-                  <a:srgbClr val="FFBD4C"/>
-                </a:solidFill>
-                <a:latin typeface="Arial Black" panose="020B0A04020102020204" pitchFamily="34" charset="0"/>
-                <a:ea typeface="Montserrat"/>
-                <a:cs typeface="Montserrat"/>
-                <a:sym typeface="Montserrat"/>
-              </a:rPr>
-              <a:t>3</a:t>
-            </a:r>
-            <a:endParaRPr lang="ru-RU" sz="6000" b="0" i="0" u="none" strike="noStrike" cap="none" dirty="0" smtClean="0">
-              <a:solidFill>
-                <a:srgbClr val="FFBD4C"/>
-              </a:solidFill>
-              <a:latin typeface="Arial Black" panose="020B0A04020102020204" pitchFamily="34" charset="0"/>
-              <a:ea typeface="Montserrat"/>
-              <a:cs typeface="Montserrat"/>
-              <a:sym typeface="Montserrat"/>
-            </a:endParaRPr>
-          </a:p>
-          <a:p>
-            <a:pPr marL="0" marR="0" lvl="0" indent="0" rtl="0">
-              <a:lnSpc>
-                <a:spcPct val="120000"/>
-              </a:lnSpc>
-              <a:spcBef>
-                <a:spcPts val="0"/>
-              </a:spcBef>
-              <a:spcAft>
-                <a:spcPts val="0"/>
-              </a:spcAft>
-              <a:buNone/>
-            </a:pPr>
-            <a:r>
-              <a:rPr lang="ru-RU" sz="5400" dirty="0" smtClean="0">
-                <a:solidFill>
-                  <a:srgbClr val="FFBD4C"/>
-                </a:solidFill>
-                <a:latin typeface="Arial Black" panose="020B0A04020102020204" pitchFamily="34" charset="0"/>
-                <a:sym typeface="Montserrat"/>
-              </a:rPr>
-              <a:t>Обработка некорректных ключей	</a:t>
-            </a:r>
-            <a:endParaRPr sz="800" dirty="0">
-              <a:latin typeface="Arial Black" panose="020B0A04020102020204" pitchFamily="34" charset="0"/>
-            </a:endParaRPr>
-          </a:p>
-        </p:txBody>
-      </p:sp>
-      <p:grpSp>
-        <p:nvGrpSpPr>
-          <p:cNvPr id="368" name="Google Shape;368;p14"/>
-          <p:cNvGrpSpPr/>
-          <p:nvPr/>
-        </p:nvGrpSpPr>
-        <p:grpSpPr>
-          <a:xfrm>
-            <a:off x="15618305" y="1755"/>
-            <a:ext cx="2137482" cy="475324"/>
-            <a:chOff x="30956" y="22212"/>
-            <a:chExt cx="2849976" cy="633766"/>
-          </a:xfrm>
-        </p:grpSpPr>
-        <p:cxnSp>
-          <p:nvCxnSpPr>
-            <p:cNvPr id="369" name="Google Shape;369;p14"/>
-            <p:cNvCxnSpPr/>
-            <p:nvPr/>
-          </p:nvCxnSpPr>
-          <p:spPr>
-            <a:xfrm rot="10800000" flipH="1">
-              <a:off x="30956" y="22212"/>
-              <a:ext cx="454750" cy="633766"/>
-            </a:xfrm>
-            <a:prstGeom prst="straightConnector1">
-              <a:avLst/>
-            </a:prstGeom>
-            <a:noFill/>
-            <a:ln w="76200" cap="flat" cmpd="sng">
-              <a:solidFill>
-                <a:srgbClr val="FFBD4C"/>
-              </a:solidFill>
-              <a:prstDash val="solid"/>
-              <a:round/>
-              <a:headEnd type="none" w="sm" len="sm"/>
-              <a:tailEnd type="none" w="sm" len="sm"/>
-            </a:ln>
-          </p:spPr>
-        </p:cxnSp>
-        <p:cxnSp>
-          <p:nvCxnSpPr>
-            <p:cNvPr id="370" name="Google Shape;370;p14"/>
-            <p:cNvCxnSpPr/>
-            <p:nvPr/>
-          </p:nvCxnSpPr>
-          <p:spPr>
-            <a:xfrm rot="10800000" flipH="1">
-              <a:off x="430160" y="22212"/>
-              <a:ext cx="454750" cy="633766"/>
-            </a:xfrm>
-            <a:prstGeom prst="straightConnector1">
-              <a:avLst/>
-            </a:prstGeom>
-            <a:noFill/>
-            <a:ln w="76200" cap="flat" cmpd="sng">
-              <a:solidFill>
-                <a:srgbClr val="FFBD4C"/>
-              </a:solidFill>
-              <a:prstDash val="solid"/>
-              <a:round/>
-              <a:headEnd type="none" w="sm" len="sm"/>
-              <a:tailEnd type="none" w="sm" len="sm"/>
-            </a:ln>
-          </p:spPr>
-        </p:cxnSp>
-        <p:cxnSp>
-          <p:nvCxnSpPr>
-            <p:cNvPr id="371" name="Google Shape;371;p14"/>
-            <p:cNvCxnSpPr/>
-            <p:nvPr/>
-          </p:nvCxnSpPr>
-          <p:spPr>
-            <a:xfrm rot="10800000" flipH="1">
-              <a:off x="829364" y="22212"/>
-              <a:ext cx="454750" cy="633766"/>
-            </a:xfrm>
-            <a:prstGeom prst="straightConnector1">
-              <a:avLst/>
-            </a:prstGeom>
-            <a:noFill/>
-            <a:ln w="76200" cap="flat" cmpd="sng">
-              <a:solidFill>
-                <a:srgbClr val="FFBD4C"/>
-              </a:solidFill>
-              <a:prstDash val="solid"/>
-              <a:round/>
-              <a:headEnd type="none" w="sm" len="sm"/>
-              <a:tailEnd type="none" w="sm" len="sm"/>
-            </a:ln>
-          </p:spPr>
-        </p:cxnSp>
-        <p:cxnSp>
-          <p:nvCxnSpPr>
-            <p:cNvPr id="372" name="Google Shape;372;p14"/>
-            <p:cNvCxnSpPr/>
-            <p:nvPr/>
-          </p:nvCxnSpPr>
-          <p:spPr>
-            <a:xfrm rot="10800000" flipH="1">
-              <a:off x="1228569" y="22212"/>
-              <a:ext cx="454750" cy="633766"/>
-            </a:xfrm>
-            <a:prstGeom prst="straightConnector1">
-              <a:avLst/>
-            </a:prstGeom>
-            <a:noFill/>
-            <a:ln w="76200" cap="flat" cmpd="sng">
-              <a:solidFill>
-                <a:srgbClr val="FFBD4C"/>
-              </a:solidFill>
-              <a:prstDash val="solid"/>
-              <a:round/>
-              <a:headEnd type="none" w="sm" len="sm"/>
-              <a:tailEnd type="none" w="sm" len="sm"/>
-            </a:ln>
-          </p:spPr>
-        </p:cxnSp>
-        <p:cxnSp>
-          <p:nvCxnSpPr>
-            <p:cNvPr id="373" name="Google Shape;373;p14"/>
-            <p:cNvCxnSpPr/>
-            <p:nvPr/>
-          </p:nvCxnSpPr>
-          <p:spPr>
-            <a:xfrm rot="10800000" flipH="1">
-              <a:off x="1627773" y="22212"/>
-              <a:ext cx="454750" cy="633766"/>
-            </a:xfrm>
-            <a:prstGeom prst="straightConnector1">
-              <a:avLst/>
-            </a:prstGeom>
-            <a:noFill/>
-            <a:ln w="76200" cap="flat" cmpd="sng">
-              <a:solidFill>
-                <a:srgbClr val="FFBD4C"/>
-              </a:solidFill>
-              <a:prstDash val="solid"/>
-              <a:round/>
-              <a:headEnd type="none" w="sm" len="sm"/>
-              <a:tailEnd type="none" w="sm" len="sm"/>
-            </a:ln>
-          </p:spPr>
-        </p:cxnSp>
-        <p:cxnSp>
-          <p:nvCxnSpPr>
-            <p:cNvPr id="374" name="Google Shape;374;p14"/>
-            <p:cNvCxnSpPr/>
-            <p:nvPr/>
-          </p:nvCxnSpPr>
-          <p:spPr>
-            <a:xfrm rot="10800000" flipH="1">
-              <a:off x="2026977" y="22212"/>
-              <a:ext cx="454750" cy="633766"/>
-            </a:xfrm>
-            <a:prstGeom prst="straightConnector1">
-              <a:avLst/>
-            </a:prstGeom>
-            <a:noFill/>
-            <a:ln w="76200" cap="flat" cmpd="sng">
-              <a:solidFill>
-                <a:srgbClr val="FFBD4C"/>
-              </a:solidFill>
-              <a:prstDash val="solid"/>
-              <a:round/>
-              <a:headEnd type="none" w="sm" len="sm"/>
-              <a:tailEnd type="none" w="sm" len="sm"/>
-            </a:ln>
-          </p:spPr>
-        </p:cxnSp>
-        <p:cxnSp>
-          <p:nvCxnSpPr>
-            <p:cNvPr id="375" name="Google Shape;375;p14"/>
-            <p:cNvCxnSpPr/>
-            <p:nvPr/>
-          </p:nvCxnSpPr>
-          <p:spPr>
-            <a:xfrm rot="10800000" flipH="1">
-              <a:off x="2426182" y="22212"/>
-              <a:ext cx="454750" cy="633766"/>
-            </a:xfrm>
-            <a:prstGeom prst="straightConnector1">
-              <a:avLst/>
-            </a:prstGeom>
-            <a:noFill/>
-            <a:ln w="76200" cap="flat" cmpd="sng">
-              <a:solidFill>
-                <a:srgbClr val="FFBD4C"/>
-              </a:solidFill>
-              <a:prstDash val="solid"/>
-              <a:round/>
-              <a:headEnd type="none" w="sm" len="sm"/>
-              <a:tailEnd type="none" w="sm" len="sm"/>
-            </a:ln>
-          </p:spPr>
-        </p:cxnSp>
-      </p:grpSp>
-      <p:grpSp>
-        <p:nvGrpSpPr>
-          <p:cNvPr id="376" name="Google Shape;376;p14"/>
-          <p:cNvGrpSpPr/>
-          <p:nvPr/>
-        </p:nvGrpSpPr>
-        <p:grpSpPr>
-          <a:xfrm rot="5400000">
-            <a:off x="-814419" y="7426244"/>
-            <a:ext cx="2137482" cy="475324"/>
-            <a:chOff x="30956" y="22212"/>
-            <a:chExt cx="2849976" cy="633766"/>
-          </a:xfrm>
-        </p:grpSpPr>
-        <p:cxnSp>
-          <p:nvCxnSpPr>
-            <p:cNvPr id="377" name="Google Shape;377;p14"/>
-            <p:cNvCxnSpPr/>
-            <p:nvPr/>
-          </p:nvCxnSpPr>
-          <p:spPr>
-            <a:xfrm rot="10800000" flipH="1">
-              <a:off x="30956" y="22212"/>
-              <a:ext cx="454750" cy="633766"/>
-            </a:xfrm>
-            <a:prstGeom prst="straightConnector1">
-              <a:avLst/>
-            </a:prstGeom>
-            <a:noFill/>
-            <a:ln w="76200" cap="flat" cmpd="sng">
-              <a:solidFill>
-                <a:srgbClr val="FFBD4C"/>
-              </a:solidFill>
-              <a:prstDash val="solid"/>
-              <a:round/>
-              <a:headEnd type="none" w="sm" len="sm"/>
-              <a:tailEnd type="none" w="sm" len="sm"/>
-            </a:ln>
-          </p:spPr>
-        </p:cxnSp>
-        <p:cxnSp>
-          <p:nvCxnSpPr>
-            <p:cNvPr id="378" name="Google Shape;378;p14"/>
-            <p:cNvCxnSpPr/>
-            <p:nvPr/>
-          </p:nvCxnSpPr>
-          <p:spPr>
-            <a:xfrm rot="10800000" flipH="1">
-              <a:off x="430160" y="22212"/>
-              <a:ext cx="454750" cy="633766"/>
-            </a:xfrm>
-            <a:prstGeom prst="straightConnector1">
-              <a:avLst/>
-            </a:prstGeom>
-            <a:noFill/>
-            <a:ln w="76200" cap="flat" cmpd="sng">
-              <a:solidFill>
-                <a:srgbClr val="FFBD4C"/>
-              </a:solidFill>
-              <a:prstDash val="solid"/>
-              <a:round/>
-              <a:headEnd type="none" w="sm" len="sm"/>
-              <a:tailEnd type="none" w="sm" len="sm"/>
-            </a:ln>
-          </p:spPr>
-        </p:cxnSp>
-        <p:cxnSp>
-          <p:nvCxnSpPr>
-            <p:cNvPr id="379" name="Google Shape;379;p14"/>
-            <p:cNvCxnSpPr/>
-            <p:nvPr/>
-          </p:nvCxnSpPr>
-          <p:spPr>
-            <a:xfrm rot="10800000" flipH="1">
-              <a:off x="829364" y="22212"/>
-              <a:ext cx="454750" cy="633766"/>
-            </a:xfrm>
-            <a:prstGeom prst="straightConnector1">
-              <a:avLst/>
-            </a:prstGeom>
-            <a:noFill/>
-            <a:ln w="76200" cap="flat" cmpd="sng">
-              <a:solidFill>
-                <a:srgbClr val="FFBD4C"/>
-              </a:solidFill>
-              <a:prstDash val="solid"/>
-              <a:round/>
-              <a:headEnd type="none" w="sm" len="sm"/>
-              <a:tailEnd type="none" w="sm" len="sm"/>
-            </a:ln>
-          </p:spPr>
-        </p:cxnSp>
-        <p:cxnSp>
-          <p:nvCxnSpPr>
-            <p:cNvPr id="380" name="Google Shape;380;p14"/>
-            <p:cNvCxnSpPr/>
-            <p:nvPr/>
-          </p:nvCxnSpPr>
-          <p:spPr>
-            <a:xfrm rot="10800000" flipH="1">
-              <a:off x="1228569" y="22212"/>
-              <a:ext cx="454750" cy="633766"/>
-            </a:xfrm>
-            <a:prstGeom prst="straightConnector1">
-              <a:avLst/>
-            </a:prstGeom>
-            <a:noFill/>
-            <a:ln w="76200" cap="flat" cmpd="sng">
-              <a:solidFill>
-                <a:srgbClr val="FFBD4C"/>
-              </a:solidFill>
-              <a:prstDash val="solid"/>
-              <a:round/>
-              <a:headEnd type="none" w="sm" len="sm"/>
-              <a:tailEnd type="none" w="sm" len="sm"/>
-            </a:ln>
-          </p:spPr>
-        </p:cxnSp>
-        <p:cxnSp>
-          <p:nvCxnSpPr>
-            <p:cNvPr id="381" name="Google Shape;381;p14"/>
-            <p:cNvCxnSpPr/>
-            <p:nvPr/>
-          </p:nvCxnSpPr>
-          <p:spPr>
-            <a:xfrm rot="10800000" flipH="1">
-              <a:off x="1627773" y="22212"/>
-              <a:ext cx="454750" cy="633766"/>
-            </a:xfrm>
-            <a:prstGeom prst="straightConnector1">
-              <a:avLst/>
-            </a:prstGeom>
-            <a:noFill/>
-            <a:ln w="76200" cap="flat" cmpd="sng">
-              <a:solidFill>
-                <a:srgbClr val="FFBD4C"/>
-              </a:solidFill>
-              <a:prstDash val="solid"/>
-              <a:round/>
-              <a:headEnd type="none" w="sm" len="sm"/>
-              <a:tailEnd type="none" w="sm" len="sm"/>
-            </a:ln>
-          </p:spPr>
-        </p:cxnSp>
-        <p:cxnSp>
-          <p:nvCxnSpPr>
-            <p:cNvPr id="382" name="Google Shape;382;p14"/>
-            <p:cNvCxnSpPr/>
-            <p:nvPr/>
-          </p:nvCxnSpPr>
-          <p:spPr>
-            <a:xfrm rot="10800000" flipH="1">
-              <a:off x="2026977" y="22212"/>
-              <a:ext cx="454750" cy="633766"/>
-            </a:xfrm>
-            <a:prstGeom prst="straightConnector1">
-              <a:avLst/>
-            </a:prstGeom>
-            <a:noFill/>
-            <a:ln w="76200" cap="flat" cmpd="sng">
-              <a:solidFill>
-                <a:srgbClr val="FFBD4C"/>
-              </a:solidFill>
-              <a:prstDash val="solid"/>
-              <a:round/>
-              <a:headEnd type="none" w="sm" len="sm"/>
-              <a:tailEnd type="none" w="sm" len="sm"/>
-            </a:ln>
-          </p:spPr>
-        </p:cxnSp>
-        <p:cxnSp>
-          <p:nvCxnSpPr>
-            <p:cNvPr id="383" name="Google Shape;383;p14"/>
-            <p:cNvCxnSpPr/>
-            <p:nvPr/>
-          </p:nvCxnSpPr>
-          <p:spPr>
-            <a:xfrm rot="10800000" flipH="1">
-              <a:off x="2426182" y="22212"/>
-              <a:ext cx="454750" cy="633766"/>
-            </a:xfrm>
-            <a:prstGeom prst="straightConnector1">
-              <a:avLst/>
-            </a:prstGeom>
-            <a:noFill/>
-            <a:ln w="76200" cap="flat" cmpd="sng">
-              <a:solidFill>
-                <a:srgbClr val="FFBD4C"/>
-              </a:solidFill>
-              <a:prstDash val="solid"/>
-              <a:round/>
-              <a:headEnd type="none" w="sm" len="sm"/>
-              <a:tailEnd type="none" w="sm" len="sm"/>
-            </a:ln>
-          </p:spPr>
-        </p:cxnSp>
-      </p:grpSp>
-      <p:sp>
-        <p:nvSpPr>
-          <p:cNvPr id="4" name="TextBox 3"/>
-          <p:cNvSpPr txBox="1"/>
-          <p:nvPr/>
-        </p:nvSpPr>
-        <p:spPr>
-          <a:xfrm>
-            <a:off x="10889673" y="2757055"/>
-            <a:ext cx="5497969" cy="307777"/>
-          </a:xfrm>
-          <a:prstGeom prst="rect">
-            <a:avLst/>
-          </a:prstGeom>
-          <a:noFill/>
-          <a:ln>
-            <a:noFill/>
-          </a:ln>
-        </p:spPr>
-        <p:txBody>
-          <a:bodyPr wrap="square" rtlCol="0">
-            <a:spAutoFit/>
-          </a:bodyPr>
-          <a:lstStyle/>
-          <a:p>
-            <a:r>
-              <a:rPr lang="ru-RU" dirty="0" smtClean="0"/>
-              <a:t>Действия и результат</a:t>
-            </a:r>
-            <a:endParaRPr lang="ru-RU" dirty="0"/>
-          </a:p>
-        </p:txBody>
-      </p:sp>
-      <p:sp>
-        <p:nvSpPr>
-          <p:cNvPr id="8" name="TextBox 7"/>
-          <p:cNvSpPr txBox="1"/>
-          <p:nvPr/>
-        </p:nvSpPr>
-        <p:spPr>
-          <a:xfrm>
-            <a:off x="766437" y="7663069"/>
-            <a:ext cx="9476509" cy="1200329"/>
-          </a:xfrm>
-          <a:prstGeom prst="rect">
-            <a:avLst/>
-          </a:prstGeom>
-          <a:noFill/>
-        </p:spPr>
-        <p:txBody>
-          <a:bodyPr wrap="square" rtlCol="0">
-            <a:spAutoFit/>
-          </a:bodyPr>
-          <a:lstStyle/>
-          <a:p>
-            <a:r>
-              <a:rPr lang="ru-RU" sz="2400" dirty="0" smtClean="0">
-                <a:solidFill>
-                  <a:srgbClr val="FFBD4C"/>
-                </a:solidFill>
-                <a:latin typeface="Arial Black" panose="020B0A04020102020204" pitchFamily="34" charset="0"/>
-              </a:rPr>
-              <a:t>Результат</a:t>
-            </a:r>
-            <a:r>
-              <a:rPr lang="en-US" sz="2400" dirty="0" smtClean="0">
-                <a:solidFill>
-                  <a:srgbClr val="FFBD4C"/>
-                </a:solidFill>
-                <a:latin typeface="Arial Black" panose="020B0A04020102020204" pitchFamily="34" charset="0"/>
-              </a:rPr>
-              <a:t>:</a:t>
-            </a:r>
-          </a:p>
-          <a:p>
-            <a:r>
-              <a:rPr lang="ru-RU" sz="2400" dirty="0" smtClean="0">
-                <a:solidFill>
-                  <a:srgbClr val="FFBD4C"/>
-                </a:solidFill>
-                <a:latin typeface="Arial Black" panose="020B0A04020102020204" pitchFamily="34" charset="0"/>
-              </a:rPr>
-              <a:t>Некорректные ключи определяются правильно</a:t>
-            </a:r>
-          </a:p>
-          <a:p>
-            <a:r>
-              <a:rPr lang="ru-RU" sz="2400" dirty="0" smtClean="0">
-                <a:solidFill>
-                  <a:srgbClr val="FFBD4C"/>
-                </a:solidFill>
-                <a:latin typeface="Arial Black" panose="020B0A04020102020204" pitchFamily="34" charset="0"/>
-              </a:rPr>
-              <a:t>Выводится сообщение об ошибке  </a:t>
-            </a:r>
-            <a:endParaRPr lang="ru-RU" sz="2400" dirty="0">
-              <a:solidFill>
-                <a:srgbClr val="FFBD4C"/>
-              </a:solidFill>
-              <a:latin typeface="Arial Black" panose="020B0A04020102020204" pitchFamily="34" charset="0"/>
-            </a:endParaRPr>
-          </a:p>
-        </p:txBody>
-      </p:sp>
-      <p:pic>
-        <p:nvPicPr>
-          <p:cNvPr id="2" name="Рисунок 1"/>
-          <p:cNvPicPr>
-            <a:picLocks noChangeAspect="1"/>
-          </p:cNvPicPr>
-          <p:nvPr/>
-        </p:nvPicPr>
-        <p:blipFill>
-          <a:blip r:embed="rId3"/>
-          <a:stretch>
-            <a:fillRect/>
-          </a:stretch>
-        </p:blipFill>
-        <p:spPr>
-          <a:xfrm>
-            <a:off x="807353" y="2348624"/>
-            <a:ext cx="7840169" cy="4887007"/>
-          </a:xfrm>
-          <a:prstGeom prst="roundRect">
-            <a:avLst>
-              <a:gd name="adj" fmla="val 8729"/>
-            </a:avLst>
-          </a:prstGeom>
-        </p:spPr>
-      </p:pic>
-      <p:pic>
-        <p:nvPicPr>
-          <p:cNvPr id="3" name="Рисунок 2"/>
-          <p:cNvPicPr>
-            <a:picLocks noChangeAspect="1"/>
-          </p:cNvPicPr>
-          <p:nvPr/>
-        </p:nvPicPr>
-        <p:blipFill>
-          <a:blip r:embed="rId4"/>
-          <a:stretch>
-            <a:fillRect/>
-          </a:stretch>
-        </p:blipFill>
-        <p:spPr>
-          <a:xfrm>
-            <a:off x="9663847" y="2348624"/>
-            <a:ext cx="7792537" cy="4810796"/>
-          </a:xfrm>
-          <a:prstGeom prst="roundRect">
-            <a:avLst>
-              <a:gd name="adj" fmla="val 8939"/>
-            </a:avLst>
-          </a:prstGeom>
-        </p:spPr>
-      </p:pic>
-    </p:spTree>
-    <p:extLst>
-      <p:ext uri="{BB962C8B-B14F-4D97-AF65-F5344CB8AC3E}">
-        <p14:creationId xmlns:p14="http://schemas.microsoft.com/office/powerpoint/2010/main" val="2637820430"/>
-      </p:ext>
-    </p:extLst>
-  </p:cSld>
-  <p:clrMapOvr>
-    <a:masterClrMapping/>
-  </p:clrMapOvr>
-</p:sld>
-</file>
-
-<file path=ppt/slides/slide9.xml><?xml version="1.0" encoding="utf-8"?>
-<p:sld xmlns:a="http://schemas.openxmlformats.org/drawingml/2006/main" xmlns:r="http://schemas.openxmlformats.org/officeDocument/2006/relationships" xmlns:p="http://schemas.openxmlformats.org/presentationml/2006/main">
-  <p:cSld>
-    <p:bg>
-      <p:bgPr>
-        <a:solidFill>
-          <a:srgbClr val="0C0F27"/>
-        </a:solidFill>
-        <a:effectLst/>
-      </p:bgPr>
-    </p:bg>
-    <p:spTree>
-      <p:nvGrpSpPr>
-        <p:cNvPr id="1" name="Shape 387"/>
-        <p:cNvGrpSpPr/>
-        <p:nvPr/>
-      </p:nvGrpSpPr>
-      <p:grpSpPr>
-        <a:xfrm>
-          <a:off x="0" y="0"/>
-          <a:ext cx="0" cy="0"/>
-          <a:chOff x="0" y="0"/>
-          <a:chExt cx="0" cy="0"/>
-        </a:xfrm>
-      </p:grpSpPr>
-      <p:sp>
-        <p:nvSpPr>
-          <p:cNvPr id="403" name="Google Shape;403;p15"/>
-          <p:cNvSpPr txBox="1"/>
-          <p:nvPr/>
-        </p:nvSpPr>
-        <p:spPr>
-          <a:xfrm>
-            <a:off x="197366" y="0"/>
-            <a:ext cx="16764754" cy="2215991"/>
-          </a:xfrm>
-          <a:prstGeom prst="rect">
-            <a:avLst/>
-          </a:prstGeom>
-          <a:noFill/>
-          <a:ln>
-            <a:noFill/>
-          </a:ln>
-        </p:spPr>
-        <p:txBody>
-          <a:bodyPr spcFirstLastPara="1" wrap="square" lIns="0" tIns="0" rIns="0" bIns="0" anchor="t" anchorCtr="0">
-            <a:spAutoFit/>
-          </a:bodyPr>
-          <a:lstStyle/>
-          <a:p>
-            <a:pPr marL="0" marR="0" lvl="0" indent="0" rtl="0">
-              <a:lnSpc>
-                <a:spcPct val="120000"/>
-              </a:lnSpc>
-              <a:spcBef>
-                <a:spcPts val="0"/>
-              </a:spcBef>
-              <a:spcAft>
-                <a:spcPts val="0"/>
-              </a:spcAft>
-              <a:buNone/>
-            </a:pPr>
-            <a:r>
-              <a:rPr lang="ru-RU" sz="6000" b="0" i="0" u="none" strike="noStrike" cap="none" dirty="0" smtClean="0">
-                <a:solidFill>
-                  <a:srgbClr val="FFBD4C"/>
-                </a:solidFill>
-                <a:latin typeface="Arial Black" panose="020B0A04020102020204" pitchFamily="34" charset="0"/>
-                <a:ea typeface="Montserrat"/>
-                <a:cs typeface="Montserrat"/>
-                <a:sym typeface="Montserrat"/>
-              </a:rPr>
-              <a:t>Описание действий и ожидаемого результата</a:t>
-            </a:r>
-            <a:endParaRPr sz="900" dirty="0">
-              <a:latin typeface="Arial Black" panose="020B0A04020102020204" pitchFamily="34" charset="0"/>
-            </a:endParaRPr>
-          </a:p>
-        </p:txBody>
-      </p:sp>
-      <p:graphicFrame>
-        <p:nvGraphicFramePr>
-          <p:cNvPr id="2" name="Таблица 1"/>
-          <p:cNvGraphicFramePr>
-            <a:graphicFrameLocks noGrp="1"/>
-          </p:cNvGraphicFramePr>
-          <p:nvPr>
-            <p:extLst>
-              <p:ext uri="{D42A27DB-BD31-4B8C-83A1-F6EECF244321}">
-                <p14:modId xmlns:p14="http://schemas.microsoft.com/office/powerpoint/2010/main" val="2947309660"/>
-              </p:ext>
-            </p:extLst>
-          </p:nvPr>
-        </p:nvGraphicFramePr>
-        <p:xfrm>
-          <a:off x="609600" y="2451100"/>
-          <a:ext cx="17038320" cy="7376668"/>
-        </p:xfrm>
-        <a:graphic>
-          <a:graphicData uri="http://schemas.openxmlformats.org/drawingml/2006/table">
-            <a:tbl>
-              <a:tblPr firstRow="1" bandRow="1">
-                <a:tableStyleId>{5A111915-BE36-4E01-A7E5-04B1672EAD32}</a:tableStyleId>
-              </a:tblPr>
-              <a:tblGrid>
-                <a:gridCol w="5679440">
-                  <a:extLst>
-                    <a:ext uri="{9D8B030D-6E8A-4147-A177-3AD203B41FA5}">
-                      <a16:colId xmlns:a16="http://schemas.microsoft.com/office/drawing/2014/main" val="4137856499"/>
-                    </a:ext>
-                  </a:extLst>
-                </a:gridCol>
-                <a:gridCol w="5679440">
-                  <a:extLst>
-                    <a:ext uri="{9D8B030D-6E8A-4147-A177-3AD203B41FA5}">
-                      <a16:colId xmlns:a16="http://schemas.microsoft.com/office/drawing/2014/main" val="3537692410"/>
-                    </a:ext>
-                  </a:extLst>
-                </a:gridCol>
-                <a:gridCol w="5679440">
-                  <a:extLst>
-                    <a:ext uri="{9D8B030D-6E8A-4147-A177-3AD203B41FA5}">
-                      <a16:colId xmlns:a16="http://schemas.microsoft.com/office/drawing/2014/main" val="2415858442"/>
-                    </a:ext>
-                  </a:extLst>
-                </a:gridCol>
-              </a:tblGrid>
-              <a:tr h="762508">
-                <a:tc>
-                  <a:txBody>
-                    <a:bodyPr/>
-                    <a:lstStyle/>
-                    <a:p>
-                      <a:r>
-                        <a:rPr lang="ru-RU" sz="2800" dirty="0" smtClean="0">
-                          <a:solidFill>
-                            <a:schemeClr val="bg1"/>
-                          </a:solidFill>
-                          <a:latin typeface="Arial Black" panose="020B0A04020102020204" pitchFamily="34" charset="0"/>
-                        </a:rPr>
-                        <a:t>Действие</a:t>
-                      </a:r>
-                      <a:endParaRPr lang="ru-RU" sz="2800" dirty="0">
-                        <a:solidFill>
-                          <a:schemeClr val="bg1"/>
-                        </a:solidFill>
-                        <a:latin typeface="Arial Black" panose="020B0A04020102020204" pitchFamily="34" charset="0"/>
-                      </a:endParaRPr>
-                    </a:p>
-                  </a:txBody>
-                  <a:tcPr/>
-                </a:tc>
-                <a:tc>
-                  <a:txBody>
-                    <a:bodyPr/>
-                    <a:lstStyle/>
-                    <a:p>
-                      <a:r>
-                        <a:rPr lang="ru-RU" sz="2800" dirty="0" smtClean="0">
-                          <a:solidFill>
-                            <a:schemeClr val="bg1"/>
-                          </a:solidFill>
-                          <a:latin typeface="Arial Black" panose="020B0A04020102020204" pitchFamily="34" charset="0"/>
-                        </a:rPr>
-                        <a:t>Ожидаемый результат</a:t>
-                      </a:r>
-                      <a:endParaRPr lang="ru-RU" sz="2800" dirty="0">
-                        <a:solidFill>
-                          <a:schemeClr val="bg1"/>
-                        </a:solidFill>
-                        <a:latin typeface="Arial Black" panose="020B0A04020102020204" pitchFamily="34" charset="0"/>
-                      </a:endParaRPr>
-                    </a:p>
-                  </a:txBody>
-                  <a:tcPr/>
-                </a:tc>
-                <a:tc>
-                  <a:txBody>
-                    <a:bodyPr/>
-                    <a:lstStyle/>
-                    <a:p>
-                      <a:r>
-                        <a:rPr lang="ru-RU" sz="2800" dirty="0" smtClean="0">
-                          <a:solidFill>
-                            <a:schemeClr val="bg1"/>
-                          </a:solidFill>
-                          <a:latin typeface="Arial Black" panose="020B0A04020102020204" pitchFamily="34" charset="0"/>
-                        </a:rPr>
-                        <a:t>Фактический результат</a:t>
-                      </a:r>
-                      <a:endParaRPr lang="ru-RU" sz="2800" dirty="0">
-                        <a:solidFill>
-                          <a:schemeClr val="bg1"/>
-                        </a:solidFill>
-                        <a:latin typeface="Arial Black" panose="020B0A04020102020204" pitchFamily="34" charset="0"/>
-                      </a:endParaRPr>
-                    </a:p>
-                  </a:txBody>
-                  <a:tcPr/>
-                </a:tc>
-                <a:extLst>
-                  <a:ext uri="{0D108BD9-81ED-4DB2-BD59-A6C34878D82A}">
-                    <a16:rowId xmlns:a16="http://schemas.microsoft.com/office/drawing/2014/main" val="1039029213"/>
-                  </a:ext>
-                </a:extLst>
-              </a:tr>
-              <a:tr h="762508">
-                <a:tc>
-                  <a:txBody>
-                    <a:bodyPr/>
-                    <a:lstStyle/>
-                    <a:p>
-                      <a:r>
-                        <a:rPr lang="ru-RU" sz="2800" dirty="0" smtClean="0">
-                          <a:solidFill>
-                            <a:schemeClr val="bg1"/>
-                          </a:solidFill>
-                          <a:latin typeface="Arial Black" panose="020B0A04020102020204" pitchFamily="34" charset="0"/>
-                        </a:rPr>
-                        <a:t>Ввод</a:t>
-                      </a:r>
-                      <a:r>
-                        <a:rPr lang="ru-RU" sz="2800" baseline="0" dirty="0" smtClean="0">
-                          <a:solidFill>
-                            <a:schemeClr val="bg1"/>
-                          </a:solidFill>
-                          <a:latin typeface="Arial Black" panose="020B0A04020102020204" pitchFamily="34" charset="0"/>
-                        </a:rPr>
-                        <a:t> английского текста и шифрование</a:t>
-                      </a:r>
-                      <a:endParaRPr lang="ru-RU" sz="2800" dirty="0">
-                        <a:solidFill>
-                          <a:schemeClr val="bg1"/>
-                        </a:solidFill>
-                        <a:latin typeface="Arial Black" panose="020B0A04020102020204" pitchFamily="34" charset="0"/>
-                      </a:endParaRPr>
-                    </a:p>
-                  </a:txBody>
-                  <a:tcPr/>
-                </a:tc>
-                <a:tc>
-                  <a:txBody>
-                    <a:bodyPr/>
-                    <a:lstStyle/>
-                    <a:p>
-                      <a:r>
-                        <a:rPr lang="ru-RU" sz="2800" dirty="0" smtClean="0">
-                          <a:solidFill>
-                            <a:schemeClr val="bg1"/>
-                          </a:solidFill>
-                          <a:latin typeface="Arial Black" panose="020B0A04020102020204" pitchFamily="34" charset="0"/>
-                        </a:rPr>
-                        <a:t>Текст корректно шифруется</a:t>
-                      </a:r>
-                      <a:endParaRPr lang="ru-RU" sz="2800" dirty="0">
-                        <a:solidFill>
-                          <a:schemeClr val="bg1"/>
-                        </a:solidFill>
-                        <a:latin typeface="Arial Black" panose="020B0A04020102020204" pitchFamily="34" charset="0"/>
-                      </a:endParaRPr>
-                    </a:p>
-                  </a:txBody>
-                  <a:tcPr/>
-                </a:tc>
-                <a:tc>
-                  <a:txBody>
-                    <a:bodyPr/>
-                    <a:lstStyle/>
-                    <a:p>
-                      <a:r>
-                        <a:rPr lang="ru-RU" sz="2800" dirty="0" smtClean="0">
-                          <a:solidFill>
-                            <a:schemeClr val="bg1"/>
-                          </a:solidFill>
-                          <a:latin typeface="Arial Black" panose="020B0A04020102020204" pitchFamily="34" charset="0"/>
-                        </a:rPr>
-                        <a:t>Текст успешно шифруется</a:t>
-                      </a:r>
-                      <a:endParaRPr lang="ru-RU" sz="2800" dirty="0">
-                        <a:solidFill>
-                          <a:schemeClr val="bg1"/>
-                        </a:solidFill>
-                        <a:latin typeface="Arial Black" panose="020B0A04020102020204" pitchFamily="34" charset="0"/>
-                      </a:endParaRPr>
-                    </a:p>
-                  </a:txBody>
-                  <a:tcPr/>
-                </a:tc>
-                <a:extLst>
-                  <a:ext uri="{0D108BD9-81ED-4DB2-BD59-A6C34878D82A}">
-                    <a16:rowId xmlns:a16="http://schemas.microsoft.com/office/drawing/2014/main" val="2465515155"/>
-                  </a:ext>
-                </a:extLst>
-              </a:tr>
-              <a:tr h="762508">
-                <a:tc>
-                  <a:txBody>
-                    <a:bodyPr/>
-                    <a:lstStyle/>
-                    <a:p>
-                      <a:r>
-                        <a:rPr lang="ru-RU" sz="2800" dirty="0" smtClean="0">
-                          <a:solidFill>
-                            <a:schemeClr val="bg1"/>
-                          </a:solidFill>
-                          <a:latin typeface="Arial Black" panose="020B0A04020102020204" pitchFamily="34" charset="0"/>
-                        </a:rPr>
-                        <a:t>Ввод английского текста и дешифровка</a:t>
-                      </a:r>
-                      <a:endParaRPr lang="ru-RU" sz="2800" dirty="0">
-                        <a:solidFill>
-                          <a:schemeClr val="bg1"/>
-                        </a:solidFill>
-                        <a:latin typeface="Arial Black" panose="020B0A04020102020204" pitchFamily="34" charset="0"/>
-                      </a:endParaRPr>
-                    </a:p>
-                  </a:txBody>
-                  <a:tcPr/>
-                </a:tc>
-                <a:tc>
-                  <a:txBody>
-                    <a:bodyPr/>
-                    <a:lstStyle/>
-                    <a:p>
-                      <a:r>
-                        <a:rPr lang="ru-RU" sz="2800" dirty="0" smtClean="0">
-                          <a:solidFill>
-                            <a:schemeClr val="bg1"/>
-                          </a:solidFill>
-                          <a:latin typeface="Arial Black" panose="020B0A04020102020204" pitchFamily="34" charset="0"/>
-                        </a:rPr>
-                        <a:t>Текст корректно дешифруется</a:t>
-                      </a:r>
-                      <a:r>
-                        <a:rPr lang="ru-RU" sz="2800" baseline="0" dirty="0" smtClean="0">
-                          <a:solidFill>
-                            <a:schemeClr val="bg1"/>
-                          </a:solidFill>
-                          <a:latin typeface="Arial Black" panose="020B0A04020102020204" pitchFamily="34" charset="0"/>
-                        </a:rPr>
-                        <a:t> </a:t>
-                      </a:r>
-                      <a:endParaRPr lang="ru-RU" sz="2800" dirty="0">
-                        <a:solidFill>
-                          <a:schemeClr val="bg1"/>
-                        </a:solidFill>
-                        <a:latin typeface="Arial Black" panose="020B0A04020102020204" pitchFamily="34" charset="0"/>
-                      </a:endParaRPr>
-                    </a:p>
-                  </a:txBody>
-                  <a:tcPr/>
-                </a:tc>
-                <a:tc>
-                  <a:txBody>
-                    <a:bodyPr/>
-                    <a:lstStyle/>
-                    <a:p>
-                      <a:r>
-                        <a:rPr lang="ru-RU" sz="2800" dirty="0" smtClean="0">
-                          <a:solidFill>
-                            <a:schemeClr val="bg1"/>
-                          </a:solidFill>
-                          <a:latin typeface="Arial Black" panose="020B0A04020102020204" pitchFamily="34" charset="0"/>
-                        </a:rPr>
-                        <a:t>Текст успешно дешифруется</a:t>
-                      </a:r>
-                      <a:endParaRPr lang="ru-RU" sz="2800" dirty="0">
-                        <a:solidFill>
-                          <a:schemeClr val="bg1"/>
-                        </a:solidFill>
-                        <a:latin typeface="Arial Black" panose="020B0A04020102020204" pitchFamily="34" charset="0"/>
-                      </a:endParaRPr>
-                    </a:p>
-                  </a:txBody>
-                  <a:tcPr/>
-                </a:tc>
-                <a:extLst>
-                  <a:ext uri="{0D108BD9-81ED-4DB2-BD59-A6C34878D82A}">
-                    <a16:rowId xmlns:a16="http://schemas.microsoft.com/office/drawing/2014/main" val="2752733445"/>
-                  </a:ext>
-                </a:extLst>
-              </a:tr>
-              <a:tr h="762508">
-                <a:tc>
-                  <a:txBody>
-                    <a:bodyPr/>
-                    <a:lstStyle/>
-                    <a:p>
-                      <a:r>
-                        <a:rPr lang="ru-RU" sz="2800" dirty="0" smtClean="0">
-                          <a:solidFill>
-                            <a:schemeClr val="bg1"/>
-                          </a:solidFill>
-                          <a:latin typeface="Arial Black" panose="020B0A04020102020204" pitchFamily="34" charset="0"/>
-                        </a:rPr>
-                        <a:t>Ввод русского алфавита</a:t>
-                      </a:r>
-                      <a:r>
-                        <a:rPr lang="ru-RU" sz="2800" baseline="0" dirty="0" smtClean="0">
-                          <a:solidFill>
-                            <a:schemeClr val="bg1"/>
-                          </a:solidFill>
-                          <a:latin typeface="Arial Black" panose="020B0A04020102020204" pitchFamily="34" charset="0"/>
-                        </a:rPr>
-                        <a:t> и шифрование</a:t>
-                      </a:r>
-                      <a:endParaRPr lang="ru-RU" sz="2800" dirty="0">
-                        <a:solidFill>
-                          <a:schemeClr val="bg1"/>
-                        </a:solidFill>
-                        <a:latin typeface="Arial Black" panose="020B0A04020102020204" pitchFamily="34" charset="0"/>
-                      </a:endParaRPr>
-                    </a:p>
-                  </a:txBody>
-                  <a:tcPr/>
-                </a:tc>
-                <a:tc>
-                  <a:txBody>
-                    <a:bodyPr/>
-                    <a:lstStyle/>
-                    <a:p>
-                      <a:r>
-                        <a:rPr lang="ru-RU" sz="2800" dirty="0" smtClean="0">
-                          <a:solidFill>
-                            <a:schemeClr val="bg1"/>
-                          </a:solidFill>
-                          <a:latin typeface="Arial Black" panose="020B0A04020102020204" pitchFamily="34" charset="0"/>
-                        </a:rPr>
-                        <a:t>Текст корректно шифруется</a:t>
-                      </a:r>
-                      <a:endParaRPr lang="ru-RU" sz="2800" dirty="0">
-                        <a:solidFill>
-                          <a:schemeClr val="bg1"/>
-                        </a:solidFill>
-                        <a:latin typeface="Arial Black" panose="020B0A04020102020204" pitchFamily="34" charset="0"/>
-                      </a:endParaRPr>
-                    </a:p>
-                  </a:txBody>
-                  <a:tcPr/>
-                </a:tc>
-                <a:tc>
-                  <a:txBody>
-                    <a:bodyPr/>
-                    <a:lstStyle/>
-                    <a:p>
-                      <a:r>
-                        <a:rPr lang="ru-RU" sz="2800" dirty="0" smtClean="0">
-                          <a:solidFill>
-                            <a:schemeClr val="bg1"/>
-                          </a:solidFill>
-                          <a:latin typeface="Arial Black" panose="020B0A04020102020204" pitchFamily="34" charset="0"/>
-                        </a:rPr>
-                        <a:t>Текст успешно шифруется</a:t>
-                      </a:r>
-                      <a:endParaRPr lang="ru-RU" sz="2800" dirty="0">
-                        <a:solidFill>
-                          <a:schemeClr val="bg1"/>
-                        </a:solidFill>
-                        <a:latin typeface="Arial Black" panose="020B0A04020102020204" pitchFamily="34" charset="0"/>
-                      </a:endParaRPr>
-                    </a:p>
-                  </a:txBody>
-                  <a:tcPr/>
-                </a:tc>
-                <a:extLst>
-                  <a:ext uri="{0D108BD9-81ED-4DB2-BD59-A6C34878D82A}">
-                    <a16:rowId xmlns:a16="http://schemas.microsoft.com/office/drawing/2014/main" val="1492168825"/>
-                  </a:ext>
-                </a:extLst>
-              </a:tr>
-              <a:tr h="762508">
-                <a:tc>
-                  <a:txBody>
-                    <a:bodyPr/>
-                    <a:lstStyle/>
-                    <a:p>
-                      <a:r>
-                        <a:rPr lang="ru-RU" sz="2800" dirty="0" smtClean="0">
-                          <a:solidFill>
-                            <a:schemeClr val="bg1"/>
-                          </a:solidFill>
-                          <a:latin typeface="Arial Black" panose="020B0A04020102020204" pitchFamily="34" charset="0"/>
-                        </a:rPr>
-                        <a:t>Ввод русского алфавита и дешифровка</a:t>
-                      </a:r>
-                      <a:endParaRPr lang="ru-RU" sz="2800" dirty="0">
-                        <a:solidFill>
-                          <a:schemeClr val="bg1"/>
-                        </a:solidFill>
-                        <a:latin typeface="Arial Black" panose="020B0A04020102020204" pitchFamily="34" charset="0"/>
-                      </a:endParaRPr>
-                    </a:p>
-                  </a:txBody>
-                  <a:tcPr/>
-                </a:tc>
-                <a:tc>
-                  <a:txBody>
-                    <a:bodyPr/>
-                    <a:lstStyle/>
-                    <a:p>
-                      <a:r>
-                        <a:rPr lang="ru-RU" sz="2800" dirty="0" smtClean="0">
-                          <a:solidFill>
-                            <a:schemeClr val="bg1"/>
-                          </a:solidFill>
-                          <a:latin typeface="Arial Black" panose="020B0A04020102020204" pitchFamily="34" charset="0"/>
-                        </a:rPr>
-                        <a:t>Текст</a:t>
-                      </a:r>
-                      <a:r>
-                        <a:rPr lang="ru-RU" sz="2800" baseline="0" dirty="0" smtClean="0">
-                          <a:solidFill>
-                            <a:schemeClr val="bg1"/>
-                          </a:solidFill>
-                          <a:latin typeface="Arial Black" panose="020B0A04020102020204" pitchFamily="34" charset="0"/>
-                        </a:rPr>
-                        <a:t> корректно дешифруется</a:t>
-                      </a:r>
-                      <a:endParaRPr lang="ru-RU" sz="2800" dirty="0">
-                        <a:solidFill>
-                          <a:schemeClr val="bg1"/>
-                        </a:solidFill>
-                        <a:latin typeface="Arial Black" panose="020B0A04020102020204" pitchFamily="34" charset="0"/>
-                      </a:endParaRPr>
-                    </a:p>
-                  </a:txBody>
-                  <a:tcPr/>
-                </a:tc>
-                <a:tc>
-                  <a:txBody>
-                    <a:bodyPr/>
-                    <a:lstStyle/>
-                    <a:p>
-                      <a:r>
-                        <a:rPr lang="ru-RU" sz="2800" dirty="0" smtClean="0">
-                          <a:solidFill>
-                            <a:schemeClr val="bg1"/>
-                          </a:solidFill>
-                          <a:latin typeface="Arial Black" panose="020B0A04020102020204" pitchFamily="34" charset="0"/>
-                        </a:rPr>
-                        <a:t>Текст успешно дешифруется</a:t>
-                      </a:r>
-                      <a:endParaRPr lang="ru-RU" sz="2800" dirty="0">
-                        <a:solidFill>
-                          <a:schemeClr val="bg1"/>
-                        </a:solidFill>
-                        <a:latin typeface="Arial Black" panose="020B0A04020102020204" pitchFamily="34" charset="0"/>
-                      </a:endParaRPr>
-                    </a:p>
-                  </a:txBody>
-                  <a:tcPr/>
-                </a:tc>
-                <a:extLst>
-                  <a:ext uri="{0D108BD9-81ED-4DB2-BD59-A6C34878D82A}">
-                    <a16:rowId xmlns:a16="http://schemas.microsoft.com/office/drawing/2014/main" val="1633726701"/>
-                  </a:ext>
-                </a:extLst>
-              </a:tr>
-              <a:tr h="762508">
-                <a:tc>
-                  <a:txBody>
-                    <a:bodyPr/>
-                    <a:lstStyle/>
-                    <a:p>
-                      <a:r>
-                        <a:rPr lang="ru-RU" sz="2800" dirty="0" smtClean="0">
-                          <a:solidFill>
-                            <a:schemeClr val="bg1"/>
-                          </a:solidFill>
-                          <a:latin typeface="Arial Black" panose="020B0A04020102020204" pitchFamily="34" charset="0"/>
-                        </a:rPr>
-                        <a:t>Ввод некорректного ключа для английского алфавита</a:t>
-                      </a:r>
-                      <a:endParaRPr lang="ru-RU" sz="2800" dirty="0">
-                        <a:solidFill>
-                          <a:schemeClr val="bg1"/>
-                        </a:solidFill>
-                        <a:latin typeface="Arial Black" panose="020B0A04020102020204" pitchFamily="34" charset="0"/>
-                      </a:endParaRPr>
-                    </a:p>
-                  </a:txBody>
-                  <a:tcPr/>
-                </a:tc>
-                <a:tc>
-                  <a:txBody>
-                    <a:bodyPr/>
-                    <a:lstStyle/>
-                    <a:p>
-                      <a:r>
-                        <a:rPr lang="ru-RU" sz="2800" dirty="0" smtClean="0">
-                          <a:solidFill>
-                            <a:schemeClr val="bg1"/>
-                          </a:solidFill>
-                          <a:latin typeface="Arial Black" panose="020B0A04020102020204" pitchFamily="34" charset="0"/>
-                        </a:rPr>
-                        <a:t>Вывод сообщения об ошибке</a:t>
-                      </a:r>
-                      <a:endParaRPr lang="ru-RU" sz="2800" dirty="0">
-                        <a:solidFill>
-                          <a:schemeClr val="bg1"/>
-                        </a:solidFill>
-                        <a:latin typeface="Arial Black" panose="020B0A04020102020204" pitchFamily="34" charset="0"/>
-                      </a:endParaRPr>
-                    </a:p>
-                  </a:txBody>
-                  <a:tcPr/>
-                </a:tc>
-                <a:tc>
-                  <a:txBody>
-                    <a:bodyPr/>
-                    <a:lstStyle/>
-                    <a:p>
-                      <a:r>
-                        <a:rPr lang="ru-RU" sz="2800" dirty="0" smtClean="0">
-                          <a:solidFill>
-                            <a:schemeClr val="bg1"/>
-                          </a:solidFill>
-                          <a:latin typeface="Arial Black" panose="020B0A04020102020204" pitchFamily="34" charset="0"/>
-                        </a:rPr>
-                        <a:t>Ошибка отображается корректно</a:t>
-                      </a:r>
-                      <a:endParaRPr lang="ru-RU" sz="2800" dirty="0">
-                        <a:solidFill>
-                          <a:schemeClr val="bg1"/>
-                        </a:solidFill>
-                        <a:latin typeface="Arial Black" panose="020B0A04020102020204" pitchFamily="34" charset="0"/>
-                      </a:endParaRPr>
-                    </a:p>
-                  </a:txBody>
-                  <a:tcPr/>
-                </a:tc>
-                <a:extLst>
-                  <a:ext uri="{0D108BD9-81ED-4DB2-BD59-A6C34878D82A}">
-                    <a16:rowId xmlns:a16="http://schemas.microsoft.com/office/drawing/2014/main" val="1005631226"/>
-                  </a:ext>
-                </a:extLst>
-              </a:tr>
-              <a:tr h="762508">
-                <a:tc>
-                  <a:txBody>
-                    <a:bodyPr/>
-                    <a:lstStyle/>
-                    <a:p>
-                      <a:r>
-                        <a:rPr lang="ru-RU" sz="2800" dirty="0" smtClean="0">
-                          <a:solidFill>
-                            <a:schemeClr val="bg1"/>
-                          </a:solidFill>
-                          <a:latin typeface="Arial Black" panose="020B0A04020102020204" pitchFamily="34" charset="0"/>
-                        </a:rPr>
-                        <a:t>Ввод некорректного ключа для русского алфавита</a:t>
-                      </a:r>
-                      <a:endParaRPr lang="ru-RU" sz="2800" dirty="0">
-                        <a:solidFill>
-                          <a:schemeClr val="bg1"/>
-                        </a:solidFill>
-                        <a:latin typeface="Arial Black" panose="020B0A04020102020204" pitchFamily="34" charset="0"/>
-                      </a:endParaRPr>
-                    </a:p>
-                  </a:txBody>
-                  <a:tcPr/>
-                </a:tc>
-                <a:tc>
-                  <a:txBody>
-                    <a:bodyPr/>
-                    <a:lstStyle/>
-                    <a:p>
-                      <a:r>
-                        <a:rPr lang="ru-RU" sz="2800" dirty="0" smtClean="0">
-                          <a:solidFill>
-                            <a:schemeClr val="bg1"/>
-                          </a:solidFill>
-                          <a:latin typeface="Arial Black" panose="020B0A04020102020204" pitchFamily="34" charset="0"/>
-                        </a:rPr>
-                        <a:t>Вывод сообщения об ошибке</a:t>
-                      </a:r>
-                      <a:endParaRPr lang="ru-RU" sz="2800" dirty="0">
-                        <a:solidFill>
-                          <a:schemeClr val="bg1"/>
-                        </a:solidFill>
-                        <a:latin typeface="Arial Black" panose="020B0A04020102020204" pitchFamily="34" charset="0"/>
-                      </a:endParaRPr>
-                    </a:p>
-                  </a:txBody>
-                  <a:tcPr/>
-                </a:tc>
-                <a:tc>
-                  <a:txBody>
-                    <a:bodyPr/>
-                    <a:lstStyle/>
-                    <a:p>
-                      <a:r>
-                        <a:rPr lang="ru-RU" sz="2800" dirty="0" smtClean="0">
-                          <a:solidFill>
-                            <a:schemeClr val="bg1"/>
-                          </a:solidFill>
-                          <a:latin typeface="Arial Black" panose="020B0A04020102020204" pitchFamily="34" charset="0"/>
-                        </a:rPr>
-                        <a:t>Ошибка отображается корректно</a:t>
-                      </a:r>
-                      <a:endParaRPr lang="ru-RU" sz="2800" dirty="0">
-                        <a:solidFill>
-                          <a:schemeClr val="bg1"/>
-                        </a:solidFill>
-                        <a:latin typeface="Arial Black" panose="020B0A04020102020204" pitchFamily="34" charset="0"/>
-                      </a:endParaRPr>
-                    </a:p>
-                  </a:txBody>
-                  <a:tcPr/>
-                </a:tc>
-                <a:extLst>
-                  <a:ext uri="{0D108BD9-81ED-4DB2-BD59-A6C34878D82A}">
-                    <a16:rowId xmlns:a16="http://schemas.microsoft.com/office/drawing/2014/main" val="2476480069"/>
-                  </a:ext>
-                </a:extLst>
-              </a:tr>
-              <a:tr h="762508">
-                <a:tc>
-                  <a:txBody>
-                    <a:bodyPr/>
-                    <a:lstStyle/>
-                    <a:p>
-                      <a:r>
-                        <a:rPr lang="ru-RU" sz="2800" dirty="0" smtClean="0">
-                          <a:solidFill>
-                            <a:schemeClr val="bg1"/>
-                          </a:solidFill>
-                          <a:latin typeface="Arial Black" panose="020B0A04020102020204" pitchFamily="34" charset="0"/>
-                        </a:rPr>
-                        <a:t>Проверка интерфейса</a:t>
-                      </a:r>
-                      <a:endParaRPr lang="ru-RU" sz="2800" dirty="0">
-                        <a:solidFill>
-                          <a:schemeClr val="bg1"/>
-                        </a:solidFill>
-                        <a:latin typeface="Arial Black" panose="020B0A04020102020204" pitchFamily="34" charset="0"/>
-                      </a:endParaRPr>
-                    </a:p>
-                  </a:txBody>
-                  <a:tcPr/>
-                </a:tc>
-                <a:tc>
-                  <a:txBody>
-                    <a:bodyPr/>
-                    <a:lstStyle/>
-                    <a:p>
-                      <a:r>
-                        <a:rPr lang="ru-RU" sz="2800" dirty="0" smtClean="0">
-                          <a:solidFill>
-                            <a:schemeClr val="bg1"/>
-                          </a:solidFill>
-                          <a:latin typeface="Arial Black" panose="020B0A04020102020204" pitchFamily="34" charset="0"/>
-                        </a:rPr>
-                        <a:t>Все элементы отображаются корректно</a:t>
-                      </a:r>
-                      <a:endParaRPr lang="ru-RU" sz="2800" dirty="0">
-                        <a:solidFill>
-                          <a:schemeClr val="bg1"/>
-                        </a:solidFill>
-                        <a:latin typeface="Arial Black" panose="020B0A04020102020204" pitchFamily="34" charset="0"/>
-                      </a:endParaRPr>
-                    </a:p>
-                  </a:txBody>
-                  <a:tcPr/>
-                </a:tc>
-                <a:tc>
-                  <a:txBody>
-                    <a:bodyPr/>
-                    <a:lstStyle/>
-                    <a:p>
-                      <a:r>
-                        <a:rPr lang="ru-RU" sz="2800" dirty="0" smtClean="0">
-                          <a:solidFill>
-                            <a:schemeClr val="bg1"/>
-                          </a:solidFill>
-                          <a:latin typeface="Arial Black" panose="020B0A04020102020204" pitchFamily="34" charset="0"/>
-                        </a:rPr>
-                        <a:t>Интерфейс работает стабильно</a:t>
-                      </a:r>
-                      <a:endParaRPr lang="ru-RU" sz="2800" dirty="0">
-                        <a:solidFill>
-                          <a:schemeClr val="bg1"/>
-                        </a:solidFill>
-                        <a:latin typeface="Arial Black" panose="020B0A04020102020204" pitchFamily="34" charset="0"/>
-                      </a:endParaRPr>
-                    </a:p>
-                  </a:txBody>
-                  <a:tcPr/>
-                </a:tc>
-                <a:extLst>
-                  <a:ext uri="{0D108BD9-81ED-4DB2-BD59-A6C34878D82A}">
-                    <a16:rowId xmlns:a16="http://schemas.microsoft.com/office/drawing/2014/main" val="1235086670"/>
-                  </a:ext>
-                </a:extLst>
-              </a:tr>
-            </a:tbl>
-          </a:graphicData>
-        </a:graphic>
-      </p:graphicFrame>
-    </p:spTree>
-  </p:cSld>
-  <p:clrMapOvr>
-    <a:masterClrMapping/>
-  </p:clrMapOvr>
+  <p:timing>
+    <p:tnLst>
+      <p:par>
+        <p:cTn id="1" dur="indefinite" restart="never" nodeType="tmRoot"/>
+      </p:par>
+    </p:tnLst>
+  </p:timing>
 </p:sld>
 </file>
 
